--- a/DMR_calendar_slides.pptx
+++ b/DMR_calendar_slides.pptx
@@ -23,6 +23,7 @@
     <p:sldId id="357" r:id="rId18"/>
     <p:sldId id="349" r:id="rId19"/>
     <p:sldId id="358" r:id="rId20"/>
+    <p:sldId id="372" r:id="rId39"/>
     <p:sldId id="359" r:id="rId21"/>
     <p:sldId id="368" r:id="rId22"/>
     <p:sldId id="363" r:id="rId23"/>
@@ -31,6 +32,8 @@
     <p:sldId id="360" r:id="rId26"/>
     <p:sldId id="361" r:id="rId27"/>
     <p:sldId id="362" r:id="rId28"/>
+    <p:sldId id="370" r:id="rId37"/>
+    <p:sldId id="371" r:id="rId38"/>
     <p:sldId id="366" r:id="rId29"/>
     <p:sldId id="369" r:id="rId30"/>
     <p:sldId id="327" r:id="rId31"/>
@@ -18037,7 +18040,7 @@
                 <a:latin typeface="Arial"/>
                 <a:cs typeface="Arial"/>
               </a:rPr>
-              <a:t>A monthly total hides them; a daily series shows each one as a false movement, or as an outlier that should have been a calendar effect.</a:t>
+              <a:t>A monthly total hides them; a daily series shows each one as a false movement, or as an unstable outlier that is revised as data arrive.</a:t>
             </a:r>
           </a:p>
         </p:txBody>
@@ -18398,6 +18401,2255 @@
     <p:extLst>
       <p:ext uri="{BB962C8B-B14F-4D97-AF65-F5344CB8AC3E}">
         <p14:creationId xmlns:p14="http://schemas.microsoft.com/office/powerpoint/2010/main" val="1975414769"/>
+      </p:ext>
+    </p:extLst>
+  </p:cSld>
+  <p:clrMapOvr>
+    <a:masterClrMapping/>
+  </p:clrMapOvr>
+</p:sld>
+</file>
+
+<file path=ppt/slides/slide27.xml><?xml version="1.0" encoding="utf-8"?>
+<p:sld xmlns:a="http://schemas.openxmlformats.org/drawingml/2006/main" xmlns:r="http://schemas.openxmlformats.org/officeDocument/2006/relationships" xmlns:p="http://schemas.openxmlformats.org/presentationml/2006/main">
+  <p:cSld>
+    <p:spTree>
+      <p:nvGrpSpPr>
+        <p:cNvPr id="1" name=""/>
+        <p:cNvGrpSpPr/>
+        <p:nvPr/>
+      </p:nvGrpSpPr>
+      <p:grpSpPr>
+        <a:xfrm>
+          <a:off x="0" y="0"/>
+          <a:ext cx="0" cy="0"/>
+          <a:chOff x="0" y="0"/>
+          <a:chExt cx="0" cy="0"/>
+        </a:xfrm>
+      </p:grpSpPr>
+      <p:sp>
+        <p:nvSpPr>
+          <p:cNvPr id="19461" name="Titolo 4"/>
+          <p:cNvSpPr>
+            <a:spLocks noGrp="1"/>
+          </p:cNvSpPr>
+          <p:nvPr>
+            <p:ph type="title"/>
+          </p:nvPr>
+        </p:nvSpPr>
+        <p:spPr>
+          <a:xfrm>
+            <a:off x="468313" y="482109"/>
+            <a:ext cx="11269662" cy="405304"/>
+          </a:xfrm>
+        </p:spPr>
+        <p:txBody>
+          <a:bodyPr/>
+          <a:lstStyle/>
+          <a:p>
+            <a:r>
+              <a:rPr lang="en-GB" altLang="it-IT" sz="3600" dirty="0">
+                <a:solidFill>
+                  <a:srgbClr val="C00000"/>
+                </a:solidFill>
+              </a:rPr>
+              <a:t>Revisions: special days need the calendar</a:t>
+            </a:r>
+          </a:p>
+        </p:txBody>
+      </p:sp>
+      <p:sp>
+        <p:nvSpPr>
+          <p:cNvPr id="9" name="Segnaposto numero diapositiva 4">
+            <a:extLst>
+              <a:ext uri="{FF2B5EF4-FFF2-40B4-BE49-F238E27FC236}">
+                <a16:creationId xmlns:a16="http://schemas.microsoft.com/office/drawing/2014/main" id="{43529721-AF16-448D-9B7A-D70C2ADC2006}"/>
+              </a:ext>
+            </a:extLst>
+          </p:cNvPr>
+          <p:cNvSpPr>
+            <a:spLocks noGrp="1"/>
+          </p:cNvSpPr>
+          <p:nvPr>
+            <p:ph type="sldNum" sz="quarter" idx="11"/>
+          </p:nvPr>
+        </p:nvSpPr>
+        <p:spPr>
+          <a:xfrm>
+            <a:off x="0" y="6392815"/>
+            <a:ext cx="501650" cy="365125"/>
+          </a:xfrm>
+          <a:prstGeom prst="rect">
+            <a:avLst/>
+          </a:prstGeom>
+        </p:spPr>
+        <p:txBody>
+          <a:bodyPr/>
+          <a:lstStyle/>
+          <a:p>
+            <a:pPr>
+              <a:defRPr/>
+            </a:pPr>
+            <a:fld id="{48B4153A-D4C5-4CEF-8992-0D8815C829E3}" type="slidenum">
+              <a:rPr lang="en-US" smtClean="0"/>
+              <a:pPr>
+                <a:defRPr/>
+              </a:pPr>
+              <a:t>19</a:t>
+            </a:fld>
+            <a:endParaRPr lang="en-US" dirty="0"/>
+          </a:p>
+        </p:txBody>
+      </p:sp>
+      <p:sp>
+        <p:nvSpPr>
+          <p:cNvPr id="8" name="Segnaposto piè di pagina 3">
+            <a:extLst>
+              <a:ext uri="{FF2B5EF4-FFF2-40B4-BE49-F238E27FC236}">
+                <a16:creationId xmlns:a16="http://schemas.microsoft.com/office/drawing/2014/main" id="{3223DD80-9C7E-474F-A668-27B6983A5687}"/>
+              </a:ext>
+            </a:extLst>
+          </p:cNvPr>
+          <p:cNvSpPr>
+            <a:spLocks noGrp="1"/>
+          </p:cNvSpPr>
+          <p:nvPr>
+            <p:ph type="ftr" sz="quarter" idx="10"/>
+          </p:nvPr>
+        </p:nvSpPr>
+        <p:spPr>
+          <a:xfrm>
+            <a:off x="635830" y="6382305"/>
+            <a:ext cx="9644444" cy="259965"/>
+          </a:xfrm>
+        </p:spPr>
+        <p:txBody>
+          <a:bodyPr/>
+          <a:lstStyle/>
+          <a:p>
+            <a:pPr>
+              <a:defRPr/>
+            </a:pPr>
+            <a:r>
+              <a:rPr lang="en-US" dirty="0"/>
+              <a:t>Building calendars for daily seasonal adjustment</a:t>
+            </a:r>
+          </a:p>
+        </p:txBody>
+      </p:sp>
+      <p:pic>
+        <p:nvPicPr>
+          <p:cNvPr id="40" name="Revisions special vs other days" descr="Mean absolute revision over the last year of each vintage, special days and other days, for four specifications of the electricity calendar"/>
+          <p:cNvPicPr>
+            <a:picLocks noChangeAspect="1"/>
+          </p:cNvPicPr>
+          <p:nvPr/>
+        </p:nvPicPr>
+        <p:blipFill>
+          <a:blip r:embed="rIdImg1"/>
+          <a:stretch>
+            <a:fillRect/>
+          </a:stretch>
+        </p:blipFill>
+        <p:spPr>
+          <a:xfrm>
+            <a:off x="411480" y="1216152"/>
+            <a:ext cx="6727847" cy="4206240"/>
+          </a:xfrm>
+          <a:prstGeom prst="rect">
+            <a:avLst/>
+          </a:prstGeom>
+        </p:spPr>
+      </p:pic>
+      <p:sp>
+        <p:nvSpPr>
+          <p:cNvPr id="41" name="Cards header"/>
+          <p:cNvSpPr txBox="1"/>
+          <p:nvPr/>
+        </p:nvSpPr>
+        <p:spPr>
+          <a:xfrm>
+            <a:off x="7459367" y="1280160"/>
+            <a:ext cx="4265984" cy="411480"/>
+          </a:xfrm>
+          <a:prstGeom prst="rect">
+            <a:avLst/>
+          </a:prstGeom>
+          <a:noFill/>
+          <a:ln>
+            <a:noFill/>
+          </a:ln>
+        </p:spPr>
+        <p:txBody>
+          <a:bodyPr wrap="square" lIns="0" tIns="0" rIns="0" bIns="0" anchor="t">
+            <a:noAutofit/>
+          </a:bodyPr>
+          <a:lstStyle/>
+          <a:p>
+            <a:pPr algn="l" marL="0" indent="0">
+              <a:spcBef>
+                <a:spcPts val="0"/>
+              </a:spcBef>
+              <a:buNone/>
+            </a:pPr>
+            <a:r>
+              <a:rPr lang="en-GB" sz="1800" b="1" i="0" dirty="0">
+                <a:solidFill>
+                  <a:srgbClr val="595959"/>
+                </a:solidFill>
+                <a:latin typeface="Arial"/>
+                <a:cs typeface="Arial"/>
+              </a:rPr>
+              <a:t>Special days</a:t>
+            </a:r>
+            <a:r>
+              <a:rPr lang="en-GB" sz="1400" b="0" i="0" dirty="0">
+                <a:solidFill>
+                  <a:srgbClr val="7B7C7E"/>
+                </a:solidFill>
+                <a:latin typeface="Arial"/>
+                <a:cs typeface="Arial"/>
+              </a:rPr>
+              <a:t>   basic → final</a:t>
+            </a:r>
+          </a:p>
+        </p:txBody>
+      </p:sp>
+      <p:sp>
+        <p:nvSpPr>
+          <p:cNvPr id="42" name="Rev card 1"/>
+          <p:cNvSpPr/>
+          <p:nvPr/>
+        </p:nvSpPr>
+        <p:spPr>
+          <a:xfrm>
+            <a:off x="7459367" y="1783080"/>
+            <a:ext cx="4265984" cy="1143000"/>
+          </a:xfrm>
+          <a:prstGeom prst="roundRect">
+            <a:avLst>
+              <a:gd name="adj" fmla="val 6000"/>
+            </a:avLst>
+          </a:prstGeom>
+          <a:solidFill>
+            <a:srgbClr val="F2F2F2"/>
+          </a:solidFill>
+          <a:ln>
+            <a:noFill/>
+          </a:ln>
+        </p:spPr>
+        <p:txBody>
+          <a:bodyPr wrap="square" lIns="0" tIns="0" rIns="0" bIns="0" anchor="t">
+            <a:noAutofit/>
+          </a:bodyPr>
+          <a:lstStyle/>
+          <a:p>
+            <a:endParaRPr lang="en-GB" dirty="0"/>
+          </a:p>
+        </p:txBody>
+      </p:sp>
+      <p:sp>
+        <p:nvSpPr>
+          <p:cNvPr id="43" name="Rev card label 1"/>
+          <p:cNvSpPr txBox="1"/>
+          <p:nvPr/>
+        </p:nvSpPr>
+        <p:spPr>
+          <a:xfrm>
+            <a:off x="7642247" y="1874520"/>
+            <a:ext cx="3900224" cy="365760"/>
+          </a:xfrm>
+          <a:prstGeom prst="rect">
+            <a:avLst/>
+          </a:prstGeom>
+          <a:noFill/>
+          <a:ln>
+            <a:noFill/>
+          </a:ln>
+        </p:spPr>
+        <p:txBody>
+          <a:bodyPr wrap="square" lIns="0" tIns="0" rIns="0" bIns="0" anchor="t">
+            <a:noAutofit/>
+          </a:bodyPr>
+          <a:lstStyle/>
+          <a:p>
+            <a:pPr algn="l" marL="0" indent="0">
+              <a:spcBef>
+                <a:spcPts val="0"/>
+              </a:spcBef>
+              <a:buNone/>
+            </a:pPr>
+            <a:r>
+              <a:rPr lang="en-GB" sz="1500" b="1" i="0" dirty="0">
+                <a:solidFill>
+                  <a:srgbClr val="595959"/>
+                </a:solidFill>
+                <a:latin typeface="Arial"/>
+                <a:cs typeface="Arial"/>
+              </a:rPr>
+              <a:t>Fixed coefficients (A → B)</a:t>
+            </a:r>
+          </a:p>
+        </p:txBody>
+      </p:sp>
+      <p:sp>
+        <p:nvSpPr>
+          <p:cNvPr id="44" name="Rev card values 1"/>
+          <p:cNvSpPr txBox="1"/>
+          <p:nvPr/>
+        </p:nvSpPr>
+        <p:spPr>
+          <a:xfrm>
+            <a:off x="7642247" y="2240280"/>
+            <a:ext cx="3900224" cy="594360"/>
+          </a:xfrm>
+          <a:prstGeom prst="rect">
+            <a:avLst/>
+          </a:prstGeom>
+          <a:noFill/>
+          <a:ln>
+            <a:noFill/>
+          </a:ln>
+        </p:spPr>
+        <p:txBody>
+          <a:bodyPr wrap="square" lIns="0" tIns="0" rIns="0" bIns="0" anchor="t">
+            <a:noAutofit/>
+          </a:bodyPr>
+          <a:lstStyle/>
+          <a:p>
+            <a:pPr algn="l" marL="0" indent="0">
+              <a:spcBef>
+                <a:spcPts val="0"/>
+              </a:spcBef>
+              <a:buNone/>
+            </a:pPr>
+            <a:r>
+              <a:rPr lang="en-GB" sz="2400" b="1" i="0" dirty="0">
+                <a:solidFill>
+                  <a:srgbClr val="C00000"/>
+                </a:solidFill>
+                <a:latin typeface="Arial"/>
+                <a:cs typeface="Arial"/>
+              </a:rPr>
+              <a:t>0.50%</a:t>
+            </a:r>
+            <a:r>
+              <a:rPr lang="en-GB" sz="1800" b="0" i="0" dirty="0">
+                <a:solidFill>
+                  <a:srgbClr val="7B7C7E"/>
+                </a:solidFill>
+                <a:latin typeface="Arial"/>
+                <a:cs typeface="Arial"/>
+              </a:rPr>
+              <a:t>  →  </a:t>
+            </a:r>
+            <a:r>
+              <a:rPr lang="en-GB" sz="2400" b="1" i="0" dirty="0">
+                <a:solidFill>
+                  <a:srgbClr val="0072B2"/>
+                </a:solidFill>
+                <a:latin typeface="Arial"/>
+                <a:cs typeface="Arial"/>
+              </a:rPr>
+              <a:t>0.19%</a:t>
+            </a:r>
+            <a:r>
+              <a:rPr lang="en-GB" sz="1600" b="1" i="0" dirty="0">
+                <a:solidFill>
+                  <a:srgbClr val="7B7C7E"/>
+                </a:solidFill>
+                <a:latin typeface="Arial"/>
+                <a:cs typeface="Arial"/>
+              </a:rPr>
+              <a:t>   −63%</a:t>
+            </a:r>
+          </a:p>
+        </p:txBody>
+      </p:sp>
+      <p:sp>
+        <p:nvSpPr>
+          <p:cNvPr id="45" name="Rev card 2"/>
+          <p:cNvSpPr/>
+          <p:nvPr/>
+        </p:nvSpPr>
+        <p:spPr>
+          <a:xfrm>
+            <a:off x="7459367" y="3063240"/>
+            <a:ext cx="4265984" cy="1143000"/>
+          </a:xfrm>
+          <a:prstGeom prst="roundRect">
+            <a:avLst>
+              <a:gd name="adj" fmla="val 6000"/>
+            </a:avLst>
+          </a:prstGeom>
+          <a:solidFill>
+            <a:srgbClr val="F2F2F2"/>
+          </a:solidFill>
+          <a:ln>
+            <a:noFill/>
+          </a:ln>
+        </p:spPr>
+        <p:txBody>
+          <a:bodyPr wrap="square" lIns="0" tIns="0" rIns="0" bIns="0" anchor="t">
+            <a:noAutofit/>
+          </a:bodyPr>
+          <a:lstStyle/>
+          <a:p>
+            <a:endParaRPr lang="en-GB" dirty="0"/>
+          </a:p>
+        </p:txBody>
+      </p:sp>
+      <p:sp>
+        <p:nvSpPr>
+          <p:cNvPr id="46" name="Rev card label 2"/>
+          <p:cNvSpPr txBox="1"/>
+          <p:nvPr/>
+        </p:nvSpPr>
+        <p:spPr>
+          <a:xfrm>
+            <a:off x="7642247" y="3154680"/>
+            <a:ext cx="3900224" cy="365760"/>
+          </a:xfrm>
+          <a:prstGeom prst="rect">
+            <a:avLst/>
+          </a:prstGeom>
+          <a:noFill/>
+          <a:ln>
+            <a:noFill/>
+          </a:ln>
+        </p:spPr>
+        <p:txBody>
+          <a:bodyPr wrap="square" lIns="0" tIns="0" rIns="0" bIns="0" anchor="t">
+            <a:noAutofit/>
+          </a:bodyPr>
+          <a:lstStyle/>
+          <a:p>
+            <a:pPr algn="l" marL="0" indent="0">
+              <a:spcBef>
+                <a:spcPts val="0"/>
+              </a:spcBef>
+              <a:buNone/>
+            </a:pPr>
+            <a:r>
+              <a:rPr lang="en-GB" sz="1500" b="1" i="0" dirty="0">
+                <a:solidFill>
+                  <a:srgbClr val="595959"/>
+                </a:solidFill>
+                <a:latin typeface="Arial"/>
+                <a:cs typeface="Arial"/>
+              </a:rPr>
+              <a:t>Time-varying (D → C)</a:t>
+            </a:r>
+          </a:p>
+        </p:txBody>
+      </p:sp>
+      <p:sp>
+        <p:nvSpPr>
+          <p:cNvPr id="47" name="Rev card values 2"/>
+          <p:cNvSpPr txBox="1"/>
+          <p:nvPr/>
+        </p:nvSpPr>
+        <p:spPr>
+          <a:xfrm>
+            <a:off x="7642247" y="3520440"/>
+            <a:ext cx="3900224" cy="594360"/>
+          </a:xfrm>
+          <a:prstGeom prst="rect">
+            <a:avLst/>
+          </a:prstGeom>
+          <a:noFill/>
+          <a:ln>
+            <a:noFill/>
+          </a:ln>
+        </p:spPr>
+        <p:txBody>
+          <a:bodyPr wrap="square" lIns="0" tIns="0" rIns="0" bIns="0" anchor="t">
+            <a:noAutofit/>
+          </a:bodyPr>
+          <a:lstStyle/>
+          <a:p>
+            <a:pPr algn="l" marL="0" indent="0">
+              <a:spcBef>
+                <a:spcPts val="0"/>
+              </a:spcBef>
+              <a:buNone/>
+            </a:pPr>
+            <a:r>
+              <a:rPr lang="en-GB" sz="2400" b="1" i="0" dirty="0">
+                <a:solidFill>
+                  <a:srgbClr val="C00000"/>
+                </a:solidFill>
+                <a:latin typeface="Arial"/>
+                <a:cs typeface="Arial"/>
+              </a:rPr>
+              <a:t>0.31%</a:t>
+            </a:r>
+            <a:r>
+              <a:rPr lang="en-GB" sz="1800" b="0" i="0" dirty="0">
+                <a:solidFill>
+                  <a:srgbClr val="7B7C7E"/>
+                </a:solidFill>
+                <a:latin typeface="Arial"/>
+                <a:cs typeface="Arial"/>
+              </a:rPr>
+              <a:t>  →  </a:t>
+            </a:r>
+            <a:r>
+              <a:rPr lang="en-GB" sz="2400" b="1" i="0" dirty="0">
+                <a:solidFill>
+                  <a:srgbClr val="0072B2"/>
+                </a:solidFill>
+                <a:latin typeface="Arial"/>
+                <a:cs typeface="Arial"/>
+              </a:rPr>
+              <a:t>0.23%</a:t>
+            </a:r>
+            <a:r>
+              <a:rPr lang="en-GB" sz="1600" b="1" i="0" dirty="0">
+                <a:solidFill>
+                  <a:srgbClr val="7B7C7E"/>
+                </a:solidFill>
+                <a:latin typeface="Arial"/>
+                <a:cs typeface="Arial"/>
+              </a:rPr>
+              <a:t>   −26%</a:t>
+            </a:r>
+          </a:p>
+        </p:txBody>
+      </p:sp>
+      <p:sp>
+        <p:nvSpPr>
+          <p:cNvPr id="50" name="Rev note"/>
+          <p:cNvSpPr txBox="1"/>
+          <p:nvPr/>
+        </p:nvSpPr>
+        <p:spPr>
+          <a:xfrm>
+            <a:off x="7459367" y="4434840"/>
+            <a:ext cx="4265984" cy="1005840"/>
+          </a:xfrm>
+          <a:prstGeom prst="rect">
+            <a:avLst/>
+          </a:prstGeom>
+          <a:noFill/>
+          <a:ln>
+            <a:noFill/>
+          </a:ln>
+        </p:spPr>
+        <p:txBody>
+          <a:bodyPr wrap="square" lIns="0" tIns="0" rIns="0" bIns="0" anchor="t">
+            <a:noAutofit/>
+          </a:bodyPr>
+          <a:lstStyle/>
+          <a:p>
+            <a:pPr algn="l" marL="0" indent="0">
+              <a:spcBef>
+                <a:spcPts val="0"/>
+              </a:spcBef>
+              <a:buNone/>
+            </a:pPr>
+            <a:r>
+              <a:rPr lang="en-GB" sz="1400" b="0" i="0" dirty="0">
+                <a:solidFill>
+                  <a:srgbClr val="595959"/>
+                </a:solidFill>
+                <a:latin typeface="Arial"/>
+                <a:cs typeface="Arial"/>
+              </a:rPr>
+              <a:t>Other days: similar for all versions. Final calendar with time-varying coefficients: smallest revisions overall (0.15%).</a:t>
+            </a:r>
+          </a:p>
+        </p:txBody>
+      </p:sp>
+      <p:sp>
+        <p:nvSpPr>
+          <p:cNvPr id="51" name="Caption"/>
+          <p:cNvSpPr txBox="1"/>
+          <p:nvPr/>
+        </p:nvSpPr>
+        <p:spPr>
+          <a:xfrm>
+            <a:off x="466344" y="5532120"/>
+            <a:ext cx="11256264" cy="411480"/>
+          </a:xfrm>
+          <a:prstGeom prst="rect">
+            <a:avLst/>
+          </a:prstGeom>
+          <a:noFill/>
+          <a:ln>
+            <a:noFill/>
+          </a:ln>
+        </p:spPr>
+        <p:txBody>
+          <a:bodyPr wrap="square" lIns="0" tIns="0" rIns="0" bIns="0" anchor="t">
+            <a:noAutofit/>
+          </a:bodyPr>
+          <a:lstStyle/>
+          <a:p>
+            <a:pPr algn="l" marL="0" indent="0">
+              <a:spcBef>
+                <a:spcPts val="0"/>
+              </a:spcBef>
+              <a:buNone/>
+            </a:pPr>
+            <a:r>
+              <a:rPr lang="en-GB" sz="1300" b="1" i="0" dirty="0">
+                <a:solidFill>
+                  <a:srgbClr val="C00000"/>
+                </a:solidFill>
+                <a:latin typeface="Arial"/>
+                <a:cs typeface="Arial"/>
+              </a:rPr>
+              <a:t>Result · Revisions, electricity.  </a:t>
+            </a:r>
+            <a:r>
+              <a:rPr lang="en-GB" sz="1300" b="0" i="1" dirty="0">
+                <a:solidFill>
+                  <a:srgbClr val="7B7C7E"/>
+                </a:solidFill>
+                <a:latin typeface="Arial"/>
+                <a:cs typeface="Arial"/>
+              </a:rPr>
+              <a:t>Full sample vs six vintages ending 7 to 730 days earlier; mean absolute revision (%) over the last year of each vintage; about 24 special days per year.</a:t>
+            </a:r>
+          </a:p>
+        </p:txBody>
+      </p:sp>
+    </p:spTree>
+    <p:extLst>
+      <p:ext uri="{BB962C8B-B14F-4D97-AF65-F5344CB8AC3E}">
+        <p14:creationId xmlns:p14="http://schemas.microsoft.com/office/powerpoint/2010/main" val="1781916628"/>
+      </p:ext>
+    </p:extLst>
+  </p:cSld>
+  <p:clrMapOvr>
+    <a:masterClrMapping/>
+  </p:clrMapOvr>
+</p:sld>
+</file>
+
+<file path=ppt/slides/slide28.xml><?xml version="1.0" encoding="utf-8"?>
+<p:sld xmlns:a="http://schemas.openxmlformats.org/drawingml/2006/main" xmlns:r="http://schemas.openxmlformats.org/officeDocument/2006/relationships" xmlns:p="http://schemas.openxmlformats.org/presentationml/2006/main">
+  <p:cSld>
+    <p:spTree>
+      <p:nvGrpSpPr>
+        <p:cNvPr id="1" name=""/>
+        <p:cNvGrpSpPr/>
+        <p:nvPr/>
+      </p:nvGrpSpPr>
+      <p:grpSpPr>
+        <a:xfrm>
+          <a:off x="0" y="0"/>
+          <a:ext cx="0" cy="0"/>
+          <a:chOff x="0" y="0"/>
+          <a:chExt cx="0" cy="0"/>
+        </a:xfrm>
+      </p:grpSpPr>
+      <p:sp>
+        <p:nvSpPr>
+          <p:cNvPr id="19461" name="Titolo 4"/>
+          <p:cNvSpPr>
+            <a:spLocks noGrp="1"/>
+          </p:cNvSpPr>
+          <p:nvPr>
+            <p:ph type="title"/>
+          </p:nvPr>
+        </p:nvSpPr>
+        <p:spPr>
+          <a:xfrm>
+            <a:off x="468313" y="482109"/>
+            <a:ext cx="11269662" cy="405304"/>
+          </a:xfrm>
+        </p:spPr>
+        <p:txBody>
+          <a:bodyPr/>
+          <a:lstStyle/>
+          <a:p>
+            <a:r>
+              <a:rPr lang="en-GB" altLang="it-IT" sz="3600" dirty="0">
+                <a:solidFill>
+                  <a:srgbClr val="C00000"/>
+                </a:solidFill>
+              </a:rPr>
+              <a:t>A good calendar also stabilises the outliers</a:t>
+            </a:r>
+          </a:p>
+        </p:txBody>
+      </p:sp>
+      <p:sp>
+        <p:nvSpPr>
+          <p:cNvPr id="9" name="Segnaposto numero diapositiva 4">
+            <a:extLst>
+              <a:ext uri="{FF2B5EF4-FFF2-40B4-BE49-F238E27FC236}">
+                <a16:creationId xmlns:a16="http://schemas.microsoft.com/office/drawing/2014/main" id="{43529721-AF16-448D-9B7A-D70C2ADC2006}"/>
+              </a:ext>
+            </a:extLst>
+          </p:cNvPr>
+          <p:cNvSpPr>
+            <a:spLocks noGrp="1"/>
+          </p:cNvSpPr>
+          <p:nvPr>
+            <p:ph type="sldNum" sz="quarter" idx="11"/>
+          </p:nvPr>
+        </p:nvSpPr>
+        <p:spPr>
+          <a:xfrm>
+            <a:off x="0" y="6392815"/>
+            <a:ext cx="501650" cy="365125"/>
+          </a:xfrm>
+          <a:prstGeom prst="rect">
+            <a:avLst/>
+          </a:prstGeom>
+        </p:spPr>
+        <p:txBody>
+          <a:bodyPr/>
+          <a:lstStyle/>
+          <a:p>
+            <a:pPr>
+              <a:defRPr/>
+            </a:pPr>
+            <a:fld id="{48B4153A-D4C5-4CEF-8992-0D8815C829E3}" type="slidenum">
+              <a:rPr lang="en-US" smtClean="0"/>
+              <a:pPr>
+                <a:defRPr/>
+              </a:pPr>
+              <a:t>19</a:t>
+            </a:fld>
+            <a:endParaRPr lang="en-US" dirty="0"/>
+          </a:p>
+        </p:txBody>
+      </p:sp>
+      <p:sp>
+        <p:nvSpPr>
+          <p:cNvPr id="8" name="Segnaposto piè di pagina 3">
+            <a:extLst>
+              <a:ext uri="{FF2B5EF4-FFF2-40B4-BE49-F238E27FC236}">
+                <a16:creationId xmlns:a16="http://schemas.microsoft.com/office/drawing/2014/main" id="{3223DD80-9C7E-474F-A668-27B6983A5687}"/>
+              </a:ext>
+            </a:extLst>
+          </p:cNvPr>
+          <p:cNvSpPr>
+            <a:spLocks noGrp="1"/>
+          </p:cNvSpPr>
+          <p:nvPr>
+            <p:ph type="ftr" sz="quarter" idx="10"/>
+          </p:nvPr>
+        </p:nvSpPr>
+        <p:spPr>
+          <a:xfrm>
+            <a:off x="635830" y="6382305"/>
+            <a:ext cx="9644444" cy="259965"/>
+          </a:xfrm>
+        </p:spPr>
+        <p:txBody>
+          <a:bodyPr/>
+          <a:lstStyle/>
+          <a:p>
+            <a:pPr>
+              <a:defRPr/>
+            </a:pPr>
+            <a:r>
+              <a:rPr lang="en-US" dirty="0"/>
+              <a:t>Building calendars for daily seasonal adjustment</a:t>
+            </a:r>
+          </a:p>
+        </p:txBody>
+      </p:sp>
+      <p:sp>
+        <p:nvSpPr>
+          <p:cNvPr id="20" name="Outlier card 1"/>
+          <p:cNvSpPr/>
+          <p:nvPr/>
+        </p:nvSpPr>
+        <p:spPr>
+          <a:xfrm>
+            <a:off x="466344" y="1298448"/>
+            <a:ext cx="5486400" cy="1874520"/>
+          </a:xfrm>
+          <a:prstGeom prst="roundRect">
+            <a:avLst>
+              <a:gd name="adj" fmla="val 6000"/>
+            </a:avLst>
+          </a:prstGeom>
+          <a:solidFill>
+            <a:srgbClr val="F2F2F2"/>
+          </a:solidFill>
+          <a:ln>
+            <a:noFill/>
+          </a:ln>
+        </p:spPr>
+        <p:txBody>
+          <a:bodyPr wrap="square" lIns="0" tIns="0" rIns="0" bIns="0" anchor="t">
+            <a:noAutofit/>
+          </a:bodyPr>
+          <a:lstStyle/>
+          <a:p>
+            <a:endParaRPr lang="en-GB" dirty="0"/>
+          </a:p>
+        </p:txBody>
+      </p:sp>
+      <p:sp>
+        <p:nvSpPr>
+          <p:cNvPr id="21" name="Outlier letter 1"/>
+          <p:cNvSpPr/>
+          <p:nvPr/>
+        </p:nvSpPr>
+        <p:spPr>
+          <a:xfrm>
+            <a:off x="694944" y="1499616"/>
+            <a:ext cx="502920" cy="502920"/>
+          </a:xfrm>
+          <a:prstGeom prst="ellipse">
+            <a:avLst/>
+          </a:prstGeom>
+          <a:solidFill>
+            <a:srgbClr val="C00000"/>
+          </a:solidFill>
+          <a:ln>
+            <a:noFill/>
+          </a:ln>
+        </p:spPr>
+        <p:txBody>
+          <a:bodyPr wrap="square" lIns="0" tIns="0" rIns="0" bIns="0" anchor="ctr">
+            <a:noAutofit/>
+          </a:bodyPr>
+          <a:lstStyle/>
+          <a:p>
+            <a:pPr algn="ctr" marL="0" indent="0">
+              <a:spcBef>
+                <a:spcPts val="0"/>
+              </a:spcBef>
+              <a:buNone/>
+            </a:pPr>
+            <a:r>
+              <a:rPr lang="en-GB" sz="1800" b="1" i="0" dirty="0">
+                <a:solidFill>
+                  <a:srgbClr val="FFFFFF"/>
+                </a:solidFill>
+                <a:latin typeface="Arial"/>
+                <a:cs typeface="Arial"/>
+              </a:rPr>
+              <a:t>A</a:t>
+            </a:r>
+          </a:p>
+        </p:txBody>
+      </p:sp>
+      <p:sp>
+        <p:nvSpPr>
+          <p:cNvPr id="22" name="Outlier heading 1"/>
+          <p:cNvSpPr txBox="1"/>
+          <p:nvPr/>
+        </p:nvSpPr>
+        <p:spPr>
+          <a:xfrm>
+            <a:off x="1380744" y="1536192"/>
+            <a:ext cx="4343400" cy="411480"/>
+          </a:xfrm>
+          <a:prstGeom prst="rect">
+            <a:avLst/>
+          </a:prstGeom>
+          <a:noFill/>
+          <a:ln>
+            <a:noFill/>
+          </a:ln>
+        </p:spPr>
+        <p:txBody>
+          <a:bodyPr wrap="square" lIns="0" tIns="0" rIns="0" bIns="0" anchor="t">
+            <a:noAutofit/>
+          </a:bodyPr>
+          <a:lstStyle/>
+          <a:p>
+            <a:pPr algn="l" marL="0" indent="0">
+              <a:spcBef>
+                <a:spcPts val="0"/>
+              </a:spcBef>
+              <a:buNone/>
+            </a:pPr>
+            <a:r>
+              <a:rPr lang="en-GB" sz="1800" b="1" i="0" dirty="0">
+                <a:solidFill>
+                  <a:srgbClr val="595959"/>
+                </a:solidFill>
+                <a:latin typeface="Arial"/>
+                <a:cs typeface="Arial"/>
+              </a:rPr>
+              <a:t>Basic, fixed</a:t>
+            </a:r>
+          </a:p>
+        </p:txBody>
+      </p:sp>
+      <p:sp>
+        <p:nvSpPr>
+          <p:cNvPr id="23" name="Outlier text 1"/>
+          <p:cNvSpPr txBox="1"/>
+          <p:nvPr/>
+        </p:nvSpPr>
+        <p:spPr>
+          <a:xfrm>
+            <a:off x="1380744" y="2029968"/>
+            <a:ext cx="4343400" cy="1051560"/>
+          </a:xfrm>
+          <a:prstGeom prst="rect">
+            <a:avLst/>
+          </a:prstGeom>
+          <a:noFill/>
+          <a:ln>
+            <a:noFill/>
+          </a:ln>
+        </p:spPr>
+        <p:txBody>
+          <a:bodyPr wrap="square" lIns="0" tIns="0" rIns="0" bIns="0" anchor="t">
+            <a:noAutofit/>
+          </a:bodyPr>
+          <a:lstStyle/>
+          <a:p>
+            <a:pPr algn="l" marL="0" indent="0">
+              <a:spcBef>
+                <a:spcPts val="0"/>
+              </a:spcBef>
+              <a:buNone/>
+            </a:pPr>
+            <a:r>
+              <a:rPr lang="en-GB" sz="1400" b="0" i="0" dirty="0">
+                <a:solidFill>
+                  <a:srgbClr val="636462"/>
+                </a:solidFill>
+                <a:latin typeface="Arial"/>
+                <a:cs typeface="Arial"/>
+              </a:rPr>
+              <a:t>23 of 28 outliers on weekend holidays, and they come and go: All Saints' Day 2025, New Year's Days 2017 and 2023; Epiphany 2024 changes type and date.</a:t>
+            </a:r>
+          </a:p>
+        </p:txBody>
+      </p:sp>
+      <p:sp>
+        <p:nvSpPr>
+          <p:cNvPr id="25" name="Outlier card 2"/>
+          <p:cNvSpPr/>
+          <p:nvPr/>
+        </p:nvSpPr>
+        <p:spPr>
+          <a:xfrm>
+            <a:off x="6236208" y="1298448"/>
+            <a:ext cx="5486400" cy="1874520"/>
+          </a:xfrm>
+          <a:prstGeom prst="roundRect">
+            <a:avLst>
+              <a:gd name="adj" fmla="val 6000"/>
+            </a:avLst>
+          </a:prstGeom>
+          <a:solidFill>
+            <a:srgbClr val="F2F2F2"/>
+          </a:solidFill>
+          <a:ln>
+            <a:noFill/>
+          </a:ln>
+        </p:spPr>
+        <p:txBody>
+          <a:bodyPr wrap="square" lIns="0" tIns="0" rIns="0" bIns="0" anchor="t">
+            <a:noAutofit/>
+          </a:bodyPr>
+          <a:lstStyle/>
+          <a:p>
+            <a:endParaRPr lang="en-GB" dirty="0"/>
+          </a:p>
+        </p:txBody>
+      </p:sp>
+      <p:sp>
+        <p:nvSpPr>
+          <p:cNvPr id="26" name="Outlier letter 2"/>
+          <p:cNvSpPr/>
+          <p:nvPr/>
+        </p:nvSpPr>
+        <p:spPr>
+          <a:xfrm>
+            <a:off x="6464808" y="1499616"/>
+            <a:ext cx="502920" cy="502920"/>
+          </a:xfrm>
+          <a:prstGeom prst="ellipse">
+            <a:avLst/>
+          </a:prstGeom>
+          <a:solidFill>
+            <a:srgbClr val="942639"/>
+          </a:solidFill>
+          <a:ln>
+            <a:noFill/>
+          </a:ln>
+        </p:spPr>
+        <p:txBody>
+          <a:bodyPr wrap="square" lIns="0" tIns="0" rIns="0" bIns="0" anchor="ctr">
+            <a:noAutofit/>
+          </a:bodyPr>
+          <a:lstStyle/>
+          <a:p>
+            <a:pPr algn="ctr" marL="0" indent="0">
+              <a:spcBef>
+                <a:spcPts val="0"/>
+              </a:spcBef>
+              <a:buNone/>
+            </a:pPr>
+            <a:r>
+              <a:rPr lang="en-GB" sz="1800" b="1" i="0" dirty="0">
+                <a:solidFill>
+                  <a:srgbClr val="FFFFFF"/>
+                </a:solidFill>
+                <a:latin typeface="Arial"/>
+                <a:cs typeface="Arial"/>
+              </a:rPr>
+              <a:t>B</a:t>
+            </a:r>
+          </a:p>
+        </p:txBody>
+      </p:sp>
+      <p:sp>
+        <p:nvSpPr>
+          <p:cNvPr id="27" name="Outlier heading 2"/>
+          <p:cNvSpPr txBox="1"/>
+          <p:nvPr/>
+        </p:nvSpPr>
+        <p:spPr>
+          <a:xfrm>
+            <a:off x="7150608" y="1536192"/>
+            <a:ext cx="4343400" cy="411480"/>
+          </a:xfrm>
+          <a:prstGeom prst="rect">
+            <a:avLst/>
+          </a:prstGeom>
+          <a:noFill/>
+          <a:ln>
+            <a:noFill/>
+          </a:ln>
+        </p:spPr>
+        <p:txBody>
+          <a:bodyPr wrap="square" lIns="0" tIns="0" rIns="0" bIns="0" anchor="t">
+            <a:noAutofit/>
+          </a:bodyPr>
+          <a:lstStyle/>
+          <a:p>
+            <a:pPr algn="l" marL="0" indent="0">
+              <a:spcBef>
+                <a:spcPts val="0"/>
+              </a:spcBef>
+              <a:buNone/>
+            </a:pPr>
+            <a:r>
+              <a:rPr lang="en-GB" sz="1800" b="1" i="0" dirty="0">
+                <a:solidFill>
+                  <a:srgbClr val="595959"/>
+                </a:solidFill>
+                <a:latin typeface="Arial"/>
+                <a:cs typeface="Arial"/>
+              </a:rPr>
+              <a:t>Final, fixed</a:t>
+            </a:r>
+          </a:p>
+        </p:txBody>
+      </p:sp>
+      <p:sp>
+        <p:nvSpPr>
+          <p:cNvPr id="28" name="Outlier text 2"/>
+          <p:cNvSpPr txBox="1"/>
+          <p:nvPr/>
+        </p:nvSpPr>
+        <p:spPr>
+          <a:xfrm>
+            <a:off x="7150608" y="2029968"/>
+            <a:ext cx="4343400" cy="1051560"/>
+          </a:xfrm>
+          <a:prstGeom prst="rect">
+            <a:avLst/>
+          </a:prstGeom>
+          <a:noFill/>
+          <a:ln>
+            <a:noFill/>
+          </a:ln>
+        </p:spPr>
+        <p:txBody>
+          <a:bodyPr wrap="square" lIns="0" tIns="0" rIns="0" bIns="0" anchor="t">
+            <a:noAutofit/>
+          </a:bodyPr>
+          <a:lstStyle/>
+          <a:p>
+            <a:pPr algn="l" marL="0" indent="0">
+              <a:spcBef>
+                <a:spcPts val="0"/>
+              </a:spcBef>
+              <a:buNone/>
+            </a:pPr>
+            <a:r>
+              <a:rPr lang="en-GB" sz="1400" b="0" i="0" dirty="0">
+                <a:solidFill>
+                  <a:srgbClr val="636462"/>
+                </a:solidFill>
+                <a:latin typeface="Arial"/>
+                <a:cs typeface="Arial"/>
+              </a:rPr>
+              <a:t>Weather outliers unstable: the 2015 storm and the 2023 summer level shifts appear only in some vintages. One day revised by 65 thousand MWh.</a:t>
+            </a:r>
+          </a:p>
+        </p:txBody>
+      </p:sp>
+      <p:sp>
+        <p:nvSpPr>
+          <p:cNvPr id="30" name="Outlier card 3"/>
+          <p:cNvSpPr/>
+          <p:nvPr/>
+        </p:nvSpPr>
+        <p:spPr>
+          <a:xfrm>
+            <a:off x="466344" y="3355848"/>
+            <a:ext cx="5486400" cy="1874520"/>
+          </a:xfrm>
+          <a:prstGeom prst="roundRect">
+            <a:avLst>
+              <a:gd name="adj" fmla="val 6000"/>
+            </a:avLst>
+          </a:prstGeom>
+          <a:solidFill>
+            <a:srgbClr val="F2F2F2"/>
+          </a:solidFill>
+          <a:ln>
+            <a:noFill/>
+          </a:ln>
+        </p:spPr>
+        <p:txBody>
+          <a:bodyPr wrap="square" lIns="0" tIns="0" rIns="0" bIns="0" anchor="t">
+            <a:noAutofit/>
+          </a:bodyPr>
+          <a:lstStyle/>
+          <a:p>
+            <a:endParaRPr lang="en-GB" dirty="0"/>
+          </a:p>
+        </p:txBody>
+      </p:sp>
+      <p:sp>
+        <p:nvSpPr>
+          <p:cNvPr id="31" name="Outlier letter 3"/>
+          <p:cNvSpPr/>
+          <p:nvPr/>
+        </p:nvSpPr>
+        <p:spPr>
+          <a:xfrm>
+            <a:off x="694944" y="3557016"/>
+            <a:ext cx="502920" cy="502920"/>
+          </a:xfrm>
+          <a:prstGeom prst="ellipse">
+            <a:avLst/>
+          </a:prstGeom>
+          <a:solidFill>
+            <a:srgbClr val="0072B2"/>
+          </a:solidFill>
+          <a:ln>
+            <a:noFill/>
+          </a:ln>
+        </p:spPr>
+        <p:txBody>
+          <a:bodyPr wrap="square" lIns="0" tIns="0" rIns="0" bIns="0" anchor="ctr">
+            <a:noAutofit/>
+          </a:bodyPr>
+          <a:lstStyle/>
+          <a:p>
+            <a:pPr algn="ctr" marL="0" indent="0">
+              <a:spcBef>
+                <a:spcPts val="0"/>
+              </a:spcBef>
+              <a:buNone/>
+            </a:pPr>
+            <a:r>
+              <a:rPr lang="en-GB" sz="1800" b="1" i="0" dirty="0">
+                <a:solidFill>
+                  <a:srgbClr val="FFFFFF"/>
+                </a:solidFill>
+                <a:latin typeface="Arial"/>
+                <a:cs typeface="Arial"/>
+              </a:rPr>
+              <a:t>C</a:t>
+            </a:r>
+          </a:p>
+        </p:txBody>
+      </p:sp>
+      <p:sp>
+        <p:nvSpPr>
+          <p:cNvPr id="32" name="Outlier heading 3"/>
+          <p:cNvSpPr txBox="1"/>
+          <p:nvPr/>
+        </p:nvSpPr>
+        <p:spPr>
+          <a:xfrm>
+            <a:off x="1380744" y="3593592"/>
+            <a:ext cx="4343400" cy="411480"/>
+          </a:xfrm>
+          <a:prstGeom prst="rect">
+            <a:avLst/>
+          </a:prstGeom>
+          <a:noFill/>
+          <a:ln>
+            <a:noFill/>
+          </a:ln>
+        </p:spPr>
+        <p:txBody>
+          <a:bodyPr wrap="square" lIns="0" tIns="0" rIns="0" bIns="0" anchor="t">
+            <a:noAutofit/>
+          </a:bodyPr>
+          <a:lstStyle/>
+          <a:p>
+            <a:pPr algn="l" marL="0" indent="0">
+              <a:spcBef>
+                <a:spcPts val="0"/>
+              </a:spcBef>
+              <a:buNone/>
+            </a:pPr>
+            <a:r>
+              <a:rPr lang="en-GB" sz="1800" b="1" i="0" dirty="0">
+                <a:solidFill>
+                  <a:srgbClr val="595959"/>
+                </a:solidFill>
+                <a:latin typeface="Arial"/>
+                <a:cs typeface="Arial"/>
+              </a:rPr>
+              <a:t>Final, time-varying</a:t>
+            </a:r>
+          </a:p>
+        </p:txBody>
+      </p:sp>
+      <p:sp>
+        <p:nvSpPr>
+          <p:cNvPr id="33" name="Outlier text 3"/>
+          <p:cNvSpPr txBox="1"/>
+          <p:nvPr/>
+        </p:nvSpPr>
+        <p:spPr>
+          <a:xfrm>
+            <a:off x="1380744" y="4087368"/>
+            <a:ext cx="4343400" cy="1051560"/>
+          </a:xfrm>
+          <a:prstGeom prst="rect">
+            <a:avLst/>
+          </a:prstGeom>
+          <a:noFill/>
+          <a:ln>
+            <a:noFill/>
+          </a:ln>
+        </p:spPr>
+        <p:txBody>
+          <a:bodyPr wrap="square" lIns="0" tIns="0" rIns="0" bIns="0" anchor="t">
+            <a:noAutofit/>
+          </a:bodyPr>
+          <a:lstStyle/>
+          <a:p>
+            <a:pPr algn="l" marL="0" indent="0">
+              <a:spcBef>
+                <a:spcPts val="0"/>
+              </a:spcBef>
+              <a:buNone/>
+            </a:pPr>
+            <a:r>
+              <a:rPr lang="en-GB" sz="1400" b="0" i="0" dirty="0">
+                <a:solidFill>
+                  <a:srgbClr val="636462"/>
+                </a:solidFill>
+                <a:latin typeface="Arial"/>
+                <a:cs typeface="Arial"/>
+              </a:rPr>
+              <a:t>The same outliers in all estimates, or all but one. Largest single-day revision below 10 thousand MWh.</a:t>
+            </a:r>
+          </a:p>
+        </p:txBody>
+      </p:sp>
+      <p:sp>
+        <p:nvSpPr>
+          <p:cNvPr id="35" name="Outlier card 4"/>
+          <p:cNvSpPr/>
+          <p:nvPr/>
+        </p:nvSpPr>
+        <p:spPr>
+          <a:xfrm>
+            <a:off x="6236208" y="3355848"/>
+            <a:ext cx="5486400" cy="1874520"/>
+          </a:xfrm>
+          <a:prstGeom prst="roundRect">
+            <a:avLst>
+              <a:gd name="adj" fmla="val 6000"/>
+            </a:avLst>
+          </a:prstGeom>
+          <a:solidFill>
+            <a:srgbClr val="F2F2F2"/>
+          </a:solidFill>
+          <a:ln>
+            <a:noFill/>
+          </a:ln>
+        </p:spPr>
+        <p:txBody>
+          <a:bodyPr wrap="square" lIns="0" tIns="0" rIns="0" bIns="0" anchor="t">
+            <a:noAutofit/>
+          </a:bodyPr>
+          <a:lstStyle/>
+          <a:p>
+            <a:endParaRPr lang="en-GB" dirty="0"/>
+          </a:p>
+        </p:txBody>
+      </p:sp>
+      <p:sp>
+        <p:nvSpPr>
+          <p:cNvPr id="36" name="Outlier letter 4"/>
+          <p:cNvSpPr/>
+          <p:nvPr/>
+        </p:nvSpPr>
+        <p:spPr>
+          <a:xfrm>
+            <a:off x="6464808" y="3557016"/>
+            <a:ext cx="502920" cy="502920"/>
+          </a:xfrm>
+          <a:prstGeom prst="ellipse">
+            <a:avLst/>
+          </a:prstGeom>
+          <a:solidFill>
+            <a:srgbClr val="7B7C7E"/>
+          </a:solidFill>
+          <a:ln>
+            <a:noFill/>
+          </a:ln>
+        </p:spPr>
+        <p:txBody>
+          <a:bodyPr wrap="square" lIns="0" tIns="0" rIns="0" bIns="0" anchor="ctr">
+            <a:noAutofit/>
+          </a:bodyPr>
+          <a:lstStyle/>
+          <a:p>
+            <a:pPr algn="ctr" marL="0" indent="0">
+              <a:spcBef>
+                <a:spcPts val="0"/>
+              </a:spcBef>
+              <a:buNone/>
+            </a:pPr>
+            <a:r>
+              <a:rPr lang="en-GB" sz="1800" b="1" i="0" dirty="0">
+                <a:solidFill>
+                  <a:srgbClr val="FFFFFF"/>
+                </a:solidFill>
+                <a:latin typeface="Arial"/>
+                <a:cs typeface="Arial"/>
+              </a:rPr>
+              <a:t>D</a:t>
+            </a:r>
+          </a:p>
+        </p:txBody>
+      </p:sp>
+      <p:sp>
+        <p:nvSpPr>
+          <p:cNvPr id="37" name="Outlier heading 4"/>
+          <p:cNvSpPr txBox="1"/>
+          <p:nvPr/>
+        </p:nvSpPr>
+        <p:spPr>
+          <a:xfrm>
+            <a:off x="7150608" y="3593592"/>
+            <a:ext cx="4343400" cy="411480"/>
+          </a:xfrm>
+          <a:prstGeom prst="rect">
+            <a:avLst/>
+          </a:prstGeom>
+          <a:noFill/>
+          <a:ln>
+            <a:noFill/>
+          </a:ln>
+        </p:spPr>
+        <p:txBody>
+          <a:bodyPr wrap="square" lIns="0" tIns="0" rIns="0" bIns="0" anchor="t">
+            <a:noAutofit/>
+          </a:bodyPr>
+          <a:lstStyle/>
+          <a:p>
+            <a:pPr algn="l" marL="0" indent="0">
+              <a:spcBef>
+                <a:spcPts val="0"/>
+              </a:spcBef>
+              <a:buNone/>
+            </a:pPr>
+            <a:r>
+              <a:rPr lang="en-GB" sz="1800" b="1" i="0" dirty="0">
+                <a:solidFill>
+                  <a:srgbClr val="595959"/>
+                </a:solidFill>
+                <a:latin typeface="Arial"/>
+                <a:cs typeface="Arial"/>
+              </a:rPr>
+              <a:t>Basic, time-varying</a:t>
+            </a:r>
+          </a:p>
+        </p:txBody>
+      </p:sp>
+      <p:sp>
+        <p:nvSpPr>
+          <p:cNvPr id="38" name="Outlier text 4"/>
+          <p:cNvSpPr txBox="1"/>
+          <p:nvPr/>
+        </p:nvSpPr>
+        <p:spPr>
+          <a:xfrm>
+            <a:off x="7150608" y="4087368"/>
+            <a:ext cx="4343400" cy="1051560"/>
+          </a:xfrm>
+          <a:prstGeom prst="rect">
+            <a:avLst/>
+          </a:prstGeom>
+          <a:noFill/>
+          <a:ln>
+            <a:noFill/>
+          </a:ln>
+        </p:spPr>
+        <p:txBody>
+          <a:bodyPr wrap="square" lIns="0" tIns="0" rIns="0" bIns="0" anchor="t">
+            <a:noAutofit/>
+          </a:bodyPr>
+          <a:lstStyle/>
+          <a:p>
+            <a:pPr algn="l" marL="0" indent="0">
+              <a:spcBef>
+                <a:spcPts val="0"/>
+              </a:spcBef>
+              <a:buNone/>
+            </a:pPr>
+            <a:r>
+              <a:rPr lang="en-GB" sz="1400" b="0" i="0" dirty="0">
+                <a:solidFill>
+                  <a:srgbClr val="636462"/>
+                </a:solidFill>
+                <a:latin typeface="Arial"/>
+                <a:cs typeface="Arial"/>
+              </a:rPr>
+              <a:t>No outlier on holidays: the coefficients absorb the error. A switch outlier still sits next to the 2016 All Saints' bridge.</a:t>
+            </a:r>
+          </a:p>
+        </p:txBody>
+      </p:sp>
+      <p:sp>
+        <p:nvSpPr>
+          <p:cNvPr id="50" name="Take-home"/>
+          <p:cNvSpPr txBox="1"/>
+          <p:nvPr/>
+        </p:nvSpPr>
+        <p:spPr>
+          <a:xfrm>
+            <a:off x="466344" y="5532120"/>
+            <a:ext cx="11256264" cy="411480"/>
+          </a:xfrm>
+          <a:prstGeom prst="rect">
+            <a:avLst/>
+          </a:prstGeom>
+          <a:noFill/>
+          <a:ln>
+            <a:noFill/>
+          </a:ln>
+        </p:spPr>
+        <p:txBody>
+          <a:bodyPr wrap="square" lIns="0" tIns="0" rIns="0" bIns="0" anchor="t">
+            <a:noAutofit/>
+          </a:bodyPr>
+          <a:lstStyle/>
+          <a:p>
+            <a:pPr algn="l" marL="0" indent="0">
+              <a:spcBef>
+                <a:spcPts val="0"/>
+              </a:spcBef>
+              <a:buNone/>
+            </a:pPr>
+            <a:r>
+              <a:rPr lang="en-GB" sz="1800" b="1" i="0" dirty="0">
+                <a:solidFill>
+                  <a:srgbClr val="C00000"/>
+                </a:solidFill>
+                <a:latin typeface="Arial"/>
+                <a:cs typeface="Arial"/>
+              </a:rPr>
+              <a:t>A well-specified calendar makes the whole model more stable, not only the calendar days.</a:t>
+            </a:r>
+          </a:p>
+        </p:txBody>
+      </p:sp>
+    </p:spTree>
+    <p:extLst>
+      <p:ext uri="{BB962C8B-B14F-4D97-AF65-F5344CB8AC3E}">
+        <p14:creationId xmlns:p14="http://schemas.microsoft.com/office/powerpoint/2010/main" val="1781916628"/>
+      </p:ext>
+    </p:extLst>
+  </p:cSld>
+  <p:clrMapOvr>
+    <a:masterClrMapping/>
+  </p:clrMapOvr>
+</p:sld>
+</file>
+
+<file path=ppt/slides/slide29.xml><?xml version="1.0" encoding="utf-8"?>
+<p:sld xmlns:a="http://schemas.openxmlformats.org/drawingml/2006/main" xmlns:r="http://schemas.openxmlformats.org/officeDocument/2006/relationships" xmlns:p="http://schemas.openxmlformats.org/presentationml/2006/main">
+  <p:cSld>
+    <p:spTree>
+      <p:nvGrpSpPr>
+        <p:cNvPr id="1" name=""/>
+        <p:cNvGrpSpPr/>
+        <p:nvPr/>
+      </p:nvGrpSpPr>
+      <p:grpSpPr>
+        <a:xfrm>
+          <a:off x="0" y="0"/>
+          <a:ext cx="0" cy="0"/>
+          <a:chOff x="0" y="0"/>
+          <a:chExt cx="0" cy="0"/>
+        </a:xfrm>
+      </p:grpSpPr>
+      <p:sp>
+        <p:nvSpPr>
+          <p:cNvPr id="19461" name="Titolo 4"/>
+          <p:cNvSpPr>
+            <a:spLocks noGrp="1"/>
+          </p:cNvSpPr>
+          <p:nvPr>
+            <p:ph type="title"/>
+          </p:nvPr>
+        </p:nvSpPr>
+        <p:spPr>
+          <a:xfrm>
+            <a:off x="468313" y="482109"/>
+            <a:ext cx="11269662" cy="405304"/>
+          </a:xfrm>
+        </p:spPr>
+        <p:txBody>
+          <a:bodyPr/>
+          <a:lstStyle/>
+          <a:p>
+            <a:r>
+              <a:rPr lang="en-GB" altLang="it-IT" sz="3600" dirty="0">
+                <a:solidFill>
+                  <a:srgbClr val="C00000"/>
+                </a:solidFill>
+              </a:rPr>
+              <a:t>Revisions: fewer on every group of days</a:t>
+            </a:r>
+          </a:p>
+        </p:txBody>
+      </p:sp>
+      <p:sp>
+        <p:nvSpPr>
+          <p:cNvPr id="9" name="Segnaposto numero diapositiva 4">
+            <a:extLst>
+              <a:ext uri="{FF2B5EF4-FFF2-40B4-BE49-F238E27FC236}">
+                <a16:creationId xmlns:a16="http://schemas.microsoft.com/office/drawing/2014/main" id="{43529721-AF16-448D-9B7A-D70C2ADC2006}"/>
+              </a:ext>
+            </a:extLst>
+          </p:cNvPr>
+          <p:cNvSpPr>
+            <a:spLocks noGrp="1"/>
+          </p:cNvSpPr>
+          <p:nvPr>
+            <p:ph type="sldNum" sz="quarter" idx="11"/>
+          </p:nvPr>
+        </p:nvSpPr>
+        <p:spPr>
+          <a:xfrm>
+            <a:off x="0" y="6392815"/>
+            <a:ext cx="501650" cy="365125"/>
+          </a:xfrm>
+          <a:prstGeom prst="rect">
+            <a:avLst/>
+          </a:prstGeom>
+        </p:spPr>
+        <p:txBody>
+          <a:bodyPr/>
+          <a:lstStyle/>
+          <a:p>
+            <a:pPr>
+              <a:defRPr/>
+            </a:pPr>
+            <a:fld id="{48B4153A-D4C5-4CEF-8992-0D8815C829E3}" type="slidenum">
+              <a:rPr lang="en-US" smtClean="0"/>
+              <a:pPr>
+                <a:defRPr/>
+              </a:pPr>
+              <a:t>19</a:t>
+            </a:fld>
+            <a:endParaRPr lang="en-US" dirty="0"/>
+          </a:p>
+        </p:txBody>
+      </p:sp>
+      <p:sp>
+        <p:nvSpPr>
+          <p:cNvPr id="8" name="Segnaposto piè di pagina 3">
+            <a:extLst>
+              <a:ext uri="{FF2B5EF4-FFF2-40B4-BE49-F238E27FC236}">
+                <a16:creationId xmlns:a16="http://schemas.microsoft.com/office/drawing/2014/main" id="{3223DD80-9C7E-474F-A668-27B6983A5687}"/>
+              </a:ext>
+            </a:extLst>
+          </p:cNvPr>
+          <p:cNvSpPr>
+            <a:spLocks noGrp="1"/>
+          </p:cNvSpPr>
+          <p:nvPr>
+            <p:ph type="ftr" sz="quarter" idx="10"/>
+          </p:nvPr>
+        </p:nvSpPr>
+        <p:spPr>
+          <a:xfrm>
+            <a:off x="635830" y="6382305"/>
+            <a:ext cx="9644444" cy="259965"/>
+          </a:xfrm>
+        </p:spPr>
+        <p:txBody>
+          <a:bodyPr/>
+          <a:lstStyle/>
+          <a:p>
+            <a:pPr>
+              <a:defRPr/>
+            </a:pPr>
+            <a:r>
+              <a:rPr lang="en-US" dirty="0"/>
+              <a:t>Building calendars for daily seasonal adjustment</a:t>
+            </a:r>
+          </a:p>
+        </p:txBody>
+      </p:sp>
+      <p:pic>
+        <p:nvPicPr>
+          <p:cNvPr id="40" name="E-invoicing revisions by group of days" descr="Mean absolute revision over the last year of each vintage for holidays, month days and other days, basic versus final e-invoicing calendar"/>
+          <p:cNvPicPr>
+            <a:picLocks noChangeAspect="1"/>
+          </p:cNvPicPr>
+          <p:nvPr/>
+        </p:nvPicPr>
+        <p:blipFill>
+          <a:blip r:embed="rIdImg1"/>
+          <a:stretch>
+            <a:fillRect/>
+          </a:stretch>
+        </p:blipFill>
+        <p:spPr>
+          <a:xfrm>
+            <a:off x="749153" y="1298448"/>
+            <a:ext cx="6731293" cy="4114800"/>
+          </a:xfrm>
+          <a:prstGeom prst="rect">
+            <a:avLst/>
+          </a:prstGeom>
+        </p:spPr>
+      </p:pic>
+      <p:sp>
+        <p:nvSpPr>
+          <p:cNvPr id="41" name="Cards header"/>
+          <p:cNvSpPr txBox="1"/>
+          <p:nvPr/>
+        </p:nvSpPr>
+        <p:spPr>
+          <a:xfrm>
+            <a:off x="8092440" y="1234440"/>
+            <a:ext cx="3632911" cy="411480"/>
+          </a:xfrm>
+          <a:prstGeom prst="rect">
+            <a:avLst/>
+          </a:prstGeom>
+          <a:noFill/>
+          <a:ln>
+            <a:noFill/>
+          </a:ln>
+        </p:spPr>
+        <p:txBody>
+          <a:bodyPr wrap="square" lIns="0" tIns="0" rIns="0" bIns="0" anchor="t">
+            <a:noAutofit/>
+          </a:bodyPr>
+          <a:lstStyle/>
+          <a:p>
+            <a:pPr algn="l" marL="0" indent="0">
+              <a:spcBef>
+                <a:spcPts val="0"/>
+              </a:spcBef>
+              <a:buNone/>
+            </a:pPr>
+            <a:r>
+              <a:rPr lang="en-GB" sz="1800" b="1" i="0" dirty="0">
+                <a:solidFill>
+                  <a:srgbClr val="595959"/>
+                </a:solidFill>
+                <a:latin typeface="Arial"/>
+                <a:cs typeface="Arial"/>
+              </a:rPr>
+              <a:t>Last year</a:t>
+            </a:r>
+            <a:r>
+              <a:rPr lang="en-GB" sz="1400" b="0" i="0" dirty="0">
+                <a:solidFill>
+                  <a:srgbClr val="7B7C7E"/>
+                </a:solidFill>
+                <a:latin typeface="Arial"/>
+                <a:cs typeface="Arial"/>
+              </a:rPr>
+              <a:t>   basic → final</a:t>
+            </a:r>
+          </a:p>
+        </p:txBody>
+      </p:sp>
+      <p:sp>
+        <p:nvSpPr>
+          <p:cNvPr id="42" name="Rev card 1"/>
+          <p:cNvSpPr/>
+          <p:nvPr/>
+        </p:nvSpPr>
+        <p:spPr>
+          <a:xfrm>
+            <a:off x="8092440" y="1691640"/>
+            <a:ext cx="3632911" cy="896112"/>
+          </a:xfrm>
+          <a:prstGeom prst="roundRect">
+            <a:avLst>
+              <a:gd name="adj" fmla="val 6000"/>
+            </a:avLst>
+          </a:prstGeom>
+          <a:solidFill>
+            <a:srgbClr val="F2F2F2"/>
+          </a:solidFill>
+          <a:ln>
+            <a:noFill/>
+          </a:ln>
+        </p:spPr>
+        <p:txBody>
+          <a:bodyPr wrap="square" lIns="0" tIns="0" rIns="0" bIns="0" anchor="t">
+            <a:noAutofit/>
+          </a:bodyPr>
+          <a:lstStyle/>
+          <a:p>
+            <a:endParaRPr lang="en-GB" dirty="0"/>
+          </a:p>
+        </p:txBody>
+      </p:sp>
+      <p:sp>
+        <p:nvSpPr>
+          <p:cNvPr id="43" name="Rev card label 1"/>
+          <p:cNvSpPr txBox="1"/>
+          <p:nvPr/>
+        </p:nvSpPr>
+        <p:spPr>
+          <a:xfrm>
+            <a:off x="8275320" y="1737360"/>
+            <a:ext cx="3267151" cy="347472"/>
+          </a:xfrm>
+          <a:prstGeom prst="rect">
+            <a:avLst/>
+          </a:prstGeom>
+          <a:noFill/>
+          <a:ln>
+            <a:noFill/>
+          </a:ln>
+        </p:spPr>
+        <p:txBody>
+          <a:bodyPr wrap="square" lIns="0" tIns="0" rIns="0" bIns="0" anchor="t">
+            <a:noAutofit/>
+          </a:bodyPr>
+          <a:lstStyle/>
+          <a:p>
+            <a:pPr algn="l" marL="0" indent="0">
+              <a:spcBef>
+                <a:spcPts val="0"/>
+              </a:spcBef>
+              <a:buNone/>
+            </a:pPr>
+            <a:r>
+              <a:rPr lang="en-GB" sz="1400" b="1" i="0" dirty="0">
+                <a:solidFill>
+                  <a:srgbClr val="595959"/>
+                </a:solidFill>
+                <a:latin typeface="Arial"/>
+                <a:cs typeface="Arial"/>
+              </a:rPr>
+              <a:t>Holidays</a:t>
+            </a:r>
+          </a:p>
+        </p:txBody>
+      </p:sp>
+      <p:sp>
+        <p:nvSpPr>
+          <p:cNvPr id="44" name="Rev card values 1"/>
+          <p:cNvSpPr txBox="1"/>
+          <p:nvPr/>
+        </p:nvSpPr>
+        <p:spPr>
+          <a:xfrm>
+            <a:off x="8275320" y="2057400"/>
+            <a:ext cx="3267151" cy="475488"/>
+          </a:xfrm>
+          <a:prstGeom prst="rect">
+            <a:avLst/>
+          </a:prstGeom>
+          <a:noFill/>
+          <a:ln>
+            <a:noFill/>
+          </a:ln>
+        </p:spPr>
+        <p:txBody>
+          <a:bodyPr wrap="square" lIns="0" tIns="0" rIns="0" bIns="0" anchor="t">
+            <a:noAutofit/>
+          </a:bodyPr>
+          <a:lstStyle/>
+          <a:p>
+            <a:pPr algn="l" marL="0" indent="0">
+              <a:spcBef>
+                <a:spcPts val="0"/>
+              </a:spcBef>
+              <a:buNone/>
+            </a:pPr>
+            <a:r>
+              <a:rPr lang="en-GB" sz="2000" b="1" i="0" dirty="0">
+                <a:solidFill>
+                  <a:srgbClr val="C00000"/>
+                </a:solidFill>
+                <a:latin typeface="Arial"/>
+                <a:cs typeface="Arial"/>
+              </a:rPr>
+              <a:t>14.2%</a:t>
+            </a:r>
+            <a:r>
+              <a:rPr lang="en-GB" sz="1600" b="0" i="0" dirty="0">
+                <a:solidFill>
+                  <a:srgbClr val="7B7C7E"/>
+                </a:solidFill>
+                <a:latin typeface="Arial"/>
+                <a:cs typeface="Arial"/>
+              </a:rPr>
+              <a:t> → </a:t>
+            </a:r>
+            <a:r>
+              <a:rPr lang="en-GB" sz="2000" b="1" i="0" dirty="0">
+                <a:solidFill>
+                  <a:srgbClr val="0072B2"/>
+                </a:solidFill>
+                <a:latin typeface="Arial"/>
+                <a:cs typeface="Arial"/>
+              </a:rPr>
+              <a:t>1.7%</a:t>
+            </a:r>
+            <a:r>
+              <a:rPr lang="en-GB" sz="1500" b="1" i="0" dirty="0">
+                <a:solidFill>
+                  <a:srgbClr val="7B7C7E"/>
+                </a:solidFill>
+                <a:latin typeface="Arial"/>
+                <a:cs typeface="Arial"/>
+              </a:rPr>
+              <a:t>   −88%</a:t>
+            </a:r>
+          </a:p>
+        </p:txBody>
+      </p:sp>
+      <p:sp>
+        <p:nvSpPr>
+          <p:cNvPr id="45" name="Rev card 2"/>
+          <p:cNvSpPr/>
+          <p:nvPr/>
+        </p:nvSpPr>
+        <p:spPr>
+          <a:xfrm>
+            <a:off x="8092440" y="2679192"/>
+            <a:ext cx="3632911" cy="896112"/>
+          </a:xfrm>
+          <a:prstGeom prst="roundRect">
+            <a:avLst>
+              <a:gd name="adj" fmla="val 6000"/>
+            </a:avLst>
+          </a:prstGeom>
+          <a:solidFill>
+            <a:srgbClr val="F2F2F2"/>
+          </a:solidFill>
+          <a:ln>
+            <a:noFill/>
+          </a:ln>
+        </p:spPr>
+        <p:txBody>
+          <a:bodyPr wrap="square" lIns="0" tIns="0" rIns="0" bIns="0" anchor="t">
+            <a:noAutofit/>
+          </a:bodyPr>
+          <a:lstStyle/>
+          <a:p>
+            <a:endParaRPr lang="en-GB" dirty="0"/>
+          </a:p>
+        </p:txBody>
+      </p:sp>
+      <p:sp>
+        <p:nvSpPr>
+          <p:cNvPr id="46" name="Rev card label 2"/>
+          <p:cNvSpPr txBox="1"/>
+          <p:nvPr/>
+        </p:nvSpPr>
+        <p:spPr>
+          <a:xfrm>
+            <a:off x="8275320" y="2724912"/>
+            <a:ext cx="3267151" cy="347472"/>
+          </a:xfrm>
+          <a:prstGeom prst="rect">
+            <a:avLst/>
+          </a:prstGeom>
+          <a:noFill/>
+          <a:ln>
+            <a:noFill/>
+          </a:ln>
+        </p:spPr>
+        <p:txBody>
+          <a:bodyPr wrap="square" lIns="0" tIns="0" rIns="0" bIns="0" anchor="t">
+            <a:noAutofit/>
+          </a:bodyPr>
+          <a:lstStyle/>
+          <a:p>
+            <a:pPr algn="l" marL="0" indent="0">
+              <a:spcBef>
+                <a:spcPts val="0"/>
+              </a:spcBef>
+              <a:buNone/>
+            </a:pPr>
+            <a:r>
+              <a:rPr lang="en-GB" sz="1400" b="1" i="0" dirty="0">
+                <a:solidFill>
+                  <a:srgbClr val="595959"/>
+                </a:solidFill>
+                <a:latin typeface="Arial"/>
+                <a:cs typeface="Arial"/>
+              </a:rPr>
+              <a:t>Month days</a:t>
+            </a:r>
+          </a:p>
+        </p:txBody>
+      </p:sp>
+      <p:sp>
+        <p:nvSpPr>
+          <p:cNvPr id="47" name="Rev card values 2"/>
+          <p:cNvSpPr txBox="1"/>
+          <p:nvPr/>
+        </p:nvSpPr>
+        <p:spPr>
+          <a:xfrm>
+            <a:off x="8275320" y="3044952"/>
+            <a:ext cx="3267151" cy="475488"/>
+          </a:xfrm>
+          <a:prstGeom prst="rect">
+            <a:avLst/>
+          </a:prstGeom>
+          <a:noFill/>
+          <a:ln>
+            <a:noFill/>
+          </a:ln>
+        </p:spPr>
+        <p:txBody>
+          <a:bodyPr wrap="square" lIns="0" tIns="0" rIns="0" bIns="0" anchor="t">
+            <a:noAutofit/>
+          </a:bodyPr>
+          <a:lstStyle/>
+          <a:p>
+            <a:pPr algn="l" marL="0" indent="0">
+              <a:spcBef>
+                <a:spcPts val="0"/>
+              </a:spcBef>
+              <a:buNone/>
+            </a:pPr>
+            <a:r>
+              <a:rPr lang="en-GB" sz="2000" b="1" i="0" dirty="0">
+                <a:solidFill>
+                  <a:srgbClr val="C00000"/>
+                </a:solidFill>
+                <a:latin typeface="Arial"/>
+                <a:cs typeface="Arial"/>
+              </a:rPr>
+              <a:t>3.0%</a:t>
+            </a:r>
+            <a:r>
+              <a:rPr lang="en-GB" sz="1600" b="0" i="0" dirty="0">
+                <a:solidFill>
+                  <a:srgbClr val="7B7C7E"/>
+                </a:solidFill>
+                <a:latin typeface="Arial"/>
+                <a:cs typeface="Arial"/>
+              </a:rPr>
+              <a:t> → </a:t>
+            </a:r>
+            <a:r>
+              <a:rPr lang="en-GB" sz="2000" b="1" i="0" dirty="0">
+                <a:solidFill>
+                  <a:srgbClr val="0072B2"/>
+                </a:solidFill>
+                <a:latin typeface="Arial"/>
+                <a:cs typeface="Arial"/>
+              </a:rPr>
+              <a:t>1.1%</a:t>
+            </a:r>
+            <a:r>
+              <a:rPr lang="en-GB" sz="1500" b="1" i="0" dirty="0">
+                <a:solidFill>
+                  <a:srgbClr val="7B7C7E"/>
+                </a:solidFill>
+                <a:latin typeface="Arial"/>
+                <a:cs typeface="Arial"/>
+              </a:rPr>
+              <a:t>   −62%</a:t>
+            </a:r>
+          </a:p>
+        </p:txBody>
+      </p:sp>
+      <p:sp>
+        <p:nvSpPr>
+          <p:cNvPr id="48" name="Rev card 3"/>
+          <p:cNvSpPr/>
+          <p:nvPr/>
+        </p:nvSpPr>
+        <p:spPr>
+          <a:xfrm>
+            <a:off x="8092440" y="3666744"/>
+            <a:ext cx="3632911" cy="896112"/>
+          </a:xfrm>
+          <a:prstGeom prst="roundRect">
+            <a:avLst>
+              <a:gd name="adj" fmla="val 6000"/>
+            </a:avLst>
+          </a:prstGeom>
+          <a:solidFill>
+            <a:srgbClr val="F2F2F2"/>
+          </a:solidFill>
+          <a:ln>
+            <a:noFill/>
+          </a:ln>
+        </p:spPr>
+        <p:txBody>
+          <a:bodyPr wrap="square" lIns="0" tIns="0" rIns="0" bIns="0" anchor="t">
+            <a:noAutofit/>
+          </a:bodyPr>
+          <a:lstStyle/>
+          <a:p>
+            <a:endParaRPr lang="en-GB" dirty="0"/>
+          </a:p>
+        </p:txBody>
+      </p:sp>
+      <p:sp>
+        <p:nvSpPr>
+          <p:cNvPr id="49" name="Rev card label 3"/>
+          <p:cNvSpPr txBox="1"/>
+          <p:nvPr/>
+        </p:nvSpPr>
+        <p:spPr>
+          <a:xfrm>
+            <a:off x="8275320" y="3712464"/>
+            <a:ext cx="3267151" cy="347472"/>
+          </a:xfrm>
+          <a:prstGeom prst="rect">
+            <a:avLst/>
+          </a:prstGeom>
+          <a:noFill/>
+          <a:ln>
+            <a:noFill/>
+          </a:ln>
+        </p:spPr>
+        <p:txBody>
+          <a:bodyPr wrap="square" lIns="0" tIns="0" rIns="0" bIns="0" anchor="t">
+            <a:noAutofit/>
+          </a:bodyPr>
+          <a:lstStyle/>
+          <a:p>
+            <a:pPr algn="l" marL="0" indent="0">
+              <a:spcBef>
+                <a:spcPts val="0"/>
+              </a:spcBef>
+              <a:buNone/>
+            </a:pPr>
+            <a:r>
+              <a:rPr lang="en-GB" sz="1400" b="1" i="0" dirty="0">
+                <a:solidFill>
+                  <a:srgbClr val="595959"/>
+                </a:solidFill>
+                <a:latin typeface="Arial"/>
+                <a:cs typeface="Arial"/>
+              </a:rPr>
+              <a:t>Other days</a:t>
+            </a:r>
+          </a:p>
+        </p:txBody>
+      </p:sp>
+      <p:sp>
+        <p:nvSpPr>
+          <p:cNvPr id="50" name="Rev card values 3"/>
+          <p:cNvSpPr txBox="1"/>
+          <p:nvPr/>
+        </p:nvSpPr>
+        <p:spPr>
+          <a:xfrm>
+            <a:off x="8275320" y="4032504"/>
+            <a:ext cx="3267151" cy="475488"/>
+          </a:xfrm>
+          <a:prstGeom prst="rect">
+            <a:avLst/>
+          </a:prstGeom>
+          <a:noFill/>
+          <a:ln>
+            <a:noFill/>
+          </a:ln>
+        </p:spPr>
+        <p:txBody>
+          <a:bodyPr wrap="square" lIns="0" tIns="0" rIns="0" bIns="0" anchor="t">
+            <a:noAutofit/>
+          </a:bodyPr>
+          <a:lstStyle/>
+          <a:p>
+            <a:pPr algn="l" marL="0" indent="0">
+              <a:spcBef>
+                <a:spcPts val="0"/>
+              </a:spcBef>
+              <a:buNone/>
+            </a:pPr>
+            <a:r>
+              <a:rPr lang="en-GB" sz="2000" b="1" i="0" dirty="0">
+                <a:solidFill>
+                  <a:srgbClr val="C00000"/>
+                </a:solidFill>
+                <a:latin typeface="Arial"/>
+                <a:cs typeface="Arial"/>
+              </a:rPr>
+              <a:t>2.1%</a:t>
+            </a:r>
+            <a:r>
+              <a:rPr lang="en-GB" sz="1600" b="0" i="0" dirty="0">
+                <a:solidFill>
+                  <a:srgbClr val="7B7C7E"/>
+                </a:solidFill>
+                <a:latin typeface="Arial"/>
+                <a:cs typeface="Arial"/>
+              </a:rPr>
+              <a:t> → </a:t>
+            </a:r>
+            <a:r>
+              <a:rPr lang="en-GB" sz="2000" b="1" i="0" dirty="0">
+                <a:solidFill>
+                  <a:srgbClr val="0072B2"/>
+                </a:solidFill>
+                <a:latin typeface="Arial"/>
+                <a:cs typeface="Arial"/>
+              </a:rPr>
+              <a:t>1.2%</a:t>
+            </a:r>
+            <a:r>
+              <a:rPr lang="en-GB" sz="1500" b="1" i="0" dirty="0">
+                <a:solidFill>
+                  <a:srgbClr val="7B7C7E"/>
+                </a:solidFill>
+                <a:latin typeface="Arial"/>
+                <a:cs typeface="Arial"/>
+              </a:rPr>
+              <a:t>   −42%</a:t>
+            </a:r>
+          </a:p>
+        </p:txBody>
+      </p:sp>
+      <p:sp>
+        <p:nvSpPr>
+          <p:cNvPr id="52" name="Rev note"/>
+          <p:cNvSpPr txBox="1"/>
+          <p:nvPr/>
+        </p:nvSpPr>
+        <p:spPr>
+          <a:xfrm>
+            <a:off x="8092440" y="4663440"/>
+            <a:ext cx="3632911" cy="822960"/>
+          </a:xfrm>
+          <a:prstGeom prst="rect">
+            <a:avLst/>
+          </a:prstGeom>
+          <a:noFill/>
+          <a:ln>
+            <a:noFill/>
+          </a:ln>
+        </p:spPr>
+        <p:txBody>
+          <a:bodyPr wrap="square" lIns="0" tIns="0" rIns="0" bIns="0" anchor="t">
+            <a:noAutofit/>
+          </a:bodyPr>
+          <a:lstStyle/>
+          <a:p>
+            <a:pPr algn="l" marL="0" indent="0">
+              <a:spcBef>
+                <a:spcPts val="0"/>
+              </a:spcBef>
+              <a:buNone/>
+            </a:pPr>
+            <a:r>
+              <a:rPr lang="en-GB" sz="1300" b="1" i="0" dirty="0">
+                <a:solidFill>
+                  <a:srgbClr val="595959"/>
+                </a:solidFill>
+                <a:latin typeface="Arial"/>
+                <a:cs typeface="Arial"/>
+              </a:rPr>
+              <a:t>Historical sample: 3.0% → 0.9% (−71%). </a:t>
+            </a:r>
+            <a:r>
+              <a:rPr lang="en-GB" sz="1300" b="0" i="0" dirty="0">
+                <a:solidFill>
+                  <a:srgbClr val="595959"/>
+                </a:solidFill>
+                <a:latin typeface="Arial"/>
+                <a:cs typeface="Arial"/>
+              </a:rPr>
+              <a:t>Basic calendar: weekend-holiday outliers come and go, one day revised by over 400%; no lockdown level shift detected.</a:t>
+            </a:r>
+          </a:p>
+        </p:txBody>
+      </p:sp>
+      <p:sp>
+        <p:nvSpPr>
+          <p:cNvPr id="53" name="Caption"/>
+          <p:cNvSpPr txBox="1"/>
+          <p:nvPr/>
+        </p:nvSpPr>
+        <p:spPr>
+          <a:xfrm>
+            <a:off x="466344" y="5532120"/>
+            <a:ext cx="11256264" cy="411480"/>
+          </a:xfrm>
+          <a:prstGeom prst="rect">
+            <a:avLst/>
+          </a:prstGeom>
+          <a:noFill/>
+          <a:ln>
+            <a:noFill/>
+          </a:ln>
+        </p:spPr>
+        <p:txBody>
+          <a:bodyPr wrap="square" lIns="0" tIns="0" rIns="0" bIns="0" anchor="t">
+            <a:noAutofit/>
+          </a:bodyPr>
+          <a:lstStyle/>
+          <a:p>
+            <a:pPr algn="l" marL="0" indent="0">
+              <a:spcBef>
+                <a:spcPts val="0"/>
+              </a:spcBef>
+              <a:buNone/>
+            </a:pPr>
+            <a:r>
+              <a:rPr lang="en-GB" sz="1300" b="1" i="0" dirty="0">
+                <a:solidFill>
+                  <a:srgbClr val="C00000"/>
+                </a:solidFill>
+                <a:latin typeface="Arial"/>
+                <a:cs typeface="Arial"/>
+              </a:rPr>
+              <a:t>Result · Revisions, e-invoicing.  </a:t>
+            </a:r>
+            <a:r>
+              <a:rPr lang="en-GB" sz="1300" b="0" i="1" dirty="0">
+                <a:solidFill>
+                  <a:srgbClr val="7B7C7E"/>
+                </a:solidFill>
+                <a:latin typeface="Arial"/>
+                <a:cs typeface="Arial"/>
+              </a:rPr>
+              <a:t>Fixed coefficients. Full sample vs six vintages ending 7 to 730 days earlier; mean absolute revision (%) over the last year of each vintage.</a:t>
+            </a:r>
+          </a:p>
+        </p:txBody>
+      </p:sp>
+    </p:spTree>
+    <p:extLst>
+      <p:ext uri="{BB962C8B-B14F-4D97-AF65-F5344CB8AC3E}">
+        <p14:creationId xmlns:p14="http://schemas.microsoft.com/office/powerpoint/2010/main" val="1781916628"/>
       </p:ext>
     </p:extLst>
   </p:cSld>

--- a/DMR_calendar_slides.pptx
+++ b/DMR_calendar_slides.pptx
@@ -5,7 +5,7 @@
     <p:sldMasterId id="2147483648" r:id="rId5"/>
   </p:sldMasterIdLst>
   <p:notesMasterIdLst>
-    <p:notesMasterId r:id="rId32"/>
+    <p:notesMasterId r:id="rId35"/>
   </p:notesMasterIdLst>
   <p:sldIdLst>
     <p:sldId id="315" r:id="rId6"/>
@@ -23,20 +23,20 @@
     <p:sldId id="357" r:id="rId18"/>
     <p:sldId id="349" r:id="rId19"/>
     <p:sldId id="358" r:id="rId20"/>
-    <p:sldId id="372" r:id="rId39"/>
-    <p:sldId id="359" r:id="rId21"/>
-    <p:sldId id="368" r:id="rId22"/>
-    <p:sldId id="363" r:id="rId23"/>
-    <p:sldId id="364" r:id="rId24"/>
-    <p:sldId id="365" r:id="rId25"/>
-    <p:sldId id="360" r:id="rId26"/>
-    <p:sldId id="361" r:id="rId27"/>
-    <p:sldId id="362" r:id="rId28"/>
-    <p:sldId id="370" r:id="rId37"/>
-    <p:sldId id="371" r:id="rId38"/>
-    <p:sldId id="366" r:id="rId29"/>
-    <p:sldId id="369" r:id="rId30"/>
-    <p:sldId id="327" r:id="rId31"/>
+    <p:sldId id="372" r:id="rId21"/>
+    <p:sldId id="359" r:id="rId22"/>
+    <p:sldId id="368" r:id="rId23"/>
+    <p:sldId id="363" r:id="rId24"/>
+    <p:sldId id="364" r:id="rId25"/>
+    <p:sldId id="365" r:id="rId26"/>
+    <p:sldId id="360" r:id="rId27"/>
+    <p:sldId id="361" r:id="rId28"/>
+    <p:sldId id="362" r:id="rId29"/>
+    <p:sldId id="370" r:id="rId30"/>
+    <p:sldId id="371" r:id="rId31"/>
+    <p:sldId id="366" r:id="rId32"/>
+    <p:sldId id="369" r:id="rId33"/>
+    <p:sldId id="327" r:id="rId34"/>
   </p:sldIdLst>
   <p:sldSz cx="12192000" cy="6858000"/>
   <p:notesSz cx="6858000" cy="9144000"/>
@@ -294,7 +294,7 @@
               <a:pPr>
                 <a:defRPr/>
               </a:pPr>
-              <a:t>10/21/2026</a:t>
+              <a:t>10/28/2026</a:t>
             </a:fld>
             <a:endParaRPr lang="en-US"/>
           </a:p>
@@ -10695,7 +10695,7 @@
                   <a:srgbClr val="C00000"/>
                 </a:solidFill>
               </a:rPr>
-              <a:t>Electricity demand: a production calendar</a:t>
+              <a:t>Revisions: fewer on every group of days</a:t>
             </a:r>
           </a:p>
         </p:txBody>
@@ -10779,16 +10779,40 @@
           </a:p>
         </p:txBody>
       </p:sp>
-      <p:sp>
-        <p:nvSpPr>
-          <p:cNvPr id="20" name="Procedure line"/>
+      <p:pic>
+        <p:nvPicPr>
+          <p:cNvPr id="40" name="E-invoicing revisions by group of days" descr="Mean absolute revision over the last year of each vintage for holidays, month days and other days, basic versus final e-invoicing calendar"/>
+          <p:cNvPicPr>
+            <a:picLocks noChangeAspect="1"/>
+          </p:cNvPicPr>
+          <p:nvPr/>
+        </p:nvPicPr>
+        <p:blipFill>
+          <a:blip r:embed="rId2"/>
+          <a:stretch>
+            <a:fillRect/>
+          </a:stretch>
+        </p:blipFill>
+        <p:spPr>
+          <a:xfrm>
+            <a:off x="749153" y="1298448"/>
+            <a:ext cx="6731293" cy="4114800"/>
+          </a:xfrm>
+          <a:prstGeom prst="rect">
+            <a:avLst/>
+          </a:prstGeom>
+        </p:spPr>
+      </p:pic>
+      <p:sp>
+        <p:nvSpPr>
+          <p:cNvPr id="41" name="Cards header"/>
           <p:cNvSpPr txBox="1"/>
           <p:nvPr/>
         </p:nvSpPr>
         <p:spPr>
           <a:xfrm>
-            <a:off x="466344" y="1261872"/>
-            <a:ext cx="11256264" cy="411480"/>
+            <a:off x="8092440" y="1234440"/>
+            <a:ext cx="3632911" cy="411480"/>
           </a:xfrm>
           <a:prstGeom prst="rect">
             <a:avLst/>
@@ -10811,38 +10835,38 @@
               <a:buNone/>
             </a:pPr>
             <a:r>
-              <a:rPr lang="en-GB" sz="1700" b="1" i="0" dirty="0">
+              <a:rPr lang="en-GB" sz="1800" b="1" i="0" dirty="0">
                 <a:solidFill>
                   <a:srgbClr val="595959"/>
                 </a:solidFill>
                 <a:latin typeface="Arial"/>
                 <a:cs typeface="Arial"/>
               </a:rPr>
-              <a:t>Same procedure as for e-invoicing: </a:t>
-            </a:r>
-            <a:r>
-              <a:rPr lang="en-GB" sz="1700" b="0" i="0" dirty="0">
-                <a:solidFill>
-                  <a:srgbClr val="636462"/>
-                </a:solidFill>
-                <a:latin typeface="Arial"/>
-                <a:cs typeface="Arial"/>
-              </a:rPr>
-              <a:t>DMR charts grouped by mechanism, split by day type, a regressor only when a chart supports it.</a:t>
-            </a:r>
-          </a:p>
-        </p:txBody>
-      </p:sp>
-      <p:sp>
-        <p:nvSpPr>
-          <p:cNvPr id="21" name="E-invoicing column"/>
+              <a:t>Last year</a:t>
+            </a:r>
+            <a:r>
+              <a:rPr lang="en-GB" sz="1400" b="0" i="0" dirty="0">
+                <a:solidFill>
+                  <a:srgbClr val="7B7C7E"/>
+                </a:solidFill>
+                <a:latin typeface="Arial"/>
+                <a:cs typeface="Arial"/>
+              </a:rPr>
+              <a:t>   basic → final</a:t>
+            </a:r>
+          </a:p>
+        </p:txBody>
+      </p:sp>
+      <p:sp>
+        <p:nvSpPr>
+          <p:cNvPr id="42" name="Rev card 1"/>
           <p:cNvSpPr/>
           <p:nvPr/>
         </p:nvSpPr>
         <p:spPr>
           <a:xfrm>
-            <a:off x="2578608" y="1874520"/>
-            <a:ext cx="4480560" cy="3785616"/>
+            <a:off x="8092440" y="1691640"/>
+            <a:ext cx="3632911" cy="896112"/>
           </a:xfrm>
           <a:prstGeom prst="roundRect">
             <a:avLst>
@@ -10868,14 +10892,132 @@
       </p:sp>
       <p:sp>
         <p:nvSpPr>
-          <p:cNvPr id="22" name="Electricity column"/>
+          <p:cNvPr id="43" name="Rev card label 1"/>
+          <p:cNvSpPr txBox="1"/>
+          <p:nvPr/>
+        </p:nvSpPr>
+        <p:spPr>
+          <a:xfrm>
+            <a:off x="8275320" y="1737360"/>
+            <a:ext cx="3267151" cy="347472"/>
+          </a:xfrm>
+          <a:prstGeom prst="rect">
+            <a:avLst/>
+          </a:prstGeom>
+          <a:noFill/>
+          <a:ln>
+            <a:noFill/>
+          </a:ln>
+        </p:spPr>
+        <p:txBody>
+          <a:bodyPr wrap="square" lIns="0" tIns="0" rIns="0" bIns="0" anchor="t">
+            <a:noAutofit/>
+          </a:bodyPr>
+          <a:lstStyle/>
+          <a:p>
+            <a:pPr marL="0" indent="0" algn="l">
+              <a:spcBef>
+                <a:spcPts val="0"/>
+              </a:spcBef>
+              <a:buNone/>
+            </a:pPr>
+            <a:r>
+              <a:rPr lang="en-GB" sz="1400" b="1" i="0" dirty="0">
+                <a:solidFill>
+                  <a:srgbClr val="595959"/>
+                </a:solidFill>
+                <a:latin typeface="Arial"/>
+                <a:cs typeface="Arial"/>
+              </a:rPr>
+              <a:t>Holidays</a:t>
+            </a:r>
+          </a:p>
+        </p:txBody>
+      </p:sp>
+      <p:sp>
+        <p:nvSpPr>
+          <p:cNvPr id="44" name="Rev card values 1"/>
+          <p:cNvSpPr txBox="1"/>
+          <p:nvPr/>
+        </p:nvSpPr>
+        <p:spPr>
+          <a:xfrm>
+            <a:off x="8275320" y="2057400"/>
+            <a:ext cx="3267151" cy="475488"/>
+          </a:xfrm>
+          <a:prstGeom prst="rect">
+            <a:avLst/>
+          </a:prstGeom>
+          <a:noFill/>
+          <a:ln>
+            <a:noFill/>
+          </a:ln>
+        </p:spPr>
+        <p:txBody>
+          <a:bodyPr wrap="square" lIns="0" tIns="0" rIns="0" bIns="0" anchor="t">
+            <a:noAutofit/>
+          </a:bodyPr>
+          <a:lstStyle/>
+          <a:p>
+            <a:pPr marL="0" indent="0" algn="l">
+              <a:spcBef>
+                <a:spcPts val="0"/>
+              </a:spcBef>
+              <a:buNone/>
+            </a:pPr>
+            <a:r>
+              <a:rPr lang="en-GB" sz="2000" b="1" i="0" dirty="0">
+                <a:solidFill>
+                  <a:srgbClr val="C00000"/>
+                </a:solidFill>
+                <a:latin typeface="Arial"/>
+                <a:cs typeface="Arial"/>
+              </a:rPr>
+              <a:t>14.2%</a:t>
+            </a:r>
+            <a:r>
+              <a:rPr lang="en-GB" sz="1600" b="0" i="0" dirty="0">
+                <a:solidFill>
+                  <a:srgbClr val="7B7C7E"/>
+                </a:solidFill>
+                <a:latin typeface="Arial"/>
+                <a:cs typeface="Arial"/>
+              </a:rPr>
+              <a:t> → </a:t>
+            </a:r>
+            <a:r>
+              <a:rPr lang="en-GB" sz="2000" b="1" i="0" dirty="0">
+                <a:solidFill>
+                  <a:srgbClr val="0072B2"/>
+                </a:solidFill>
+                <a:latin typeface="Arial"/>
+                <a:cs typeface="Arial"/>
+              </a:rPr>
+              <a:t>1.7%</a:t>
+            </a:r>
+            <a:r>
+              <a:rPr lang="en-GB" sz="1500" b="1" i="0" dirty="0">
+                <a:solidFill>
+                  <a:srgbClr val="7B7C7E"/>
+                </a:solidFill>
+                <a:latin typeface="Arial"/>
+                <a:cs typeface="Arial"/>
+              </a:rPr>
+              <a:t>   −88%</a:t>
+            </a:r>
+          </a:p>
+        </p:txBody>
+      </p:sp>
+      <p:sp>
+        <p:nvSpPr>
+          <p:cNvPr id="45" name="Rev card 2"/>
           <p:cNvSpPr/>
           <p:nvPr/>
         </p:nvSpPr>
         <p:spPr>
           <a:xfrm>
-            <a:off x="7242048" y="1874520"/>
-            <a:ext cx="4480560" cy="3785616"/>
+            <a:off x="8092440" y="2679192"/>
+            <a:ext cx="3632911" cy="896112"/>
           </a:xfrm>
           <a:prstGeom prst="roundRect">
             <a:avLst>
@@ -10901,14 +11043,14 @@
       </p:sp>
       <p:sp>
         <p:nvSpPr>
-          <p:cNvPr id="23" name="E-invoicing header"/>
+          <p:cNvPr id="46" name="Rev card label 2"/>
           <p:cNvSpPr txBox="1"/>
           <p:nvPr/>
         </p:nvSpPr>
         <p:spPr>
           <a:xfrm>
-            <a:off x="2761488" y="1984248"/>
-            <a:ext cx="4114800" cy="365760"/>
+            <a:off x="8275320" y="2724912"/>
+            <a:ext cx="3267151" cy="347472"/>
           </a:xfrm>
           <a:prstGeom prst="rect">
             <a:avLst/>
@@ -10931,38 +11073,28 @@
               <a:buNone/>
             </a:pPr>
             <a:r>
-              <a:rPr lang="en-GB" sz="1800" b="1" i="0" dirty="0">
-                <a:solidFill>
-                  <a:srgbClr val="7B7C7E"/>
-                </a:solidFill>
-                <a:latin typeface="Arial"/>
-                <a:cs typeface="Arial"/>
-              </a:rPr>
-              <a:t>E-invoicing: </a:t>
-            </a:r>
-            <a:r>
-              <a:rPr lang="en-GB" sz="1800" b="0" i="0" dirty="0">
-                <a:solidFill>
-                  <a:srgbClr val="7B7C7E"/>
-                </a:solidFill>
-                <a:latin typeface="Arial"/>
-                <a:cs typeface="Arial"/>
-              </a:rPr>
-              <a:t>administrative</a:t>
-            </a:r>
-          </a:p>
-        </p:txBody>
-      </p:sp>
-      <p:sp>
-        <p:nvSpPr>
-          <p:cNvPr id="24" name="Electricity header"/>
+              <a:rPr lang="en-GB" sz="1400" b="1" i="0" dirty="0">
+                <a:solidFill>
+                  <a:srgbClr val="595959"/>
+                </a:solidFill>
+                <a:latin typeface="Arial"/>
+                <a:cs typeface="Arial"/>
+              </a:rPr>
+              <a:t>Month days</a:t>
+            </a:r>
+          </a:p>
+        </p:txBody>
+      </p:sp>
+      <p:sp>
+        <p:nvSpPr>
+          <p:cNvPr id="47" name="Rev card values 2"/>
           <p:cNvSpPr txBox="1"/>
           <p:nvPr/>
         </p:nvSpPr>
         <p:spPr>
           <a:xfrm>
-            <a:off x="7424928" y="1984248"/>
-            <a:ext cx="4114800" cy="365760"/>
+            <a:off x="8275320" y="3044952"/>
+            <a:ext cx="3267151" cy="475488"/>
           </a:xfrm>
           <a:prstGeom prst="rect">
             <a:avLst/>
@@ -10985,38 +11117,91 @@
               <a:buNone/>
             </a:pPr>
             <a:r>
-              <a:rPr lang="en-GB" sz="1800" b="1" i="0" dirty="0">
+              <a:rPr lang="en-GB" sz="2000" b="1" i="0" dirty="0">
                 <a:solidFill>
                   <a:srgbClr val="C00000"/>
                 </a:solidFill>
                 <a:latin typeface="Arial"/>
                 <a:cs typeface="Arial"/>
               </a:rPr>
-              <a:t>Electricity: </a:t>
-            </a:r>
-            <a:r>
-              <a:rPr lang="en-GB" sz="1800" b="0" i="0" dirty="0">
-                <a:solidFill>
-                  <a:srgbClr val="C00000"/>
-                </a:solidFill>
-                <a:latin typeface="Arial"/>
-                <a:cs typeface="Arial"/>
-              </a:rPr>
-              <a:t>production</a:t>
-            </a:r>
-          </a:p>
-        </p:txBody>
-      </p:sp>
-      <p:sp>
-        <p:nvSpPr>
-          <p:cNvPr id="30" name="Row label Driver"/>
+              <a:t>3.0%</a:t>
+            </a:r>
+            <a:r>
+              <a:rPr lang="en-GB" sz="1600" b="0" i="0" dirty="0">
+                <a:solidFill>
+                  <a:srgbClr val="7B7C7E"/>
+                </a:solidFill>
+                <a:latin typeface="Arial"/>
+                <a:cs typeface="Arial"/>
+              </a:rPr>
+              <a:t> → </a:t>
+            </a:r>
+            <a:r>
+              <a:rPr lang="en-GB" sz="2000" b="1" i="0" dirty="0">
+                <a:solidFill>
+                  <a:srgbClr val="0072B2"/>
+                </a:solidFill>
+                <a:latin typeface="Arial"/>
+                <a:cs typeface="Arial"/>
+              </a:rPr>
+              <a:t>1.1%</a:t>
+            </a:r>
+            <a:r>
+              <a:rPr lang="en-GB" sz="1500" b="1" i="0" dirty="0">
+                <a:solidFill>
+                  <a:srgbClr val="7B7C7E"/>
+                </a:solidFill>
+                <a:latin typeface="Arial"/>
+                <a:cs typeface="Arial"/>
+              </a:rPr>
+              <a:t>   −62%</a:t>
+            </a:r>
+          </a:p>
+        </p:txBody>
+      </p:sp>
+      <p:sp>
+        <p:nvSpPr>
+          <p:cNvPr id="48" name="Rev card 3"/>
+          <p:cNvSpPr/>
+          <p:nvPr/>
+        </p:nvSpPr>
+        <p:spPr>
+          <a:xfrm>
+            <a:off x="8092440" y="3666744"/>
+            <a:ext cx="3632911" cy="896112"/>
+          </a:xfrm>
+          <a:prstGeom prst="roundRect">
+            <a:avLst>
+              <a:gd name="adj" fmla="val 6000"/>
+            </a:avLst>
+          </a:prstGeom>
+          <a:solidFill>
+            <a:srgbClr val="F2F2F2"/>
+          </a:solidFill>
+          <a:ln>
+            <a:noFill/>
+          </a:ln>
+        </p:spPr>
+        <p:txBody>
+          <a:bodyPr wrap="square" lIns="0" tIns="0" rIns="0" bIns="0" anchor="t">
+            <a:noAutofit/>
+          </a:bodyPr>
+          <a:lstStyle/>
+          <a:p>
+            <a:endParaRPr lang="en-GB" dirty="0"/>
+          </a:p>
+        </p:txBody>
+      </p:sp>
+      <p:sp>
+        <p:nvSpPr>
+          <p:cNvPr id="49" name="Rev card label 3"/>
           <p:cNvSpPr txBox="1"/>
           <p:nvPr/>
         </p:nvSpPr>
         <p:spPr>
           <a:xfrm>
-            <a:off x="466344" y="2478024"/>
-            <a:ext cx="1965960" cy="457200"/>
+            <a:off x="8275320" y="3712464"/>
+            <a:ext cx="3267151" cy="347472"/>
           </a:xfrm>
           <a:prstGeom prst="rect">
             <a:avLst/>
@@ -11039,28 +11224,28 @@
               <a:buNone/>
             </a:pPr>
             <a:r>
-              <a:rPr lang="en-GB" sz="1500" b="1" i="0" dirty="0">
+              <a:rPr lang="en-GB" sz="1400" b="1" i="0" dirty="0">
                 <a:solidFill>
                   <a:srgbClr val="595959"/>
                 </a:solidFill>
                 <a:latin typeface="Arial"/>
                 <a:cs typeface="Arial"/>
               </a:rPr>
-              <a:t>Driver</a:t>
-            </a:r>
-          </a:p>
-        </p:txBody>
-      </p:sp>
-      <p:sp>
-        <p:nvSpPr>
-          <p:cNvPr id="31" name="E-invoicing Driver"/>
+              <a:t>Other days</a:t>
+            </a:r>
+          </a:p>
+        </p:txBody>
+      </p:sp>
+      <p:sp>
+        <p:nvSpPr>
+          <p:cNvPr id="50" name="Rev card values 3"/>
           <p:cNvSpPr txBox="1"/>
           <p:nvPr/>
         </p:nvSpPr>
         <p:spPr>
           <a:xfrm>
-            <a:off x="2761488" y="2478024"/>
-            <a:ext cx="4114800" cy="457200"/>
+            <a:off x="8275320" y="4032504"/>
+            <a:ext cx="3267151" cy="475488"/>
           </a:xfrm>
           <a:prstGeom prst="rect">
             <a:avLst/>
@@ -11083,28 +11268,58 @@
               <a:buNone/>
             </a:pPr>
             <a:r>
-              <a:rPr lang="en-GB" sz="1500" b="0" i="0" dirty="0">
-                <a:solidFill>
-                  <a:srgbClr val="636462"/>
-                </a:solidFill>
-                <a:latin typeface="Arial"/>
-                <a:cs typeface="Arial"/>
-              </a:rPr>
-              <a:t>Billing rules and fiscal deadlines</a:t>
-            </a:r>
-          </a:p>
-        </p:txBody>
-      </p:sp>
-      <p:sp>
-        <p:nvSpPr>
-          <p:cNvPr id="32" name="Electricity Driver"/>
+              <a:rPr lang="en-GB" sz="2000" b="1" i="0" dirty="0">
+                <a:solidFill>
+                  <a:srgbClr val="C00000"/>
+                </a:solidFill>
+                <a:latin typeface="Arial"/>
+                <a:cs typeface="Arial"/>
+              </a:rPr>
+              <a:t>2.1%</a:t>
+            </a:r>
+            <a:r>
+              <a:rPr lang="en-GB" sz="1600" b="0" i="0" dirty="0">
+                <a:solidFill>
+                  <a:srgbClr val="7B7C7E"/>
+                </a:solidFill>
+                <a:latin typeface="Arial"/>
+                <a:cs typeface="Arial"/>
+              </a:rPr>
+              <a:t> → </a:t>
+            </a:r>
+            <a:r>
+              <a:rPr lang="en-GB" sz="2000" b="1" i="0" dirty="0">
+                <a:solidFill>
+                  <a:srgbClr val="0072B2"/>
+                </a:solidFill>
+                <a:latin typeface="Arial"/>
+                <a:cs typeface="Arial"/>
+              </a:rPr>
+              <a:t>1.2%</a:t>
+            </a:r>
+            <a:r>
+              <a:rPr lang="en-GB" sz="1500" b="1" i="0" dirty="0">
+                <a:solidFill>
+                  <a:srgbClr val="7B7C7E"/>
+                </a:solidFill>
+                <a:latin typeface="Arial"/>
+                <a:cs typeface="Arial"/>
+              </a:rPr>
+              <a:t>   −42%</a:t>
+            </a:r>
+          </a:p>
+        </p:txBody>
+      </p:sp>
+      <p:sp>
+        <p:nvSpPr>
+          <p:cNvPr id="52" name="Rev note"/>
           <p:cNvSpPr txBox="1"/>
           <p:nvPr/>
         </p:nvSpPr>
         <p:spPr>
           <a:xfrm>
-            <a:off x="7424928" y="2478024"/>
-            <a:ext cx="4114800" cy="457200"/>
+            <a:off x="8092440" y="4663440"/>
+            <a:ext cx="3632911" cy="822960"/>
           </a:xfrm>
           <a:prstGeom prst="rect">
             <a:avLst/>
@@ -11127,28 +11342,38 @@
               <a:buNone/>
             </a:pPr>
             <a:r>
-              <a:rPr lang="en-GB" sz="1500" b="0" i="0" dirty="0">
+              <a:rPr lang="en-GB" sz="1300" b="1" i="0" dirty="0">
                 <a:solidFill>
                   <a:srgbClr val="595959"/>
                 </a:solidFill>
                 <a:latin typeface="Arial"/>
                 <a:cs typeface="Arial"/>
               </a:rPr>
-              <a:t>Plant activity and closures</a:t>
-            </a:r>
-          </a:p>
-        </p:txBody>
-      </p:sp>
-      <p:sp>
-        <p:nvSpPr>
-          <p:cNvPr id="33" name="Row label Model"/>
+              <a:t>Historical sample: 3.0% → 0.9% (−71%). </a:t>
+            </a:r>
+            <a:r>
+              <a:rPr lang="en-GB" sz="1300" b="0" i="0" dirty="0">
+                <a:solidFill>
+                  <a:srgbClr val="595959"/>
+                </a:solidFill>
+                <a:latin typeface="Arial"/>
+                <a:cs typeface="Arial"/>
+              </a:rPr>
+              <a:t>Basic calendar: weekend-holiday outliers come and go, one day revised by over 400%; no lockdown level shift detected.</a:t>
+            </a:r>
+          </a:p>
+        </p:txBody>
+      </p:sp>
+      <p:sp>
+        <p:nvSpPr>
+          <p:cNvPr id="53" name="Caption"/>
           <p:cNvSpPr txBox="1"/>
           <p:nvPr/>
         </p:nvSpPr>
         <p:spPr>
           <a:xfrm>
-            <a:off x="466344" y="2935224"/>
-            <a:ext cx="1965960" cy="457200"/>
+            <a:off x="466344" y="5532120"/>
+            <a:ext cx="11256264" cy="411480"/>
           </a:xfrm>
           <a:prstGeom prst="rect">
             <a:avLst/>
@@ -11171,674 +11396,24 @@
               <a:buNone/>
             </a:pPr>
             <a:r>
-              <a:rPr lang="en-GB" sz="1500" b="1" i="0" dirty="0">
-                <a:solidFill>
-                  <a:srgbClr val="595959"/>
-                </a:solidFill>
-                <a:latin typeface="Arial"/>
-                <a:cs typeface="Arial"/>
-              </a:rPr>
-              <a:t>Model</a:t>
-            </a:r>
-          </a:p>
-        </p:txBody>
-      </p:sp>
-      <p:sp>
-        <p:nvSpPr>
-          <p:cNvPr id="34" name="E-invoicing Model"/>
-          <p:cNvSpPr txBox="1"/>
-          <p:nvPr/>
-        </p:nvSpPr>
-        <p:spPr>
-          <a:xfrm>
-            <a:off x="2761488" y="2935224"/>
-            <a:ext cx="4114800" cy="457200"/>
-          </a:xfrm>
-          <a:prstGeom prst="rect">
-            <a:avLst/>
-          </a:prstGeom>
-          <a:noFill/>
-          <a:ln>
-            <a:noFill/>
-          </a:ln>
-        </p:spPr>
-        <p:txBody>
-          <a:bodyPr wrap="square" lIns="0" tIns="0" rIns="0" bIns="0" anchor="t">
-            <a:noAutofit/>
-          </a:bodyPr>
-          <a:lstStyle/>
-          <a:p>
-            <a:pPr marL="0" indent="0" algn="l">
-              <a:spcBef>
-                <a:spcPts val="0"/>
-              </a:spcBef>
-              <a:buNone/>
-            </a:pPr>
-            <a:r>
-              <a:rPr lang="en-GB" sz="1500" b="0" i="0" dirty="0">
-                <a:solidFill>
-                  <a:srgbClr val="636462"/>
-                </a:solidFill>
-                <a:latin typeface="Arial"/>
-                <a:cs typeface="Arial"/>
-              </a:rPr>
-              <a:t>Multiplicative (log)</a:t>
-            </a:r>
-          </a:p>
-        </p:txBody>
-      </p:sp>
-      <p:sp>
-        <p:nvSpPr>
-          <p:cNvPr id="35" name="Electricity Model"/>
-          <p:cNvSpPr txBox="1"/>
-          <p:nvPr/>
-        </p:nvSpPr>
-        <p:spPr>
-          <a:xfrm>
-            <a:off x="7424928" y="2935224"/>
-            <a:ext cx="4114800" cy="457200"/>
-          </a:xfrm>
-          <a:prstGeom prst="rect">
-            <a:avLst/>
-          </a:prstGeom>
-          <a:noFill/>
-          <a:ln>
-            <a:noFill/>
-          </a:ln>
-        </p:spPr>
-        <p:txBody>
-          <a:bodyPr wrap="square" lIns="0" tIns="0" rIns="0" bIns="0" anchor="t">
-            <a:noAutofit/>
-          </a:bodyPr>
-          <a:lstStyle/>
-          <a:p>
-            <a:pPr marL="0" indent="0" algn="l">
-              <a:spcBef>
-                <a:spcPts val="0"/>
-              </a:spcBef>
-              <a:buNone/>
-            </a:pPr>
-            <a:r>
-              <a:rPr lang="en-GB" sz="1500" b="0" i="0" dirty="0">
-                <a:solidFill>
-                  <a:srgbClr val="595959"/>
-                </a:solidFill>
-                <a:latin typeface="Arial"/>
-                <a:cs typeface="Arial"/>
-              </a:rPr>
-              <a:t>Additive (MWh)</a:t>
-            </a:r>
-          </a:p>
-        </p:txBody>
-      </p:sp>
-      <p:sp>
-        <p:nvSpPr>
-          <p:cNvPr id="36" name="Row label Within the month"/>
-          <p:cNvSpPr txBox="1"/>
-          <p:nvPr/>
-        </p:nvSpPr>
-        <p:spPr>
-          <a:xfrm>
-            <a:off x="466344" y="3392424"/>
-            <a:ext cx="1965960" cy="457200"/>
-          </a:xfrm>
-          <a:prstGeom prst="rect">
-            <a:avLst/>
-          </a:prstGeom>
-          <a:noFill/>
-          <a:ln>
-            <a:noFill/>
-          </a:ln>
-        </p:spPr>
-        <p:txBody>
-          <a:bodyPr wrap="square" lIns="0" tIns="0" rIns="0" bIns="0" anchor="t">
-            <a:noAutofit/>
-          </a:bodyPr>
-          <a:lstStyle/>
-          <a:p>
-            <a:pPr marL="0" indent="0" algn="l">
-              <a:spcBef>
-                <a:spcPts val="0"/>
-              </a:spcBef>
-              <a:buNone/>
-            </a:pPr>
-            <a:r>
-              <a:rPr lang="en-GB" sz="1500" b="1" i="0" dirty="0">
-                <a:solidFill>
-                  <a:srgbClr val="595959"/>
-                </a:solidFill>
-                <a:latin typeface="Arial"/>
-                <a:cs typeface="Arial"/>
-              </a:rPr>
-              <a:t>Within the month</a:t>
-            </a:r>
-          </a:p>
-        </p:txBody>
-      </p:sp>
-      <p:sp>
-        <p:nvSpPr>
-          <p:cNvPr id="37" name="E-invoicing Within the month"/>
-          <p:cNvSpPr txBox="1"/>
-          <p:nvPr/>
-        </p:nvSpPr>
-        <p:spPr>
-          <a:xfrm>
-            <a:off x="2761488" y="3392424"/>
-            <a:ext cx="4114800" cy="457200"/>
-          </a:xfrm>
-          <a:prstGeom prst="rect">
-            <a:avLst/>
-          </a:prstGeom>
-          <a:noFill/>
-          <a:ln>
-            <a:noFill/>
-          </a:ln>
-        </p:spPr>
-        <p:txBody>
-          <a:bodyPr wrap="square" lIns="0" tIns="0" rIns="0" bIns="0" anchor="t">
-            <a:noAutofit/>
-          </a:bodyPr>
-          <a:lstStyle/>
-          <a:p>
-            <a:pPr marL="0" indent="0" algn="l">
-              <a:spcBef>
-                <a:spcPts val="0"/>
-              </a:spcBef>
-              <a:buNone/>
-            </a:pPr>
-            <a:r>
-              <a:rPr lang="en-GB" sz="1500" b="0" i="0" dirty="0">
-                <a:solidFill>
-                  <a:srgbClr val="636462"/>
-                </a:solidFill>
-                <a:latin typeface="Arial"/>
-                <a:cs typeface="Arial"/>
-              </a:rPr>
-              <a:t>Strong: month end, days 1, 15 and 20</a:t>
-            </a:r>
-          </a:p>
-        </p:txBody>
-      </p:sp>
-      <p:sp>
-        <p:nvSpPr>
-          <p:cNvPr id="38" name="Electricity Within the month"/>
-          <p:cNvSpPr txBox="1"/>
-          <p:nvPr/>
-        </p:nvSpPr>
-        <p:spPr>
-          <a:xfrm>
-            <a:off x="7424928" y="3392424"/>
-            <a:ext cx="4114800" cy="457200"/>
-          </a:xfrm>
-          <a:prstGeom prst="rect">
-            <a:avLst/>
-          </a:prstGeom>
-          <a:noFill/>
-          <a:ln>
-            <a:noFill/>
-          </a:ln>
-        </p:spPr>
-        <p:txBody>
-          <a:bodyPr wrap="square" lIns="0" tIns="0" rIns="0" bIns="0" anchor="t">
-            <a:noAutofit/>
-          </a:bodyPr>
-          <a:lstStyle/>
-          <a:p>
-            <a:pPr marL="0" indent="0" algn="l">
-              <a:spcBef>
-                <a:spcPts val="0"/>
-              </a:spcBef>
-              <a:buNone/>
-            </a:pPr>
-            <a:r>
-              <a:rPr lang="en-GB" sz="1500" b="0" i="0" dirty="0">
-                <a:solidFill>
-                  <a:srgbClr val="595959"/>
-                </a:solidFill>
-                <a:latin typeface="Arial"/>
-                <a:cs typeface="Arial"/>
-              </a:rPr>
-              <a:t>None: flat DMR profiles</a:t>
-            </a:r>
-          </a:p>
-        </p:txBody>
-      </p:sp>
-      <p:sp>
-        <p:nvSpPr>
-          <p:cNvPr id="39" name="Row label Holidays"/>
-          <p:cNvSpPr txBox="1"/>
-          <p:nvPr/>
-        </p:nvSpPr>
-        <p:spPr>
-          <a:xfrm>
-            <a:off x="466344" y="3849624"/>
-            <a:ext cx="1965960" cy="658368"/>
-          </a:xfrm>
-          <a:prstGeom prst="rect">
-            <a:avLst/>
-          </a:prstGeom>
-          <a:noFill/>
-          <a:ln>
-            <a:noFill/>
-          </a:ln>
-        </p:spPr>
-        <p:txBody>
-          <a:bodyPr wrap="square" lIns="0" tIns="0" rIns="0" bIns="0" anchor="t">
-            <a:noAutofit/>
-          </a:bodyPr>
-          <a:lstStyle/>
-          <a:p>
-            <a:pPr marL="0" indent="0" algn="l">
-              <a:spcBef>
-                <a:spcPts val="0"/>
-              </a:spcBef>
-              <a:buNone/>
-            </a:pPr>
-            <a:r>
-              <a:rPr lang="en-GB" sz="1500" b="1" i="0" dirty="0">
-                <a:solidFill>
-                  <a:srgbClr val="595959"/>
-                </a:solidFill>
-                <a:latin typeface="Arial"/>
-                <a:cs typeface="Arial"/>
-              </a:rPr>
-              <a:t>Holidays</a:t>
-            </a:r>
-          </a:p>
-        </p:txBody>
-      </p:sp>
-      <p:sp>
-        <p:nvSpPr>
-          <p:cNvPr id="40" name="E-invoicing Holidays"/>
-          <p:cNvSpPr txBox="1"/>
-          <p:nvPr/>
-        </p:nvSpPr>
-        <p:spPr>
-          <a:xfrm>
-            <a:off x="2761488" y="3849624"/>
-            <a:ext cx="4114800" cy="658368"/>
-          </a:xfrm>
-          <a:prstGeom prst="rect">
-            <a:avLst/>
-          </a:prstGeom>
-          <a:noFill/>
-          <a:ln>
-            <a:noFill/>
-          </a:ln>
-        </p:spPr>
-        <p:txBody>
-          <a:bodyPr wrap="square" lIns="0" tIns="0" rIns="0" bIns="0" anchor="t">
-            <a:noAutofit/>
-          </a:bodyPr>
-          <a:lstStyle/>
-          <a:p>
-            <a:pPr marL="0" indent="0" algn="l">
-              <a:spcBef>
-                <a:spcPts val="0"/>
-              </a:spcBef>
-              <a:buNone/>
-            </a:pPr>
-            <a:r>
-              <a:rPr lang="en-GB" sz="1500" b="0" i="0" dirty="0">
-                <a:solidFill>
-                  <a:srgbClr val="636462"/>
-                </a:solidFill>
-                <a:latin typeface="Arial"/>
-                <a:cs typeface="Arial"/>
-              </a:rPr>
-              <a:t>Monday to Friday only: set to zero on weekends</a:t>
-            </a:r>
-          </a:p>
-        </p:txBody>
-      </p:sp>
-      <p:sp>
-        <p:nvSpPr>
-          <p:cNvPr id="41" name="Electricity Holidays"/>
-          <p:cNvSpPr txBox="1"/>
-          <p:nvPr/>
-        </p:nvSpPr>
-        <p:spPr>
-          <a:xfrm>
-            <a:off x="7424928" y="3849624"/>
-            <a:ext cx="4114800" cy="658368"/>
-          </a:xfrm>
-          <a:prstGeom prst="rect">
-            <a:avLst/>
-          </a:prstGeom>
-          <a:noFill/>
-          <a:ln>
-            <a:noFill/>
-          </a:ln>
-        </p:spPr>
-        <p:txBody>
-          <a:bodyPr wrap="square" lIns="0" tIns="0" rIns="0" bIns="0" anchor="t">
-            <a:noAutofit/>
-          </a:bodyPr>
-          <a:lstStyle/>
-          <a:p>
-            <a:pPr marL="0" indent="0" algn="l">
-              <a:spcBef>
-                <a:spcPts val="0"/>
-              </a:spcBef>
-              <a:buNone/>
-            </a:pPr>
-            <a:r>
-              <a:rPr lang="en-GB" sz="1500" b="0" i="0" dirty="0">
-                <a:solidFill>
-                  <a:srgbClr val="595959"/>
-                </a:solidFill>
-                <a:latin typeface="Arial"/>
-                <a:cs typeface="Arial"/>
-              </a:rPr>
-              <a:t>Monday to Friday only (zero on weekends), plus Saturday and midweek effects</a:t>
-            </a:r>
-          </a:p>
-        </p:txBody>
-      </p:sp>
-      <p:sp>
-        <p:nvSpPr>
-          <p:cNvPr id="42" name="Row label Other days"/>
-          <p:cNvSpPr txBox="1"/>
-          <p:nvPr/>
-        </p:nvSpPr>
-        <p:spPr>
-          <a:xfrm>
-            <a:off x="466344" y="4507992"/>
-            <a:ext cx="1965960" cy="658368"/>
-          </a:xfrm>
-          <a:prstGeom prst="rect">
-            <a:avLst/>
-          </a:prstGeom>
-          <a:noFill/>
-          <a:ln>
-            <a:noFill/>
-          </a:ln>
-        </p:spPr>
-        <p:txBody>
-          <a:bodyPr wrap="square" lIns="0" tIns="0" rIns="0" bIns="0" anchor="t">
-            <a:noAutofit/>
-          </a:bodyPr>
-          <a:lstStyle/>
-          <a:p>
-            <a:pPr marL="0" indent="0" algn="l">
-              <a:spcBef>
-                <a:spcPts val="0"/>
-              </a:spcBef>
-              <a:buNone/>
-            </a:pPr>
-            <a:r>
-              <a:rPr lang="en-GB" sz="1500" b="1" i="0" dirty="0">
-                <a:solidFill>
-                  <a:srgbClr val="595959"/>
-                </a:solidFill>
-                <a:latin typeface="Arial"/>
-                <a:cs typeface="Arial"/>
-              </a:rPr>
-              <a:t>Other days</a:t>
-            </a:r>
-          </a:p>
-        </p:txBody>
-      </p:sp>
-      <p:sp>
-        <p:nvSpPr>
-          <p:cNvPr id="43" name="E-invoicing Other days"/>
-          <p:cNvSpPr txBox="1"/>
-          <p:nvPr/>
-        </p:nvSpPr>
-        <p:spPr>
-          <a:xfrm>
-            <a:off x="2761488" y="4507992"/>
-            <a:ext cx="4114800" cy="658368"/>
-          </a:xfrm>
-          <a:prstGeom prst="rect">
-            <a:avLst/>
-          </a:prstGeom>
-          <a:noFill/>
-          <a:ln>
-            <a:noFill/>
-          </a:ln>
-        </p:spPr>
-        <p:txBody>
-          <a:bodyPr wrap="square" lIns="0" tIns="0" rIns="0" bIns="0" anchor="t">
-            <a:noAutofit/>
-          </a:bodyPr>
-          <a:lstStyle/>
-          <a:p>
-            <a:pPr marL="0" indent="0" algn="l">
-              <a:spcBef>
-                <a:spcPts val="0"/>
-              </a:spcBef>
-              <a:buNone/>
-            </a:pPr>
-            <a:r>
-              <a:rPr lang="en-GB" sz="1500" b="0" i="0" dirty="0">
-                <a:solidFill>
-                  <a:srgbClr val="636462"/>
-                </a:solidFill>
-                <a:latin typeface="Arial"/>
-                <a:cs typeface="Arial"/>
-              </a:rPr>
-              <a:t>Last working day before a weekend month end</a:t>
-            </a:r>
-          </a:p>
-        </p:txBody>
-      </p:sp>
-      <p:sp>
-        <p:nvSpPr>
-          <p:cNvPr id="44" name="Electricity Other days"/>
-          <p:cNvSpPr txBox="1"/>
-          <p:nvPr/>
-        </p:nvSpPr>
-        <p:spPr>
-          <a:xfrm>
-            <a:off x="7424928" y="4507992"/>
-            <a:ext cx="4114800" cy="658368"/>
-          </a:xfrm>
-          <a:prstGeom prst="rect">
-            <a:avLst/>
-          </a:prstGeom>
-          <a:noFill/>
-          <a:ln>
-            <a:noFill/>
-          </a:ln>
-        </p:spPr>
-        <p:txBody>
-          <a:bodyPr wrap="square" lIns="0" tIns="0" rIns="0" bIns="0" anchor="t">
-            <a:noAutofit/>
-          </a:bodyPr>
-          <a:lstStyle/>
-          <a:p>
-            <a:pPr marL="0" indent="0" algn="l">
-              <a:spcBef>
-                <a:spcPts val="0"/>
-              </a:spcBef>
-              <a:buNone/>
-            </a:pPr>
-            <a:r>
-              <a:rPr lang="en-GB" sz="1500" b="0" i="0" dirty="0">
-                <a:solidFill>
-                  <a:srgbClr val="595959"/>
-                </a:solidFill>
-                <a:latin typeface="Arial"/>
-                <a:cs typeface="Arial"/>
-              </a:rPr>
-              <a:t>Bridges, 24 and 31 Dec, Christmas–Epiphany working days, 14 and 16 Aug, Easter window</a:t>
-            </a:r>
-          </a:p>
-        </p:txBody>
-      </p:sp>
-      <p:sp>
-        <p:nvSpPr>
-          <p:cNvPr id="45" name="Row label Coefficients"/>
-          <p:cNvSpPr txBox="1"/>
-          <p:nvPr/>
-        </p:nvSpPr>
-        <p:spPr>
-          <a:xfrm>
-            <a:off x="466344" y="5166360"/>
-            <a:ext cx="1965960" cy="457200"/>
-          </a:xfrm>
-          <a:prstGeom prst="rect">
-            <a:avLst/>
-          </a:prstGeom>
-          <a:noFill/>
-          <a:ln>
-            <a:noFill/>
-          </a:ln>
-        </p:spPr>
-        <p:txBody>
-          <a:bodyPr wrap="square" lIns="0" tIns="0" rIns="0" bIns="0" anchor="t">
-            <a:noAutofit/>
-          </a:bodyPr>
-          <a:lstStyle/>
-          <a:p>
-            <a:pPr marL="0" indent="0" algn="l">
-              <a:spcBef>
-                <a:spcPts val="0"/>
-              </a:spcBef>
-              <a:buNone/>
-            </a:pPr>
-            <a:r>
-              <a:rPr lang="en-GB" sz="1500" b="1" i="0" dirty="0">
-                <a:solidFill>
-                  <a:srgbClr val="595959"/>
-                </a:solidFill>
-                <a:latin typeface="Arial"/>
-                <a:cs typeface="Arial"/>
-              </a:rPr>
-              <a:t>Coefficients</a:t>
-            </a:r>
-          </a:p>
-        </p:txBody>
-      </p:sp>
-      <p:sp>
-        <p:nvSpPr>
-          <p:cNvPr id="46" name="E-invoicing Coefficients"/>
-          <p:cNvSpPr txBox="1"/>
-          <p:nvPr/>
-        </p:nvSpPr>
-        <p:spPr>
-          <a:xfrm>
-            <a:off x="2761488" y="5166360"/>
-            <a:ext cx="4114800" cy="457200"/>
-          </a:xfrm>
-          <a:prstGeom prst="rect">
-            <a:avLst/>
-          </a:prstGeom>
-          <a:noFill/>
-          <a:ln>
-            <a:noFill/>
-          </a:ln>
-        </p:spPr>
-        <p:txBody>
-          <a:bodyPr wrap="square" lIns="0" tIns="0" rIns="0" bIns="0" anchor="t">
-            <a:noAutofit/>
-          </a:bodyPr>
-          <a:lstStyle/>
-          <a:p>
-            <a:pPr marL="0" indent="0" algn="l">
-              <a:spcBef>
-                <a:spcPts val="0"/>
-              </a:spcBef>
-              <a:buNone/>
-            </a:pPr>
-            <a:r>
-              <a:rPr lang="en-GB" sz="1500" b="0" i="0" dirty="0">
-                <a:solidFill>
-                  <a:srgbClr val="636462"/>
-                </a:solidFill>
-                <a:latin typeface="Arial"/>
-                <a:cs typeface="Arial"/>
-              </a:rPr>
-              <a:t>Fixed, 32 regressors</a:t>
-            </a:r>
-          </a:p>
-        </p:txBody>
-      </p:sp>
-      <p:sp>
-        <p:nvSpPr>
-          <p:cNvPr id="47" name="Electricity Coefficients"/>
-          <p:cNvSpPr txBox="1"/>
-          <p:nvPr/>
-        </p:nvSpPr>
-        <p:spPr>
-          <a:xfrm>
-            <a:off x="7424928" y="5166360"/>
-            <a:ext cx="4114800" cy="457200"/>
-          </a:xfrm>
-          <a:prstGeom prst="rect">
-            <a:avLst/>
-          </a:prstGeom>
-          <a:noFill/>
-          <a:ln>
-            <a:noFill/>
-          </a:ln>
-        </p:spPr>
-        <p:txBody>
-          <a:bodyPr wrap="square" lIns="0" tIns="0" rIns="0" bIns="0" anchor="t">
-            <a:noAutofit/>
-          </a:bodyPr>
-          <a:lstStyle/>
-          <a:p>
-            <a:pPr marL="0" indent="0" algn="l">
-              <a:spcBef>
-                <a:spcPts val="0"/>
-              </a:spcBef>
-              <a:buNone/>
-            </a:pPr>
-            <a:r>
-              <a:rPr lang="en-GB" sz="1500" b="0" i="0" dirty="0">
-                <a:solidFill>
-                  <a:srgbClr val="595959"/>
-                </a:solidFill>
-                <a:latin typeface="Arial"/>
-                <a:cs typeface="Arial"/>
-              </a:rPr>
-              <a:t>Time-varying, 23 regressors</a:t>
-            </a:r>
-          </a:p>
-        </p:txBody>
-      </p:sp>
-      <p:sp>
-        <p:nvSpPr>
-          <p:cNvPr id="48" name="Electricity caption"/>
-          <p:cNvSpPr txBox="1"/>
-          <p:nvPr/>
-        </p:nvSpPr>
-        <p:spPr>
-          <a:xfrm>
-            <a:off x="466344" y="5815584"/>
-            <a:ext cx="11256264" cy="365760"/>
-          </a:xfrm>
-          <a:prstGeom prst="rect">
-            <a:avLst/>
-          </a:prstGeom>
-          <a:noFill/>
-          <a:ln>
-            <a:noFill/>
-          </a:ln>
-        </p:spPr>
-        <p:txBody>
-          <a:bodyPr wrap="square" lIns="0" tIns="0" rIns="0" bIns="0" anchor="t">
-            <a:noAutofit/>
-          </a:bodyPr>
-          <a:lstStyle/>
-          <a:p>
-            <a:pPr marL="0" indent="0" algn="l">
-              <a:spcBef>
-                <a:spcPts val="0"/>
-              </a:spcBef>
-              <a:buNone/>
-            </a:pPr>
-            <a:r>
-              <a:rPr lang="en-GB" sz="1200" b="0" i="1" dirty="0">
+              <a:rPr lang="en-GB" sz="1300" b="1" i="0" dirty="0">
+                <a:solidFill>
+                  <a:srgbClr val="C00000"/>
+                </a:solidFill>
+                <a:latin typeface="Arial"/>
+                <a:cs typeface="Arial"/>
+              </a:rPr>
+              <a:t>Result · Revisions, e-invoicing.  </a:t>
+            </a:r>
+            <a:r>
+              <a:rPr lang="en-GB" sz="1300" b="0" i="1" dirty="0">
                 <a:solidFill>
                   <a:srgbClr val="7B7C7E"/>
                 </a:solidFill>
                 <a:latin typeface="Arial"/>
                 <a:cs typeface="Arial"/>
               </a:rPr>
-              <a:t>E-invoicing 2019–2025, electricity demand 2012–2025. Time-varying coefficients: random walks with a common variance, estimated before the outlier search (two steps).</a:t>
+              <a:t>Fixed coefficients. Full sample vs six vintages ending 7 to 730 days earlier; mean absolute revision (%) over the last year of each vintage.</a:t>
             </a:r>
           </a:p>
         </p:txBody>
@@ -11899,7 +11474,7 @@
                   <a:srgbClr val="C00000"/>
                 </a:solidFill>
               </a:rPr>
-              <a:t>Electricity: time-varying calendar effects</a:t>
+              <a:t>Electricity demand: a production calendar</a:t>
             </a:r>
           </a:p>
         </p:txBody>
@@ -11942,6 +11517,1210 @@
                 <a:defRPr/>
               </a:pPr>
               <a:t>17</a:t>
+            </a:fld>
+            <a:endParaRPr lang="en-US" dirty="0"/>
+          </a:p>
+        </p:txBody>
+      </p:sp>
+      <p:sp>
+        <p:nvSpPr>
+          <p:cNvPr id="8" name="Segnaposto piè di pagina 3">
+            <a:extLst>
+              <a:ext uri="{FF2B5EF4-FFF2-40B4-BE49-F238E27FC236}">
+                <a16:creationId xmlns:a16="http://schemas.microsoft.com/office/drawing/2014/main" id="{3223DD80-9C7E-474F-A668-27B6983A5687}"/>
+              </a:ext>
+            </a:extLst>
+          </p:cNvPr>
+          <p:cNvSpPr>
+            <a:spLocks noGrp="1"/>
+          </p:cNvSpPr>
+          <p:nvPr>
+            <p:ph type="ftr" sz="quarter" idx="10"/>
+          </p:nvPr>
+        </p:nvSpPr>
+        <p:spPr>
+          <a:xfrm>
+            <a:off x="635830" y="6382305"/>
+            <a:ext cx="9644444" cy="259965"/>
+          </a:xfrm>
+        </p:spPr>
+        <p:txBody>
+          <a:bodyPr/>
+          <a:lstStyle/>
+          <a:p>
+            <a:pPr>
+              <a:defRPr/>
+            </a:pPr>
+            <a:r>
+              <a:rPr lang="en-US" dirty="0"/>
+              <a:t>Building calendars for daily seasonal adjustment</a:t>
+            </a:r>
+          </a:p>
+        </p:txBody>
+      </p:sp>
+      <p:sp>
+        <p:nvSpPr>
+          <p:cNvPr id="20" name="Procedure line"/>
+          <p:cNvSpPr txBox="1"/>
+          <p:nvPr/>
+        </p:nvSpPr>
+        <p:spPr>
+          <a:xfrm>
+            <a:off x="466344" y="1261872"/>
+            <a:ext cx="11256264" cy="411480"/>
+          </a:xfrm>
+          <a:prstGeom prst="rect">
+            <a:avLst/>
+          </a:prstGeom>
+          <a:noFill/>
+          <a:ln>
+            <a:noFill/>
+          </a:ln>
+        </p:spPr>
+        <p:txBody>
+          <a:bodyPr wrap="square" lIns="0" tIns="0" rIns="0" bIns="0" anchor="t">
+            <a:noAutofit/>
+          </a:bodyPr>
+          <a:lstStyle/>
+          <a:p>
+            <a:pPr marL="0" indent="0" algn="l">
+              <a:spcBef>
+                <a:spcPts val="0"/>
+              </a:spcBef>
+              <a:buNone/>
+            </a:pPr>
+            <a:r>
+              <a:rPr lang="en-GB" sz="1700" b="1" i="0" dirty="0">
+                <a:solidFill>
+                  <a:srgbClr val="595959"/>
+                </a:solidFill>
+                <a:latin typeface="Arial"/>
+                <a:cs typeface="Arial"/>
+              </a:rPr>
+              <a:t>Same procedure as for e-invoicing: </a:t>
+            </a:r>
+            <a:r>
+              <a:rPr lang="en-GB" sz="1700" b="0" i="0" dirty="0">
+                <a:solidFill>
+                  <a:srgbClr val="636462"/>
+                </a:solidFill>
+                <a:latin typeface="Arial"/>
+                <a:cs typeface="Arial"/>
+              </a:rPr>
+              <a:t>DMR charts grouped by mechanism, split by day type, a regressor only when a chart supports it.</a:t>
+            </a:r>
+          </a:p>
+        </p:txBody>
+      </p:sp>
+      <p:sp>
+        <p:nvSpPr>
+          <p:cNvPr id="21" name="E-invoicing column"/>
+          <p:cNvSpPr/>
+          <p:nvPr/>
+        </p:nvSpPr>
+        <p:spPr>
+          <a:xfrm>
+            <a:off x="2578608" y="1874520"/>
+            <a:ext cx="4480560" cy="3785616"/>
+          </a:xfrm>
+          <a:prstGeom prst="roundRect">
+            <a:avLst>
+              <a:gd name="adj" fmla="val 6000"/>
+            </a:avLst>
+          </a:prstGeom>
+          <a:solidFill>
+            <a:srgbClr val="F2F2F2"/>
+          </a:solidFill>
+          <a:ln>
+            <a:noFill/>
+          </a:ln>
+        </p:spPr>
+        <p:txBody>
+          <a:bodyPr wrap="square" lIns="0" tIns="0" rIns="0" bIns="0" anchor="t">
+            <a:noAutofit/>
+          </a:bodyPr>
+          <a:lstStyle/>
+          <a:p>
+            <a:endParaRPr lang="en-GB" dirty="0"/>
+          </a:p>
+        </p:txBody>
+      </p:sp>
+      <p:sp>
+        <p:nvSpPr>
+          <p:cNvPr id="22" name="Electricity column"/>
+          <p:cNvSpPr/>
+          <p:nvPr/>
+        </p:nvSpPr>
+        <p:spPr>
+          <a:xfrm>
+            <a:off x="7242048" y="1874520"/>
+            <a:ext cx="4480560" cy="3785616"/>
+          </a:xfrm>
+          <a:prstGeom prst="roundRect">
+            <a:avLst>
+              <a:gd name="adj" fmla="val 6000"/>
+            </a:avLst>
+          </a:prstGeom>
+          <a:solidFill>
+            <a:srgbClr val="F2F2F2"/>
+          </a:solidFill>
+          <a:ln>
+            <a:noFill/>
+          </a:ln>
+        </p:spPr>
+        <p:txBody>
+          <a:bodyPr wrap="square" lIns="0" tIns="0" rIns="0" bIns="0" anchor="t">
+            <a:noAutofit/>
+          </a:bodyPr>
+          <a:lstStyle/>
+          <a:p>
+            <a:endParaRPr lang="en-GB" dirty="0"/>
+          </a:p>
+        </p:txBody>
+      </p:sp>
+      <p:sp>
+        <p:nvSpPr>
+          <p:cNvPr id="23" name="E-invoicing header"/>
+          <p:cNvSpPr txBox="1"/>
+          <p:nvPr/>
+        </p:nvSpPr>
+        <p:spPr>
+          <a:xfrm>
+            <a:off x="2761488" y="1984248"/>
+            <a:ext cx="4114800" cy="365760"/>
+          </a:xfrm>
+          <a:prstGeom prst="rect">
+            <a:avLst/>
+          </a:prstGeom>
+          <a:noFill/>
+          <a:ln>
+            <a:noFill/>
+          </a:ln>
+        </p:spPr>
+        <p:txBody>
+          <a:bodyPr wrap="square" lIns="0" tIns="0" rIns="0" bIns="0" anchor="t">
+            <a:noAutofit/>
+          </a:bodyPr>
+          <a:lstStyle/>
+          <a:p>
+            <a:pPr marL="0" indent="0" algn="l">
+              <a:spcBef>
+                <a:spcPts val="0"/>
+              </a:spcBef>
+              <a:buNone/>
+            </a:pPr>
+            <a:r>
+              <a:rPr lang="en-GB" sz="1800" b="1" i="0" dirty="0">
+                <a:solidFill>
+                  <a:srgbClr val="7B7C7E"/>
+                </a:solidFill>
+                <a:latin typeface="Arial"/>
+                <a:cs typeface="Arial"/>
+              </a:rPr>
+              <a:t>E-invoicing: </a:t>
+            </a:r>
+            <a:r>
+              <a:rPr lang="en-GB" sz="1800" b="0" i="0" dirty="0">
+                <a:solidFill>
+                  <a:srgbClr val="7B7C7E"/>
+                </a:solidFill>
+                <a:latin typeface="Arial"/>
+                <a:cs typeface="Arial"/>
+              </a:rPr>
+              <a:t>administrative</a:t>
+            </a:r>
+          </a:p>
+        </p:txBody>
+      </p:sp>
+      <p:sp>
+        <p:nvSpPr>
+          <p:cNvPr id="24" name="Electricity header"/>
+          <p:cNvSpPr txBox="1"/>
+          <p:nvPr/>
+        </p:nvSpPr>
+        <p:spPr>
+          <a:xfrm>
+            <a:off x="7424928" y="1984248"/>
+            <a:ext cx="4114800" cy="365760"/>
+          </a:xfrm>
+          <a:prstGeom prst="rect">
+            <a:avLst/>
+          </a:prstGeom>
+          <a:noFill/>
+          <a:ln>
+            <a:noFill/>
+          </a:ln>
+        </p:spPr>
+        <p:txBody>
+          <a:bodyPr wrap="square" lIns="0" tIns="0" rIns="0" bIns="0" anchor="t">
+            <a:noAutofit/>
+          </a:bodyPr>
+          <a:lstStyle/>
+          <a:p>
+            <a:pPr marL="0" indent="0" algn="l">
+              <a:spcBef>
+                <a:spcPts val="0"/>
+              </a:spcBef>
+              <a:buNone/>
+            </a:pPr>
+            <a:r>
+              <a:rPr lang="en-GB" sz="1800" b="1" i="0" dirty="0">
+                <a:solidFill>
+                  <a:srgbClr val="C00000"/>
+                </a:solidFill>
+                <a:latin typeface="Arial"/>
+                <a:cs typeface="Arial"/>
+              </a:rPr>
+              <a:t>Electricity: </a:t>
+            </a:r>
+            <a:r>
+              <a:rPr lang="en-GB" sz="1800" b="0" i="0" dirty="0">
+                <a:solidFill>
+                  <a:srgbClr val="C00000"/>
+                </a:solidFill>
+                <a:latin typeface="Arial"/>
+                <a:cs typeface="Arial"/>
+              </a:rPr>
+              <a:t>production</a:t>
+            </a:r>
+          </a:p>
+        </p:txBody>
+      </p:sp>
+      <p:sp>
+        <p:nvSpPr>
+          <p:cNvPr id="30" name="Row label Driver"/>
+          <p:cNvSpPr txBox="1"/>
+          <p:nvPr/>
+        </p:nvSpPr>
+        <p:spPr>
+          <a:xfrm>
+            <a:off x="466344" y="2478024"/>
+            <a:ext cx="1965960" cy="457200"/>
+          </a:xfrm>
+          <a:prstGeom prst="rect">
+            <a:avLst/>
+          </a:prstGeom>
+          <a:noFill/>
+          <a:ln>
+            <a:noFill/>
+          </a:ln>
+        </p:spPr>
+        <p:txBody>
+          <a:bodyPr wrap="square" lIns="0" tIns="0" rIns="0" bIns="0" anchor="t">
+            <a:noAutofit/>
+          </a:bodyPr>
+          <a:lstStyle/>
+          <a:p>
+            <a:pPr marL="0" indent="0" algn="l">
+              <a:spcBef>
+                <a:spcPts val="0"/>
+              </a:spcBef>
+              <a:buNone/>
+            </a:pPr>
+            <a:r>
+              <a:rPr lang="en-GB" sz="1500" b="1" i="0" dirty="0">
+                <a:solidFill>
+                  <a:srgbClr val="595959"/>
+                </a:solidFill>
+                <a:latin typeface="Arial"/>
+                <a:cs typeface="Arial"/>
+              </a:rPr>
+              <a:t>Driver</a:t>
+            </a:r>
+          </a:p>
+        </p:txBody>
+      </p:sp>
+      <p:sp>
+        <p:nvSpPr>
+          <p:cNvPr id="31" name="E-invoicing Driver"/>
+          <p:cNvSpPr txBox="1"/>
+          <p:nvPr/>
+        </p:nvSpPr>
+        <p:spPr>
+          <a:xfrm>
+            <a:off x="2761488" y="2478024"/>
+            <a:ext cx="4114800" cy="457200"/>
+          </a:xfrm>
+          <a:prstGeom prst="rect">
+            <a:avLst/>
+          </a:prstGeom>
+          <a:noFill/>
+          <a:ln>
+            <a:noFill/>
+          </a:ln>
+        </p:spPr>
+        <p:txBody>
+          <a:bodyPr wrap="square" lIns="0" tIns="0" rIns="0" bIns="0" anchor="t">
+            <a:noAutofit/>
+          </a:bodyPr>
+          <a:lstStyle/>
+          <a:p>
+            <a:pPr marL="0" indent="0" algn="l">
+              <a:spcBef>
+                <a:spcPts val="0"/>
+              </a:spcBef>
+              <a:buNone/>
+            </a:pPr>
+            <a:r>
+              <a:rPr lang="en-GB" sz="1500" b="0" i="0" dirty="0">
+                <a:solidFill>
+                  <a:srgbClr val="636462"/>
+                </a:solidFill>
+                <a:latin typeface="Arial"/>
+                <a:cs typeface="Arial"/>
+              </a:rPr>
+              <a:t>Billing rules and fiscal deadlines</a:t>
+            </a:r>
+          </a:p>
+        </p:txBody>
+      </p:sp>
+      <p:sp>
+        <p:nvSpPr>
+          <p:cNvPr id="32" name="Electricity Driver"/>
+          <p:cNvSpPr txBox="1"/>
+          <p:nvPr/>
+        </p:nvSpPr>
+        <p:spPr>
+          <a:xfrm>
+            <a:off x="7424928" y="2478024"/>
+            <a:ext cx="4114800" cy="457200"/>
+          </a:xfrm>
+          <a:prstGeom prst="rect">
+            <a:avLst/>
+          </a:prstGeom>
+          <a:noFill/>
+          <a:ln>
+            <a:noFill/>
+          </a:ln>
+        </p:spPr>
+        <p:txBody>
+          <a:bodyPr wrap="square" lIns="0" tIns="0" rIns="0" bIns="0" anchor="t">
+            <a:noAutofit/>
+          </a:bodyPr>
+          <a:lstStyle/>
+          <a:p>
+            <a:pPr marL="0" indent="0" algn="l">
+              <a:spcBef>
+                <a:spcPts val="0"/>
+              </a:spcBef>
+              <a:buNone/>
+            </a:pPr>
+            <a:r>
+              <a:rPr lang="en-GB" sz="1500" b="0" i="0" dirty="0">
+                <a:solidFill>
+                  <a:srgbClr val="595959"/>
+                </a:solidFill>
+                <a:latin typeface="Arial"/>
+                <a:cs typeface="Arial"/>
+              </a:rPr>
+              <a:t>Plant activity and closures</a:t>
+            </a:r>
+          </a:p>
+        </p:txBody>
+      </p:sp>
+      <p:sp>
+        <p:nvSpPr>
+          <p:cNvPr id="33" name="Row label Model"/>
+          <p:cNvSpPr txBox="1"/>
+          <p:nvPr/>
+        </p:nvSpPr>
+        <p:spPr>
+          <a:xfrm>
+            <a:off x="466344" y="2935224"/>
+            <a:ext cx="1965960" cy="457200"/>
+          </a:xfrm>
+          <a:prstGeom prst="rect">
+            <a:avLst/>
+          </a:prstGeom>
+          <a:noFill/>
+          <a:ln>
+            <a:noFill/>
+          </a:ln>
+        </p:spPr>
+        <p:txBody>
+          <a:bodyPr wrap="square" lIns="0" tIns="0" rIns="0" bIns="0" anchor="t">
+            <a:noAutofit/>
+          </a:bodyPr>
+          <a:lstStyle/>
+          <a:p>
+            <a:pPr marL="0" indent="0" algn="l">
+              <a:spcBef>
+                <a:spcPts val="0"/>
+              </a:spcBef>
+              <a:buNone/>
+            </a:pPr>
+            <a:r>
+              <a:rPr lang="en-GB" sz="1500" b="1" i="0" dirty="0">
+                <a:solidFill>
+                  <a:srgbClr val="595959"/>
+                </a:solidFill>
+                <a:latin typeface="Arial"/>
+                <a:cs typeface="Arial"/>
+              </a:rPr>
+              <a:t>Model</a:t>
+            </a:r>
+          </a:p>
+        </p:txBody>
+      </p:sp>
+      <p:sp>
+        <p:nvSpPr>
+          <p:cNvPr id="34" name="E-invoicing Model"/>
+          <p:cNvSpPr txBox="1"/>
+          <p:nvPr/>
+        </p:nvSpPr>
+        <p:spPr>
+          <a:xfrm>
+            <a:off x="2761488" y="2935224"/>
+            <a:ext cx="4114800" cy="457200"/>
+          </a:xfrm>
+          <a:prstGeom prst="rect">
+            <a:avLst/>
+          </a:prstGeom>
+          <a:noFill/>
+          <a:ln>
+            <a:noFill/>
+          </a:ln>
+        </p:spPr>
+        <p:txBody>
+          <a:bodyPr wrap="square" lIns="0" tIns="0" rIns="0" bIns="0" anchor="t">
+            <a:noAutofit/>
+          </a:bodyPr>
+          <a:lstStyle/>
+          <a:p>
+            <a:pPr marL="0" indent="0" algn="l">
+              <a:spcBef>
+                <a:spcPts val="0"/>
+              </a:spcBef>
+              <a:buNone/>
+            </a:pPr>
+            <a:r>
+              <a:rPr lang="en-GB" sz="1500" b="0" i="0" dirty="0">
+                <a:solidFill>
+                  <a:srgbClr val="636462"/>
+                </a:solidFill>
+                <a:latin typeface="Arial"/>
+                <a:cs typeface="Arial"/>
+              </a:rPr>
+              <a:t>Multiplicative (log)</a:t>
+            </a:r>
+          </a:p>
+        </p:txBody>
+      </p:sp>
+      <p:sp>
+        <p:nvSpPr>
+          <p:cNvPr id="35" name="Electricity Model"/>
+          <p:cNvSpPr txBox="1"/>
+          <p:nvPr/>
+        </p:nvSpPr>
+        <p:spPr>
+          <a:xfrm>
+            <a:off x="7424928" y="2935224"/>
+            <a:ext cx="4114800" cy="457200"/>
+          </a:xfrm>
+          <a:prstGeom prst="rect">
+            <a:avLst/>
+          </a:prstGeom>
+          <a:noFill/>
+          <a:ln>
+            <a:noFill/>
+          </a:ln>
+        </p:spPr>
+        <p:txBody>
+          <a:bodyPr wrap="square" lIns="0" tIns="0" rIns="0" bIns="0" anchor="t">
+            <a:noAutofit/>
+          </a:bodyPr>
+          <a:lstStyle/>
+          <a:p>
+            <a:pPr marL="0" indent="0" algn="l">
+              <a:spcBef>
+                <a:spcPts val="0"/>
+              </a:spcBef>
+              <a:buNone/>
+            </a:pPr>
+            <a:r>
+              <a:rPr lang="en-GB" sz="1500" b="0" i="0" dirty="0">
+                <a:solidFill>
+                  <a:srgbClr val="595959"/>
+                </a:solidFill>
+                <a:latin typeface="Arial"/>
+                <a:cs typeface="Arial"/>
+              </a:rPr>
+              <a:t>Additive (MWh)</a:t>
+            </a:r>
+          </a:p>
+        </p:txBody>
+      </p:sp>
+      <p:sp>
+        <p:nvSpPr>
+          <p:cNvPr id="36" name="Row label Within the month"/>
+          <p:cNvSpPr txBox="1"/>
+          <p:nvPr/>
+        </p:nvSpPr>
+        <p:spPr>
+          <a:xfrm>
+            <a:off x="466344" y="3392424"/>
+            <a:ext cx="1965960" cy="457200"/>
+          </a:xfrm>
+          <a:prstGeom prst="rect">
+            <a:avLst/>
+          </a:prstGeom>
+          <a:noFill/>
+          <a:ln>
+            <a:noFill/>
+          </a:ln>
+        </p:spPr>
+        <p:txBody>
+          <a:bodyPr wrap="square" lIns="0" tIns="0" rIns="0" bIns="0" anchor="t">
+            <a:noAutofit/>
+          </a:bodyPr>
+          <a:lstStyle/>
+          <a:p>
+            <a:pPr marL="0" indent="0" algn="l">
+              <a:spcBef>
+                <a:spcPts val="0"/>
+              </a:spcBef>
+              <a:buNone/>
+            </a:pPr>
+            <a:r>
+              <a:rPr lang="en-GB" sz="1500" b="1" i="0" dirty="0">
+                <a:solidFill>
+                  <a:srgbClr val="595959"/>
+                </a:solidFill>
+                <a:latin typeface="Arial"/>
+                <a:cs typeface="Arial"/>
+              </a:rPr>
+              <a:t>Within the month</a:t>
+            </a:r>
+          </a:p>
+        </p:txBody>
+      </p:sp>
+      <p:sp>
+        <p:nvSpPr>
+          <p:cNvPr id="37" name="E-invoicing Within the month"/>
+          <p:cNvSpPr txBox="1"/>
+          <p:nvPr/>
+        </p:nvSpPr>
+        <p:spPr>
+          <a:xfrm>
+            <a:off x="2761488" y="3392424"/>
+            <a:ext cx="4114800" cy="457200"/>
+          </a:xfrm>
+          <a:prstGeom prst="rect">
+            <a:avLst/>
+          </a:prstGeom>
+          <a:noFill/>
+          <a:ln>
+            <a:noFill/>
+          </a:ln>
+        </p:spPr>
+        <p:txBody>
+          <a:bodyPr wrap="square" lIns="0" tIns="0" rIns="0" bIns="0" anchor="t">
+            <a:noAutofit/>
+          </a:bodyPr>
+          <a:lstStyle/>
+          <a:p>
+            <a:pPr marL="0" indent="0" algn="l">
+              <a:spcBef>
+                <a:spcPts val="0"/>
+              </a:spcBef>
+              <a:buNone/>
+            </a:pPr>
+            <a:r>
+              <a:rPr lang="en-GB" sz="1500" b="0" i="0" dirty="0">
+                <a:solidFill>
+                  <a:srgbClr val="636462"/>
+                </a:solidFill>
+                <a:latin typeface="Arial"/>
+                <a:cs typeface="Arial"/>
+              </a:rPr>
+              <a:t>Strong: month end, days 1, 15 and 20</a:t>
+            </a:r>
+          </a:p>
+        </p:txBody>
+      </p:sp>
+      <p:sp>
+        <p:nvSpPr>
+          <p:cNvPr id="38" name="Electricity Within the month"/>
+          <p:cNvSpPr txBox="1"/>
+          <p:nvPr/>
+        </p:nvSpPr>
+        <p:spPr>
+          <a:xfrm>
+            <a:off x="7424928" y="3392424"/>
+            <a:ext cx="4114800" cy="457200"/>
+          </a:xfrm>
+          <a:prstGeom prst="rect">
+            <a:avLst/>
+          </a:prstGeom>
+          <a:noFill/>
+          <a:ln>
+            <a:noFill/>
+          </a:ln>
+        </p:spPr>
+        <p:txBody>
+          <a:bodyPr wrap="square" lIns="0" tIns="0" rIns="0" bIns="0" anchor="t">
+            <a:noAutofit/>
+          </a:bodyPr>
+          <a:lstStyle/>
+          <a:p>
+            <a:pPr marL="0" indent="0" algn="l">
+              <a:spcBef>
+                <a:spcPts val="0"/>
+              </a:spcBef>
+              <a:buNone/>
+            </a:pPr>
+            <a:r>
+              <a:rPr lang="en-GB" sz="1500" b="0" i="0" dirty="0">
+                <a:solidFill>
+                  <a:srgbClr val="595959"/>
+                </a:solidFill>
+                <a:latin typeface="Arial"/>
+                <a:cs typeface="Arial"/>
+              </a:rPr>
+              <a:t>None: flat DMR profiles</a:t>
+            </a:r>
+          </a:p>
+        </p:txBody>
+      </p:sp>
+      <p:sp>
+        <p:nvSpPr>
+          <p:cNvPr id="39" name="Row label Holidays"/>
+          <p:cNvSpPr txBox="1"/>
+          <p:nvPr/>
+        </p:nvSpPr>
+        <p:spPr>
+          <a:xfrm>
+            <a:off x="466344" y="3849624"/>
+            <a:ext cx="1965960" cy="658368"/>
+          </a:xfrm>
+          <a:prstGeom prst="rect">
+            <a:avLst/>
+          </a:prstGeom>
+          <a:noFill/>
+          <a:ln>
+            <a:noFill/>
+          </a:ln>
+        </p:spPr>
+        <p:txBody>
+          <a:bodyPr wrap="square" lIns="0" tIns="0" rIns="0" bIns="0" anchor="t">
+            <a:noAutofit/>
+          </a:bodyPr>
+          <a:lstStyle/>
+          <a:p>
+            <a:pPr marL="0" indent="0" algn="l">
+              <a:spcBef>
+                <a:spcPts val="0"/>
+              </a:spcBef>
+              <a:buNone/>
+            </a:pPr>
+            <a:r>
+              <a:rPr lang="en-GB" sz="1500" b="1" i="0" dirty="0">
+                <a:solidFill>
+                  <a:srgbClr val="595959"/>
+                </a:solidFill>
+                <a:latin typeface="Arial"/>
+                <a:cs typeface="Arial"/>
+              </a:rPr>
+              <a:t>Holidays</a:t>
+            </a:r>
+          </a:p>
+        </p:txBody>
+      </p:sp>
+      <p:sp>
+        <p:nvSpPr>
+          <p:cNvPr id="40" name="E-invoicing Holidays"/>
+          <p:cNvSpPr txBox="1"/>
+          <p:nvPr/>
+        </p:nvSpPr>
+        <p:spPr>
+          <a:xfrm>
+            <a:off x="2761488" y="3849624"/>
+            <a:ext cx="4114800" cy="658368"/>
+          </a:xfrm>
+          <a:prstGeom prst="rect">
+            <a:avLst/>
+          </a:prstGeom>
+          <a:noFill/>
+          <a:ln>
+            <a:noFill/>
+          </a:ln>
+        </p:spPr>
+        <p:txBody>
+          <a:bodyPr wrap="square" lIns="0" tIns="0" rIns="0" bIns="0" anchor="t">
+            <a:noAutofit/>
+          </a:bodyPr>
+          <a:lstStyle/>
+          <a:p>
+            <a:pPr marL="0" indent="0" algn="l">
+              <a:spcBef>
+                <a:spcPts val="0"/>
+              </a:spcBef>
+              <a:buNone/>
+            </a:pPr>
+            <a:r>
+              <a:rPr lang="en-GB" sz="1500" b="0" i="0" dirty="0">
+                <a:solidFill>
+                  <a:srgbClr val="636462"/>
+                </a:solidFill>
+                <a:latin typeface="Arial"/>
+                <a:cs typeface="Arial"/>
+              </a:rPr>
+              <a:t>Monday to Friday only: set to zero on weekends</a:t>
+            </a:r>
+          </a:p>
+        </p:txBody>
+      </p:sp>
+      <p:sp>
+        <p:nvSpPr>
+          <p:cNvPr id="41" name="Electricity Holidays"/>
+          <p:cNvSpPr txBox="1"/>
+          <p:nvPr/>
+        </p:nvSpPr>
+        <p:spPr>
+          <a:xfrm>
+            <a:off x="7424928" y="3849624"/>
+            <a:ext cx="4114800" cy="658368"/>
+          </a:xfrm>
+          <a:prstGeom prst="rect">
+            <a:avLst/>
+          </a:prstGeom>
+          <a:noFill/>
+          <a:ln>
+            <a:noFill/>
+          </a:ln>
+        </p:spPr>
+        <p:txBody>
+          <a:bodyPr wrap="square" lIns="0" tIns="0" rIns="0" bIns="0" anchor="t">
+            <a:noAutofit/>
+          </a:bodyPr>
+          <a:lstStyle/>
+          <a:p>
+            <a:pPr marL="0" indent="0" algn="l">
+              <a:spcBef>
+                <a:spcPts val="0"/>
+              </a:spcBef>
+              <a:buNone/>
+            </a:pPr>
+            <a:r>
+              <a:rPr lang="en-GB" sz="1500" b="0" i="0" dirty="0">
+                <a:solidFill>
+                  <a:srgbClr val="595959"/>
+                </a:solidFill>
+                <a:latin typeface="Arial"/>
+                <a:cs typeface="Arial"/>
+              </a:rPr>
+              <a:t>Monday to Friday only (zero on weekends), plus Saturday and midweek effects</a:t>
+            </a:r>
+          </a:p>
+        </p:txBody>
+      </p:sp>
+      <p:sp>
+        <p:nvSpPr>
+          <p:cNvPr id="42" name="Row label Other days"/>
+          <p:cNvSpPr txBox="1"/>
+          <p:nvPr/>
+        </p:nvSpPr>
+        <p:spPr>
+          <a:xfrm>
+            <a:off x="466344" y="4507992"/>
+            <a:ext cx="1965960" cy="658368"/>
+          </a:xfrm>
+          <a:prstGeom prst="rect">
+            <a:avLst/>
+          </a:prstGeom>
+          <a:noFill/>
+          <a:ln>
+            <a:noFill/>
+          </a:ln>
+        </p:spPr>
+        <p:txBody>
+          <a:bodyPr wrap="square" lIns="0" tIns="0" rIns="0" bIns="0" anchor="t">
+            <a:noAutofit/>
+          </a:bodyPr>
+          <a:lstStyle/>
+          <a:p>
+            <a:pPr marL="0" indent="0" algn="l">
+              <a:spcBef>
+                <a:spcPts val="0"/>
+              </a:spcBef>
+              <a:buNone/>
+            </a:pPr>
+            <a:r>
+              <a:rPr lang="en-GB" sz="1500" b="1" i="0" dirty="0">
+                <a:solidFill>
+                  <a:srgbClr val="595959"/>
+                </a:solidFill>
+                <a:latin typeface="Arial"/>
+                <a:cs typeface="Arial"/>
+              </a:rPr>
+              <a:t>Other days</a:t>
+            </a:r>
+          </a:p>
+        </p:txBody>
+      </p:sp>
+      <p:sp>
+        <p:nvSpPr>
+          <p:cNvPr id="43" name="E-invoicing Other days"/>
+          <p:cNvSpPr txBox="1"/>
+          <p:nvPr/>
+        </p:nvSpPr>
+        <p:spPr>
+          <a:xfrm>
+            <a:off x="2761488" y="4507992"/>
+            <a:ext cx="4114800" cy="658368"/>
+          </a:xfrm>
+          <a:prstGeom prst="rect">
+            <a:avLst/>
+          </a:prstGeom>
+          <a:noFill/>
+          <a:ln>
+            <a:noFill/>
+          </a:ln>
+        </p:spPr>
+        <p:txBody>
+          <a:bodyPr wrap="square" lIns="0" tIns="0" rIns="0" bIns="0" anchor="t">
+            <a:noAutofit/>
+          </a:bodyPr>
+          <a:lstStyle/>
+          <a:p>
+            <a:pPr marL="0" indent="0" algn="l">
+              <a:spcBef>
+                <a:spcPts val="0"/>
+              </a:spcBef>
+              <a:buNone/>
+            </a:pPr>
+            <a:r>
+              <a:rPr lang="en-GB" sz="1500" b="0" i="0" dirty="0">
+                <a:solidFill>
+                  <a:srgbClr val="636462"/>
+                </a:solidFill>
+                <a:latin typeface="Arial"/>
+                <a:cs typeface="Arial"/>
+              </a:rPr>
+              <a:t>Last working day before a weekend month end</a:t>
+            </a:r>
+          </a:p>
+        </p:txBody>
+      </p:sp>
+      <p:sp>
+        <p:nvSpPr>
+          <p:cNvPr id="44" name="Electricity Other days"/>
+          <p:cNvSpPr txBox="1"/>
+          <p:nvPr/>
+        </p:nvSpPr>
+        <p:spPr>
+          <a:xfrm>
+            <a:off x="7424928" y="4507992"/>
+            <a:ext cx="4114800" cy="658368"/>
+          </a:xfrm>
+          <a:prstGeom prst="rect">
+            <a:avLst/>
+          </a:prstGeom>
+          <a:noFill/>
+          <a:ln>
+            <a:noFill/>
+          </a:ln>
+        </p:spPr>
+        <p:txBody>
+          <a:bodyPr wrap="square" lIns="0" tIns="0" rIns="0" bIns="0" anchor="t">
+            <a:noAutofit/>
+          </a:bodyPr>
+          <a:lstStyle/>
+          <a:p>
+            <a:pPr marL="0" indent="0" algn="l">
+              <a:spcBef>
+                <a:spcPts val="0"/>
+              </a:spcBef>
+              <a:buNone/>
+            </a:pPr>
+            <a:r>
+              <a:rPr lang="en-GB" sz="1500" b="0" i="0" dirty="0">
+                <a:solidFill>
+                  <a:srgbClr val="595959"/>
+                </a:solidFill>
+                <a:latin typeface="Arial"/>
+                <a:cs typeface="Arial"/>
+              </a:rPr>
+              <a:t>Bridges, 24 and 31 Dec, Christmas–Epiphany working days, 14 and 16 Aug, Easter window</a:t>
+            </a:r>
+          </a:p>
+        </p:txBody>
+      </p:sp>
+      <p:sp>
+        <p:nvSpPr>
+          <p:cNvPr id="45" name="Row label Coefficients"/>
+          <p:cNvSpPr txBox="1"/>
+          <p:nvPr/>
+        </p:nvSpPr>
+        <p:spPr>
+          <a:xfrm>
+            <a:off x="466344" y="5166360"/>
+            <a:ext cx="1965960" cy="457200"/>
+          </a:xfrm>
+          <a:prstGeom prst="rect">
+            <a:avLst/>
+          </a:prstGeom>
+          <a:noFill/>
+          <a:ln>
+            <a:noFill/>
+          </a:ln>
+        </p:spPr>
+        <p:txBody>
+          <a:bodyPr wrap="square" lIns="0" tIns="0" rIns="0" bIns="0" anchor="t">
+            <a:noAutofit/>
+          </a:bodyPr>
+          <a:lstStyle/>
+          <a:p>
+            <a:pPr marL="0" indent="0" algn="l">
+              <a:spcBef>
+                <a:spcPts val="0"/>
+              </a:spcBef>
+              <a:buNone/>
+            </a:pPr>
+            <a:r>
+              <a:rPr lang="en-GB" sz="1500" b="1" i="0" dirty="0">
+                <a:solidFill>
+                  <a:srgbClr val="595959"/>
+                </a:solidFill>
+                <a:latin typeface="Arial"/>
+                <a:cs typeface="Arial"/>
+              </a:rPr>
+              <a:t>Coefficients</a:t>
+            </a:r>
+          </a:p>
+        </p:txBody>
+      </p:sp>
+      <p:sp>
+        <p:nvSpPr>
+          <p:cNvPr id="46" name="E-invoicing Coefficients"/>
+          <p:cNvSpPr txBox="1"/>
+          <p:nvPr/>
+        </p:nvSpPr>
+        <p:spPr>
+          <a:xfrm>
+            <a:off x="2761488" y="5166360"/>
+            <a:ext cx="4114800" cy="457200"/>
+          </a:xfrm>
+          <a:prstGeom prst="rect">
+            <a:avLst/>
+          </a:prstGeom>
+          <a:noFill/>
+          <a:ln>
+            <a:noFill/>
+          </a:ln>
+        </p:spPr>
+        <p:txBody>
+          <a:bodyPr wrap="square" lIns="0" tIns="0" rIns="0" bIns="0" anchor="t">
+            <a:noAutofit/>
+          </a:bodyPr>
+          <a:lstStyle/>
+          <a:p>
+            <a:pPr marL="0" indent="0" algn="l">
+              <a:spcBef>
+                <a:spcPts val="0"/>
+              </a:spcBef>
+              <a:buNone/>
+            </a:pPr>
+            <a:r>
+              <a:rPr lang="en-GB" sz="1500" b="0" i="0" dirty="0">
+                <a:solidFill>
+                  <a:srgbClr val="636462"/>
+                </a:solidFill>
+                <a:latin typeface="Arial"/>
+                <a:cs typeface="Arial"/>
+              </a:rPr>
+              <a:t>Fixed, 32 regressors</a:t>
+            </a:r>
+          </a:p>
+        </p:txBody>
+      </p:sp>
+      <p:sp>
+        <p:nvSpPr>
+          <p:cNvPr id="47" name="Electricity Coefficients"/>
+          <p:cNvSpPr txBox="1"/>
+          <p:nvPr/>
+        </p:nvSpPr>
+        <p:spPr>
+          <a:xfrm>
+            <a:off x="7424928" y="5166360"/>
+            <a:ext cx="4114800" cy="457200"/>
+          </a:xfrm>
+          <a:prstGeom prst="rect">
+            <a:avLst/>
+          </a:prstGeom>
+          <a:noFill/>
+          <a:ln>
+            <a:noFill/>
+          </a:ln>
+        </p:spPr>
+        <p:txBody>
+          <a:bodyPr wrap="square" lIns="0" tIns="0" rIns="0" bIns="0" anchor="t">
+            <a:noAutofit/>
+          </a:bodyPr>
+          <a:lstStyle/>
+          <a:p>
+            <a:pPr marL="0" indent="0" algn="l">
+              <a:spcBef>
+                <a:spcPts val="0"/>
+              </a:spcBef>
+              <a:buNone/>
+            </a:pPr>
+            <a:r>
+              <a:rPr lang="en-GB" sz="1500" b="0" i="0" dirty="0">
+                <a:solidFill>
+                  <a:srgbClr val="595959"/>
+                </a:solidFill>
+                <a:latin typeface="Arial"/>
+                <a:cs typeface="Arial"/>
+              </a:rPr>
+              <a:t>Time-varying, 23 regressors</a:t>
+            </a:r>
+          </a:p>
+        </p:txBody>
+      </p:sp>
+      <p:sp>
+        <p:nvSpPr>
+          <p:cNvPr id="48" name="Electricity caption"/>
+          <p:cNvSpPr txBox="1"/>
+          <p:nvPr/>
+        </p:nvSpPr>
+        <p:spPr>
+          <a:xfrm>
+            <a:off x="466344" y="5815584"/>
+            <a:ext cx="11256264" cy="365760"/>
+          </a:xfrm>
+          <a:prstGeom prst="rect">
+            <a:avLst/>
+          </a:prstGeom>
+          <a:noFill/>
+          <a:ln>
+            <a:noFill/>
+          </a:ln>
+        </p:spPr>
+        <p:txBody>
+          <a:bodyPr wrap="square" lIns="0" tIns="0" rIns="0" bIns="0" anchor="t">
+            <a:noAutofit/>
+          </a:bodyPr>
+          <a:lstStyle/>
+          <a:p>
+            <a:pPr marL="0" indent="0" algn="l">
+              <a:spcBef>
+                <a:spcPts val="0"/>
+              </a:spcBef>
+              <a:buNone/>
+            </a:pPr>
+            <a:r>
+              <a:rPr lang="en-GB" sz="1200" b="0" i="1" dirty="0">
+                <a:solidFill>
+                  <a:srgbClr val="7B7C7E"/>
+                </a:solidFill>
+                <a:latin typeface="Arial"/>
+                <a:cs typeface="Arial"/>
+              </a:rPr>
+              <a:t>E-invoicing 2019–2025, electricity demand 2012–2025. Time-varying coefficients: random walks with a common variance, estimated before the outlier search (two steps).</a:t>
+            </a:r>
+          </a:p>
+        </p:txBody>
+      </p:sp>
+    </p:spTree>
+    <p:extLst>
+      <p:ext uri="{BB962C8B-B14F-4D97-AF65-F5344CB8AC3E}">
+        <p14:creationId xmlns:p14="http://schemas.microsoft.com/office/powerpoint/2010/main" val="1781916628"/>
+      </p:ext>
+    </p:extLst>
+  </p:cSld>
+  <p:clrMapOvr>
+    <a:masterClrMapping/>
+  </p:clrMapOvr>
+</p:sld>
+</file>
+
+<file path=ppt/slides/slide18.xml><?xml version="1.0" encoding="utf-8"?>
+<p:sld xmlns:a="http://schemas.openxmlformats.org/drawingml/2006/main" xmlns:r="http://schemas.openxmlformats.org/officeDocument/2006/relationships" xmlns:p="http://schemas.openxmlformats.org/presentationml/2006/main">
+  <p:cSld>
+    <p:spTree>
+      <p:nvGrpSpPr>
+        <p:cNvPr id="1" name=""/>
+        <p:cNvGrpSpPr/>
+        <p:nvPr/>
+      </p:nvGrpSpPr>
+      <p:grpSpPr>
+        <a:xfrm>
+          <a:off x="0" y="0"/>
+          <a:ext cx="0" cy="0"/>
+          <a:chOff x="0" y="0"/>
+          <a:chExt cx="0" cy="0"/>
+        </a:xfrm>
+      </p:grpSpPr>
+      <p:sp>
+        <p:nvSpPr>
+          <p:cNvPr id="19461" name="Titolo 4"/>
+          <p:cNvSpPr>
+            <a:spLocks noGrp="1"/>
+          </p:cNvSpPr>
+          <p:nvPr>
+            <p:ph type="title"/>
+          </p:nvPr>
+        </p:nvSpPr>
+        <p:spPr>
+          <a:xfrm>
+            <a:off x="468313" y="482109"/>
+            <a:ext cx="11269662" cy="405304"/>
+          </a:xfrm>
+        </p:spPr>
+        <p:txBody>
+          <a:bodyPr/>
+          <a:lstStyle/>
+          <a:p>
+            <a:r>
+              <a:rPr lang="en-GB" altLang="it-IT" sz="3600" dirty="0">
+                <a:solidFill>
+                  <a:srgbClr val="C00000"/>
+                </a:solidFill>
+              </a:rPr>
+              <a:t>Electricity: time-varying calendar effects</a:t>
+            </a:r>
+          </a:p>
+        </p:txBody>
+      </p:sp>
+      <p:sp>
+        <p:nvSpPr>
+          <p:cNvPr id="9" name="Segnaposto numero diapositiva 4">
+            <a:extLst>
+              <a:ext uri="{FF2B5EF4-FFF2-40B4-BE49-F238E27FC236}">
+                <a16:creationId xmlns:a16="http://schemas.microsoft.com/office/drawing/2014/main" id="{43529721-AF16-448D-9B7A-D70C2ADC2006}"/>
+              </a:ext>
+            </a:extLst>
+          </p:cNvPr>
+          <p:cNvSpPr>
+            <a:spLocks noGrp="1"/>
+          </p:cNvSpPr>
+          <p:nvPr>
+            <p:ph type="sldNum" sz="quarter" idx="11"/>
+          </p:nvPr>
+        </p:nvSpPr>
+        <p:spPr>
+          <a:xfrm>
+            <a:off x="0" y="6392815"/>
+            <a:ext cx="501650" cy="365125"/>
+          </a:xfrm>
+          <a:prstGeom prst="rect">
+            <a:avLst/>
+          </a:prstGeom>
+        </p:spPr>
+        <p:txBody>
+          <a:bodyPr/>
+          <a:lstStyle/>
+          <a:p>
+            <a:pPr>
+              <a:defRPr/>
+            </a:pPr>
+            <a:fld id="{48B4153A-D4C5-4CEF-8992-0D8815C829E3}" type="slidenum">
+              <a:rPr lang="en-US" smtClean="0"/>
+              <a:pPr>
+                <a:defRPr/>
+              </a:pPr>
+              <a:t>18</a:t>
             </a:fld>
             <a:endParaRPr lang="en-US" dirty="0"/>
           </a:p>
@@ -12580,755 +13359,6 @@
 </p:sld>
 </file>
 
-<file path=ppt/slides/slide18.xml><?xml version="1.0" encoding="utf-8"?>
-<p:sld xmlns:a="http://schemas.openxmlformats.org/drawingml/2006/main" xmlns:r="http://schemas.openxmlformats.org/officeDocument/2006/relationships" xmlns:p="http://schemas.openxmlformats.org/presentationml/2006/main">
-  <p:cSld>
-    <p:spTree>
-      <p:nvGrpSpPr>
-        <p:cNvPr id="1" name=""/>
-        <p:cNvGrpSpPr/>
-        <p:nvPr/>
-      </p:nvGrpSpPr>
-      <p:grpSpPr>
-        <a:xfrm>
-          <a:off x="0" y="0"/>
-          <a:ext cx="0" cy="0"/>
-          <a:chOff x="0" y="0"/>
-          <a:chExt cx="0" cy="0"/>
-        </a:xfrm>
-      </p:grpSpPr>
-      <p:sp>
-        <p:nvSpPr>
-          <p:cNvPr id="19461" name="Titolo 4"/>
-          <p:cNvSpPr>
-            <a:spLocks noGrp="1"/>
-          </p:cNvSpPr>
-          <p:nvPr>
-            <p:ph type="title"/>
-          </p:nvPr>
-        </p:nvSpPr>
-        <p:spPr>
-          <a:xfrm>
-            <a:off x="468313" y="482109"/>
-            <a:ext cx="11269662" cy="405304"/>
-          </a:xfrm>
-        </p:spPr>
-        <p:txBody>
-          <a:bodyPr/>
-          <a:lstStyle/>
-          <a:p>
-            <a:r>
-              <a:rPr lang="en-GB" altLang="it-IT" sz="3600" dirty="0">
-                <a:solidFill>
-                  <a:srgbClr val="C00000"/>
-                </a:solidFill>
-              </a:rPr>
-              <a:t>Special days back within the ±5% band</a:t>
-            </a:r>
-          </a:p>
-        </p:txBody>
-      </p:sp>
-      <p:sp>
-        <p:nvSpPr>
-          <p:cNvPr id="9" name="Segnaposto numero diapositiva 4">
-            <a:extLst>
-              <a:ext uri="{FF2B5EF4-FFF2-40B4-BE49-F238E27FC236}">
-                <a16:creationId xmlns:a16="http://schemas.microsoft.com/office/drawing/2014/main" id="{43529721-AF16-448D-9B7A-D70C2ADC2006}"/>
-              </a:ext>
-            </a:extLst>
-          </p:cNvPr>
-          <p:cNvSpPr>
-            <a:spLocks noGrp="1"/>
-          </p:cNvSpPr>
-          <p:nvPr>
-            <p:ph type="sldNum" sz="quarter" idx="11"/>
-          </p:nvPr>
-        </p:nvSpPr>
-        <p:spPr>
-          <a:xfrm>
-            <a:off x="0" y="6392815"/>
-            <a:ext cx="501650" cy="365125"/>
-          </a:xfrm>
-          <a:prstGeom prst="rect">
-            <a:avLst/>
-          </a:prstGeom>
-        </p:spPr>
-        <p:txBody>
-          <a:bodyPr/>
-          <a:lstStyle/>
-          <a:p>
-            <a:pPr>
-              <a:defRPr/>
-            </a:pPr>
-            <a:fld id="{48B4153A-D4C5-4CEF-8992-0D8815C829E3}" type="slidenum">
-              <a:rPr lang="en-US" smtClean="0"/>
-              <a:pPr>
-                <a:defRPr/>
-              </a:pPr>
-              <a:t>18</a:t>
-            </a:fld>
-            <a:endParaRPr lang="en-US" dirty="0"/>
-          </a:p>
-        </p:txBody>
-      </p:sp>
-      <p:sp>
-        <p:nvSpPr>
-          <p:cNvPr id="8" name="Segnaposto piè di pagina 3">
-            <a:extLst>
-              <a:ext uri="{FF2B5EF4-FFF2-40B4-BE49-F238E27FC236}">
-                <a16:creationId xmlns:a16="http://schemas.microsoft.com/office/drawing/2014/main" id="{3223DD80-9C7E-474F-A668-27B6983A5687}"/>
-              </a:ext>
-            </a:extLst>
-          </p:cNvPr>
-          <p:cNvSpPr>
-            <a:spLocks noGrp="1"/>
-          </p:cNvSpPr>
-          <p:nvPr>
-            <p:ph type="ftr" sz="quarter" idx="10"/>
-          </p:nvPr>
-        </p:nvSpPr>
-        <p:spPr>
-          <a:xfrm>
-            <a:off x="635830" y="6382305"/>
-            <a:ext cx="9644444" cy="259965"/>
-          </a:xfrm>
-        </p:spPr>
-        <p:txBody>
-          <a:bodyPr/>
-          <a:lstStyle/>
-          <a:p>
-            <a:pPr>
-              <a:defRPr/>
-            </a:pPr>
-            <a:r>
-              <a:rPr lang="en-US" dirty="0"/>
-              <a:t>Building calendars for daily seasonal adjustment</a:t>
-            </a:r>
-          </a:p>
-        </p:txBody>
-      </p:sp>
-      <p:pic>
-        <p:nvPicPr>
-          <p:cNvPr id="40" name="DMR special days basic vs final" descr="Boxplots of the DMR on special days of electricity demand, basic calendar above and final calendar below, same scale"/>
-          <p:cNvPicPr>
-            <a:picLocks noChangeAspect="1"/>
-          </p:cNvPicPr>
-          <p:nvPr/>
-        </p:nvPicPr>
-        <p:blipFill>
-          <a:blip r:embed="rId2"/>
-          <a:stretch>
-            <a:fillRect/>
-          </a:stretch>
-        </p:blipFill>
-        <p:spPr>
-          <a:xfrm>
-            <a:off x="466344" y="1161288"/>
-            <a:ext cx="5068005" cy="4434840"/>
-          </a:xfrm>
-          <a:prstGeom prst="rect">
-            <a:avLst/>
-          </a:prstGeom>
-        </p:spPr>
-      </p:pic>
-      <p:sp>
-        <p:nvSpPr>
-          <p:cNvPr id="41" name="Before-after header"/>
-          <p:cNvSpPr txBox="1"/>
-          <p:nvPr/>
-        </p:nvSpPr>
-        <p:spPr>
-          <a:xfrm>
-            <a:off x="5945829" y="1280160"/>
-            <a:ext cx="5779522" cy="457200"/>
-          </a:xfrm>
-          <a:prstGeom prst="rect">
-            <a:avLst/>
-          </a:prstGeom>
-          <a:noFill/>
-          <a:ln>
-            <a:noFill/>
-          </a:ln>
-        </p:spPr>
-        <p:txBody>
-          <a:bodyPr wrap="square" lIns="0" tIns="0" rIns="0" bIns="0" anchor="t">
-            <a:noAutofit/>
-          </a:bodyPr>
-          <a:lstStyle/>
-          <a:p>
-            <a:pPr marL="0" indent="0" algn="l">
-              <a:spcBef>
-                <a:spcPts val="0"/>
-              </a:spcBef>
-              <a:buNone/>
-            </a:pPr>
-            <a:r>
-              <a:rPr lang="en-GB" sz="1800" b="1" i="0" dirty="0">
-                <a:solidFill>
-                  <a:srgbClr val="595959"/>
-                </a:solidFill>
-                <a:latin typeface="Arial"/>
-                <a:cs typeface="Arial"/>
-              </a:rPr>
-              <a:t>Median DMR</a:t>
-            </a:r>
-            <a:r>
-              <a:rPr lang="en-GB" sz="1600" b="0" i="0" dirty="0">
-                <a:solidFill>
-                  <a:srgbClr val="7B7C7E"/>
-                </a:solidFill>
-                <a:latin typeface="Arial"/>
-                <a:cs typeface="Arial"/>
-              </a:rPr>
-              <a:t>   basic → final</a:t>
-            </a:r>
-          </a:p>
-        </p:txBody>
-      </p:sp>
-      <p:sp>
-        <p:nvSpPr>
-          <p:cNvPr id="42" name="Row card 1"/>
-          <p:cNvSpPr/>
-          <p:nvPr/>
-        </p:nvSpPr>
-        <p:spPr>
-          <a:xfrm>
-            <a:off x="5945829" y="1810512"/>
-            <a:ext cx="5779522" cy="914400"/>
-          </a:xfrm>
-          <a:prstGeom prst="roundRect">
-            <a:avLst>
-              <a:gd name="adj" fmla="val 6000"/>
-            </a:avLst>
-          </a:prstGeom>
-          <a:solidFill>
-            <a:srgbClr val="F2F2F2"/>
-          </a:solidFill>
-          <a:ln>
-            <a:noFill/>
-          </a:ln>
-        </p:spPr>
-        <p:txBody>
-          <a:bodyPr wrap="square" lIns="0" tIns="0" rIns="0" bIns="0" anchor="t">
-            <a:noAutofit/>
-          </a:bodyPr>
-          <a:lstStyle/>
-          <a:p>
-            <a:endParaRPr lang="en-GB" dirty="0"/>
-          </a:p>
-        </p:txBody>
-      </p:sp>
-      <p:sp>
-        <p:nvSpPr>
-          <p:cNvPr id="43" name="Row label 1"/>
-          <p:cNvSpPr txBox="1"/>
-          <p:nvPr/>
-        </p:nvSpPr>
-        <p:spPr>
-          <a:xfrm>
-            <a:off x="6174429" y="1883664"/>
-            <a:ext cx="5322322" cy="365760"/>
-          </a:xfrm>
-          <a:prstGeom prst="rect">
-            <a:avLst/>
-          </a:prstGeom>
-          <a:noFill/>
-          <a:ln>
-            <a:noFill/>
-          </a:ln>
-        </p:spPr>
-        <p:txBody>
-          <a:bodyPr wrap="square" lIns="0" tIns="0" rIns="0" bIns="0" anchor="t">
-            <a:noAutofit/>
-          </a:bodyPr>
-          <a:lstStyle/>
-          <a:p>
-            <a:pPr marL="0" indent="0" algn="l">
-              <a:spcBef>
-                <a:spcPts val="0"/>
-              </a:spcBef>
-              <a:buNone/>
-            </a:pPr>
-            <a:r>
-              <a:rPr lang="en-GB" sz="1500" b="1" i="0" dirty="0">
-                <a:solidFill>
-                  <a:srgbClr val="595959"/>
-                </a:solidFill>
-                <a:latin typeface="Arial"/>
-                <a:cs typeface="Arial"/>
-              </a:rPr>
-              <a:t>Holiday on Saturday</a:t>
-            </a:r>
-          </a:p>
-        </p:txBody>
-      </p:sp>
-      <p:sp>
-        <p:nvSpPr>
-          <p:cNvPr id="44" name="Row values 1"/>
-          <p:cNvSpPr txBox="1"/>
-          <p:nvPr/>
-        </p:nvSpPr>
-        <p:spPr>
-          <a:xfrm>
-            <a:off x="6174429" y="2194560"/>
-            <a:ext cx="5322322" cy="502920"/>
-          </a:xfrm>
-          <a:prstGeom prst="rect">
-            <a:avLst/>
-          </a:prstGeom>
-          <a:noFill/>
-          <a:ln>
-            <a:noFill/>
-          </a:ln>
-        </p:spPr>
-        <p:txBody>
-          <a:bodyPr wrap="square" lIns="0" tIns="0" rIns="0" bIns="0" anchor="t">
-            <a:noAutofit/>
-          </a:bodyPr>
-          <a:lstStyle/>
-          <a:p>
-            <a:pPr marL="0" indent="0" algn="l">
-              <a:spcBef>
-                <a:spcPts val="0"/>
-              </a:spcBef>
-              <a:buNone/>
-            </a:pPr>
-            <a:r>
-              <a:rPr lang="en-GB" sz="2400" b="1" i="0" dirty="0">
-                <a:solidFill>
-                  <a:srgbClr val="C00000"/>
-                </a:solidFill>
-                <a:latin typeface="Arial"/>
-                <a:cs typeface="Arial"/>
-              </a:rPr>
-              <a:t>1.09</a:t>
-            </a:r>
-            <a:r>
-              <a:rPr lang="en-GB" sz="2000" b="0" i="0" dirty="0">
-                <a:solidFill>
-                  <a:srgbClr val="7B7C7E"/>
-                </a:solidFill>
-                <a:latin typeface="Arial"/>
-                <a:cs typeface="Arial"/>
-              </a:rPr>
-              <a:t>  →  </a:t>
-            </a:r>
-            <a:r>
-              <a:rPr lang="en-GB" sz="2400" b="1" i="0" dirty="0">
-                <a:solidFill>
-                  <a:srgbClr val="0072B2"/>
-                </a:solidFill>
-                <a:latin typeface="Arial"/>
-                <a:cs typeface="Arial"/>
-              </a:rPr>
-              <a:t>1.01</a:t>
-            </a:r>
-          </a:p>
-        </p:txBody>
-      </p:sp>
-      <p:sp>
-        <p:nvSpPr>
-          <p:cNvPr id="45" name="Row card 2"/>
-          <p:cNvSpPr/>
-          <p:nvPr/>
-        </p:nvSpPr>
-        <p:spPr>
-          <a:xfrm>
-            <a:off x="5945829" y="2834640"/>
-            <a:ext cx="5779522" cy="914400"/>
-          </a:xfrm>
-          <a:prstGeom prst="roundRect">
-            <a:avLst>
-              <a:gd name="adj" fmla="val 6000"/>
-            </a:avLst>
-          </a:prstGeom>
-          <a:solidFill>
-            <a:srgbClr val="F2F2F2"/>
-          </a:solidFill>
-          <a:ln>
-            <a:noFill/>
-          </a:ln>
-        </p:spPr>
-        <p:txBody>
-          <a:bodyPr wrap="square" lIns="0" tIns="0" rIns="0" bIns="0" anchor="t">
-            <a:noAutofit/>
-          </a:bodyPr>
-          <a:lstStyle/>
-          <a:p>
-            <a:endParaRPr lang="en-GB" dirty="0"/>
-          </a:p>
-        </p:txBody>
-      </p:sp>
-      <p:sp>
-        <p:nvSpPr>
-          <p:cNvPr id="46" name="Row label 2"/>
-          <p:cNvSpPr txBox="1"/>
-          <p:nvPr/>
-        </p:nvSpPr>
-        <p:spPr>
-          <a:xfrm>
-            <a:off x="6174429" y="2907792"/>
-            <a:ext cx="5322322" cy="365760"/>
-          </a:xfrm>
-          <a:prstGeom prst="rect">
-            <a:avLst/>
-          </a:prstGeom>
-          <a:noFill/>
-          <a:ln>
-            <a:noFill/>
-          </a:ln>
-        </p:spPr>
-        <p:txBody>
-          <a:bodyPr wrap="square" lIns="0" tIns="0" rIns="0" bIns="0" anchor="t">
-            <a:noAutofit/>
-          </a:bodyPr>
-          <a:lstStyle/>
-          <a:p>
-            <a:pPr marL="0" indent="0" algn="l">
-              <a:spcBef>
-                <a:spcPts val="0"/>
-              </a:spcBef>
-              <a:buNone/>
-            </a:pPr>
-            <a:r>
-              <a:rPr lang="en-GB" sz="1500" b="1" i="0" dirty="0">
-                <a:solidFill>
-                  <a:srgbClr val="595959"/>
-                </a:solidFill>
-                <a:latin typeface="Arial"/>
-                <a:cs typeface="Arial"/>
-              </a:rPr>
-              <a:t>Monday bridge</a:t>
-            </a:r>
-          </a:p>
-        </p:txBody>
-      </p:sp>
-      <p:sp>
-        <p:nvSpPr>
-          <p:cNvPr id="47" name="Row values 2"/>
-          <p:cNvSpPr txBox="1"/>
-          <p:nvPr/>
-        </p:nvSpPr>
-        <p:spPr>
-          <a:xfrm>
-            <a:off x="6174429" y="3218688"/>
-            <a:ext cx="5322322" cy="502920"/>
-          </a:xfrm>
-          <a:prstGeom prst="rect">
-            <a:avLst/>
-          </a:prstGeom>
-          <a:noFill/>
-          <a:ln>
-            <a:noFill/>
-          </a:ln>
-        </p:spPr>
-        <p:txBody>
-          <a:bodyPr wrap="square" lIns="0" tIns="0" rIns="0" bIns="0" anchor="t">
-            <a:noAutofit/>
-          </a:bodyPr>
-          <a:lstStyle/>
-          <a:p>
-            <a:pPr marL="0" indent="0" algn="l">
-              <a:spcBef>
-                <a:spcPts val="0"/>
-              </a:spcBef>
-              <a:buNone/>
-            </a:pPr>
-            <a:r>
-              <a:rPr lang="en-GB" sz="2400" b="1" i="0" dirty="0">
-                <a:solidFill>
-                  <a:srgbClr val="C00000"/>
-                </a:solidFill>
-                <a:latin typeface="Arial"/>
-                <a:cs typeface="Arial"/>
-              </a:rPr>
-              <a:t>0.91</a:t>
-            </a:r>
-            <a:r>
-              <a:rPr lang="en-GB" sz="2000" b="0" i="0" dirty="0">
-                <a:solidFill>
-                  <a:srgbClr val="7B7C7E"/>
-                </a:solidFill>
-                <a:latin typeface="Arial"/>
-                <a:cs typeface="Arial"/>
-              </a:rPr>
-              <a:t>  →  </a:t>
-            </a:r>
-            <a:r>
-              <a:rPr lang="en-GB" sz="2400" b="1" i="0" dirty="0">
-                <a:solidFill>
-                  <a:srgbClr val="0072B2"/>
-                </a:solidFill>
-                <a:latin typeface="Arial"/>
-                <a:cs typeface="Arial"/>
-              </a:rPr>
-              <a:t>1.00</a:t>
-            </a:r>
-          </a:p>
-        </p:txBody>
-      </p:sp>
-      <p:sp>
-        <p:nvSpPr>
-          <p:cNvPr id="48" name="Row card 3"/>
-          <p:cNvSpPr/>
-          <p:nvPr/>
-        </p:nvSpPr>
-        <p:spPr>
-          <a:xfrm>
-            <a:off x="5945829" y="3858768"/>
-            <a:ext cx="5779522" cy="914400"/>
-          </a:xfrm>
-          <a:prstGeom prst="roundRect">
-            <a:avLst>
-              <a:gd name="adj" fmla="val 6000"/>
-            </a:avLst>
-          </a:prstGeom>
-          <a:solidFill>
-            <a:srgbClr val="F2F2F2"/>
-          </a:solidFill>
-          <a:ln>
-            <a:noFill/>
-          </a:ln>
-        </p:spPr>
-        <p:txBody>
-          <a:bodyPr wrap="square" lIns="0" tIns="0" rIns="0" bIns="0" anchor="t">
-            <a:noAutofit/>
-          </a:bodyPr>
-          <a:lstStyle/>
-          <a:p>
-            <a:endParaRPr lang="en-GB" dirty="0"/>
-          </a:p>
-        </p:txBody>
-      </p:sp>
-      <p:sp>
-        <p:nvSpPr>
-          <p:cNvPr id="49" name="Row label 3"/>
-          <p:cNvSpPr txBox="1"/>
-          <p:nvPr/>
-        </p:nvSpPr>
-        <p:spPr>
-          <a:xfrm>
-            <a:off x="6174429" y="3931920"/>
-            <a:ext cx="5322322" cy="365760"/>
-          </a:xfrm>
-          <a:prstGeom prst="rect">
-            <a:avLst/>
-          </a:prstGeom>
-          <a:noFill/>
-          <a:ln>
-            <a:noFill/>
-          </a:ln>
-        </p:spPr>
-        <p:txBody>
-          <a:bodyPr wrap="square" lIns="0" tIns="0" rIns="0" bIns="0" anchor="t">
-            <a:noAutofit/>
-          </a:bodyPr>
-          <a:lstStyle/>
-          <a:p>
-            <a:pPr marL="0" indent="0" algn="l">
-              <a:spcBef>
-                <a:spcPts val="0"/>
-              </a:spcBef>
-              <a:buNone/>
-            </a:pPr>
-            <a:r>
-              <a:rPr lang="en-GB" sz="1500" b="1" i="0" dirty="0">
-                <a:solidFill>
-                  <a:srgbClr val="595959"/>
-                </a:solidFill>
-                <a:latin typeface="Arial"/>
-                <a:cs typeface="Arial"/>
-              </a:rPr>
-              <a:t>Easter Tuesday</a:t>
-            </a:r>
-          </a:p>
-        </p:txBody>
-      </p:sp>
-      <p:sp>
-        <p:nvSpPr>
-          <p:cNvPr id="50" name="Row values 3"/>
-          <p:cNvSpPr txBox="1"/>
-          <p:nvPr/>
-        </p:nvSpPr>
-        <p:spPr>
-          <a:xfrm>
-            <a:off x="6174429" y="4242816"/>
-            <a:ext cx="5322322" cy="502920"/>
-          </a:xfrm>
-          <a:prstGeom prst="rect">
-            <a:avLst/>
-          </a:prstGeom>
-          <a:noFill/>
-          <a:ln>
-            <a:noFill/>
-          </a:ln>
-        </p:spPr>
-        <p:txBody>
-          <a:bodyPr wrap="square" lIns="0" tIns="0" rIns="0" bIns="0" anchor="t">
-            <a:noAutofit/>
-          </a:bodyPr>
-          <a:lstStyle/>
-          <a:p>
-            <a:pPr marL="0" indent="0" algn="l">
-              <a:spcBef>
-                <a:spcPts val="0"/>
-              </a:spcBef>
-              <a:buNone/>
-            </a:pPr>
-            <a:r>
-              <a:rPr lang="en-GB" sz="2400" b="1" i="0" dirty="0">
-                <a:solidFill>
-                  <a:srgbClr val="C00000"/>
-                </a:solidFill>
-                <a:latin typeface="Arial"/>
-                <a:cs typeface="Arial"/>
-              </a:rPr>
-              <a:t>0.94</a:t>
-            </a:r>
-            <a:r>
-              <a:rPr lang="en-GB" sz="2000" b="0" i="0" dirty="0">
-                <a:solidFill>
-                  <a:srgbClr val="7B7C7E"/>
-                </a:solidFill>
-                <a:latin typeface="Arial"/>
-                <a:cs typeface="Arial"/>
-              </a:rPr>
-              <a:t>  →  </a:t>
-            </a:r>
-            <a:r>
-              <a:rPr lang="en-GB" sz="2400" b="1" i="0" dirty="0">
-                <a:solidFill>
-                  <a:srgbClr val="0072B2"/>
-                </a:solidFill>
-                <a:latin typeface="Arial"/>
-                <a:cs typeface="Arial"/>
-              </a:rPr>
-              <a:t>0.98</a:t>
-            </a:r>
-          </a:p>
-        </p:txBody>
-      </p:sp>
-      <p:sp>
-        <p:nvSpPr>
-          <p:cNvPr id="52" name="Groups note"/>
-          <p:cNvSpPr txBox="1"/>
-          <p:nvPr/>
-        </p:nvSpPr>
-        <p:spPr>
-          <a:xfrm>
-            <a:off x="5945829" y="4937760"/>
-            <a:ext cx="5779522" cy="685800"/>
-          </a:xfrm>
-          <a:prstGeom prst="rect">
-            <a:avLst/>
-          </a:prstGeom>
-          <a:noFill/>
-          <a:ln>
-            <a:noFill/>
-          </a:ln>
-        </p:spPr>
-        <p:txBody>
-          <a:bodyPr wrap="square" lIns="0" tIns="0" rIns="0" bIns="0" anchor="t">
-            <a:noAutofit/>
-          </a:bodyPr>
-          <a:lstStyle/>
-          <a:p>
-            <a:pPr marL="0" indent="0" algn="l">
-              <a:spcBef>
-                <a:spcPts val="0"/>
-              </a:spcBef>
-              <a:buNone/>
-            </a:pPr>
-            <a:r>
-              <a:rPr lang="en-GB" sz="1500" b="1" i="0" dirty="0">
-                <a:solidFill>
-                  <a:srgbClr val="595959"/>
-                </a:solidFill>
-                <a:latin typeface="Arial"/>
-                <a:cs typeface="Arial"/>
-              </a:rPr>
-              <a:t>Groups outside ±5%: </a:t>
-            </a:r>
-            <a:r>
-              <a:rPr lang="en-GB" sz="1500" b="0" i="0" dirty="0">
-                <a:solidFill>
-                  <a:srgbClr val="595959"/>
-                </a:solidFill>
-                <a:latin typeface="Arial"/>
-                <a:cs typeface="Arial"/>
-              </a:rPr>
-              <a:t>7 of 14 → 1 (14 and 16 August, 0.949)</a:t>
-            </a:r>
-          </a:p>
-        </p:txBody>
-      </p:sp>
-      <p:sp>
-        <p:nvSpPr>
-          <p:cNvPr id="53" name="Caption"/>
-          <p:cNvSpPr txBox="1"/>
-          <p:nvPr/>
-        </p:nvSpPr>
-        <p:spPr>
-          <a:xfrm>
-            <a:off x="466344" y="5650992"/>
-            <a:ext cx="11256264" cy="365760"/>
-          </a:xfrm>
-          <a:prstGeom prst="rect">
-            <a:avLst/>
-          </a:prstGeom>
-          <a:noFill/>
-          <a:ln>
-            <a:noFill/>
-          </a:ln>
-        </p:spPr>
-        <p:txBody>
-          <a:bodyPr wrap="square" lIns="0" tIns="0" rIns="0" bIns="0" anchor="t">
-            <a:noAutofit/>
-          </a:bodyPr>
-          <a:lstStyle/>
-          <a:p>
-            <a:pPr marL="0" indent="0" algn="l">
-              <a:spcBef>
-                <a:spcPts val="0"/>
-              </a:spcBef>
-              <a:buNone/>
-            </a:pPr>
-            <a:r>
-              <a:rPr lang="en-GB" sz="1300" b="1" i="0" dirty="0">
-                <a:solidFill>
-                  <a:srgbClr val="C00000"/>
-                </a:solidFill>
-                <a:latin typeface="Arial"/>
-                <a:cs typeface="Arial"/>
-              </a:rPr>
-              <a:t>Result · Basic vs final calendar.  </a:t>
-            </a:r>
-            <a:r>
-              <a:rPr lang="en-GB" sz="1300" b="0" i="1" dirty="0">
-                <a:solidFill>
-                  <a:srgbClr val="7B7C7E"/>
-                </a:solidFill>
-                <a:latin typeface="Arial"/>
-                <a:cs typeface="Arial"/>
-              </a:rPr>
-              <a:t>Basic: 12 holidays on every day, fixed coefficients. Final: production calendar, 23 time-varying regressors.</a:t>
-            </a:r>
-          </a:p>
-        </p:txBody>
-      </p:sp>
-    </p:spTree>
-    <p:extLst>
-      <p:ext uri="{BB962C8B-B14F-4D97-AF65-F5344CB8AC3E}">
-        <p14:creationId xmlns:p14="http://schemas.microsoft.com/office/powerpoint/2010/main" val="1781916628"/>
-      </p:ext>
-    </p:extLst>
-  </p:cSld>
-  <p:clrMapOvr>
-    <a:masterClrMapping/>
-  </p:clrMapOvr>
-</p:sld>
-</file>
-
 <file path=ppt/slides/slide19.xml><?xml version="1.0" encoding="utf-8"?>
 <p:sld xmlns:a="http://schemas.openxmlformats.org/drawingml/2006/main" xmlns:r="http://schemas.openxmlformats.org/officeDocument/2006/relationships" xmlns:p="http://schemas.openxmlformats.org/presentationml/2006/main">
   <p:cSld>
@@ -13372,7 +13402,7 @@
                   <a:srgbClr val="C00000"/>
                 </a:solidFill>
               </a:rPr>
-              <a:t>What remains: two known limits</a:t>
+              <a:t>Special days back within the ±5% band</a:t>
             </a:r>
           </a:p>
         </p:txBody>
@@ -13456,16 +13486,94 @@
           </a:p>
         </p:txBody>
       </p:sp>
-      <p:sp>
-        <p:nvSpPr>
-          <p:cNvPr id="20" name="Limit card 1"/>
+      <p:pic>
+        <p:nvPicPr>
+          <p:cNvPr id="40" name="DMR special days basic vs final" descr="Boxplots of the DMR on special days of electricity demand, basic calendar above and final calendar below, same scale"/>
+          <p:cNvPicPr>
+            <a:picLocks noChangeAspect="1"/>
+          </p:cNvPicPr>
+          <p:nvPr/>
+        </p:nvPicPr>
+        <p:blipFill>
+          <a:blip r:embed="rId2"/>
+          <a:stretch>
+            <a:fillRect/>
+          </a:stretch>
+        </p:blipFill>
+        <p:spPr>
+          <a:xfrm>
+            <a:off x="466344" y="1161288"/>
+            <a:ext cx="5068005" cy="4434840"/>
+          </a:xfrm>
+          <a:prstGeom prst="rect">
+            <a:avLst/>
+          </a:prstGeom>
+        </p:spPr>
+      </p:pic>
+      <p:sp>
+        <p:nvSpPr>
+          <p:cNvPr id="41" name="Before-after header"/>
+          <p:cNvSpPr txBox="1"/>
+          <p:nvPr/>
+        </p:nvSpPr>
+        <p:spPr>
+          <a:xfrm>
+            <a:off x="5945829" y="1280160"/>
+            <a:ext cx="5779522" cy="457200"/>
+          </a:xfrm>
+          <a:prstGeom prst="rect">
+            <a:avLst/>
+          </a:prstGeom>
+          <a:noFill/>
+          <a:ln>
+            <a:noFill/>
+          </a:ln>
+        </p:spPr>
+        <p:txBody>
+          <a:bodyPr wrap="square" lIns="0" tIns="0" rIns="0" bIns="0" anchor="t">
+            <a:noAutofit/>
+          </a:bodyPr>
+          <a:lstStyle/>
+          <a:p>
+            <a:pPr marL="0" indent="0" algn="l">
+              <a:spcBef>
+                <a:spcPts val="0"/>
+              </a:spcBef>
+              <a:buNone/>
+            </a:pPr>
+            <a:r>
+              <a:rPr lang="en-GB" sz="1800" b="1" i="0" dirty="0">
+                <a:solidFill>
+                  <a:srgbClr val="595959"/>
+                </a:solidFill>
+                <a:latin typeface="Arial"/>
+                <a:cs typeface="Arial"/>
+              </a:rPr>
+              <a:t>Median DMR</a:t>
+            </a:r>
+            <a:r>
+              <a:rPr lang="en-GB" sz="1600" b="0" i="0" dirty="0">
+                <a:solidFill>
+                  <a:srgbClr val="7B7C7E"/>
+                </a:solidFill>
+                <a:latin typeface="Arial"/>
+                <a:cs typeface="Arial"/>
+              </a:rPr>
+              <a:t>   basic → final</a:t>
+            </a:r>
+          </a:p>
+        </p:txBody>
+      </p:sp>
+      <p:sp>
+        <p:nvSpPr>
+          <p:cNvPr id="42" name="Row card 1"/>
           <p:cNvSpPr/>
           <p:nvPr/>
         </p:nvSpPr>
         <p:spPr>
           <a:xfrm>
-            <a:off x="466344" y="1325880"/>
-            <a:ext cx="5486400" cy="3886200"/>
+            <a:off x="5945829" y="1810512"/>
+            <a:ext cx="5779522" cy="914400"/>
           </a:xfrm>
           <a:prstGeom prst="roundRect">
             <a:avLst>
@@ -13491,14 +13599,14 @@
       </p:sp>
       <p:sp>
         <p:nvSpPr>
-          <p:cNvPr id="21" name="Limit heading 1"/>
+          <p:cNvPr id="43" name="Row label 1"/>
           <p:cNvSpPr txBox="1"/>
           <p:nvPr/>
         </p:nvSpPr>
         <p:spPr>
           <a:xfrm>
-            <a:off x="740664" y="1527048"/>
-            <a:ext cx="4937760" cy="411480"/>
+            <a:off x="6174429" y="1883664"/>
+            <a:ext cx="5322322" cy="365760"/>
           </a:xfrm>
           <a:prstGeom prst="rect">
             <a:avLst/>
@@ -13521,28 +13629,28 @@
               <a:buNone/>
             </a:pPr>
             <a:r>
-              <a:rPr lang="en-GB" sz="1900" b="1" i="0" dirty="0">
+              <a:rPr lang="en-GB" sz="1500" b="1" i="0" dirty="0">
                 <a:solidFill>
                   <a:srgbClr val="595959"/>
                 </a:solidFill>
                 <a:latin typeface="Arial"/>
                 <a:cs typeface="Arial"/>
               </a:rPr>
-              <a:t>Holidays: slightly under-corrected</a:t>
-            </a:r>
-          </a:p>
-        </p:txBody>
-      </p:sp>
-      <p:sp>
-        <p:nvSpPr>
-          <p:cNvPr id="22" name="Limit value 1"/>
+              <a:t>Holiday on Saturday</a:t>
+            </a:r>
+          </a:p>
+        </p:txBody>
+      </p:sp>
+      <p:sp>
+        <p:nvSpPr>
+          <p:cNvPr id="44" name="Row values 1"/>
           <p:cNvSpPr txBox="1"/>
           <p:nvPr/>
         </p:nvSpPr>
         <p:spPr>
           <a:xfrm>
-            <a:off x="740664" y="2011680"/>
-            <a:ext cx="4937760" cy="1097280"/>
+            <a:off x="6174429" y="2194560"/>
+            <a:ext cx="5322322" cy="502920"/>
           </a:xfrm>
           <a:prstGeom prst="rect">
             <a:avLst/>
@@ -13565,38 +13673,81 @@
               <a:buNone/>
             </a:pPr>
             <a:r>
-              <a:rPr lang="en-GB" sz="2800" b="1" i="0" dirty="0">
+              <a:rPr lang="en-GB" sz="2400" b="1" i="0" dirty="0">
                 <a:solidFill>
                   <a:srgbClr val="C00000"/>
                 </a:solidFill>
                 <a:latin typeface="Arial"/>
                 <a:cs typeface="Arial"/>
               </a:rPr>
-              <a:t>0.98</a:t>
-            </a:r>
-            <a:r>
-              <a:rPr lang="en-GB" sz="1500" b="0" i="0" dirty="0">
+              <a:t>1.09</a:t>
+            </a:r>
+            <a:r>
+              <a:rPr lang="en-GB" sz="2000" b="0" i="0" dirty="0">
                 <a:solidFill>
                   <a:srgbClr val="7B7C7E"/>
                 </a:solidFill>
                 <a:latin typeface="Arial"/>
                 <a:cs typeface="Arial"/>
               </a:rPr>
-              <a:t>  median DMR, final calendar</a:t>
-            </a:r>
-          </a:p>
-        </p:txBody>
-      </p:sp>
-      <p:sp>
-        <p:nvSpPr>
-          <p:cNvPr id="23" name="Limit text 1"/>
+              <a:t>  →  </a:t>
+            </a:r>
+            <a:r>
+              <a:rPr lang="en-GB" sz="2400" b="1" i="0" dirty="0">
+                <a:solidFill>
+                  <a:srgbClr val="0072B2"/>
+                </a:solidFill>
+                <a:latin typeface="Arial"/>
+                <a:cs typeface="Arial"/>
+              </a:rPr>
+              <a:t>1.01</a:t>
+            </a:r>
+          </a:p>
+        </p:txBody>
+      </p:sp>
+      <p:sp>
+        <p:nvSpPr>
+          <p:cNvPr id="45" name="Row card 2"/>
+          <p:cNvSpPr/>
+          <p:nvPr/>
+        </p:nvSpPr>
+        <p:spPr>
+          <a:xfrm>
+            <a:off x="5945829" y="2834640"/>
+            <a:ext cx="5779522" cy="914400"/>
+          </a:xfrm>
+          <a:prstGeom prst="roundRect">
+            <a:avLst>
+              <a:gd name="adj" fmla="val 6000"/>
+            </a:avLst>
+          </a:prstGeom>
+          <a:solidFill>
+            <a:srgbClr val="F2F2F2"/>
+          </a:solidFill>
+          <a:ln>
+            <a:noFill/>
+          </a:ln>
+        </p:spPr>
+        <p:txBody>
+          <a:bodyPr wrap="square" lIns="0" tIns="0" rIns="0" bIns="0" anchor="t">
+            <a:noAutofit/>
+          </a:bodyPr>
+          <a:lstStyle/>
+          <a:p>
+            <a:endParaRPr lang="en-GB" dirty="0"/>
+          </a:p>
+        </p:txBody>
+      </p:sp>
+      <p:sp>
+        <p:nvSpPr>
+          <p:cNvPr id="46" name="Row label 2"/>
           <p:cNvSpPr txBox="1"/>
           <p:nvPr/>
         </p:nvSpPr>
         <p:spPr>
           <a:xfrm>
-            <a:off x="740664" y="3154680"/>
-            <a:ext cx="4937760" cy="1965960"/>
+            <a:off x="6174429" y="2907792"/>
+            <a:ext cx="5322322" cy="365760"/>
           </a:xfrm>
           <a:prstGeom prst="rect">
             <a:avLst/>
@@ -13619,46 +13770,92 @@
               <a:buNone/>
             </a:pPr>
             <a:r>
-              <a:rPr lang="en-GB" sz="1500" b="0" i="0" dirty="0">
-                <a:solidFill>
-                  <a:srgbClr val="636462"/>
-                </a:solidFill>
-                <a:latin typeface="Arial"/>
-                <a:cs typeface="Arial"/>
-              </a:rPr>
-              <a:t>Inside the ±5% band, but below 1 on every weekday and in the Easter window (0.98–0.99).</a:t>
-            </a:r>
-          </a:p>
+              <a:rPr lang="en-GB" sz="1500" b="1" i="0" dirty="0">
+                <a:solidFill>
+                  <a:srgbClr val="595959"/>
+                </a:solidFill>
+                <a:latin typeface="Arial"/>
+                <a:cs typeface="Arial"/>
+              </a:rPr>
+              <a:t>Monday bridge</a:t>
+            </a:r>
+          </a:p>
+        </p:txBody>
+      </p:sp>
+      <p:sp>
+        <p:nvSpPr>
+          <p:cNvPr id="47" name="Row values 2"/>
+          <p:cNvSpPr txBox="1"/>
+          <p:nvPr/>
+        </p:nvSpPr>
+        <p:spPr>
+          <a:xfrm>
+            <a:off x="6174429" y="3218688"/>
+            <a:ext cx="5322322" cy="502920"/>
+          </a:xfrm>
+          <a:prstGeom prst="rect">
+            <a:avLst/>
+          </a:prstGeom>
+          <a:noFill/>
+          <a:ln>
+            <a:noFill/>
+          </a:ln>
+        </p:spPr>
+        <p:txBody>
+          <a:bodyPr wrap="square" lIns="0" tIns="0" rIns="0" bIns="0" anchor="t">
+            <a:noAutofit/>
+          </a:bodyPr>
+          <a:lstStyle/>
           <a:p>
             <a:pPr marL="0" indent="0" algn="l">
               <a:spcBef>
-                <a:spcPts val="800"/>
+                <a:spcPts val="0"/>
               </a:spcBef>
               <a:buNone/>
             </a:pPr>
             <a:r>
-              <a:rPr lang="en-GB" sz="1500" b="0" i="0" dirty="0">
-                <a:solidFill>
-                  <a:srgbClr val="636462"/>
-                </a:solidFill>
-                <a:latin typeface="Arial"/>
-                <a:cs typeface="Arial"/>
-              </a:rPr>
-              <a:t>Cause: in the two-step estimation the calendar is fitted with a weekly airline only. Its local level absorbs part of the drop, so the coefficients come out a little too small.</a:t>
-            </a:r>
-          </a:p>
-        </p:txBody>
-      </p:sp>
-      <p:sp>
-        <p:nvSpPr>
-          <p:cNvPr id="30" name="Limit card 2"/>
+              <a:rPr lang="en-GB" sz="2400" b="1" i="0" dirty="0">
+                <a:solidFill>
+                  <a:srgbClr val="C00000"/>
+                </a:solidFill>
+                <a:latin typeface="Arial"/>
+                <a:cs typeface="Arial"/>
+              </a:rPr>
+              <a:t>0.91</a:t>
+            </a:r>
+            <a:r>
+              <a:rPr lang="en-GB" sz="2000" b="0" i="0" dirty="0">
+                <a:solidFill>
+                  <a:srgbClr val="7B7C7E"/>
+                </a:solidFill>
+                <a:latin typeface="Arial"/>
+                <a:cs typeface="Arial"/>
+              </a:rPr>
+              <a:t>  →  </a:t>
+            </a:r>
+            <a:r>
+              <a:rPr lang="en-GB" sz="2400" b="1" i="0" dirty="0">
+                <a:solidFill>
+                  <a:srgbClr val="0072B2"/>
+                </a:solidFill>
+                <a:latin typeface="Arial"/>
+                <a:cs typeface="Arial"/>
+              </a:rPr>
+              <a:t>1.00</a:t>
+            </a:r>
+          </a:p>
+        </p:txBody>
+      </p:sp>
+      <p:sp>
+        <p:nvSpPr>
+          <p:cNvPr id="48" name="Row card 3"/>
           <p:cNvSpPr/>
           <p:nvPr/>
         </p:nvSpPr>
         <p:spPr>
           <a:xfrm>
-            <a:off x="6236208" y="1325880"/>
-            <a:ext cx="5486400" cy="3886200"/>
+            <a:off x="5945829" y="3858768"/>
+            <a:ext cx="5779522" cy="914400"/>
           </a:xfrm>
           <a:prstGeom prst="roundRect">
             <a:avLst>
@@ -13684,14 +13881,14 @@
       </p:sp>
       <p:sp>
         <p:nvSpPr>
-          <p:cNvPr id="31" name="Limit heading 2"/>
+          <p:cNvPr id="49" name="Row label 3"/>
           <p:cNvSpPr txBox="1"/>
           <p:nvPr/>
         </p:nvSpPr>
         <p:spPr>
           <a:xfrm>
-            <a:off x="6510528" y="1527048"/>
-            <a:ext cx="4937760" cy="411480"/>
+            <a:off x="6174429" y="3931920"/>
+            <a:ext cx="5322322" cy="365760"/>
           </a:xfrm>
           <a:prstGeom prst="rect">
             <a:avLst/>
@@ -13714,28 +13911,28 @@
               <a:buNone/>
             </a:pPr>
             <a:r>
-              <a:rPr lang="en-GB" sz="1900" b="1" i="0" dirty="0">
+              <a:rPr lang="en-GB" sz="1500" b="1" i="0" dirty="0">
                 <a:solidFill>
                   <a:srgbClr val="595959"/>
                 </a:solidFill>
                 <a:latin typeface="Arial"/>
                 <a:cs typeface="Arial"/>
               </a:rPr>
-              <a:t>August: a weaker weekly pattern</a:t>
-            </a:r>
-          </a:p>
-        </p:txBody>
-      </p:sp>
-      <p:sp>
-        <p:nvSpPr>
-          <p:cNvPr id="32" name="Limit value 2"/>
+              <a:t>Easter Tuesday</a:t>
+            </a:r>
+          </a:p>
+        </p:txBody>
+      </p:sp>
+      <p:sp>
+        <p:nvSpPr>
+          <p:cNvPr id="50" name="Row values 3"/>
           <p:cNvSpPr txBox="1"/>
           <p:nvPr/>
         </p:nvSpPr>
         <p:spPr>
           <a:xfrm>
-            <a:off x="6510528" y="2011680"/>
-            <a:ext cx="4937760" cy="1097280"/>
+            <a:off x="6174429" y="4242816"/>
+            <a:ext cx="5322322" cy="502920"/>
           </a:xfrm>
           <a:prstGeom prst="rect">
             <a:avLst/>
@@ -13758,26 +13955,62 @@
               <a:buNone/>
             </a:pPr>
             <a:r>
-              <a:rPr lang="en-GB" sz="2800" b="1" i="0" dirty="0">
+              <a:rPr lang="en-GB" sz="2400" b="1" i="0" dirty="0">
                 <a:solidFill>
                   <a:srgbClr val="C00000"/>
                 </a:solidFill>
                 <a:latin typeface="Arial"/>
                 <a:cs typeface="Arial"/>
               </a:rPr>
-              <a:t>1.03–1.07</a:t>
-            </a:r>
-            <a:r>
-              <a:rPr lang="en-GB" sz="1500" b="0" i="0" dirty="0">
+              <a:t>0.94</a:t>
+            </a:r>
+            <a:r>
+              <a:rPr lang="en-GB" sz="2000" b="0" i="0" dirty="0">
                 <a:solidFill>
                   <a:srgbClr val="7B7C7E"/>
                 </a:solidFill>
                 <a:latin typeface="Arial"/>
                 <a:cs typeface="Arial"/>
               </a:rPr>
-              <a:t>  weekends</a:t>
-            </a:r>
-          </a:p>
+              <a:t>  →  </a:t>
+            </a:r>
+            <a:r>
+              <a:rPr lang="en-GB" sz="2400" b="1" i="0" dirty="0">
+                <a:solidFill>
+                  <a:srgbClr val="0072B2"/>
+                </a:solidFill>
+                <a:latin typeface="Arial"/>
+                <a:cs typeface="Arial"/>
+              </a:rPr>
+              <a:t>0.98</a:t>
+            </a:r>
+          </a:p>
+        </p:txBody>
+      </p:sp>
+      <p:sp>
+        <p:nvSpPr>
+          <p:cNvPr id="52" name="Groups note"/>
+          <p:cNvSpPr txBox="1"/>
+          <p:nvPr/>
+        </p:nvSpPr>
+        <p:spPr>
+          <a:xfrm>
+            <a:off x="5945829" y="4937760"/>
+            <a:ext cx="5779522" cy="685800"/>
+          </a:xfrm>
+          <a:prstGeom prst="rect">
+            <a:avLst/>
+          </a:prstGeom>
+          <a:noFill/>
+          <a:ln>
+            <a:noFill/>
+          </a:ln>
+        </p:spPr>
+        <p:txBody>
+          <a:bodyPr wrap="square" lIns="0" tIns="0" rIns="0" bIns="0" anchor="t">
+            <a:noAutofit/>
+          </a:bodyPr>
+          <a:lstStyle/>
           <a:p>
             <a:pPr marL="0" indent="0" algn="l">
               <a:spcBef>
@@ -13786,38 +14019,38 @@
               <a:buNone/>
             </a:pPr>
             <a:r>
-              <a:rPr lang="en-GB" sz="2800" b="1" i="0" dirty="0">
-                <a:solidFill>
-                  <a:srgbClr val="0072B2"/>
-                </a:solidFill>
-                <a:latin typeface="Arial"/>
-                <a:cs typeface="Arial"/>
-              </a:rPr>
-              <a:t>0.94–0.97</a:t>
+              <a:rPr lang="en-GB" sz="1500" b="1" i="0" dirty="0">
+                <a:solidFill>
+                  <a:srgbClr val="595959"/>
+                </a:solidFill>
+                <a:latin typeface="Arial"/>
+                <a:cs typeface="Arial"/>
+              </a:rPr>
+              <a:t>Groups outside ±5%: </a:t>
             </a:r>
             <a:r>
               <a:rPr lang="en-GB" sz="1500" b="0" i="0" dirty="0">
                 <a:solidFill>
-                  <a:srgbClr val="7B7C7E"/>
-                </a:solidFill>
-                <a:latin typeface="Arial"/>
-                <a:cs typeface="Arial"/>
-              </a:rPr>
-              <a:t>  weekdays</a:t>
-            </a:r>
-          </a:p>
-        </p:txBody>
-      </p:sp>
-      <p:sp>
-        <p:nvSpPr>
-          <p:cNvPr id="33" name="Limit text 2"/>
+                  <a:srgbClr val="595959"/>
+                </a:solidFill>
+                <a:latin typeface="Arial"/>
+                <a:cs typeface="Arial"/>
+              </a:rPr>
+              <a:t>7 of 14 → 1 (14 and 16 August, 0.949)</a:t>
+            </a:r>
+          </a:p>
+        </p:txBody>
+      </p:sp>
+      <p:sp>
+        <p:nvSpPr>
+          <p:cNvPr id="53" name="Caption"/>
           <p:cNvSpPr txBox="1"/>
           <p:nvPr/>
         </p:nvSpPr>
         <p:spPr>
           <a:xfrm>
-            <a:off x="6510528" y="3154680"/>
-            <a:ext cx="4937760" cy="1965960"/>
+            <a:off x="466344" y="5650992"/>
+            <a:ext cx="11256264" cy="365760"/>
           </a:xfrm>
           <a:prstGeom prst="rect">
             <a:avLst/>
@@ -13840,86 +14073,24 @@
               <a:buNone/>
             </a:pPr>
             <a:r>
-              <a:rPr lang="en-GB" sz="1500" b="0" i="0" dirty="0">
-                <a:solidFill>
-                  <a:srgbClr val="636462"/>
-                </a:solidFill>
-                <a:latin typeface="Arial"/>
-                <a:cs typeface="Arial"/>
-              </a:rPr>
-              <a:t>Over the whole month, and the same with the basic calendar: not a calendar error.</a:t>
-            </a:r>
-          </a:p>
-          <a:p>
-            <a:pPr marL="0" indent="0" algn="l">
-              <a:spcBef>
-                <a:spcPts val="800"/>
-              </a:spcBef>
-              <a:buNone/>
-            </a:pPr>
-            <a:r>
-              <a:rPr lang="en-GB" sz="1500" b="0" i="0" dirty="0">
-                <a:solidFill>
-                  <a:srgbClr val="636462"/>
-                </a:solidFill>
-                <a:latin typeface="Arial"/>
-                <a:cs typeface="Arial"/>
-              </a:rPr>
-              <a:t>Cause: with plants closed, weekdays and weekends get closer, but the estimated weekly seasonality is the same all year. This also explains 14 and 16 August at 0.949.</a:t>
-            </a:r>
-          </a:p>
-        </p:txBody>
-      </p:sp>
-      <p:sp>
-        <p:nvSpPr>
-          <p:cNvPr id="50" name="Open points"/>
-          <p:cNvSpPr txBox="1"/>
-          <p:nvPr/>
-        </p:nvSpPr>
-        <p:spPr>
-          <a:xfrm>
-            <a:off x="466344" y="5440680"/>
-            <a:ext cx="11256264" cy="457200"/>
-          </a:xfrm>
-          <a:prstGeom prst="rect">
-            <a:avLst/>
-          </a:prstGeom>
-          <a:noFill/>
-          <a:ln>
-            <a:noFill/>
-          </a:ln>
-        </p:spPr>
-        <p:txBody>
-          <a:bodyPr wrap="square" lIns="0" tIns="0" rIns="0" bIns="0" anchor="t">
-            <a:noAutofit/>
-          </a:bodyPr>
-          <a:lstStyle/>
-          <a:p>
-            <a:pPr marL="0" indent="0" algn="l">
-              <a:spcBef>
-                <a:spcPts val="0"/>
-              </a:spcBef>
-              <a:buNone/>
-            </a:pPr>
-            <a:r>
-              <a:rPr lang="en-GB" sz="1700" b="1" i="0" dirty="0">
+              <a:rPr lang="en-GB" sz="1300" b="1" i="0" dirty="0">
                 <a:solidFill>
                   <a:srgbClr val="C00000"/>
                 </a:solidFill>
                 <a:latin typeface="Arial"/>
                 <a:cs typeface="Arial"/>
               </a:rPr>
-              <a:t>Open points: </a:t>
-            </a:r>
-            <a:r>
-              <a:rPr lang="en-GB" sz="1700" b="0" i="0" dirty="0">
-                <a:solidFill>
-                  <a:srgbClr val="595959"/>
-                </a:solidFill>
-                <a:latin typeface="Arial"/>
-                <a:cs typeface="Arial"/>
-              </a:rPr>
-              <a:t>temperature (cooling and heating degree days) and a weekly pattern that changes within the year.</a:t>
+              <a:t>Result · Basic vs final calendar.  </a:t>
+            </a:r>
+            <a:r>
+              <a:rPr lang="en-GB" sz="1300" b="0" i="1" dirty="0">
+                <a:solidFill>
+                  <a:srgbClr val="7B7C7E"/>
+                </a:solidFill>
+                <a:latin typeface="Arial"/>
+                <a:cs typeface="Arial"/>
+              </a:rPr>
+              <a:t>Basic: 12 holidays on every day, fixed coefficients. Final: production calendar, 23 time-varying regressors.</a:t>
             </a:r>
           </a:p>
         </p:txBody>
@@ -14590,7 +14761,7 @@
                   <a:srgbClr val="C00000"/>
                 </a:solidFill>
               </a:rPr>
-              <a:t>Pre-treatment: outliers show what is missing</a:t>
+              <a:t>What remains: two known limits</a:t>
             </a:r>
           </a:p>
         </p:txBody>
@@ -14674,40 +14845,16 @@
           </a:p>
         </p:txBody>
       </p:sp>
-      <p:pic>
-        <p:nvPicPr>
-          <p:cNvPr id="40" name="Pre-treatment table" descr="Table of the pre-treatment model for electricity demand: MA parameters and 15 outliers with dates, coefficients and events"/>
-          <p:cNvPicPr>
-            <a:picLocks noChangeAspect="1"/>
-          </p:cNvPicPr>
-          <p:nvPr/>
-        </p:nvPicPr>
-        <p:blipFill>
-          <a:blip r:embed="rId2"/>
-          <a:stretch>
-            <a:fillRect/>
-          </a:stretch>
-        </p:blipFill>
-        <p:spPr>
-          <a:xfrm>
-            <a:off x="466344" y="1371600"/>
-            <a:ext cx="8001000" cy="3501823"/>
-          </a:xfrm>
-          <a:prstGeom prst="rect">
-            <a:avLst/>
-          </a:prstGeom>
-        </p:spPr>
-      </p:pic>
-      <p:sp>
-        <p:nvSpPr>
-          <p:cNvPr id="41" name="Outlier card"/>
+      <p:sp>
+        <p:nvSpPr>
+          <p:cNvPr id="20" name="Limit card 1"/>
           <p:cNvSpPr/>
           <p:nvPr/>
         </p:nvSpPr>
         <p:spPr>
           <a:xfrm>
-            <a:off x="8741664" y="1325880"/>
-            <a:ext cx="2983687" cy="4023360"/>
+            <a:off x="466344" y="1325880"/>
+            <a:ext cx="5486400" cy="3886200"/>
           </a:xfrm>
           <a:prstGeom prst="roundRect">
             <a:avLst>
@@ -14733,14 +14880,14 @@
       </p:sp>
       <p:sp>
         <p:nvSpPr>
-          <p:cNvPr id="42" name="Outlier value 1"/>
+          <p:cNvPr id="21" name="Limit heading 1"/>
           <p:cNvSpPr txBox="1"/>
           <p:nvPr/>
         </p:nvSpPr>
         <p:spPr>
           <a:xfrm>
-            <a:off x="8942832" y="1463040"/>
-            <a:ext cx="2617927" cy="548640"/>
+            <a:off x="740664" y="1527048"/>
+            <a:ext cx="4937760" cy="411480"/>
           </a:xfrm>
           <a:prstGeom prst="rect">
             <a:avLst/>
@@ -14763,28 +14910,28 @@
               <a:buNone/>
             </a:pPr>
             <a:r>
-              <a:rPr lang="en-GB" sz="3000" b="1" i="0" dirty="0">
-                <a:solidFill>
-                  <a:srgbClr val="C00000"/>
-                </a:solidFill>
-                <a:latin typeface="Arial"/>
-                <a:cs typeface="Arial"/>
-              </a:rPr>
-              <a:t>10</a:t>
-            </a:r>
-          </a:p>
-        </p:txBody>
-      </p:sp>
-      <p:sp>
-        <p:nvSpPr>
-          <p:cNvPr id="43" name="Outlier label 1"/>
+              <a:rPr lang="en-GB" sz="1900" b="1" i="0" dirty="0">
+                <a:solidFill>
+                  <a:srgbClr val="595959"/>
+                </a:solidFill>
+                <a:latin typeface="Arial"/>
+                <a:cs typeface="Arial"/>
+              </a:rPr>
+              <a:t>Holidays: slightly under-corrected</a:t>
+            </a:r>
+          </a:p>
+        </p:txBody>
+      </p:sp>
+      <p:sp>
+        <p:nvSpPr>
+          <p:cNvPr id="22" name="Limit value 1"/>
           <p:cNvSpPr txBox="1"/>
           <p:nvPr/>
         </p:nvSpPr>
         <p:spPr>
           <a:xfrm>
-            <a:off x="8942832" y="1993392"/>
-            <a:ext cx="2617927" cy="731520"/>
+            <a:off x="740664" y="2011680"/>
+            <a:ext cx="4937760" cy="1097280"/>
           </a:xfrm>
           <a:prstGeom prst="rect">
             <a:avLst/>
@@ -14807,28 +14954,38 @@
               <a:buNone/>
             </a:pPr>
             <a:r>
-              <a:rPr lang="en-GB" sz="1300" b="0" i="0" dirty="0">
-                <a:solidFill>
-                  <a:srgbClr val="595959"/>
-                </a:solidFill>
-                <a:latin typeface="Arial"/>
-                <a:cs typeface="Arial"/>
-              </a:rPr>
-              <a:t>summer level shifts, mostly in pairs of opposite sign: temperature is not modelled</a:t>
-            </a:r>
-          </a:p>
-        </p:txBody>
-      </p:sp>
-      <p:sp>
-        <p:nvSpPr>
-          <p:cNvPr id="44" name="Outlier value 2"/>
+              <a:rPr lang="en-GB" sz="2800" b="1" i="0" dirty="0">
+                <a:solidFill>
+                  <a:srgbClr val="C00000"/>
+                </a:solidFill>
+                <a:latin typeface="Arial"/>
+                <a:cs typeface="Arial"/>
+              </a:rPr>
+              <a:t>0.98</a:t>
+            </a:r>
+            <a:r>
+              <a:rPr lang="en-GB" sz="1500" b="0" i="0" dirty="0">
+                <a:solidFill>
+                  <a:srgbClr val="7B7C7E"/>
+                </a:solidFill>
+                <a:latin typeface="Arial"/>
+                <a:cs typeface="Arial"/>
+              </a:rPr>
+              <a:t>  median DMR, final calendar</a:t>
+            </a:r>
+          </a:p>
+        </p:txBody>
+      </p:sp>
+      <p:sp>
+        <p:nvSpPr>
+          <p:cNvPr id="23" name="Limit text 1"/>
           <p:cNvSpPr txBox="1"/>
           <p:nvPr/>
         </p:nvSpPr>
         <p:spPr>
           <a:xfrm>
-            <a:off x="8942832" y="2743200"/>
-            <a:ext cx="2617927" cy="548640"/>
+            <a:off x="740664" y="3154680"/>
+            <a:ext cx="4937760" cy="1965960"/>
           </a:xfrm>
           <a:prstGeom prst="rect">
             <a:avLst/>
@@ -14851,28 +15008,79 @@
               <a:buNone/>
             </a:pPr>
             <a:r>
-              <a:rPr lang="en-GB" sz="3000" b="1" i="0" dirty="0">
-                <a:solidFill>
-                  <a:srgbClr val="942639"/>
-                </a:solidFill>
-                <a:latin typeface="Arial"/>
-                <a:cs typeface="Arial"/>
-              </a:rPr>
-              <a:t>4</a:t>
-            </a:r>
-          </a:p>
-        </p:txBody>
-      </p:sp>
-      <p:sp>
-        <p:nvSpPr>
-          <p:cNvPr id="45" name="Outlier label 2"/>
+              <a:rPr lang="en-GB" sz="1500" b="0" i="0" dirty="0">
+                <a:solidFill>
+                  <a:srgbClr val="636462"/>
+                </a:solidFill>
+                <a:latin typeface="Arial"/>
+                <a:cs typeface="Arial"/>
+              </a:rPr>
+              <a:t>Inside the ±5% band, but below 1 on every weekday and in the Easter window (0.98–0.99).</a:t>
+            </a:r>
+          </a:p>
+          <a:p>
+            <a:pPr marL="0" indent="0" algn="l">
+              <a:spcBef>
+                <a:spcPts val="800"/>
+              </a:spcBef>
+              <a:buNone/>
+            </a:pPr>
+            <a:r>
+              <a:rPr lang="en-GB" sz="1500" b="0" i="0" dirty="0">
+                <a:solidFill>
+                  <a:srgbClr val="636462"/>
+                </a:solidFill>
+                <a:latin typeface="Arial"/>
+                <a:cs typeface="Arial"/>
+              </a:rPr>
+              <a:t>Cause: in the two-step estimation the calendar is fitted with a weekly airline only. Its local level absorbs part of the drop, so the coefficients come out a little too small.</a:t>
+            </a:r>
+          </a:p>
+        </p:txBody>
+      </p:sp>
+      <p:sp>
+        <p:nvSpPr>
+          <p:cNvPr id="30" name="Limit card 2"/>
+          <p:cNvSpPr/>
+          <p:nvPr/>
+        </p:nvSpPr>
+        <p:spPr>
+          <a:xfrm>
+            <a:off x="6236208" y="1325880"/>
+            <a:ext cx="5486400" cy="3886200"/>
+          </a:xfrm>
+          <a:prstGeom prst="roundRect">
+            <a:avLst>
+              <a:gd name="adj" fmla="val 6000"/>
+            </a:avLst>
+          </a:prstGeom>
+          <a:solidFill>
+            <a:srgbClr val="F2F2F2"/>
+          </a:solidFill>
+          <a:ln>
+            <a:noFill/>
+          </a:ln>
+        </p:spPr>
+        <p:txBody>
+          <a:bodyPr wrap="square" lIns="0" tIns="0" rIns="0" bIns="0" anchor="t">
+            <a:noAutofit/>
+          </a:bodyPr>
+          <a:lstStyle/>
+          <a:p>
+            <a:endParaRPr lang="en-GB" dirty="0"/>
+          </a:p>
+        </p:txBody>
+      </p:sp>
+      <p:sp>
+        <p:nvSpPr>
+          <p:cNvPr id="31" name="Limit heading 2"/>
           <p:cNvSpPr txBox="1"/>
           <p:nvPr/>
         </p:nvSpPr>
         <p:spPr>
           <a:xfrm>
-            <a:off x="8942832" y="3273552"/>
-            <a:ext cx="2617927" cy="731520"/>
+            <a:off x="6510528" y="1527048"/>
+            <a:ext cx="4937760" cy="411480"/>
           </a:xfrm>
           <a:prstGeom prst="rect">
             <a:avLst/>
@@ -14895,28 +15103,28 @@
               <a:buNone/>
             </a:pPr>
             <a:r>
-              <a:rPr lang="en-GB" sz="1300" b="0" i="0" dirty="0">
+              <a:rPr lang="en-GB" sz="1900" b="1" i="0" dirty="0">
                 <a:solidFill>
                   <a:srgbClr val="595959"/>
                 </a:solidFill>
                 <a:latin typeface="Arial"/>
                 <a:cs typeface="Arial"/>
               </a:rPr>
-              <a:t>Covid-19 (lockdown, reopenings) and the 2022 energy crisis</a:t>
-            </a:r>
-          </a:p>
-        </p:txBody>
-      </p:sp>
-      <p:sp>
-        <p:nvSpPr>
-          <p:cNvPr id="46" name="Outlier value 3"/>
+              <a:t>August: a weaker weekly pattern</a:t>
+            </a:r>
+          </a:p>
+        </p:txBody>
+      </p:sp>
+      <p:sp>
+        <p:nvSpPr>
+          <p:cNvPr id="32" name="Limit value 2"/>
           <p:cNvSpPr txBox="1"/>
           <p:nvPr/>
         </p:nvSpPr>
         <p:spPr>
           <a:xfrm>
-            <a:off x="8942832" y="4023360"/>
-            <a:ext cx="2617927" cy="548640"/>
+            <a:off x="6510528" y="2011680"/>
+            <a:ext cx="4937760" cy="1097280"/>
           </a:xfrm>
           <a:prstGeom prst="rect">
             <a:avLst/>
@@ -14939,42 +15147,26 @@
               <a:buNone/>
             </a:pPr>
             <a:r>
-              <a:rPr lang="en-GB" sz="3000" b="1" i="0" dirty="0">
+              <a:rPr lang="en-GB" sz="2800" b="1" i="0" dirty="0">
+                <a:solidFill>
+                  <a:srgbClr val="C00000"/>
+                </a:solidFill>
+                <a:latin typeface="Arial"/>
+                <a:cs typeface="Arial"/>
+              </a:rPr>
+              <a:t>1.03–1.07</a:t>
+            </a:r>
+            <a:r>
+              <a:rPr lang="en-GB" sz="1500" b="0" i="0" dirty="0">
                 <a:solidFill>
                   <a:srgbClr val="7B7C7E"/>
                 </a:solidFill>
                 <a:latin typeface="Arial"/>
                 <a:cs typeface="Arial"/>
               </a:rPr>
-              <a:t>1</a:t>
-            </a:r>
-          </a:p>
-        </p:txBody>
-      </p:sp>
-      <p:sp>
-        <p:nvSpPr>
-          <p:cNvPr id="47" name="Outlier label 3"/>
-          <p:cNvSpPr txBox="1"/>
-          <p:nvPr/>
-        </p:nvSpPr>
-        <p:spPr>
-          <a:xfrm>
-            <a:off x="8942832" y="4553712"/>
-            <a:ext cx="2617927" cy="731520"/>
-          </a:xfrm>
-          <a:prstGeom prst="rect">
-            <a:avLst/>
-          </a:prstGeom>
-          <a:noFill/>
-          <a:ln>
-            <a:noFill/>
-          </a:ln>
-        </p:spPr>
-        <p:txBody>
-          <a:bodyPr wrap="square" lIns="0" tIns="0" rIns="0" bIns="0" anchor="t">
-            <a:noAutofit/>
-          </a:bodyPr>
-          <a:lstStyle/>
+              <a:t>  weekends</a:t>
+            </a:r>
+          </a:p>
           <a:p>
             <a:pPr marL="0" indent="0" algn="l">
               <a:spcBef>
@@ -14983,28 +15175,38 @@
               <a:buNone/>
             </a:pPr>
             <a:r>
-              <a:rPr lang="en-GB" sz="1300" b="0" i="0" dirty="0">
-                <a:solidFill>
-                  <a:srgbClr val="595959"/>
-                </a:solidFill>
-                <a:latin typeface="Arial"/>
-                <a:cs typeface="Arial"/>
-              </a:rPr>
-              <a:t>additive outlier (21/08/2015): a storm with a sharp temperature drop</a:t>
-            </a:r>
-          </a:p>
-        </p:txBody>
-      </p:sp>
-      <p:sp>
-        <p:nvSpPr>
-          <p:cNvPr id="50" name="Table caption"/>
+              <a:rPr lang="en-GB" sz="2800" b="1" i="0" dirty="0">
+                <a:solidFill>
+                  <a:srgbClr val="0072B2"/>
+                </a:solidFill>
+                <a:latin typeface="Arial"/>
+                <a:cs typeface="Arial"/>
+              </a:rPr>
+              <a:t>0.94–0.97</a:t>
+            </a:r>
+            <a:r>
+              <a:rPr lang="en-GB" sz="1500" b="0" i="0" dirty="0">
+                <a:solidFill>
+                  <a:srgbClr val="7B7C7E"/>
+                </a:solidFill>
+                <a:latin typeface="Arial"/>
+                <a:cs typeface="Arial"/>
+              </a:rPr>
+              <a:t>  weekdays</a:t>
+            </a:r>
+          </a:p>
+        </p:txBody>
+      </p:sp>
+      <p:sp>
+        <p:nvSpPr>
+          <p:cNvPr id="33" name="Limit text 2"/>
           <p:cNvSpPr txBox="1"/>
           <p:nvPr/>
         </p:nvSpPr>
         <p:spPr>
           <a:xfrm>
-            <a:off x="466344" y="5532120"/>
-            <a:ext cx="11256264" cy="457200"/>
+            <a:off x="6510528" y="3154680"/>
+            <a:ext cx="4937760" cy="1965960"/>
           </a:xfrm>
           <a:prstGeom prst="rect">
             <a:avLst/>
@@ -15027,14 +15229,86 @@
               <a:buNone/>
             </a:pPr>
             <a:r>
-              <a:rPr lang="en-GB" sz="1300" b="0" i="1" dirty="0">
-                <a:solidFill>
-                  <a:srgbClr val="7B7C7E"/>
-                </a:solidFill>
-                <a:latin typeface="Arial"/>
-                <a:cs typeface="Arial"/>
-              </a:rPr>
-              <a:t>Pre-treatment of the calendar-adjusted series (additive model); outlier coefficients in thousand MWh. LS: level shift; AO: additive outlier.</a:t>
+              <a:rPr lang="en-GB" sz="1500" b="0" i="0" dirty="0">
+                <a:solidFill>
+                  <a:srgbClr val="636462"/>
+                </a:solidFill>
+                <a:latin typeface="Arial"/>
+                <a:cs typeface="Arial"/>
+              </a:rPr>
+              <a:t>Over the whole month, and the same with the basic calendar: not a calendar error.</a:t>
+            </a:r>
+          </a:p>
+          <a:p>
+            <a:pPr marL="0" indent="0" algn="l">
+              <a:spcBef>
+                <a:spcPts val="800"/>
+              </a:spcBef>
+              <a:buNone/>
+            </a:pPr>
+            <a:r>
+              <a:rPr lang="en-GB" sz="1500" b="0" i="0" dirty="0">
+                <a:solidFill>
+                  <a:srgbClr val="636462"/>
+                </a:solidFill>
+                <a:latin typeface="Arial"/>
+                <a:cs typeface="Arial"/>
+              </a:rPr>
+              <a:t>Cause: with plants closed, weekdays and weekends get closer, but the estimated weekly seasonality is the same all year. This also explains 14 and 16 August at 0.949.</a:t>
+            </a:r>
+          </a:p>
+        </p:txBody>
+      </p:sp>
+      <p:sp>
+        <p:nvSpPr>
+          <p:cNvPr id="50" name="Open points"/>
+          <p:cNvSpPr txBox="1"/>
+          <p:nvPr/>
+        </p:nvSpPr>
+        <p:spPr>
+          <a:xfrm>
+            <a:off x="466344" y="5440680"/>
+            <a:ext cx="11256264" cy="457200"/>
+          </a:xfrm>
+          <a:prstGeom prst="rect">
+            <a:avLst/>
+          </a:prstGeom>
+          <a:noFill/>
+          <a:ln>
+            <a:noFill/>
+          </a:ln>
+        </p:spPr>
+        <p:txBody>
+          <a:bodyPr wrap="square" lIns="0" tIns="0" rIns="0" bIns="0" anchor="t">
+            <a:noAutofit/>
+          </a:bodyPr>
+          <a:lstStyle/>
+          <a:p>
+            <a:pPr marL="0" indent="0" algn="l">
+              <a:spcBef>
+                <a:spcPts val="0"/>
+              </a:spcBef>
+              <a:buNone/>
+            </a:pPr>
+            <a:r>
+              <a:rPr lang="en-GB" sz="1700" b="1" i="0" dirty="0">
+                <a:solidFill>
+                  <a:srgbClr val="C00000"/>
+                </a:solidFill>
+                <a:latin typeface="Arial"/>
+                <a:cs typeface="Arial"/>
+              </a:rPr>
+              <a:t>Open points: </a:t>
+            </a:r>
+            <a:r>
+              <a:rPr lang="en-GB" sz="1700" b="0" i="0" dirty="0">
+                <a:solidFill>
+                  <a:srgbClr val="595959"/>
+                </a:solidFill>
+                <a:latin typeface="Arial"/>
+                <a:cs typeface="Arial"/>
+              </a:rPr>
+              <a:t>temperature (cooling and heating degree days) and a weekly pattern that changes within the year.</a:t>
             </a:r>
           </a:p>
         </p:txBody>
@@ -15095,7 +15369,7 @@
                   <a:srgbClr val="C00000"/>
                 </a:solidFill>
               </a:rPr>
-              <a:t>National holidays: the effects fade</a:t>
+              <a:t>Pre-treatment: outliers show what is missing</a:t>
             </a:r>
           </a:p>
         </p:txBody>
@@ -15181,7 +15455,7 @@
       </p:sp>
       <p:pic>
         <p:nvPicPr>
-          <p:cNvPr id="40" name="Time-varying coefficients" descr="Time-varying effects of the 12 national holidays on electricity demand, 2012-2025, thousand MWh"/>
+          <p:cNvPr id="40" name="Pre-treatment table" descr="Table of the pre-treatment model for electricity demand: MA parameters and 15 outliers with dates, coefficients and events"/>
           <p:cNvPicPr>
             <a:picLocks noChangeAspect="1"/>
           </p:cNvPicPr>
@@ -15195,8 +15469,8 @@
         </p:blipFill>
         <p:spPr>
           <a:xfrm>
-            <a:off x="411480" y="1207008"/>
-            <a:ext cx="6874105" cy="4297680"/>
+            <a:off x="466344" y="1371600"/>
+            <a:ext cx="8001000" cy="3501823"/>
           </a:xfrm>
           <a:prstGeom prst="rect">
             <a:avLst/>
@@ -15205,14 +15479,47 @@
       </p:pic>
       <p:sp>
         <p:nvSpPr>
-          <p:cNvPr id="41" name="Cards header"/>
+          <p:cNvPr id="41" name="Outlier card"/>
+          <p:cNvSpPr/>
+          <p:nvPr/>
+        </p:nvSpPr>
+        <p:spPr>
+          <a:xfrm>
+            <a:off x="8741664" y="1325880"/>
+            <a:ext cx="2983687" cy="4023360"/>
+          </a:xfrm>
+          <a:prstGeom prst="roundRect">
+            <a:avLst>
+              <a:gd name="adj" fmla="val 6000"/>
+            </a:avLst>
+          </a:prstGeom>
+          <a:solidFill>
+            <a:srgbClr val="F2F2F2"/>
+          </a:solidFill>
+          <a:ln>
+            <a:noFill/>
+          </a:ln>
+        </p:spPr>
+        <p:txBody>
+          <a:bodyPr wrap="square" lIns="0" tIns="0" rIns="0" bIns="0" anchor="t">
+            <a:noAutofit/>
+          </a:bodyPr>
+          <a:lstStyle/>
+          <a:p>
+            <a:endParaRPr lang="en-GB" dirty="0"/>
+          </a:p>
+        </p:txBody>
+      </p:sp>
+      <p:sp>
+        <p:nvSpPr>
+          <p:cNvPr id="42" name="Outlier value 1"/>
           <p:cNvSpPr txBox="1"/>
           <p:nvPr/>
         </p:nvSpPr>
         <p:spPr>
           <a:xfrm>
-            <a:off x="7605625" y="1325880"/>
-            <a:ext cx="4119727" cy="411480"/>
+            <a:off x="8942832" y="1463040"/>
+            <a:ext cx="2617927" cy="548640"/>
           </a:xfrm>
           <a:prstGeom prst="rect">
             <a:avLst/>
@@ -15235,71 +15542,28 @@
               <a:buNone/>
             </a:pPr>
             <a:r>
-              <a:rPr lang="en-GB" sz="1800" b="1" i="0" dirty="0">
-                <a:solidFill>
-                  <a:srgbClr val="595959"/>
-                </a:solidFill>
-                <a:latin typeface="Arial"/>
-                <a:cs typeface="Arial"/>
-              </a:rPr>
-              <a:t>2012 → 2025</a:t>
-            </a:r>
-            <a:r>
-              <a:rPr lang="en-GB" sz="1400" b="0" i="0" dirty="0">
-                <a:solidFill>
-                  <a:srgbClr val="7B7C7E"/>
-                </a:solidFill>
-                <a:latin typeface="Arial"/>
-                <a:cs typeface="Arial"/>
-              </a:rPr>
-              <a:t>   thousand MWh</a:t>
-            </a:r>
-          </a:p>
-        </p:txBody>
-      </p:sp>
-      <p:sp>
-        <p:nvSpPr>
-          <p:cNvPr id="42" name="Card 1"/>
-          <p:cNvSpPr/>
-          <p:nvPr/>
-        </p:nvSpPr>
-        <p:spPr>
-          <a:xfrm>
-            <a:off x="7605625" y="1828800"/>
-            <a:ext cx="4119727" cy="1143000"/>
-          </a:xfrm>
-          <a:prstGeom prst="roundRect">
-            <a:avLst>
-              <a:gd name="adj" fmla="val 6000"/>
-            </a:avLst>
-          </a:prstGeom>
-          <a:solidFill>
-            <a:srgbClr val="F2F2F2"/>
-          </a:solidFill>
-          <a:ln>
-            <a:noFill/>
-          </a:ln>
-        </p:spPr>
-        <p:txBody>
-          <a:bodyPr wrap="square" lIns="0" tIns="0" rIns="0" bIns="0" anchor="t">
-            <a:noAutofit/>
-          </a:bodyPr>
-          <a:lstStyle/>
-          <a:p>
-            <a:endParaRPr lang="en-GB" dirty="0"/>
-          </a:p>
-        </p:txBody>
-      </p:sp>
-      <p:sp>
-        <p:nvSpPr>
-          <p:cNvPr id="43" name="Card 1 label"/>
+              <a:rPr lang="en-GB" sz="3000" b="1" i="0" dirty="0">
+                <a:solidFill>
+                  <a:srgbClr val="C00000"/>
+                </a:solidFill>
+                <a:latin typeface="Arial"/>
+                <a:cs typeface="Arial"/>
+              </a:rPr>
+              <a:t>10</a:t>
+            </a:r>
+          </a:p>
+        </p:txBody>
+      </p:sp>
+      <p:sp>
+        <p:nvSpPr>
+          <p:cNvPr id="43" name="Outlier label 1"/>
           <p:cNvSpPr txBox="1"/>
           <p:nvPr/>
         </p:nvSpPr>
         <p:spPr>
           <a:xfrm>
-            <a:off x="7806793" y="1938528"/>
-            <a:ext cx="3753967" cy="365760"/>
+            <a:off x="8942832" y="1993392"/>
+            <a:ext cx="2617927" cy="731520"/>
           </a:xfrm>
           <a:prstGeom prst="rect">
             <a:avLst/>
@@ -15322,28 +15586,28 @@
               <a:buNone/>
             </a:pPr>
             <a:r>
-              <a:rPr lang="en-GB" sz="1600" b="1" i="0" dirty="0">
+              <a:rPr lang="en-GB" sz="1300" b="0" i="0" dirty="0">
                 <a:solidFill>
                   <a:srgbClr val="595959"/>
                 </a:solidFill>
                 <a:latin typeface="Arial"/>
                 <a:cs typeface="Arial"/>
               </a:rPr>
-              <a:t>Republic Day</a:t>
-            </a:r>
-          </a:p>
-        </p:txBody>
-      </p:sp>
-      <p:sp>
-        <p:nvSpPr>
-          <p:cNvPr id="44" name="Card 1 values"/>
+              <a:t>summer level shifts, mostly in pairs of opposite sign: temperature is not modelled</a:t>
+            </a:r>
+          </a:p>
+        </p:txBody>
+      </p:sp>
+      <p:sp>
+        <p:nvSpPr>
+          <p:cNvPr id="44" name="Outlier value 2"/>
           <p:cNvSpPr txBox="1"/>
           <p:nvPr/>
         </p:nvSpPr>
         <p:spPr>
           <a:xfrm>
-            <a:off x="7806793" y="2286000"/>
-            <a:ext cx="3753967" cy="594360"/>
+            <a:off x="8942832" y="2743200"/>
+            <a:ext cx="2617927" cy="548640"/>
           </a:xfrm>
           <a:prstGeom prst="rect">
             <a:avLst/>
@@ -15366,81 +15630,28 @@
               <a:buNone/>
             </a:pPr>
             <a:r>
-              <a:rPr lang="en-GB" sz="2800" b="1" i="0" dirty="0">
-                <a:solidFill>
-                  <a:srgbClr val="7B7C7E"/>
-                </a:solidFill>
-                <a:latin typeface="Arial"/>
-                <a:cs typeface="Arial"/>
-              </a:rPr>
-              <a:t>−174</a:t>
-            </a:r>
-            <a:r>
-              <a:rPr lang="en-GB" sz="2200" b="0" i="0" dirty="0">
-                <a:solidFill>
-                  <a:srgbClr val="7B7C7E"/>
-                </a:solidFill>
-                <a:latin typeface="Arial"/>
-                <a:cs typeface="Arial"/>
-              </a:rPr>
-              <a:t>  →  </a:t>
-            </a:r>
-            <a:r>
-              <a:rPr lang="en-GB" sz="2800" b="1" i="0" dirty="0">
-                <a:solidFill>
-                  <a:srgbClr val="C00000"/>
-                </a:solidFill>
-                <a:latin typeface="Arial"/>
-                <a:cs typeface="Arial"/>
-              </a:rPr>
-              <a:t>−143</a:t>
-            </a:r>
-          </a:p>
-        </p:txBody>
-      </p:sp>
-      <p:sp>
-        <p:nvSpPr>
-          <p:cNvPr id="45" name="Card 2"/>
-          <p:cNvSpPr/>
-          <p:nvPr/>
-        </p:nvSpPr>
-        <p:spPr>
-          <a:xfrm>
-            <a:off x="7605625" y="3108960"/>
-            <a:ext cx="4119727" cy="1143000"/>
-          </a:xfrm>
-          <a:prstGeom prst="roundRect">
-            <a:avLst>
-              <a:gd name="adj" fmla="val 6000"/>
-            </a:avLst>
-          </a:prstGeom>
-          <a:solidFill>
-            <a:srgbClr val="F2F2F2"/>
-          </a:solidFill>
-          <a:ln>
-            <a:noFill/>
-          </a:ln>
-        </p:spPr>
-        <p:txBody>
-          <a:bodyPr wrap="square" lIns="0" tIns="0" rIns="0" bIns="0" anchor="t">
-            <a:noAutofit/>
-          </a:bodyPr>
-          <a:lstStyle/>
-          <a:p>
-            <a:endParaRPr lang="en-GB" dirty="0"/>
-          </a:p>
-        </p:txBody>
-      </p:sp>
-      <p:sp>
-        <p:nvSpPr>
-          <p:cNvPr id="46" name="Card 2 label"/>
+              <a:rPr lang="en-GB" sz="3000" b="1" i="0" dirty="0">
+                <a:solidFill>
+                  <a:srgbClr val="942639"/>
+                </a:solidFill>
+                <a:latin typeface="Arial"/>
+                <a:cs typeface="Arial"/>
+              </a:rPr>
+              <a:t>4</a:t>
+            </a:r>
+          </a:p>
+        </p:txBody>
+      </p:sp>
+      <p:sp>
+        <p:nvSpPr>
+          <p:cNvPr id="45" name="Outlier label 2"/>
           <p:cNvSpPr txBox="1"/>
           <p:nvPr/>
         </p:nvSpPr>
         <p:spPr>
           <a:xfrm>
-            <a:off x="7806793" y="3218688"/>
-            <a:ext cx="3753967" cy="365760"/>
+            <a:off x="8942832" y="3273552"/>
+            <a:ext cx="2617927" cy="731520"/>
           </a:xfrm>
           <a:prstGeom prst="rect">
             <a:avLst/>
@@ -15463,28 +15674,28 @@
               <a:buNone/>
             </a:pPr>
             <a:r>
-              <a:rPr lang="en-GB" sz="1600" b="1" i="0" dirty="0">
+              <a:rPr lang="en-GB" sz="1300" b="0" i="0" dirty="0">
                 <a:solidFill>
                   <a:srgbClr val="595959"/>
                 </a:solidFill>
                 <a:latin typeface="Arial"/>
                 <a:cs typeface="Arial"/>
               </a:rPr>
-              <a:t>Easter Monday</a:t>
-            </a:r>
-          </a:p>
-        </p:txBody>
-      </p:sp>
-      <p:sp>
-        <p:nvSpPr>
-          <p:cNvPr id="47" name="Card 2 values"/>
+              <a:t>Covid-19 (lockdown, reopenings) and the 2022 energy crisis</a:t>
+            </a:r>
+          </a:p>
+        </p:txBody>
+      </p:sp>
+      <p:sp>
+        <p:nvSpPr>
+          <p:cNvPr id="46" name="Outlier value 3"/>
           <p:cNvSpPr txBox="1"/>
           <p:nvPr/>
         </p:nvSpPr>
         <p:spPr>
           <a:xfrm>
-            <a:off x="7806793" y="3566160"/>
-            <a:ext cx="3753967" cy="594360"/>
+            <a:off x="8942832" y="4023360"/>
+            <a:ext cx="2617927" cy="548640"/>
           </a:xfrm>
           <a:prstGeom prst="rect">
             <a:avLst/>
@@ -15507,48 +15718,28 @@
               <a:buNone/>
             </a:pPr>
             <a:r>
-              <a:rPr lang="en-GB" sz="2800" b="1" i="0" dirty="0">
+              <a:rPr lang="en-GB" sz="3000" b="1" i="0" dirty="0">
                 <a:solidFill>
                   <a:srgbClr val="7B7C7E"/>
                 </a:solidFill>
                 <a:latin typeface="Arial"/>
                 <a:cs typeface="Arial"/>
               </a:rPr>
-              <a:t>−221</a:t>
-            </a:r>
-            <a:r>
-              <a:rPr lang="en-GB" sz="2200" b="0" i="0" dirty="0">
-                <a:solidFill>
-                  <a:srgbClr val="7B7C7E"/>
-                </a:solidFill>
-                <a:latin typeface="Arial"/>
-                <a:cs typeface="Arial"/>
-              </a:rPr>
-              <a:t>  →  </a:t>
-            </a:r>
-            <a:r>
-              <a:rPr lang="en-GB" sz="2800" b="1" i="0" dirty="0">
-                <a:solidFill>
-                  <a:srgbClr val="C00000"/>
-                </a:solidFill>
-                <a:latin typeface="Arial"/>
-                <a:cs typeface="Arial"/>
-              </a:rPr>
-              <a:t>−198</a:t>
-            </a:r>
-          </a:p>
-        </p:txBody>
-      </p:sp>
-      <p:sp>
-        <p:nvSpPr>
-          <p:cNvPr id="50" name="Note"/>
+              <a:t>1</a:t>
+            </a:r>
+          </a:p>
+        </p:txBody>
+      </p:sp>
+      <p:sp>
+        <p:nvSpPr>
+          <p:cNvPr id="47" name="Outlier label 3"/>
           <p:cNvSpPr txBox="1"/>
           <p:nvPr/>
         </p:nvSpPr>
         <p:spPr>
           <a:xfrm>
-            <a:off x="7605625" y="4434840"/>
-            <a:ext cx="4119727" cy="1051560"/>
+            <a:off x="8942832" y="4553712"/>
+            <a:ext cx="2617927" cy="731520"/>
           </a:xfrm>
           <a:prstGeom prst="rect">
             <a:avLst/>
@@ -15571,28 +15762,28 @@
               <a:buNone/>
             </a:pPr>
             <a:r>
-              <a:rPr lang="en-GB" sz="1500" b="0" i="0" dirty="0">
+              <a:rPr lang="en-GB" sz="1300" b="0" i="0" dirty="0">
                 <a:solidFill>
                   <a:srgbClr val="595959"/>
                 </a:solidFill>
                 <a:latin typeface="Arial"/>
                 <a:cs typeface="Arial"/>
               </a:rPr>
-              <a:t>All holidays move together, by 10–18%, mostly after 2018. Only the Assumption is stable (−132 → −128).</a:t>
-            </a:r>
-          </a:p>
-        </p:txBody>
-      </p:sp>
-      <p:sp>
-        <p:nvSpPr>
-          <p:cNvPr id="51" name="Caption"/>
+              <a:t>additive outlier (21/08/2015): a storm with a sharp temperature drop</a:t>
+            </a:r>
+          </a:p>
+        </p:txBody>
+      </p:sp>
+      <p:sp>
+        <p:nvSpPr>
+          <p:cNvPr id="50" name="Table caption"/>
           <p:cNvSpPr txBox="1"/>
           <p:nvPr/>
         </p:nvSpPr>
         <p:spPr>
           <a:xfrm>
-            <a:off x="466344" y="5577840"/>
-            <a:ext cx="11256264" cy="365760"/>
+            <a:off x="466344" y="5532120"/>
+            <a:ext cx="11256264" cy="457200"/>
           </a:xfrm>
           <a:prstGeom prst="rect">
             <a:avLst/>
@@ -15615,16 +15806,6 @@
               <a:buNone/>
             </a:pPr>
             <a:r>
-              <a:rPr lang="en-GB" sz="1300" b="1" i="0" dirty="0">
-                <a:solidFill>
-                  <a:srgbClr val="C00000"/>
-                </a:solidFill>
-                <a:latin typeface="Arial"/>
-                <a:cs typeface="Arial"/>
-              </a:rPr>
-              <a:t>Result · Time-varying coefficients.  </a:t>
-            </a:r>
-            <a:r>
               <a:rPr lang="en-GB" sz="1300" b="0" i="1" dirty="0">
                 <a:solidFill>
                   <a:srgbClr val="7B7C7E"/>
@@ -15632,7 +15813,7 @@
                 <a:latin typeface="Arial"/>
                 <a:cs typeface="Arial"/>
               </a:rPr>
-              <a:t>Thousand MWh; values at the end of 2012 and of 2025.</a:t>
+              <a:t>Pre-treatment of the calendar-adjusted series (additive model); outlier coefficients in thousand MWh. LS: level shift; AO: additive outlier.</a:t>
             </a:r>
           </a:p>
         </p:txBody>
@@ -15693,7 +15874,7 @@
                   <a:srgbClr val="C00000"/>
                 </a:solidFill>
               </a:rPr>
-              <a:t>Bridges and semi-closures: no fading</a:t>
+              <a:t>National holidays: the effects fade</a:t>
             </a:r>
           </a:p>
         </p:txBody>
@@ -15779,7 +15960,7 @@
       </p:sp>
       <p:pic>
         <p:nvPicPr>
-          <p:cNvPr id="40" name="Time-varying coefficients" descr="Time-varying effects of bridges and semi-closure days on electricity demand, 2012-2025, thousand MWh"/>
+          <p:cNvPr id="40" name="Time-varying coefficients" descr="Time-varying effects of the 12 national holidays on electricity demand, 2012-2025, thousand MWh"/>
           <p:cNvPicPr>
             <a:picLocks noChangeAspect="1"/>
           </p:cNvPicPr>
@@ -15927,7 +16108,7 @@
                 <a:latin typeface="Arial"/>
                 <a:cs typeface="Arial"/>
               </a:rPr>
-              <a:t>Monday bridge</a:t>
+              <a:t>Republic Day</a:t>
             </a:r>
           </a:p>
         </p:txBody>
@@ -15971,7 +16152,7 @@
                 <a:latin typeface="Arial"/>
                 <a:cs typeface="Arial"/>
               </a:rPr>
-              <a:t>−52</a:t>
+              <a:t>−174</a:t>
             </a:r>
             <a:r>
               <a:rPr lang="en-GB" sz="2200" b="0" i="0" dirty="0">
@@ -15991,7 +16172,7 @@
                 <a:latin typeface="Arial"/>
                 <a:cs typeface="Arial"/>
               </a:rPr>
-              <a:t>−77</a:t>
+              <a:t>−143</a:t>
             </a:r>
           </a:p>
         </p:txBody>
@@ -16068,7 +16249,7 @@
                 <a:latin typeface="Arial"/>
                 <a:cs typeface="Arial"/>
               </a:rPr>
-              <a:t>New Year's Eve</a:t>
+              <a:t>Easter Monday</a:t>
             </a:r>
           </a:p>
         </p:txBody>
@@ -16112,7 +16293,7 @@
                 <a:latin typeface="Arial"/>
                 <a:cs typeface="Arial"/>
               </a:rPr>
-              <a:t>−76</a:t>
+              <a:t>−221</a:t>
             </a:r>
             <a:r>
               <a:rPr lang="en-GB" sz="2200" b="0" i="0" dirty="0">
@@ -16132,7 +16313,7 @@
                 <a:latin typeface="Arial"/>
                 <a:cs typeface="Arial"/>
               </a:rPr>
-              <a:t>−97</a:t>
+              <a:t>−198</a:t>
             </a:r>
           </a:p>
         </p:txBody>
@@ -16176,7 +16357,7 @@
                 <a:latin typeface="Arial"/>
                 <a:cs typeface="Arial"/>
               </a:rPr>
-              <a:t>Unlike holidays, these days do not fade: some deepen. Days next to the Assumption stay at about −30.</a:t>
+              <a:t>All holidays move together, by 10–18%, mostly after 2018. Only the Assumption is stable (−132 → −128).</a:t>
             </a:r>
           </a:p>
         </p:txBody>
@@ -16291,7 +16472,7 @@
                   <a:srgbClr val="C00000"/>
                 </a:solidFill>
               </a:rPr>
-              <a:t>Saturday fades, Easter Tuesday deepens</a:t>
+              <a:t>Bridges and semi-closures: no fading</a:t>
             </a:r>
           </a:p>
         </p:txBody>
@@ -16377,7 +16558,7 @@
       </p:sp>
       <p:pic>
         <p:nvPicPr>
-          <p:cNvPr id="40" name="Time-varying coefficients" descr="Time-varying effects of Saturday holidays, the midweek holiday effect and the Easter window, 2012-2025, thousand MWh"/>
+          <p:cNvPr id="40" name="Time-varying coefficients" descr="Time-varying effects of bridges and semi-closure days on electricity demand, 2012-2025, thousand MWh"/>
           <p:cNvPicPr>
             <a:picLocks noChangeAspect="1"/>
           </p:cNvPicPr>
@@ -16525,7 +16706,7 @@
                 <a:latin typeface="Arial"/>
                 <a:cs typeface="Arial"/>
               </a:rPr>
-              <a:t>Holiday on Saturday</a:t>
+              <a:t>Monday bridge</a:t>
             </a:r>
           </a:p>
         </p:txBody>
@@ -16569,7 +16750,7 @@
                 <a:latin typeface="Arial"/>
                 <a:cs typeface="Arial"/>
               </a:rPr>
-              <a:t>−73</a:t>
+              <a:t>−52</a:t>
             </a:r>
             <a:r>
               <a:rPr lang="en-GB" sz="2200" b="0" i="0" dirty="0">
@@ -16589,7 +16770,7 @@
                 <a:latin typeface="Arial"/>
                 <a:cs typeface="Arial"/>
               </a:rPr>
-              <a:t>−55</a:t>
+              <a:t>−77</a:t>
             </a:r>
           </a:p>
         </p:txBody>
@@ -16666,7 +16847,7 @@
                 <a:latin typeface="Arial"/>
                 <a:cs typeface="Arial"/>
               </a:rPr>
-              <a:t>Easter Tuesday</a:t>
+              <a:t>New Year's Eve</a:t>
             </a:r>
           </a:p>
         </p:txBody>
@@ -16710,7 +16891,7 @@
                 <a:latin typeface="Arial"/>
                 <a:cs typeface="Arial"/>
               </a:rPr>
-              <a:t>−30</a:t>
+              <a:t>−76</a:t>
             </a:r>
             <a:r>
               <a:rPr lang="en-GB" sz="2200" b="0" i="0" dirty="0">
@@ -16730,7 +16911,7 @@
                 <a:latin typeface="Arial"/>
                 <a:cs typeface="Arial"/>
               </a:rPr>
-              <a:t>−46</a:t>
+              <a:t>−97</a:t>
             </a:r>
           </a:p>
         </p:txBody>
@@ -16774,7 +16955,7 @@
                 <a:latin typeface="Arial"/>
                 <a:cs typeface="Arial"/>
               </a:rPr>
-              <a:t>The midweek effect (−21 → +2) overlaps with the single holidays: read it together with them.</a:t>
+              <a:t>Unlike holidays, these days do not fade: some deepen. Days next to the Assumption stay at about −30.</a:t>
             </a:r>
           </a:p>
         </p:txBody>
@@ -16889,7 +17070,7 @@
                   <a:srgbClr val="C00000"/>
                 </a:solidFill>
               </a:rPr>
-              <a:t>Standard diagnostics barely see the calendar</a:t>
+              <a:t>Saturday fades, Easter Tuesday deepens</a:t>
             </a:r>
           </a:p>
         </p:txBody>
@@ -16975,7 +17156,7 @@
       </p:sp>
       <p:pic>
         <p:nvPicPr>
-          <p:cNvPr id="40" name="KDE of rolling autocorrelations" descr="Densities of rolling autocorrelations at lags 7, 30 and 365 for e-invoicing and electricity demand: raw series, basic calendar and final calendar"/>
+          <p:cNvPr id="40" name="Time-varying coefficients" descr="Time-varying effects of Saturday holidays, the midweek holiday effect and the Easter window, 2012-2025, thousand MWh"/>
           <p:cNvPicPr>
             <a:picLocks noChangeAspect="1"/>
           </p:cNvPicPr>
@@ -16989,8 +17170,8 @@
         </p:blipFill>
         <p:spPr>
           <a:xfrm>
-            <a:off x="466344" y="1170432"/>
-            <a:ext cx="6076143" cy="4389120"/>
+            <a:off x="411480" y="1207008"/>
+            <a:ext cx="6874105" cy="4297680"/>
           </a:xfrm>
           <a:prstGeom prst="rect">
             <a:avLst/>
@@ -16999,14 +17180,68 @@
       </p:pic>
       <p:sp>
         <p:nvSpPr>
-          <p:cNvPr id="41" name="Point card 1"/>
+          <p:cNvPr id="41" name="Cards header"/>
+          <p:cNvSpPr txBox="1"/>
+          <p:nvPr/>
+        </p:nvSpPr>
+        <p:spPr>
+          <a:xfrm>
+            <a:off x="7605625" y="1325880"/>
+            <a:ext cx="4119727" cy="411480"/>
+          </a:xfrm>
+          <a:prstGeom prst="rect">
+            <a:avLst/>
+          </a:prstGeom>
+          <a:noFill/>
+          <a:ln>
+            <a:noFill/>
+          </a:ln>
+        </p:spPr>
+        <p:txBody>
+          <a:bodyPr wrap="square" lIns="0" tIns="0" rIns="0" bIns="0" anchor="t">
+            <a:noAutofit/>
+          </a:bodyPr>
+          <a:lstStyle/>
+          <a:p>
+            <a:pPr marL="0" indent="0" algn="l">
+              <a:spcBef>
+                <a:spcPts val="0"/>
+              </a:spcBef>
+              <a:buNone/>
+            </a:pPr>
+            <a:r>
+              <a:rPr lang="en-GB" sz="1800" b="1" i="0" dirty="0">
+                <a:solidFill>
+                  <a:srgbClr val="595959"/>
+                </a:solidFill>
+                <a:latin typeface="Arial"/>
+                <a:cs typeface="Arial"/>
+              </a:rPr>
+              <a:t>2012 → 2025</a:t>
+            </a:r>
+            <a:r>
+              <a:rPr lang="en-GB" sz="1400" b="0" i="0" dirty="0">
+                <a:solidFill>
+                  <a:srgbClr val="7B7C7E"/>
+                </a:solidFill>
+                <a:latin typeface="Arial"/>
+                <a:cs typeface="Arial"/>
+              </a:rPr>
+              <a:t>   thousand MWh</a:t>
+            </a:r>
+          </a:p>
+        </p:txBody>
+      </p:sp>
+      <p:sp>
+        <p:nvSpPr>
+          <p:cNvPr id="42" name="Card 1"/>
           <p:cNvSpPr/>
           <p:nvPr/>
         </p:nvSpPr>
         <p:spPr>
           <a:xfrm>
-            <a:off x="6908247" y="1280160"/>
-            <a:ext cx="4817104" cy="1261872"/>
+            <a:off x="7605625" y="1828800"/>
+            <a:ext cx="4119727" cy="1143000"/>
           </a:xfrm>
           <a:prstGeom prst="roundRect">
             <a:avLst>
@@ -17032,14 +17267,14 @@
       </p:sp>
       <p:sp>
         <p:nvSpPr>
-          <p:cNvPr id="42" name="Point heading 1"/>
+          <p:cNvPr id="43" name="Card 1 label"/>
           <p:cNvSpPr txBox="1"/>
           <p:nvPr/>
         </p:nvSpPr>
         <p:spPr>
           <a:xfrm>
-            <a:off x="7109415" y="1371600"/>
-            <a:ext cx="4451344" cy="365760"/>
+            <a:off x="7806793" y="1938528"/>
+            <a:ext cx="3753967" cy="365760"/>
           </a:xfrm>
           <a:prstGeom prst="rect">
             <a:avLst/>
@@ -17062,28 +17297,28 @@
               <a:buNone/>
             </a:pPr>
             <a:r>
-              <a:rPr lang="en-GB" sz="1700" b="1" i="0" dirty="0">
-                <a:solidFill>
-                  <a:srgbClr val="C00000"/>
-                </a:solidFill>
-                <a:latin typeface="Arial"/>
-                <a:cs typeface="Arial"/>
-              </a:rPr>
-              <a:t>Seasonality: removed</a:t>
-            </a:r>
-          </a:p>
-        </p:txBody>
-      </p:sp>
-      <p:sp>
-        <p:nvSpPr>
-          <p:cNvPr id="43" name="Point text 1"/>
+              <a:rPr lang="en-GB" sz="1600" b="1" i="0" dirty="0">
+                <a:solidFill>
+                  <a:srgbClr val="595959"/>
+                </a:solidFill>
+                <a:latin typeface="Arial"/>
+                <a:cs typeface="Arial"/>
+              </a:rPr>
+              <a:t>Holiday on Saturday</a:t>
+            </a:r>
+          </a:p>
+        </p:txBody>
+      </p:sp>
+      <p:sp>
+        <p:nvSpPr>
+          <p:cNvPr id="44" name="Card 1 values"/>
           <p:cNvSpPr txBox="1"/>
           <p:nvPr/>
         </p:nvSpPr>
         <p:spPr>
           <a:xfrm>
-            <a:off x="7109415" y="1737360"/>
-            <a:ext cx="4451344" cy="777240"/>
+            <a:off x="7806793" y="2286000"/>
+            <a:ext cx="3753967" cy="594360"/>
           </a:xfrm>
           <a:prstGeom prst="rect">
             <a:avLst/>
@@ -17106,28 +17341,48 @@
               <a:buNone/>
             </a:pPr>
             <a:r>
-              <a:rPr lang="en-GB" sz="1300" b="0" i="0" dirty="0">
-                <a:solidFill>
-                  <a:srgbClr val="595959"/>
-                </a:solidFill>
-                <a:latin typeface="Arial"/>
-                <a:cs typeface="Arial"/>
-              </a:rPr>
-              <a:t>The raw series is far from 0 at every lag; after adjustment all densities are centred around 0.</a:t>
-            </a:r>
-          </a:p>
-        </p:txBody>
-      </p:sp>
-      <p:sp>
-        <p:nvSpPr>
-          <p:cNvPr id="44" name="Point card 2"/>
+              <a:rPr lang="en-GB" sz="2800" b="1" i="0" dirty="0">
+                <a:solidFill>
+                  <a:srgbClr val="7B7C7E"/>
+                </a:solidFill>
+                <a:latin typeface="Arial"/>
+                <a:cs typeface="Arial"/>
+              </a:rPr>
+              <a:t>−73</a:t>
+            </a:r>
+            <a:r>
+              <a:rPr lang="en-GB" sz="2200" b="0" i="0" dirty="0">
+                <a:solidFill>
+                  <a:srgbClr val="7B7C7E"/>
+                </a:solidFill>
+                <a:latin typeface="Arial"/>
+                <a:cs typeface="Arial"/>
+              </a:rPr>
+              <a:t>  →  </a:t>
+            </a:r>
+            <a:r>
+              <a:rPr lang="en-GB" sz="2800" b="1" i="0" dirty="0">
+                <a:solidFill>
+                  <a:srgbClr val="C00000"/>
+                </a:solidFill>
+                <a:latin typeface="Arial"/>
+                <a:cs typeface="Arial"/>
+              </a:rPr>
+              <a:t>−55</a:t>
+            </a:r>
+          </a:p>
+        </p:txBody>
+      </p:sp>
+      <p:sp>
+        <p:nvSpPr>
+          <p:cNvPr id="45" name="Card 2"/>
           <p:cNvSpPr/>
           <p:nvPr/>
         </p:nvSpPr>
         <p:spPr>
           <a:xfrm>
-            <a:off x="6908247" y="2651760"/>
-            <a:ext cx="4817104" cy="1261872"/>
+            <a:off x="7605625" y="3108960"/>
+            <a:ext cx="4119727" cy="1143000"/>
           </a:xfrm>
           <a:prstGeom prst="roundRect">
             <a:avLst>
@@ -17153,14 +17408,14 @@
       </p:sp>
       <p:sp>
         <p:nvSpPr>
-          <p:cNvPr id="45" name="Point heading 2"/>
+          <p:cNvPr id="46" name="Card 2 label"/>
           <p:cNvSpPr txBox="1"/>
           <p:nvPr/>
         </p:nvSpPr>
         <p:spPr>
           <a:xfrm>
-            <a:off x="7109415" y="2743200"/>
-            <a:ext cx="4451344" cy="365760"/>
+            <a:off x="7806793" y="3218688"/>
+            <a:ext cx="3753967" cy="365760"/>
           </a:xfrm>
           <a:prstGeom prst="rect">
             <a:avLst/>
@@ -17183,28 +17438,28 @@
               <a:buNone/>
             </a:pPr>
             <a:r>
-              <a:rPr lang="en-GB" sz="1700" b="1" i="0" dirty="0">
-                <a:solidFill>
-                  <a:srgbClr val="942639"/>
-                </a:solidFill>
-                <a:latin typeface="Arial"/>
-                <a:cs typeface="Arial"/>
-              </a:rPr>
-              <a:t>Calendar: hardly visible</a:t>
-            </a:r>
-          </a:p>
-        </p:txBody>
-      </p:sp>
-      <p:sp>
-        <p:nvSpPr>
-          <p:cNvPr id="46" name="Point text 2"/>
+              <a:rPr lang="en-GB" sz="1600" b="1" i="0" dirty="0">
+                <a:solidFill>
+                  <a:srgbClr val="595959"/>
+                </a:solidFill>
+                <a:latin typeface="Arial"/>
+                <a:cs typeface="Arial"/>
+              </a:rPr>
+              <a:t>Easter Tuesday</a:t>
+            </a:r>
+          </a:p>
+        </p:txBody>
+      </p:sp>
+      <p:sp>
+        <p:nvSpPr>
+          <p:cNvPr id="47" name="Card 2 values"/>
           <p:cNvSpPr txBox="1"/>
           <p:nvPr/>
         </p:nvSpPr>
         <p:spPr>
           <a:xfrm>
-            <a:off x="7109415" y="3108960"/>
-            <a:ext cx="4451344" cy="777240"/>
+            <a:off x="7806793" y="3566160"/>
+            <a:ext cx="3753967" cy="594360"/>
           </a:xfrm>
           <a:prstGeom prst="rect">
             <a:avLst/>
@@ -17227,61 +17482,48 @@
               <a:buNone/>
             </a:pPr>
             <a:r>
-              <a:rPr lang="en-GB" sz="1300" b="0" i="0" dirty="0">
-                <a:solidFill>
-                  <a:srgbClr val="595959"/>
-                </a:solidFill>
-                <a:latin typeface="Arial"/>
-                <a:cs typeface="Arial"/>
-              </a:rPr>
-              <a:t>Only at lag 30 for e-invoicing is the final calendar a little narrower than the basic one. Elsewhere the curves overlap.</a:t>
-            </a:r>
-          </a:p>
-        </p:txBody>
-      </p:sp>
-      <p:sp>
-        <p:nvSpPr>
-          <p:cNvPr id="47" name="Point card 3"/>
-          <p:cNvSpPr/>
-          <p:nvPr/>
-        </p:nvSpPr>
-        <p:spPr>
-          <a:xfrm>
-            <a:off x="6908247" y="4023360"/>
-            <a:ext cx="4817104" cy="1261872"/>
-          </a:xfrm>
-          <a:prstGeom prst="roundRect">
-            <a:avLst>
-              <a:gd name="adj" fmla="val 6000"/>
-            </a:avLst>
-          </a:prstGeom>
-          <a:solidFill>
-            <a:srgbClr val="F2F2F2"/>
-          </a:solidFill>
-          <a:ln>
-            <a:noFill/>
-          </a:ln>
-        </p:spPr>
-        <p:txBody>
-          <a:bodyPr wrap="square" lIns="0" tIns="0" rIns="0" bIns="0" anchor="t">
-            <a:noAutofit/>
-          </a:bodyPr>
-          <a:lstStyle/>
-          <a:p>
-            <a:endParaRPr lang="en-GB" dirty="0"/>
-          </a:p>
-        </p:txBody>
-      </p:sp>
-      <p:sp>
-        <p:nvSpPr>
-          <p:cNvPr id="48" name="Point heading 3"/>
+              <a:rPr lang="en-GB" sz="2800" b="1" i="0" dirty="0">
+                <a:solidFill>
+                  <a:srgbClr val="7B7C7E"/>
+                </a:solidFill>
+                <a:latin typeface="Arial"/>
+                <a:cs typeface="Arial"/>
+              </a:rPr>
+              <a:t>−30</a:t>
+            </a:r>
+            <a:r>
+              <a:rPr lang="en-GB" sz="2200" b="0" i="0" dirty="0">
+                <a:solidFill>
+                  <a:srgbClr val="7B7C7E"/>
+                </a:solidFill>
+                <a:latin typeface="Arial"/>
+                <a:cs typeface="Arial"/>
+              </a:rPr>
+              <a:t>  →  </a:t>
+            </a:r>
+            <a:r>
+              <a:rPr lang="en-GB" sz="2800" b="1" i="0" dirty="0">
+                <a:solidFill>
+                  <a:srgbClr val="C00000"/>
+                </a:solidFill>
+                <a:latin typeface="Arial"/>
+                <a:cs typeface="Arial"/>
+              </a:rPr>
+              <a:t>−46</a:t>
+            </a:r>
+          </a:p>
+        </p:txBody>
+      </p:sp>
+      <p:sp>
+        <p:nvSpPr>
+          <p:cNvPr id="50" name="Note"/>
           <p:cNvSpPr txBox="1"/>
           <p:nvPr/>
         </p:nvSpPr>
         <p:spPr>
           <a:xfrm>
-            <a:off x="7109415" y="4114800"/>
-            <a:ext cx="4451344" cy="365760"/>
+            <a:off x="7605625" y="4434840"/>
+            <a:ext cx="4119727" cy="1051560"/>
           </a:xfrm>
           <a:prstGeom prst="rect">
             <a:avLst/>
@@ -17304,28 +17546,28 @@
               <a:buNone/>
             </a:pPr>
             <a:r>
-              <a:rPr lang="en-GB" sz="1700" b="1" i="0" dirty="0">
-                <a:solidFill>
-                  <a:srgbClr val="7B7C7E"/>
-                </a:solidFill>
-                <a:latin typeface="Arial"/>
-                <a:cs typeface="Arial"/>
-              </a:rPr>
-              <a:t>Why</a:t>
-            </a:r>
-          </a:p>
-        </p:txBody>
-      </p:sp>
-      <p:sp>
-        <p:nvSpPr>
-          <p:cNvPr id="49" name="Point text 3"/>
+              <a:rPr lang="en-GB" sz="1500" b="0" i="0" dirty="0">
+                <a:solidFill>
+                  <a:srgbClr val="595959"/>
+                </a:solidFill>
+                <a:latin typeface="Arial"/>
+                <a:cs typeface="Arial"/>
+              </a:rPr>
+              <a:t>The midweek effect (−21 → +2) overlaps with the single holidays: read it together with them.</a:t>
+            </a:r>
+          </a:p>
+        </p:txBody>
+      </p:sp>
+      <p:sp>
+        <p:nvSpPr>
+          <p:cNvPr id="51" name="Caption"/>
           <p:cNvSpPr txBox="1"/>
           <p:nvPr/>
         </p:nvSpPr>
         <p:spPr>
           <a:xfrm>
-            <a:off x="7109415" y="4480560"/>
-            <a:ext cx="4451344" cy="777240"/>
+            <a:off x="466344" y="5577840"/>
+            <a:ext cx="11256264" cy="365760"/>
           </a:xfrm>
           <a:prstGeom prst="rect">
             <a:avLst/>
@@ -17348,49 +17590,15 @@
               <a:buNone/>
             </a:pPr>
             <a:r>
-              <a:rPr lang="en-GB" sz="1300" b="0" i="0" dirty="0">
-                <a:solidFill>
-                  <a:srgbClr val="595959"/>
-                </a:solidFill>
-                <a:latin typeface="Arial"/>
-                <a:cs typeface="Arial"/>
-              </a:rPr>
-              <a:t>Special days are a few per year and get lost in rolling windows over all days. The DMR groups them by mechanism, so it sees them.</a:t>
-            </a:r>
-          </a:p>
-        </p:txBody>
-      </p:sp>
-      <p:sp>
-        <p:nvSpPr>
-          <p:cNvPr id="52" name="Caption"/>
-          <p:cNvSpPr txBox="1"/>
-          <p:nvPr/>
-        </p:nvSpPr>
-        <p:spPr>
-          <a:xfrm>
-            <a:off x="466344" y="5623560"/>
-            <a:ext cx="11256264" cy="365760"/>
-          </a:xfrm>
-          <a:prstGeom prst="rect">
-            <a:avLst/>
-          </a:prstGeom>
-          <a:noFill/>
-          <a:ln>
-            <a:noFill/>
-          </a:ln>
-        </p:spPr>
-        <p:txBody>
-          <a:bodyPr wrap="square" lIns="0" tIns="0" rIns="0" bIns="0" anchor="t">
-            <a:noAutofit/>
-          </a:bodyPr>
-          <a:lstStyle/>
-          <a:p>
-            <a:pPr marL="0" indent="0" algn="l">
-              <a:spcBef>
-                <a:spcPts val="0"/>
-              </a:spcBef>
-              <a:buNone/>
-            </a:pPr>
+              <a:rPr lang="en-GB" sz="1300" b="1" i="0" dirty="0">
+                <a:solidFill>
+                  <a:srgbClr val="C00000"/>
+                </a:solidFill>
+                <a:latin typeface="Arial"/>
+                <a:cs typeface="Arial"/>
+              </a:rPr>
+              <a:t>Result · Time-varying coefficients.  </a:t>
+            </a:r>
             <a:r>
               <a:rPr lang="en-GB" sz="1300" b="0" i="1" dirty="0">
                 <a:solidFill>
@@ -17399,7 +17607,7 @@
                 <a:latin typeface="Arial"/>
                 <a:cs typeface="Arial"/>
               </a:rPr>
-              <a:t>Rolling autocorrelations of first differences (of logs for e-invoicing), windows of 28, 90 and 730 days; grey band ±0.025.</a:t>
+              <a:t>Thousand MWh; values at the end of 2012 and of 2025.</a:t>
             </a:r>
           </a:p>
         </p:txBody>
@@ -17460,7 +17668,7 @@
                   <a:srgbClr val="C00000"/>
                 </a:solidFill>
               </a:rPr>
-              <a:t>Why the calendar deserves the effort</a:t>
+              <a:t>Revisions: special days need the calendar</a:t>
             </a:r>
           </a:p>
         </p:txBody>
@@ -17544,16 +17752,94 @@
           </a:p>
         </p:txBody>
       </p:sp>
-      <p:sp>
-        <p:nvSpPr>
-          <p:cNvPr id="20" name="Conclusion card 1"/>
+      <p:pic>
+        <p:nvPicPr>
+          <p:cNvPr id="40" name="Revisions special vs other days" descr="Mean absolute revision over the last year of each vintage, special days and other days, for four specifications of the electricity calendar"/>
+          <p:cNvPicPr>
+            <a:picLocks noChangeAspect="1"/>
+          </p:cNvPicPr>
+          <p:nvPr/>
+        </p:nvPicPr>
+        <p:blipFill>
+          <a:blip r:embed="rId2"/>
+          <a:stretch>
+            <a:fillRect/>
+          </a:stretch>
+        </p:blipFill>
+        <p:spPr>
+          <a:xfrm>
+            <a:off x="717056" y="1216152"/>
+            <a:ext cx="6116695" cy="4206240"/>
+          </a:xfrm>
+          <a:prstGeom prst="rect">
+            <a:avLst/>
+          </a:prstGeom>
+        </p:spPr>
+      </p:pic>
+      <p:sp>
+        <p:nvSpPr>
+          <p:cNvPr id="41" name="Cards header"/>
+          <p:cNvSpPr txBox="1"/>
+          <p:nvPr/>
+        </p:nvSpPr>
+        <p:spPr>
+          <a:xfrm>
+            <a:off x="7459367" y="1280160"/>
+            <a:ext cx="4265984" cy="411480"/>
+          </a:xfrm>
+          <a:prstGeom prst="rect">
+            <a:avLst/>
+          </a:prstGeom>
+          <a:noFill/>
+          <a:ln>
+            <a:noFill/>
+          </a:ln>
+        </p:spPr>
+        <p:txBody>
+          <a:bodyPr wrap="square" lIns="0" tIns="0" rIns="0" bIns="0" anchor="t">
+            <a:noAutofit/>
+          </a:bodyPr>
+          <a:lstStyle/>
+          <a:p>
+            <a:pPr marL="0" indent="0" algn="l">
+              <a:spcBef>
+                <a:spcPts val="0"/>
+              </a:spcBef>
+              <a:buNone/>
+            </a:pPr>
+            <a:r>
+              <a:rPr lang="en-GB" sz="1800" b="1" i="0" dirty="0">
+                <a:solidFill>
+                  <a:srgbClr val="595959"/>
+                </a:solidFill>
+                <a:latin typeface="Arial"/>
+                <a:cs typeface="Arial"/>
+              </a:rPr>
+              <a:t>Special days</a:t>
+            </a:r>
+            <a:r>
+              <a:rPr lang="en-GB" sz="1400" b="0" i="0" dirty="0">
+                <a:solidFill>
+                  <a:srgbClr val="7B7C7E"/>
+                </a:solidFill>
+                <a:latin typeface="Arial"/>
+                <a:cs typeface="Arial"/>
+              </a:rPr>
+              <a:t>   basic → final</a:t>
+            </a:r>
+          </a:p>
+        </p:txBody>
+      </p:sp>
+      <p:sp>
+        <p:nvSpPr>
+          <p:cNvPr id="42" name="Rev card 1"/>
           <p:cNvSpPr/>
           <p:nvPr/>
         </p:nvSpPr>
         <p:spPr>
           <a:xfrm>
-            <a:off x="466344" y="1298448"/>
-            <a:ext cx="5486400" cy="1874520"/>
+            <a:off x="7459367" y="1783080"/>
+            <a:ext cx="4265984" cy="1143000"/>
           </a:xfrm>
           <a:prstGeom prst="roundRect">
             <a:avLst>
@@ -17579,60 +17865,14 @@
       </p:sp>
       <p:sp>
         <p:nvSpPr>
-          <p:cNvPr id="21" name="Conclusion number 1"/>
-          <p:cNvSpPr/>
-          <p:nvPr/>
-        </p:nvSpPr>
-        <p:spPr>
-          <a:xfrm>
-            <a:off x="694944" y="1499616"/>
-            <a:ext cx="457200" cy="457200"/>
-          </a:xfrm>
-          <a:prstGeom prst="ellipse">
-            <a:avLst/>
-          </a:prstGeom>
-          <a:solidFill>
-            <a:srgbClr val="C00000"/>
-          </a:solidFill>
-          <a:ln>
-            <a:noFill/>
-          </a:ln>
-        </p:spPr>
-        <p:txBody>
-          <a:bodyPr wrap="square" lIns="0" tIns="0" rIns="0" bIns="0" anchor="ctr">
-            <a:noAutofit/>
-          </a:bodyPr>
-          <a:lstStyle/>
-          <a:p>
-            <a:pPr marL="0" indent="0" algn="ctr">
-              <a:spcBef>
-                <a:spcPts val="0"/>
-              </a:spcBef>
-              <a:buNone/>
-            </a:pPr>
-            <a:r>
-              <a:rPr lang="en-GB" sz="1800" b="1" i="0" dirty="0">
-                <a:solidFill>
-                  <a:srgbClr val="FFFFFF"/>
-                </a:solidFill>
-                <a:latin typeface="Arial"/>
-                <a:cs typeface="Arial"/>
-              </a:rPr>
-              <a:t>1</a:t>
-            </a:r>
-          </a:p>
-        </p:txBody>
-      </p:sp>
-      <p:sp>
-        <p:nvSpPr>
-          <p:cNvPr id="22" name="Conclusion heading 1"/>
+          <p:cNvPr id="43" name="Rev card label 1"/>
           <p:cNvSpPr txBox="1"/>
           <p:nvPr/>
         </p:nvSpPr>
         <p:spPr>
           <a:xfrm>
-            <a:off x="1335024" y="1517904"/>
-            <a:ext cx="4389120" cy="411480"/>
+            <a:off x="7642247" y="1874520"/>
+            <a:ext cx="3900224" cy="365760"/>
           </a:xfrm>
           <a:prstGeom prst="rect">
             <a:avLst/>
@@ -17655,28 +17895,28 @@
               <a:buNone/>
             </a:pPr>
             <a:r>
-              <a:rPr lang="en-GB" sz="1800" b="1" i="0" dirty="0">
+              <a:rPr lang="en-GB" sz="1500" b="1" i="0" dirty="0">
                 <a:solidFill>
                   <a:srgbClr val="595959"/>
                 </a:solidFill>
                 <a:latin typeface="Arial"/>
                 <a:cs typeface="Arial"/>
               </a:rPr>
-              <a:t>Special days are key days</a:t>
-            </a:r>
-          </a:p>
-        </p:txBody>
-      </p:sp>
-      <p:sp>
-        <p:nvSpPr>
-          <p:cNvPr id="23" name="Conclusion text 1"/>
+              <a:t>Fixed coefficients (A → B)</a:t>
+            </a:r>
+          </a:p>
+        </p:txBody>
+      </p:sp>
+      <p:sp>
+        <p:nvSpPr>
+          <p:cNvPr id="44" name="Rev card values 1"/>
           <p:cNvSpPr txBox="1"/>
           <p:nvPr/>
         </p:nvSpPr>
         <p:spPr>
           <a:xfrm>
-            <a:off x="1335024" y="2011680"/>
-            <a:ext cx="4389120" cy="1051560"/>
+            <a:off x="7642247" y="2240280"/>
+            <a:ext cx="3900224" cy="594360"/>
           </a:xfrm>
           <a:prstGeom prst="rect">
             <a:avLst/>
@@ -17699,28 +17939,58 @@
               <a:buNone/>
             </a:pPr>
             <a:r>
-              <a:rPr lang="en-GB" sz="1400" b="0" i="0" dirty="0">
-                <a:solidFill>
-                  <a:srgbClr val="636462"/>
-                </a:solidFill>
-                <a:latin typeface="Arial"/>
-                <a:cs typeface="Arial"/>
-              </a:rPr>
-              <a:t>Month ends, holidays and bridges are the days users look at. A wrong calendar distorts exactly them: e-invoicing DMR from 0.76 to 1.27 with the basic calendar.</a:t>
-            </a:r>
-          </a:p>
-        </p:txBody>
-      </p:sp>
-      <p:sp>
-        <p:nvSpPr>
-          <p:cNvPr id="25" name="Conclusion card 2"/>
+              <a:rPr lang="en-GB" sz="2400" b="1" i="0" dirty="0">
+                <a:solidFill>
+                  <a:srgbClr val="C00000"/>
+                </a:solidFill>
+                <a:latin typeface="Arial"/>
+                <a:cs typeface="Arial"/>
+              </a:rPr>
+              <a:t>0.50%</a:t>
+            </a:r>
+            <a:r>
+              <a:rPr lang="en-GB" sz="1800" b="0" i="0" dirty="0">
+                <a:solidFill>
+                  <a:srgbClr val="7B7C7E"/>
+                </a:solidFill>
+                <a:latin typeface="Arial"/>
+                <a:cs typeface="Arial"/>
+              </a:rPr>
+              <a:t>  →  </a:t>
+            </a:r>
+            <a:r>
+              <a:rPr lang="en-GB" sz="2400" b="1" i="0" dirty="0">
+                <a:solidFill>
+                  <a:srgbClr val="0072B2"/>
+                </a:solidFill>
+                <a:latin typeface="Arial"/>
+                <a:cs typeface="Arial"/>
+              </a:rPr>
+              <a:t>0.19%</a:t>
+            </a:r>
+            <a:r>
+              <a:rPr lang="en-GB" sz="1600" b="1" i="0" dirty="0">
+                <a:solidFill>
+                  <a:srgbClr val="7B7C7E"/>
+                </a:solidFill>
+                <a:latin typeface="Arial"/>
+                <a:cs typeface="Arial"/>
+              </a:rPr>
+              <a:t>   −63%</a:t>
+            </a:r>
+          </a:p>
+        </p:txBody>
+      </p:sp>
+      <p:sp>
+        <p:nvSpPr>
+          <p:cNvPr id="45" name="Rev card 2"/>
           <p:cNvSpPr/>
           <p:nvPr/>
         </p:nvSpPr>
         <p:spPr>
           <a:xfrm>
-            <a:off x="6236208" y="1298448"/>
-            <a:ext cx="5486400" cy="1874520"/>
+            <a:off x="7459367" y="3063240"/>
+            <a:ext cx="4265984" cy="1143000"/>
           </a:xfrm>
           <a:prstGeom prst="roundRect">
             <a:avLst>
@@ -17746,60 +18016,14 @@
       </p:sp>
       <p:sp>
         <p:nvSpPr>
-          <p:cNvPr id="26" name="Conclusion number 2"/>
-          <p:cNvSpPr/>
-          <p:nvPr/>
-        </p:nvSpPr>
-        <p:spPr>
-          <a:xfrm>
-            <a:off x="6464808" y="1499616"/>
-            <a:ext cx="457200" cy="457200"/>
-          </a:xfrm>
-          <a:prstGeom prst="ellipse">
-            <a:avLst/>
-          </a:prstGeom>
-          <a:solidFill>
-            <a:srgbClr val="C00000"/>
-          </a:solidFill>
-          <a:ln>
-            <a:noFill/>
-          </a:ln>
-        </p:spPr>
-        <p:txBody>
-          <a:bodyPr wrap="square" lIns="0" tIns="0" rIns="0" bIns="0" anchor="ctr">
-            <a:noAutofit/>
-          </a:bodyPr>
-          <a:lstStyle/>
-          <a:p>
-            <a:pPr marL="0" indent="0" algn="ctr">
-              <a:spcBef>
-                <a:spcPts val="0"/>
-              </a:spcBef>
-              <a:buNone/>
-            </a:pPr>
-            <a:r>
-              <a:rPr lang="en-GB" sz="1800" b="1" i="0" dirty="0">
-                <a:solidFill>
-                  <a:srgbClr val="FFFFFF"/>
-                </a:solidFill>
-                <a:latin typeface="Arial"/>
-                <a:cs typeface="Arial"/>
-              </a:rPr>
-              <a:t>2</a:t>
-            </a:r>
-          </a:p>
-        </p:txBody>
-      </p:sp>
-      <p:sp>
-        <p:nvSpPr>
-          <p:cNvPr id="27" name="Conclusion heading 2"/>
+          <p:cNvPr id="46" name="Rev card label 2"/>
           <p:cNvSpPr txBox="1"/>
           <p:nvPr/>
         </p:nvSpPr>
         <p:spPr>
           <a:xfrm>
-            <a:off x="7104888" y="1517904"/>
-            <a:ext cx="4389120" cy="411480"/>
+            <a:off x="7642247" y="3154680"/>
+            <a:ext cx="3900224" cy="365760"/>
           </a:xfrm>
           <a:prstGeom prst="rect">
             <a:avLst/>
@@ -17822,28 +18046,28 @@
               <a:buNone/>
             </a:pPr>
             <a:r>
-              <a:rPr lang="en-GB" sz="1800" b="1" i="0" dirty="0">
+              <a:rPr lang="en-GB" sz="1500" b="1" i="0" dirty="0">
                 <a:solidFill>
                   <a:srgbClr val="595959"/>
                 </a:solidFill>
                 <a:latin typeface="Arial"/>
                 <a:cs typeface="Arial"/>
               </a:rPr>
-              <a:t>Calendar effects are information</a:t>
-            </a:r>
-          </a:p>
-        </p:txBody>
-      </p:sp>
-      <p:sp>
-        <p:nvSpPr>
-          <p:cNvPr id="28" name="Conclusion text 2"/>
+              <a:t>Time-varying (C → D)</a:t>
+            </a:r>
+          </a:p>
+        </p:txBody>
+      </p:sp>
+      <p:sp>
+        <p:nvSpPr>
+          <p:cNvPr id="47" name="Rev card values 2"/>
           <p:cNvSpPr txBox="1"/>
           <p:nvPr/>
         </p:nvSpPr>
         <p:spPr>
           <a:xfrm>
-            <a:off x="7104888" y="2011680"/>
-            <a:ext cx="4389120" cy="1051560"/>
+            <a:off x="7642247" y="3520440"/>
+            <a:ext cx="3900224" cy="594360"/>
           </a:xfrm>
           <a:prstGeom prst="rect">
             <a:avLst/>
@@ -17866,107 +18090,58 @@
               <a:buNone/>
             </a:pPr>
             <a:r>
-              <a:rPr lang="en-GB" sz="1400" b="0" i="0" dirty="0">
-                <a:solidFill>
-                  <a:srgbClr val="636462"/>
-                </a:solidFill>
-                <a:latin typeface="Arial"/>
-                <a:cs typeface="Arial"/>
-              </a:rPr>
-              <a:t>They can be read on their own: a month end worth almost nine weekdays of invoicing; holiday effects on electricity down 10–18% since 2012.</a:t>
-            </a:r>
-          </a:p>
-        </p:txBody>
-      </p:sp>
-      <p:sp>
-        <p:nvSpPr>
-          <p:cNvPr id="30" name="Conclusion card 3"/>
-          <p:cNvSpPr/>
-          <p:nvPr/>
-        </p:nvSpPr>
-        <p:spPr>
-          <a:xfrm>
-            <a:off x="466344" y="3355848"/>
-            <a:ext cx="5486400" cy="1874520"/>
-          </a:xfrm>
-          <a:prstGeom prst="roundRect">
-            <a:avLst>
-              <a:gd name="adj" fmla="val 6000"/>
-            </a:avLst>
-          </a:prstGeom>
-          <a:solidFill>
-            <a:srgbClr val="F2F2F2"/>
-          </a:solidFill>
-          <a:ln>
-            <a:noFill/>
-          </a:ln>
-        </p:spPr>
-        <p:txBody>
-          <a:bodyPr wrap="square" lIns="0" tIns="0" rIns="0" bIns="0" anchor="t">
-            <a:noAutofit/>
-          </a:bodyPr>
-          <a:lstStyle/>
-          <a:p>
-            <a:endParaRPr lang="en-GB" dirty="0"/>
-          </a:p>
-        </p:txBody>
-      </p:sp>
-      <p:sp>
-        <p:nvSpPr>
-          <p:cNvPr id="31" name="Conclusion number 3"/>
-          <p:cNvSpPr/>
-          <p:nvPr/>
-        </p:nvSpPr>
-        <p:spPr>
-          <a:xfrm>
-            <a:off x="694944" y="3557016"/>
-            <a:ext cx="457200" cy="457200"/>
-          </a:xfrm>
-          <a:prstGeom prst="ellipse">
-            <a:avLst/>
-          </a:prstGeom>
-          <a:solidFill>
-            <a:srgbClr val="C00000"/>
-          </a:solidFill>
-          <a:ln>
-            <a:noFill/>
-          </a:ln>
-        </p:spPr>
-        <p:txBody>
-          <a:bodyPr wrap="square" lIns="0" tIns="0" rIns="0" bIns="0" anchor="ctr">
-            <a:noAutofit/>
-          </a:bodyPr>
-          <a:lstStyle/>
-          <a:p>
-            <a:pPr marL="0" indent="0" algn="ctr">
-              <a:spcBef>
-                <a:spcPts val="0"/>
-              </a:spcBef>
-              <a:buNone/>
-            </a:pPr>
-            <a:r>
-              <a:rPr lang="en-GB" sz="1800" b="1" i="0" dirty="0">
-                <a:solidFill>
-                  <a:srgbClr val="FFFFFF"/>
-                </a:solidFill>
-                <a:latin typeface="Arial"/>
-                <a:cs typeface="Arial"/>
-              </a:rPr>
-              <a:t>3</a:t>
-            </a:r>
-          </a:p>
-        </p:txBody>
-      </p:sp>
-      <p:sp>
-        <p:nvSpPr>
-          <p:cNvPr id="32" name="Conclusion heading 3"/>
+              <a:rPr lang="en-GB" sz="2400" b="1" i="0" dirty="0">
+                <a:solidFill>
+                  <a:srgbClr val="C00000"/>
+                </a:solidFill>
+                <a:latin typeface="Arial"/>
+                <a:cs typeface="Arial"/>
+              </a:rPr>
+              <a:t>0.31%</a:t>
+            </a:r>
+            <a:r>
+              <a:rPr lang="en-GB" sz="1800" b="0" i="0" dirty="0">
+                <a:solidFill>
+                  <a:srgbClr val="7B7C7E"/>
+                </a:solidFill>
+                <a:latin typeface="Arial"/>
+                <a:cs typeface="Arial"/>
+              </a:rPr>
+              <a:t>  →  </a:t>
+            </a:r>
+            <a:r>
+              <a:rPr lang="en-GB" sz="2400" b="1" i="0" dirty="0">
+                <a:solidFill>
+                  <a:srgbClr val="0072B2"/>
+                </a:solidFill>
+                <a:latin typeface="Arial"/>
+                <a:cs typeface="Arial"/>
+              </a:rPr>
+              <a:t>0.23%</a:t>
+            </a:r>
+            <a:r>
+              <a:rPr lang="en-GB" sz="1600" b="1" i="0" dirty="0">
+                <a:solidFill>
+                  <a:srgbClr val="7B7C7E"/>
+                </a:solidFill>
+                <a:latin typeface="Arial"/>
+                <a:cs typeface="Arial"/>
+              </a:rPr>
+              <a:t>   −26%</a:t>
+            </a:r>
+          </a:p>
+        </p:txBody>
+      </p:sp>
+      <p:sp>
+        <p:nvSpPr>
+          <p:cNvPr id="50" name="Rev note"/>
           <p:cNvSpPr txBox="1"/>
           <p:nvPr/>
         </p:nvSpPr>
         <p:spPr>
           <a:xfrm>
-            <a:off x="1335024" y="3575304"/>
-            <a:ext cx="4389120" cy="411480"/>
+            <a:off x="7459367" y="4434840"/>
+            <a:ext cx="4265984" cy="1005840"/>
           </a:xfrm>
           <a:prstGeom prst="rect">
             <a:avLst/>
@@ -17989,28 +18164,28 @@
               <a:buNone/>
             </a:pPr>
             <a:r>
-              <a:rPr lang="en-GB" sz="1800" b="1" i="0" dirty="0">
+              <a:rPr lang="en-GB" sz="1400" b="0" i="0" dirty="0">
                 <a:solidFill>
                   <a:srgbClr val="595959"/>
                 </a:solidFill>
                 <a:latin typeface="Arial"/>
                 <a:cs typeface="Arial"/>
               </a:rPr>
-              <a:t>Daily errors do not average out</a:t>
-            </a:r>
-          </a:p>
-        </p:txBody>
-      </p:sp>
-      <p:sp>
-        <p:nvSpPr>
-          <p:cNvPr id="33" name="Conclusion text 3"/>
+              <a:t>Other days: similar for all versions. Final calendar with time-varying coefficients: smallest revisions overall (0.15%).</a:t>
+            </a:r>
+          </a:p>
+        </p:txBody>
+      </p:sp>
+      <p:sp>
+        <p:nvSpPr>
+          <p:cNvPr id="51" name="Caption"/>
           <p:cNvSpPr txBox="1"/>
           <p:nvPr/>
         </p:nvSpPr>
         <p:spPr>
           <a:xfrm>
-            <a:off x="1335024" y="4069080"/>
-            <a:ext cx="4389120" cy="1051560"/>
+            <a:off x="466344" y="5532120"/>
+            <a:ext cx="11256264" cy="411480"/>
           </a:xfrm>
           <a:prstGeom prst="rect">
             <a:avLst/>
@@ -18033,225 +18208,24 @@
               <a:buNone/>
             </a:pPr>
             <a:r>
-              <a:rPr lang="en-GB" sz="1400" b="0" i="0" dirty="0">
-                <a:solidFill>
-                  <a:srgbClr val="636462"/>
-                </a:solidFill>
-                <a:latin typeface="Arial"/>
-                <a:cs typeface="Arial"/>
-              </a:rPr>
-              <a:t>A monthly total hides them; a daily series shows each one as a false movement, or as an unstable outlier that is revised as data arrive.</a:t>
-            </a:r>
-          </a:p>
-        </p:txBody>
-      </p:sp>
-      <p:sp>
-        <p:nvSpPr>
-          <p:cNvPr id="35" name="Conclusion card 4"/>
-          <p:cNvSpPr/>
-          <p:nvPr/>
-        </p:nvSpPr>
-        <p:spPr>
-          <a:xfrm>
-            <a:off x="6236208" y="3355848"/>
-            <a:ext cx="5486400" cy="1874520"/>
-          </a:xfrm>
-          <a:prstGeom prst="roundRect">
-            <a:avLst>
-              <a:gd name="adj" fmla="val 6000"/>
-            </a:avLst>
-          </a:prstGeom>
-          <a:solidFill>
-            <a:srgbClr val="F2F2F2"/>
-          </a:solidFill>
-          <a:ln>
-            <a:noFill/>
-          </a:ln>
-        </p:spPr>
-        <p:txBody>
-          <a:bodyPr wrap="square" lIns="0" tIns="0" rIns="0" bIns="0" anchor="t">
-            <a:noAutofit/>
-          </a:bodyPr>
-          <a:lstStyle/>
-          <a:p>
-            <a:endParaRPr lang="en-GB" dirty="0"/>
-          </a:p>
-        </p:txBody>
-      </p:sp>
-      <p:sp>
-        <p:nvSpPr>
-          <p:cNvPr id="36" name="Conclusion number 4"/>
-          <p:cNvSpPr/>
-          <p:nvPr/>
-        </p:nvSpPr>
-        <p:spPr>
-          <a:xfrm>
-            <a:off x="6464808" y="3557016"/>
-            <a:ext cx="457200" cy="457200"/>
-          </a:xfrm>
-          <a:prstGeom prst="ellipse">
-            <a:avLst/>
-          </a:prstGeom>
-          <a:solidFill>
-            <a:srgbClr val="C00000"/>
-          </a:solidFill>
-          <a:ln>
-            <a:noFill/>
-          </a:ln>
-        </p:spPr>
-        <p:txBody>
-          <a:bodyPr wrap="square" lIns="0" tIns="0" rIns="0" bIns="0" anchor="ctr">
-            <a:noAutofit/>
-          </a:bodyPr>
-          <a:lstStyle/>
-          <a:p>
-            <a:pPr marL="0" indent="0" algn="ctr">
-              <a:spcBef>
-                <a:spcPts val="0"/>
-              </a:spcBef>
-              <a:buNone/>
-            </a:pPr>
-            <a:r>
-              <a:rPr lang="en-GB" sz="1800" b="1" i="0" dirty="0">
-                <a:solidFill>
-                  <a:srgbClr val="FFFFFF"/>
-                </a:solidFill>
-                <a:latin typeface="Arial"/>
-                <a:cs typeface="Arial"/>
-              </a:rPr>
-              <a:t>4</a:t>
-            </a:r>
-          </a:p>
-        </p:txBody>
-      </p:sp>
-      <p:sp>
-        <p:nvSpPr>
-          <p:cNvPr id="37" name="Conclusion heading 4"/>
-          <p:cNvSpPr txBox="1"/>
-          <p:nvPr/>
-        </p:nvSpPr>
-        <p:spPr>
-          <a:xfrm>
-            <a:off x="7104888" y="3575304"/>
-            <a:ext cx="4389120" cy="411480"/>
-          </a:xfrm>
-          <a:prstGeom prst="rect">
-            <a:avLst/>
-          </a:prstGeom>
-          <a:noFill/>
-          <a:ln>
-            <a:noFill/>
-          </a:ln>
-        </p:spPr>
-        <p:txBody>
-          <a:bodyPr wrap="square" lIns="0" tIns="0" rIns="0" bIns="0" anchor="t">
-            <a:noAutofit/>
-          </a:bodyPr>
-          <a:lstStyle/>
-          <a:p>
-            <a:pPr marL="0" indent="0" algn="l">
-              <a:spcBef>
-                <a:spcPts val="0"/>
-              </a:spcBef>
-              <a:buNone/>
-            </a:pPr>
-            <a:r>
-              <a:rPr lang="en-GB" sz="1800" b="1" i="0" dirty="0">
-                <a:solidFill>
-                  <a:srgbClr val="595959"/>
-                </a:solidFill>
-                <a:latin typeface="Arial"/>
-                <a:cs typeface="Arial"/>
-              </a:rPr>
-              <a:t>Each series needs its own calendar</a:t>
-            </a:r>
-          </a:p>
-        </p:txBody>
-      </p:sp>
-      <p:sp>
-        <p:nvSpPr>
-          <p:cNvPr id="38" name="Conclusion text 4"/>
-          <p:cNvSpPr txBox="1"/>
-          <p:nvPr/>
-        </p:nvSpPr>
-        <p:spPr>
-          <a:xfrm>
-            <a:off x="7104888" y="4069080"/>
-            <a:ext cx="4389120" cy="1051560"/>
-          </a:xfrm>
-          <a:prstGeom prst="rect">
-            <a:avLst/>
-          </a:prstGeom>
-          <a:noFill/>
-          <a:ln>
-            <a:noFill/>
-          </a:ln>
-        </p:spPr>
-        <p:txBody>
-          <a:bodyPr wrap="square" lIns="0" tIns="0" rIns="0" bIns="0" anchor="t">
-            <a:noAutofit/>
-          </a:bodyPr>
-          <a:lstStyle/>
-          <a:p>
-            <a:pPr marL="0" indent="0" algn="l">
-              <a:spcBef>
-                <a:spcPts val="0"/>
-              </a:spcBef>
-              <a:buNone/>
-            </a:pPr>
-            <a:r>
-              <a:rPr lang="en-GB" sz="1400" b="0" i="0" dirty="0">
-                <a:solidFill>
-                  <a:srgbClr val="636462"/>
-                </a:solidFill>
-                <a:latin typeface="Arial"/>
-                <a:cs typeface="Arial"/>
-              </a:rPr>
-              <a:t>Same diagnostic, different calendars: administrative for e-invoicing, production for electricity. Standard diagnostics barely see the difference; the DMR does.</a:t>
-            </a:r>
-          </a:p>
-        </p:txBody>
-      </p:sp>
-      <p:sp>
-        <p:nvSpPr>
-          <p:cNvPr id="50" name="Take-home message"/>
-          <p:cNvSpPr txBox="1"/>
-          <p:nvPr/>
-        </p:nvSpPr>
-        <p:spPr>
-          <a:xfrm>
-            <a:off x="466344" y="5532120"/>
-            <a:ext cx="11256264" cy="411480"/>
-          </a:xfrm>
-          <a:prstGeom prst="rect">
-            <a:avLst/>
-          </a:prstGeom>
-          <a:noFill/>
-          <a:ln>
-            <a:noFill/>
-          </a:ln>
-        </p:spPr>
-        <p:txBody>
-          <a:bodyPr wrap="square" lIns="0" tIns="0" rIns="0" bIns="0" anchor="t">
-            <a:noAutofit/>
-          </a:bodyPr>
-          <a:lstStyle/>
-          <a:p>
-            <a:pPr marL="0" indent="0" algn="l">
-              <a:spcBef>
-                <a:spcPts val="0"/>
-              </a:spcBef>
-              <a:buNone/>
-            </a:pPr>
-            <a:r>
-              <a:rPr lang="en-GB" sz="1800" b="1" i="0" dirty="0">
+              <a:rPr lang="en-GB" sz="1300" b="1" i="0" dirty="0">
                 <a:solidFill>
                   <a:srgbClr val="C00000"/>
                 </a:solidFill>
                 <a:latin typeface="Arial"/>
                 <a:cs typeface="Arial"/>
               </a:rPr>
-              <a:t>Build the calendar from the evidence of each series, and check it on the adjusted series, day by day.</a:t>
+              <a:t>Result · Revisions, electricity.  </a:t>
+            </a:r>
+            <a:r>
+              <a:rPr lang="en-GB" sz="1300" b="0" i="1" dirty="0">
+                <a:solidFill>
+                  <a:srgbClr val="7B7C7E"/>
+                </a:solidFill>
+                <a:latin typeface="Arial"/>
+                <a:cs typeface="Arial"/>
+              </a:rPr>
+              <a:t>Full sample vs six vintages ending 7 to 730 days earlier; mean absolute revision (%) over the last year of each vintage; about 24 special days per year.</a:t>
             </a:r>
           </a:p>
         </p:txBody>
@@ -18288,10 +18262,41 @@
       </p:grpSpPr>
       <p:sp>
         <p:nvSpPr>
-          <p:cNvPr id="2" name="Titolo 1">
+          <p:cNvPr id="19461" name="Titolo 4"/>
+          <p:cNvSpPr>
+            <a:spLocks noGrp="1"/>
+          </p:cNvSpPr>
+          <p:nvPr>
+            <p:ph type="title"/>
+          </p:nvPr>
+        </p:nvSpPr>
+        <p:spPr>
+          <a:xfrm>
+            <a:off x="468313" y="482109"/>
+            <a:ext cx="11269662" cy="405304"/>
+          </a:xfrm>
+        </p:spPr>
+        <p:txBody>
+          <a:bodyPr/>
+          <a:lstStyle/>
+          <a:p>
+            <a:r>
+              <a:rPr lang="en-GB" altLang="it-IT" sz="3600" dirty="0">
+                <a:solidFill>
+                  <a:srgbClr val="C00000"/>
+                </a:solidFill>
+              </a:rPr>
+              <a:t>A good calendar also stabilises the outliers</a:t>
+            </a:r>
+          </a:p>
+        </p:txBody>
+      </p:sp>
+      <p:sp>
+        <p:nvSpPr>
+          <p:cNvPr id="9" name="Segnaposto numero diapositiva 4">
             <a:extLst>
               <a:ext uri="{FF2B5EF4-FFF2-40B4-BE49-F238E27FC236}">
-                <a16:creationId xmlns:a16="http://schemas.microsoft.com/office/drawing/2014/main" id="{1907821B-5649-449D-A1C2-3F67CA468A7F}"/>
+                <a16:creationId xmlns:a16="http://schemas.microsoft.com/office/drawing/2014/main" id="{43529721-AF16-448D-9B7A-D70C2ADC2006}"/>
               </a:ext>
             </a:extLst>
           </p:cNvPr>
@@ -18299,71 +18304,42 @@
             <a:spLocks noGrp="1"/>
           </p:cNvSpPr>
           <p:nvPr>
-            <p:ph type="ctrTitle"/>
+            <p:ph type="sldNum" sz="quarter" idx="11"/>
           </p:nvPr>
         </p:nvSpPr>
-        <p:spPr/>
+        <p:spPr>
+          <a:xfrm>
+            <a:off x="0" y="6392815"/>
+            <a:ext cx="501650" cy="365125"/>
+          </a:xfrm>
+          <a:prstGeom prst="rect">
+            <a:avLst/>
+          </a:prstGeom>
+        </p:spPr>
         <p:txBody>
           <a:bodyPr/>
           <a:lstStyle/>
           <a:p>
-            <a:r>
-              <a:rPr lang="it-IT" dirty="0" err="1">
-                <a:solidFill>
-                  <a:srgbClr val="C00000"/>
-                </a:solidFill>
-              </a:rPr>
-              <a:t>Thanks</a:t>
-            </a:r>
-            <a:r>
-              <a:rPr lang="it-IT" dirty="0">
-                <a:solidFill>
-                  <a:srgbClr val="C00000"/>
-                </a:solidFill>
-              </a:rPr>
-              <a:t> for </a:t>
-            </a:r>
-            <a:r>
-              <a:rPr lang="it-IT" dirty="0" err="1">
-                <a:solidFill>
-                  <a:srgbClr val="C00000"/>
-                </a:solidFill>
-              </a:rPr>
-              <a:t>your</a:t>
-            </a:r>
-            <a:r>
-              <a:rPr lang="it-IT" dirty="0">
-                <a:solidFill>
-                  <a:srgbClr val="C00000"/>
-                </a:solidFill>
-              </a:rPr>
-              <a:t> </a:t>
-            </a:r>
-            <a:r>
-              <a:rPr lang="it-IT" dirty="0" err="1">
-                <a:solidFill>
-                  <a:srgbClr val="C00000"/>
-                </a:solidFill>
-              </a:rPr>
-              <a:t>attention</a:t>
-            </a:r>
-            <a:r>
-              <a:rPr lang="it-IT" dirty="0">
-                <a:solidFill>
-                  <a:srgbClr val="C00000"/>
-                </a:solidFill>
-              </a:rPr>
-              <a:t>!</a:t>
-            </a:r>
-          </a:p>
-        </p:txBody>
-      </p:sp>
-      <p:sp>
-        <p:nvSpPr>
-          <p:cNvPr id="3" name="Segnaposto testo 2">
+            <a:pPr>
+              <a:defRPr/>
+            </a:pPr>
+            <a:fld id="{48B4153A-D4C5-4CEF-8992-0D8815C829E3}" type="slidenum">
+              <a:rPr lang="en-US" smtClean="0"/>
+              <a:pPr>
+                <a:defRPr/>
+              </a:pPr>
+              <a:t>26</a:t>
+            </a:fld>
+            <a:endParaRPr lang="en-US" dirty="0"/>
+          </a:p>
+        </p:txBody>
+      </p:sp>
+      <p:sp>
+        <p:nvSpPr>
+          <p:cNvPr id="8" name="Segnaposto piè di pagina 3">
             <a:extLst>
               <a:ext uri="{FF2B5EF4-FFF2-40B4-BE49-F238E27FC236}">
-                <a16:creationId xmlns:a16="http://schemas.microsoft.com/office/drawing/2014/main" id="{52857493-CE83-4A58-B836-860B262B8CCD}"/>
+                <a16:creationId xmlns:a16="http://schemas.microsoft.com/office/drawing/2014/main" id="{3223DD80-9C7E-474F-A668-27B6983A5687}"/>
               </a:ext>
             </a:extLst>
           </p:cNvPr>
@@ -18371,28 +18347,737 @@
             <a:spLocks noGrp="1"/>
           </p:cNvSpPr>
           <p:nvPr>
-            <p:ph type="body" idx="1"/>
+            <p:ph type="ftr" sz="quarter" idx="10"/>
           </p:nvPr>
         </p:nvSpPr>
         <p:spPr>
           <a:xfrm>
-            <a:off x="3296093" y="3683529"/>
-            <a:ext cx="5624623" cy="867206"/>
+            <a:off x="635830" y="6382305"/>
+            <a:ext cx="9644444" cy="259965"/>
           </a:xfrm>
         </p:spPr>
         <p:txBody>
           <a:bodyPr/>
           <a:lstStyle/>
           <a:p>
-            <a:r>
-              <a:rPr lang="it-IT" sz="2400" dirty="0"/>
-              <a:t>ALESSANDRO PIOVANI</a:t>
-            </a:r>
-          </a:p>
-          <a:p>
-            <a:r>
-              <a:rPr lang="it-IT" sz="2400" dirty="0"/>
-              <a:t>alessandro.piovani@istat.it</a:t>
+            <a:pPr>
+              <a:defRPr/>
+            </a:pPr>
+            <a:r>
+              <a:rPr lang="en-US" dirty="0"/>
+              <a:t>Building calendars for daily seasonal adjustment</a:t>
+            </a:r>
+          </a:p>
+        </p:txBody>
+      </p:sp>
+      <p:sp>
+        <p:nvSpPr>
+          <p:cNvPr id="20" name="Outlier card 1"/>
+          <p:cNvSpPr/>
+          <p:nvPr/>
+        </p:nvSpPr>
+        <p:spPr>
+          <a:xfrm>
+            <a:off x="466344" y="1298448"/>
+            <a:ext cx="5486400" cy="1874520"/>
+          </a:xfrm>
+          <a:prstGeom prst="roundRect">
+            <a:avLst>
+              <a:gd name="adj" fmla="val 6000"/>
+            </a:avLst>
+          </a:prstGeom>
+          <a:solidFill>
+            <a:srgbClr val="F2F2F2"/>
+          </a:solidFill>
+          <a:ln>
+            <a:noFill/>
+          </a:ln>
+        </p:spPr>
+        <p:txBody>
+          <a:bodyPr wrap="square" lIns="0" tIns="0" rIns="0" bIns="0" anchor="t">
+            <a:noAutofit/>
+          </a:bodyPr>
+          <a:lstStyle/>
+          <a:p>
+            <a:endParaRPr lang="en-GB" dirty="0"/>
+          </a:p>
+        </p:txBody>
+      </p:sp>
+      <p:sp>
+        <p:nvSpPr>
+          <p:cNvPr id="21" name="Outlier letter 1"/>
+          <p:cNvSpPr/>
+          <p:nvPr/>
+        </p:nvSpPr>
+        <p:spPr>
+          <a:xfrm>
+            <a:off x="694944" y="1499616"/>
+            <a:ext cx="502920" cy="502920"/>
+          </a:xfrm>
+          <a:prstGeom prst="ellipse">
+            <a:avLst/>
+          </a:prstGeom>
+          <a:solidFill>
+            <a:srgbClr val="C00000"/>
+          </a:solidFill>
+          <a:ln>
+            <a:noFill/>
+          </a:ln>
+        </p:spPr>
+        <p:txBody>
+          <a:bodyPr wrap="square" lIns="0" tIns="0" rIns="0" bIns="0" anchor="ctr">
+            <a:noAutofit/>
+          </a:bodyPr>
+          <a:lstStyle/>
+          <a:p>
+            <a:pPr marL="0" indent="0" algn="ctr">
+              <a:spcBef>
+                <a:spcPts val="0"/>
+              </a:spcBef>
+              <a:buNone/>
+            </a:pPr>
+            <a:r>
+              <a:rPr lang="en-GB" sz="1800" b="1" i="0" dirty="0">
+                <a:solidFill>
+                  <a:srgbClr val="FFFFFF"/>
+                </a:solidFill>
+                <a:latin typeface="Arial"/>
+                <a:cs typeface="Arial"/>
+              </a:rPr>
+              <a:t>A</a:t>
+            </a:r>
+          </a:p>
+        </p:txBody>
+      </p:sp>
+      <p:sp>
+        <p:nvSpPr>
+          <p:cNvPr id="22" name="Outlier heading 1"/>
+          <p:cNvSpPr txBox="1"/>
+          <p:nvPr/>
+        </p:nvSpPr>
+        <p:spPr>
+          <a:xfrm>
+            <a:off x="1380744" y="1536192"/>
+            <a:ext cx="4343400" cy="411480"/>
+          </a:xfrm>
+          <a:prstGeom prst="rect">
+            <a:avLst/>
+          </a:prstGeom>
+          <a:noFill/>
+          <a:ln>
+            <a:noFill/>
+          </a:ln>
+        </p:spPr>
+        <p:txBody>
+          <a:bodyPr wrap="square" lIns="0" tIns="0" rIns="0" bIns="0" anchor="t">
+            <a:noAutofit/>
+          </a:bodyPr>
+          <a:lstStyle/>
+          <a:p>
+            <a:pPr marL="0" indent="0" algn="l">
+              <a:spcBef>
+                <a:spcPts val="0"/>
+              </a:spcBef>
+              <a:buNone/>
+            </a:pPr>
+            <a:r>
+              <a:rPr lang="en-GB" sz="1800" b="1" i="0" dirty="0">
+                <a:solidFill>
+                  <a:srgbClr val="595959"/>
+                </a:solidFill>
+                <a:latin typeface="Arial"/>
+                <a:cs typeface="Arial"/>
+              </a:rPr>
+              <a:t>Basic, fixed</a:t>
+            </a:r>
+          </a:p>
+        </p:txBody>
+      </p:sp>
+      <p:sp>
+        <p:nvSpPr>
+          <p:cNvPr id="23" name="Outlier text 1"/>
+          <p:cNvSpPr txBox="1"/>
+          <p:nvPr/>
+        </p:nvSpPr>
+        <p:spPr>
+          <a:xfrm>
+            <a:off x="1380744" y="2029968"/>
+            <a:ext cx="4343400" cy="1051560"/>
+          </a:xfrm>
+          <a:prstGeom prst="rect">
+            <a:avLst/>
+          </a:prstGeom>
+          <a:noFill/>
+          <a:ln>
+            <a:noFill/>
+          </a:ln>
+        </p:spPr>
+        <p:txBody>
+          <a:bodyPr wrap="square" lIns="0" tIns="0" rIns="0" bIns="0" anchor="t">
+            <a:noAutofit/>
+          </a:bodyPr>
+          <a:lstStyle/>
+          <a:p>
+            <a:pPr marL="0" indent="0" algn="l">
+              <a:spcBef>
+                <a:spcPts val="0"/>
+              </a:spcBef>
+              <a:buNone/>
+            </a:pPr>
+            <a:r>
+              <a:rPr lang="en-GB" sz="1400" b="0" i="0" dirty="0">
+                <a:solidFill>
+                  <a:srgbClr val="636462"/>
+                </a:solidFill>
+                <a:latin typeface="Arial"/>
+                <a:cs typeface="Arial"/>
+              </a:rPr>
+              <a:t>23 of 28 outliers on weekend holidays, and they come and go: All Saints' Day 2025, New Year's Days 2017 and 2023; Epiphany 2024 changes type and date.</a:t>
+            </a:r>
+          </a:p>
+        </p:txBody>
+      </p:sp>
+      <p:sp>
+        <p:nvSpPr>
+          <p:cNvPr id="25" name="Outlier card 2"/>
+          <p:cNvSpPr/>
+          <p:nvPr/>
+        </p:nvSpPr>
+        <p:spPr>
+          <a:xfrm>
+            <a:off x="6236208" y="1298448"/>
+            <a:ext cx="5486400" cy="1874520"/>
+          </a:xfrm>
+          <a:prstGeom prst="roundRect">
+            <a:avLst>
+              <a:gd name="adj" fmla="val 6000"/>
+            </a:avLst>
+          </a:prstGeom>
+          <a:solidFill>
+            <a:srgbClr val="F2F2F2"/>
+          </a:solidFill>
+          <a:ln>
+            <a:noFill/>
+          </a:ln>
+        </p:spPr>
+        <p:txBody>
+          <a:bodyPr wrap="square" lIns="0" tIns="0" rIns="0" bIns="0" anchor="t">
+            <a:noAutofit/>
+          </a:bodyPr>
+          <a:lstStyle/>
+          <a:p>
+            <a:endParaRPr lang="en-GB" dirty="0"/>
+          </a:p>
+        </p:txBody>
+      </p:sp>
+      <p:sp>
+        <p:nvSpPr>
+          <p:cNvPr id="26" name="Outlier letter 2"/>
+          <p:cNvSpPr/>
+          <p:nvPr/>
+        </p:nvSpPr>
+        <p:spPr>
+          <a:xfrm>
+            <a:off x="6464808" y="1499616"/>
+            <a:ext cx="502920" cy="502920"/>
+          </a:xfrm>
+          <a:prstGeom prst="ellipse">
+            <a:avLst/>
+          </a:prstGeom>
+          <a:solidFill>
+            <a:srgbClr val="942639"/>
+          </a:solidFill>
+          <a:ln>
+            <a:noFill/>
+          </a:ln>
+        </p:spPr>
+        <p:txBody>
+          <a:bodyPr wrap="square" lIns="0" tIns="0" rIns="0" bIns="0" anchor="ctr">
+            <a:noAutofit/>
+          </a:bodyPr>
+          <a:lstStyle/>
+          <a:p>
+            <a:pPr marL="0" indent="0" algn="ctr">
+              <a:spcBef>
+                <a:spcPts val="0"/>
+              </a:spcBef>
+              <a:buNone/>
+            </a:pPr>
+            <a:r>
+              <a:rPr lang="en-GB" sz="1800" b="1" i="0" dirty="0">
+                <a:solidFill>
+                  <a:srgbClr val="FFFFFF"/>
+                </a:solidFill>
+                <a:latin typeface="Arial"/>
+                <a:cs typeface="Arial"/>
+              </a:rPr>
+              <a:t>B</a:t>
+            </a:r>
+          </a:p>
+        </p:txBody>
+      </p:sp>
+      <p:sp>
+        <p:nvSpPr>
+          <p:cNvPr id="27" name="Outlier heading 2"/>
+          <p:cNvSpPr txBox="1"/>
+          <p:nvPr/>
+        </p:nvSpPr>
+        <p:spPr>
+          <a:xfrm>
+            <a:off x="7150608" y="1536192"/>
+            <a:ext cx="4343400" cy="411480"/>
+          </a:xfrm>
+          <a:prstGeom prst="rect">
+            <a:avLst/>
+          </a:prstGeom>
+          <a:noFill/>
+          <a:ln>
+            <a:noFill/>
+          </a:ln>
+        </p:spPr>
+        <p:txBody>
+          <a:bodyPr wrap="square" lIns="0" tIns="0" rIns="0" bIns="0" anchor="t">
+            <a:noAutofit/>
+          </a:bodyPr>
+          <a:lstStyle/>
+          <a:p>
+            <a:pPr marL="0" indent="0" algn="l">
+              <a:spcBef>
+                <a:spcPts val="0"/>
+              </a:spcBef>
+              <a:buNone/>
+            </a:pPr>
+            <a:r>
+              <a:rPr lang="en-GB" sz="1800" b="1" i="0" dirty="0">
+                <a:solidFill>
+                  <a:srgbClr val="595959"/>
+                </a:solidFill>
+                <a:latin typeface="Arial"/>
+                <a:cs typeface="Arial"/>
+              </a:rPr>
+              <a:t>Final, fixed</a:t>
+            </a:r>
+          </a:p>
+        </p:txBody>
+      </p:sp>
+      <p:sp>
+        <p:nvSpPr>
+          <p:cNvPr id="28" name="Outlier text 2"/>
+          <p:cNvSpPr txBox="1"/>
+          <p:nvPr/>
+        </p:nvSpPr>
+        <p:spPr>
+          <a:xfrm>
+            <a:off x="7150608" y="2029968"/>
+            <a:ext cx="4343400" cy="1051560"/>
+          </a:xfrm>
+          <a:prstGeom prst="rect">
+            <a:avLst/>
+          </a:prstGeom>
+          <a:noFill/>
+          <a:ln>
+            <a:noFill/>
+          </a:ln>
+        </p:spPr>
+        <p:txBody>
+          <a:bodyPr wrap="square" lIns="0" tIns="0" rIns="0" bIns="0" anchor="t">
+            <a:noAutofit/>
+          </a:bodyPr>
+          <a:lstStyle/>
+          <a:p>
+            <a:pPr marL="0" indent="0" algn="l">
+              <a:spcBef>
+                <a:spcPts val="0"/>
+              </a:spcBef>
+              <a:buNone/>
+            </a:pPr>
+            <a:r>
+              <a:rPr lang="en-GB" sz="1400" b="0" i="0" dirty="0">
+                <a:solidFill>
+                  <a:srgbClr val="636462"/>
+                </a:solidFill>
+                <a:latin typeface="Arial"/>
+                <a:cs typeface="Arial"/>
+              </a:rPr>
+              <a:t>Weather outliers unstable: the 2015 storm and the 2023 summer level shifts appear only in some vintages. One day revised by 65 thousand MWh.</a:t>
+            </a:r>
+          </a:p>
+        </p:txBody>
+      </p:sp>
+      <p:sp>
+        <p:nvSpPr>
+          <p:cNvPr id="30" name="Outlier card 3"/>
+          <p:cNvSpPr/>
+          <p:nvPr/>
+        </p:nvSpPr>
+        <p:spPr>
+          <a:xfrm>
+            <a:off x="466344" y="3355848"/>
+            <a:ext cx="5486400" cy="1874520"/>
+          </a:xfrm>
+          <a:prstGeom prst="roundRect">
+            <a:avLst>
+              <a:gd name="adj" fmla="val 6000"/>
+            </a:avLst>
+          </a:prstGeom>
+          <a:solidFill>
+            <a:srgbClr val="F2F2F2"/>
+          </a:solidFill>
+          <a:ln>
+            <a:noFill/>
+          </a:ln>
+        </p:spPr>
+        <p:txBody>
+          <a:bodyPr wrap="square" lIns="0" tIns="0" rIns="0" bIns="0" anchor="t">
+            <a:noAutofit/>
+          </a:bodyPr>
+          <a:lstStyle/>
+          <a:p>
+            <a:endParaRPr lang="en-GB" dirty="0"/>
+          </a:p>
+        </p:txBody>
+      </p:sp>
+      <p:sp>
+        <p:nvSpPr>
+          <p:cNvPr id="31" name="Outlier letter 3"/>
+          <p:cNvSpPr/>
+          <p:nvPr/>
+        </p:nvSpPr>
+        <p:spPr>
+          <a:xfrm>
+            <a:off x="694944" y="3557016"/>
+            <a:ext cx="502920" cy="502920"/>
+          </a:xfrm>
+          <a:prstGeom prst="ellipse">
+            <a:avLst/>
+          </a:prstGeom>
+          <a:solidFill>
+            <a:srgbClr val="7B7C7E"/>
+          </a:solidFill>
+          <a:ln>
+            <a:noFill/>
+          </a:ln>
+        </p:spPr>
+        <p:txBody>
+          <a:bodyPr wrap="square" lIns="0" tIns="0" rIns="0" bIns="0" anchor="ctr">
+            <a:noAutofit/>
+          </a:bodyPr>
+          <a:lstStyle/>
+          <a:p>
+            <a:pPr marL="0" indent="0" algn="ctr">
+              <a:spcBef>
+                <a:spcPts val="0"/>
+              </a:spcBef>
+              <a:buNone/>
+            </a:pPr>
+            <a:r>
+              <a:rPr lang="en-GB" sz="1800" b="1" i="0" dirty="0">
+                <a:solidFill>
+                  <a:srgbClr val="FFFFFF"/>
+                </a:solidFill>
+                <a:latin typeface="Arial"/>
+                <a:cs typeface="Arial"/>
+              </a:rPr>
+              <a:t>C</a:t>
+            </a:r>
+          </a:p>
+        </p:txBody>
+      </p:sp>
+      <p:sp>
+        <p:nvSpPr>
+          <p:cNvPr id="32" name="Outlier heading 3"/>
+          <p:cNvSpPr txBox="1"/>
+          <p:nvPr/>
+        </p:nvSpPr>
+        <p:spPr>
+          <a:xfrm>
+            <a:off x="1380744" y="3593592"/>
+            <a:ext cx="4343400" cy="411480"/>
+          </a:xfrm>
+          <a:prstGeom prst="rect">
+            <a:avLst/>
+          </a:prstGeom>
+          <a:noFill/>
+          <a:ln>
+            <a:noFill/>
+          </a:ln>
+        </p:spPr>
+        <p:txBody>
+          <a:bodyPr wrap="square" lIns="0" tIns="0" rIns="0" bIns="0" anchor="t">
+            <a:noAutofit/>
+          </a:bodyPr>
+          <a:lstStyle/>
+          <a:p>
+            <a:pPr marL="0" indent="0" algn="l">
+              <a:spcBef>
+                <a:spcPts val="0"/>
+              </a:spcBef>
+              <a:buNone/>
+            </a:pPr>
+            <a:r>
+              <a:rPr lang="en-GB" sz="1800" b="1" i="0" dirty="0">
+                <a:solidFill>
+                  <a:srgbClr val="595959"/>
+                </a:solidFill>
+                <a:latin typeface="Arial"/>
+                <a:cs typeface="Arial"/>
+              </a:rPr>
+              <a:t>Basic, time-varying</a:t>
+            </a:r>
+          </a:p>
+        </p:txBody>
+      </p:sp>
+      <p:sp>
+        <p:nvSpPr>
+          <p:cNvPr id="33" name="Outlier text 3"/>
+          <p:cNvSpPr txBox="1"/>
+          <p:nvPr/>
+        </p:nvSpPr>
+        <p:spPr>
+          <a:xfrm>
+            <a:off x="1380744" y="4087368"/>
+            <a:ext cx="4343400" cy="1051560"/>
+          </a:xfrm>
+          <a:prstGeom prst="rect">
+            <a:avLst/>
+          </a:prstGeom>
+          <a:noFill/>
+          <a:ln>
+            <a:noFill/>
+          </a:ln>
+        </p:spPr>
+        <p:txBody>
+          <a:bodyPr wrap="square" lIns="0" tIns="0" rIns="0" bIns="0" anchor="t">
+            <a:noAutofit/>
+          </a:bodyPr>
+          <a:lstStyle/>
+          <a:p>
+            <a:pPr marL="0" indent="0" algn="l">
+              <a:spcBef>
+                <a:spcPts val="0"/>
+              </a:spcBef>
+              <a:buNone/>
+            </a:pPr>
+            <a:r>
+              <a:rPr lang="en-GB" sz="1400" b="0" i="0" dirty="0">
+                <a:solidFill>
+                  <a:srgbClr val="636462"/>
+                </a:solidFill>
+                <a:latin typeface="Arial"/>
+                <a:cs typeface="Arial"/>
+              </a:rPr>
+              <a:t>No outlier on holidays, but the error is still there: the coefficients move to absorb it, and are revised as data arrive. A switch outlier sits next to the 2016 All Saints' bridge.</a:t>
+            </a:r>
+          </a:p>
+        </p:txBody>
+      </p:sp>
+      <p:sp>
+        <p:nvSpPr>
+          <p:cNvPr id="35" name="Outlier card 4"/>
+          <p:cNvSpPr/>
+          <p:nvPr/>
+        </p:nvSpPr>
+        <p:spPr>
+          <a:xfrm>
+            <a:off x="6236208" y="3355848"/>
+            <a:ext cx="5486400" cy="1874520"/>
+          </a:xfrm>
+          <a:prstGeom prst="roundRect">
+            <a:avLst>
+              <a:gd name="adj" fmla="val 6000"/>
+            </a:avLst>
+          </a:prstGeom>
+          <a:solidFill>
+            <a:srgbClr val="F2F2F2"/>
+          </a:solidFill>
+          <a:ln>
+            <a:noFill/>
+          </a:ln>
+        </p:spPr>
+        <p:txBody>
+          <a:bodyPr wrap="square" lIns="0" tIns="0" rIns="0" bIns="0" anchor="t">
+            <a:noAutofit/>
+          </a:bodyPr>
+          <a:lstStyle/>
+          <a:p>
+            <a:endParaRPr lang="en-GB" dirty="0"/>
+          </a:p>
+        </p:txBody>
+      </p:sp>
+      <p:sp>
+        <p:nvSpPr>
+          <p:cNvPr id="36" name="Outlier letter 4"/>
+          <p:cNvSpPr/>
+          <p:nvPr/>
+        </p:nvSpPr>
+        <p:spPr>
+          <a:xfrm>
+            <a:off x="6464808" y="3557016"/>
+            <a:ext cx="502920" cy="502920"/>
+          </a:xfrm>
+          <a:prstGeom prst="ellipse">
+            <a:avLst/>
+          </a:prstGeom>
+          <a:solidFill>
+            <a:srgbClr val="0072B2"/>
+          </a:solidFill>
+          <a:ln>
+            <a:noFill/>
+          </a:ln>
+        </p:spPr>
+        <p:txBody>
+          <a:bodyPr wrap="square" lIns="0" tIns="0" rIns="0" bIns="0" anchor="ctr">
+            <a:noAutofit/>
+          </a:bodyPr>
+          <a:lstStyle/>
+          <a:p>
+            <a:pPr marL="0" indent="0" algn="ctr">
+              <a:spcBef>
+                <a:spcPts val="0"/>
+              </a:spcBef>
+              <a:buNone/>
+            </a:pPr>
+            <a:r>
+              <a:rPr lang="en-GB" sz="1800" b="1" i="0" dirty="0">
+                <a:solidFill>
+                  <a:srgbClr val="FFFFFF"/>
+                </a:solidFill>
+                <a:latin typeface="Arial"/>
+                <a:cs typeface="Arial"/>
+              </a:rPr>
+              <a:t>D</a:t>
+            </a:r>
+          </a:p>
+        </p:txBody>
+      </p:sp>
+      <p:sp>
+        <p:nvSpPr>
+          <p:cNvPr id="37" name="Outlier heading 4"/>
+          <p:cNvSpPr txBox="1"/>
+          <p:nvPr/>
+        </p:nvSpPr>
+        <p:spPr>
+          <a:xfrm>
+            <a:off x="7150608" y="3593592"/>
+            <a:ext cx="4343400" cy="411480"/>
+          </a:xfrm>
+          <a:prstGeom prst="rect">
+            <a:avLst/>
+          </a:prstGeom>
+          <a:noFill/>
+          <a:ln>
+            <a:noFill/>
+          </a:ln>
+        </p:spPr>
+        <p:txBody>
+          <a:bodyPr wrap="square" lIns="0" tIns="0" rIns="0" bIns="0" anchor="t">
+            <a:noAutofit/>
+          </a:bodyPr>
+          <a:lstStyle/>
+          <a:p>
+            <a:pPr marL="0" indent="0" algn="l">
+              <a:spcBef>
+                <a:spcPts val="0"/>
+              </a:spcBef>
+              <a:buNone/>
+            </a:pPr>
+            <a:r>
+              <a:rPr lang="en-GB" sz="1800" b="1" i="0" dirty="0">
+                <a:solidFill>
+                  <a:srgbClr val="595959"/>
+                </a:solidFill>
+                <a:latin typeface="Arial"/>
+                <a:cs typeface="Arial"/>
+              </a:rPr>
+              <a:t>Final, time-varying (adopted)</a:t>
+            </a:r>
+          </a:p>
+        </p:txBody>
+      </p:sp>
+      <p:sp>
+        <p:nvSpPr>
+          <p:cNvPr id="38" name="Outlier text 4"/>
+          <p:cNvSpPr txBox="1"/>
+          <p:nvPr/>
+        </p:nvSpPr>
+        <p:spPr>
+          <a:xfrm>
+            <a:off x="7150608" y="4087368"/>
+            <a:ext cx="4343400" cy="1051560"/>
+          </a:xfrm>
+          <a:prstGeom prst="rect">
+            <a:avLst/>
+          </a:prstGeom>
+          <a:noFill/>
+          <a:ln>
+            <a:noFill/>
+          </a:ln>
+        </p:spPr>
+        <p:txBody>
+          <a:bodyPr wrap="square" lIns="0" tIns="0" rIns="0" bIns="0" anchor="t">
+            <a:noAutofit/>
+          </a:bodyPr>
+          <a:lstStyle/>
+          <a:p>
+            <a:pPr marL="0" indent="0" algn="l">
+              <a:spcBef>
+                <a:spcPts val="0"/>
+              </a:spcBef>
+              <a:buNone/>
+            </a:pPr>
+            <a:r>
+              <a:rPr lang="en-GB" sz="1400" b="0" i="0" dirty="0">
+                <a:solidFill>
+                  <a:srgbClr val="636462"/>
+                </a:solidFill>
+                <a:latin typeface="Arial"/>
+                <a:cs typeface="Arial"/>
+              </a:rPr>
+              <a:t>The same outliers in all estimates, or all but one; on holidays only the Covid reopening of April 2020, a real event. Largest single-day revision below 10 thousand MWh.</a:t>
+            </a:r>
+          </a:p>
+        </p:txBody>
+      </p:sp>
+      <p:sp>
+        <p:nvSpPr>
+          <p:cNvPr id="50" name="Take-home"/>
+          <p:cNvSpPr txBox="1"/>
+          <p:nvPr/>
+        </p:nvSpPr>
+        <p:spPr>
+          <a:xfrm>
+            <a:off x="466344" y="5532120"/>
+            <a:ext cx="11256264" cy="411480"/>
+          </a:xfrm>
+          <a:prstGeom prst="rect">
+            <a:avLst/>
+          </a:prstGeom>
+          <a:noFill/>
+          <a:ln>
+            <a:noFill/>
+          </a:ln>
+        </p:spPr>
+        <p:txBody>
+          <a:bodyPr wrap="square" lIns="0" tIns="0" rIns="0" bIns="0" anchor="t">
+            <a:noAutofit/>
+          </a:bodyPr>
+          <a:lstStyle/>
+          <a:p>
+            <a:pPr marL="0" indent="0" algn="l">
+              <a:spcBef>
+                <a:spcPts val="0"/>
+              </a:spcBef>
+              <a:buNone/>
+            </a:pPr>
+            <a:r>
+              <a:rPr lang="en-GB" sz="1800" b="1" i="0" dirty="0">
+                <a:solidFill>
+                  <a:srgbClr val="C00000"/>
+                </a:solidFill>
+                <a:latin typeface="Arial"/>
+                <a:cs typeface="Arial"/>
+              </a:rPr>
+              <a:t>A well-specified calendar makes the whole model more stable, not only the calendar days.</a:t>
             </a:r>
           </a:p>
         </p:txBody>
@@ -18400,7 +19085,7 @@
     </p:spTree>
     <p:extLst>
       <p:ext uri="{BB962C8B-B14F-4D97-AF65-F5344CB8AC3E}">
-        <p14:creationId xmlns:p14="http://schemas.microsoft.com/office/powerpoint/2010/main" val="1975414769"/>
+        <p14:creationId xmlns:p14="http://schemas.microsoft.com/office/powerpoint/2010/main" val="1781916628"/>
       </p:ext>
     </p:extLst>
   </p:cSld>
@@ -18453,7 +19138,7 @@
                   <a:srgbClr val="C00000"/>
                 </a:solidFill>
               </a:rPr>
-              <a:t>Revisions: special days need the calendar</a:t>
+              <a:t>Standard diagnostics barely see the calendar</a:t>
             </a:r>
           </a:p>
         </p:txBody>
@@ -18495,7 +19180,7 @@
               <a:pPr>
                 <a:defRPr/>
               </a:pPr>
-              <a:t>19</a:t>
+              <a:t>27</a:t>
             </a:fld>
             <a:endParaRPr lang="en-US" dirty="0"/>
           </a:p>
@@ -18539,22 +19224,22 @@
       </p:sp>
       <p:pic>
         <p:nvPicPr>
-          <p:cNvPr id="40" name="Revisions special vs other days" descr="Mean absolute revision over the last year of each vintage, special days and other days, for four specifications of the electricity calendar"/>
+          <p:cNvPr id="40" name="KDE of rolling autocorrelations" descr="Densities of rolling autocorrelations at lags 7, 30 and 365 for e-invoicing and electricity demand: raw series, basic calendar and final calendar"/>
           <p:cNvPicPr>
             <a:picLocks noChangeAspect="1"/>
           </p:cNvPicPr>
           <p:nvPr/>
         </p:nvPicPr>
         <p:blipFill>
-          <a:blip r:embed="rIdImg1"/>
+          <a:blip r:embed="rId2"/>
           <a:stretch>
             <a:fillRect/>
           </a:stretch>
         </p:blipFill>
         <p:spPr>
           <a:xfrm>
-            <a:off x="411480" y="1216152"/>
-            <a:ext cx="6727847" cy="4206240"/>
+            <a:off x="466344" y="1170432"/>
+            <a:ext cx="6076143" cy="4389120"/>
           </a:xfrm>
           <a:prstGeom prst="rect">
             <a:avLst/>
@@ -18563,68 +19248,14 @@
       </p:pic>
       <p:sp>
         <p:nvSpPr>
-          <p:cNvPr id="41" name="Cards header"/>
-          <p:cNvSpPr txBox="1"/>
-          <p:nvPr/>
-        </p:nvSpPr>
-        <p:spPr>
-          <a:xfrm>
-            <a:off x="7459367" y="1280160"/>
-            <a:ext cx="4265984" cy="411480"/>
-          </a:xfrm>
-          <a:prstGeom prst="rect">
-            <a:avLst/>
-          </a:prstGeom>
-          <a:noFill/>
-          <a:ln>
-            <a:noFill/>
-          </a:ln>
-        </p:spPr>
-        <p:txBody>
-          <a:bodyPr wrap="square" lIns="0" tIns="0" rIns="0" bIns="0" anchor="t">
-            <a:noAutofit/>
-          </a:bodyPr>
-          <a:lstStyle/>
-          <a:p>
-            <a:pPr algn="l" marL="0" indent="0">
-              <a:spcBef>
-                <a:spcPts val="0"/>
-              </a:spcBef>
-              <a:buNone/>
-            </a:pPr>
-            <a:r>
-              <a:rPr lang="en-GB" sz="1800" b="1" i="0" dirty="0">
-                <a:solidFill>
-                  <a:srgbClr val="595959"/>
-                </a:solidFill>
-                <a:latin typeface="Arial"/>
-                <a:cs typeface="Arial"/>
-              </a:rPr>
-              <a:t>Special days</a:t>
-            </a:r>
-            <a:r>
-              <a:rPr lang="en-GB" sz="1400" b="0" i="0" dirty="0">
-                <a:solidFill>
-                  <a:srgbClr val="7B7C7E"/>
-                </a:solidFill>
-                <a:latin typeface="Arial"/>
-                <a:cs typeface="Arial"/>
-              </a:rPr>
-              <a:t>   basic → final</a:t>
-            </a:r>
-          </a:p>
-        </p:txBody>
-      </p:sp>
-      <p:sp>
-        <p:nvSpPr>
-          <p:cNvPr id="42" name="Rev card 1"/>
+          <p:cNvPr id="41" name="Point card 1"/>
           <p:cNvSpPr/>
           <p:nvPr/>
         </p:nvSpPr>
         <p:spPr>
           <a:xfrm>
-            <a:off x="7459367" y="1783080"/>
-            <a:ext cx="4265984" cy="1143000"/>
+            <a:off x="6908247" y="1280160"/>
+            <a:ext cx="4817104" cy="1261872"/>
           </a:xfrm>
           <a:prstGeom prst="roundRect">
             <a:avLst>
@@ -18650,14 +19281,14 @@
       </p:sp>
       <p:sp>
         <p:nvSpPr>
-          <p:cNvPr id="43" name="Rev card label 1"/>
+          <p:cNvPr id="42" name="Point heading 1"/>
           <p:cNvSpPr txBox="1"/>
           <p:nvPr/>
         </p:nvSpPr>
         <p:spPr>
           <a:xfrm>
-            <a:off x="7642247" y="1874520"/>
-            <a:ext cx="3900224" cy="365760"/>
+            <a:off x="7109415" y="1371600"/>
+            <a:ext cx="4451344" cy="365760"/>
           </a:xfrm>
           <a:prstGeom prst="rect">
             <a:avLst/>
@@ -18673,35 +19304,35 @@
           </a:bodyPr>
           <a:lstStyle/>
           <a:p>
-            <a:pPr algn="l" marL="0" indent="0">
+            <a:pPr marL="0" indent="0" algn="l">
               <a:spcBef>
                 <a:spcPts val="0"/>
               </a:spcBef>
               <a:buNone/>
             </a:pPr>
             <a:r>
-              <a:rPr lang="en-GB" sz="1500" b="1" i="0" dirty="0">
-                <a:solidFill>
-                  <a:srgbClr val="595959"/>
-                </a:solidFill>
-                <a:latin typeface="Arial"/>
-                <a:cs typeface="Arial"/>
-              </a:rPr>
-              <a:t>Fixed coefficients (A → B)</a:t>
-            </a:r>
-          </a:p>
-        </p:txBody>
-      </p:sp>
-      <p:sp>
-        <p:nvSpPr>
-          <p:cNvPr id="44" name="Rev card values 1"/>
+              <a:rPr lang="en-GB" sz="1700" b="1" i="0" dirty="0">
+                <a:solidFill>
+                  <a:srgbClr val="C00000"/>
+                </a:solidFill>
+                <a:latin typeface="Arial"/>
+                <a:cs typeface="Arial"/>
+              </a:rPr>
+              <a:t>Seasonality: removed</a:t>
+            </a:r>
+          </a:p>
+        </p:txBody>
+      </p:sp>
+      <p:sp>
+        <p:nvSpPr>
+          <p:cNvPr id="43" name="Point text 1"/>
           <p:cNvSpPr txBox="1"/>
           <p:nvPr/>
         </p:nvSpPr>
         <p:spPr>
           <a:xfrm>
-            <a:off x="7642247" y="2240280"/>
-            <a:ext cx="3900224" cy="594360"/>
+            <a:off x="7109415" y="1737360"/>
+            <a:ext cx="4451344" cy="777240"/>
           </a:xfrm>
           <a:prstGeom prst="rect">
             <a:avLst/>
@@ -18717,65 +19348,35 @@
           </a:bodyPr>
           <a:lstStyle/>
           <a:p>
-            <a:pPr algn="l" marL="0" indent="0">
+            <a:pPr marL="0" indent="0" algn="l">
               <a:spcBef>
                 <a:spcPts val="0"/>
               </a:spcBef>
               <a:buNone/>
             </a:pPr>
             <a:r>
-              <a:rPr lang="en-GB" sz="2400" b="1" i="0" dirty="0">
-                <a:solidFill>
-                  <a:srgbClr val="C00000"/>
-                </a:solidFill>
-                <a:latin typeface="Arial"/>
-                <a:cs typeface="Arial"/>
-              </a:rPr>
-              <a:t>0.50%</a:t>
-            </a:r>
-            <a:r>
-              <a:rPr lang="en-GB" sz="1800" b="0" i="0" dirty="0">
-                <a:solidFill>
-                  <a:srgbClr val="7B7C7E"/>
-                </a:solidFill>
-                <a:latin typeface="Arial"/>
-                <a:cs typeface="Arial"/>
-              </a:rPr>
-              <a:t>  →  </a:t>
-            </a:r>
-            <a:r>
-              <a:rPr lang="en-GB" sz="2400" b="1" i="0" dirty="0">
-                <a:solidFill>
-                  <a:srgbClr val="0072B2"/>
-                </a:solidFill>
-                <a:latin typeface="Arial"/>
-                <a:cs typeface="Arial"/>
-              </a:rPr>
-              <a:t>0.19%</a:t>
-            </a:r>
-            <a:r>
-              <a:rPr lang="en-GB" sz="1600" b="1" i="0" dirty="0">
-                <a:solidFill>
-                  <a:srgbClr val="7B7C7E"/>
-                </a:solidFill>
-                <a:latin typeface="Arial"/>
-                <a:cs typeface="Arial"/>
-              </a:rPr>
-              <a:t>   −63%</a:t>
-            </a:r>
-          </a:p>
-        </p:txBody>
-      </p:sp>
-      <p:sp>
-        <p:nvSpPr>
-          <p:cNvPr id="45" name="Rev card 2"/>
+              <a:rPr lang="en-GB" sz="1300" b="0" i="0" dirty="0">
+                <a:solidFill>
+                  <a:srgbClr val="595959"/>
+                </a:solidFill>
+                <a:latin typeface="Arial"/>
+                <a:cs typeface="Arial"/>
+              </a:rPr>
+              <a:t>The raw series is far from 0 at every lag; after adjustment all densities are centred around 0.</a:t>
+            </a:r>
+          </a:p>
+        </p:txBody>
+      </p:sp>
+      <p:sp>
+        <p:nvSpPr>
+          <p:cNvPr id="44" name="Point card 2"/>
           <p:cNvSpPr/>
           <p:nvPr/>
         </p:nvSpPr>
         <p:spPr>
           <a:xfrm>
-            <a:off x="7459367" y="3063240"/>
-            <a:ext cx="4265984" cy="1143000"/>
+            <a:off x="6908247" y="2651760"/>
+            <a:ext cx="4817104" cy="1261872"/>
           </a:xfrm>
           <a:prstGeom prst="roundRect">
             <a:avLst>
@@ -18801,14 +19402,14 @@
       </p:sp>
       <p:sp>
         <p:nvSpPr>
-          <p:cNvPr id="46" name="Rev card label 2"/>
+          <p:cNvPr id="45" name="Point heading 2"/>
           <p:cNvSpPr txBox="1"/>
           <p:nvPr/>
         </p:nvSpPr>
         <p:spPr>
           <a:xfrm>
-            <a:off x="7642247" y="3154680"/>
-            <a:ext cx="3900224" cy="365760"/>
+            <a:off x="7109415" y="2743200"/>
+            <a:ext cx="4451344" cy="365760"/>
           </a:xfrm>
           <a:prstGeom prst="rect">
             <a:avLst/>
@@ -18824,35 +19425,35 @@
           </a:bodyPr>
           <a:lstStyle/>
           <a:p>
-            <a:pPr algn="l" marL="0" indent="0">
+            <a:pPr marL="0" indent="0" algn="l">
               <a:spcBef>
                 <a:spcPts val="0"/>
               </a:spcBef>
               <a:buNone/>
             </a:pPr>
             <a:r>
-              <a:rPr lang="en-GB" sz="1500" b="1" i="0" dirty="0">
-                <a:solidFill>
-                  <a:srgbClr val="595959"/>
-                </a:solidFill>
-                <a:latin typeface="Arial"/>
-                <a:cs typeface="Arial"/>
-              </a:rPr>
-              <a:t>Time-varying (D → C)</a:t>
-            </a:r>
-          </a:p>
-        </p:txBody>
-      </p:sp>
-      <p:sp>
-        <p:nvSpPr>
-          <p:cNvPr id="47" name="Rev card values 2"/>
+              <a:rPr lang="en-GB" sz="1700" b="1" i="0" dirty="0">
+                <a:solidFill>
+                  <a:srgbClr val="942639"/>
+                </a:solidFill>
+                <a:latin typeface="Arial"/>
+                <a:cs typeface="Arial"/>
+              </a:rPr>
+              <a:t>Calendar: hardly visible</a:t>
+            </a:r>
+          </a:p>
+        </p:txBody>
+      </p:sp>
+      <p:sp>
+        <p:nvSpPr>
+          <p:cNvPr id="46" name="Point text 2"/>
           <p:cNvSpPr txBox="1"/>
           <p:nvPr/>
         </p:nvSpPr>
         <p:spPr>
           <a:xfrm>
-            <a:off x="7642247" y="3520440"/>
-            <a:ext cx="3900224" cy="594360"/>
+            <a:off x="7109415" y="3108960"/>
+            <a:ext cx="4451344" cy="777240"/>
           </a:xfrm>
           <a:prstGeom prst="rect">
             <a:avLst/>
@@ -18868,70 +19469,44 @@
           </a:bodyPr>
           <a:lstStyle/>
           <a:p>
-            <a:pPr algn="l" marL="0" indent="0">
+            <a:pPr marL="0" indent="0" algn="l">
               <a:spcBef>
                 <a:spcPts val="0"/>
               </a:spcBef>
               <a:buNone/>
             </a:pPr>
             <a:r>
-              <a:rPr lang="en-GB" sz="2400" b="1" i="0" dirty="0">
-                <a:solidFill>
-                  <a:srgbClr val="C00000"/>
-                </a:solidFill>
-                <a:latin typeface="Arial"/>
-                <a:cs typeface="Arial"/>
-              </a:rPr>
-              <a:t>0.31%</a:t>
-            </a:r>
-            <a:r>
-              <a:rPr lang="en-GB" sz="1800" b="0" i="0" dirty="0">
-                <a:solidFill>
-                  <a:srgbClr val="7B7C7E"/>
-                </a:solidFill>
-                <a:latin typeface="Arial"/>
-                <a:cs typeface="Arial"/>
-              </a:rPr>
-              <a:t>  →  </a:t>
-            </a:r>
-            <a:r>
-              <a:rPr lang="en-GB" sz="2400" b="1" i="0" dirty="0">
-                <a:solidFill>
-                  <a:srgbClr val="0072B2"/>
-                </a:solidFill>
-                <a:latin typeface="Arial"/>
-                <a:cs typeface="Arial"/>
-              </a:rPr>
-              <a:t>0.23%</a:t>
-            </a:r>
-            <a:r>
-              <a:rPr lang="en-GB" sz="1600" b="1" i="0" dirty="0">
-                <a:solidFill>
-                  <a:srgbClr val="7B7C7E"/>
-                </a:solidFill>
-                <a:latin typeface="Arial"/>
-                <a:cs typeface="Arial"/>
-              </a:rPr>
-              <a:t>   −26%</a:t>
-            </a:r>
-          </a:p>
-        </p:txBody>
-      </p:sp>
-      <p:sp>
-        <p:nvSpPr>
-          <p:cNvPr id="50" name="Rev note"/>
-          <p:cNvSpPr txBox="1"/>
-          <p:nvPr/>
-        </p:nvSpPr>
-        <p:spPr>
-          <a:xfrm>
-            <a:off x="7459367" y="4434840"/>
-            <a:ext cx="4265984" cy="1005840"/>
-          </a:xfrm>
-          <a:prstGeom prst="rect">
-            <a:avLst/>
-          </a:prstGeom>
-          <a:noFill/>
+              <a:rPr lang="en-GB" sz="1300" b="0" i="0" dirty="0">
+                <a:solidFill>
+                  <a:srgbClr val="595959"/>
+                </a:solidFill>
+                <a:latin typeface="Arial"/>
+                <a:cs typeface="Arial"/>
+              </a:rPr>
+              <a:t>Only at lag 30 for e-invoicing is the final calendar a little narrower than the basic one. Elsewhere the curves overlap.</a:t>
+            </a:r>
+          </a:p>
+        </p:txBody>
+      </p:sp>
+      <p:sp>
+        <p:nvSpPr>
+          <p:cNvPr id="47" name="Point card 3"/>
+          <p:cNvSpPr/>
+          <p:nvPr/>
+        </p:nvSpPr>
+        <p:spPr>
+          <a:xfrm>
+            <a:off x="6908247" y="4023360"/>
+            <a:ext cx="4817104" cy="1261872"/>
+          </a:xfrm>
+          <a:prstGeom prst="roundRect">
+            <a:avLst>
+              <a:gd name="adj" fmla="val 6000"/>
+            </a:avLst>
+          </a:prstGeom>
+          <a:solidFill>
+            <a:srgbClr val="F2F2F2"/>
+          </a:solidFill>
           <a:ln>
             <a:noFill/>
           </a:ln>
@@ -18942,35 +19517,64 @@
           </a:bodyPr>
           <a:lstStyle/>
           <a:p>
-            <a:pPr algn="l" marL="0" indent="0">
+            <a:endParaRPr lang="en-GB" dirty="0"/>
+          </a:p>
+        </p:txBody>
+      </p:sp>
+      <p:sp>
+        <p:nvSpPr>
+          <p:cNvPr id="48" name="Point heading 3"/>
+          <p:cNvSpPr txBox="1"/>
+          <p:nvPr/>
+        </p:nvSpPr>
+        <p:spPr>
+          <a:xfrm>
+            <a:off x="7109415" y="4114800"/>
+            <a:ext cx="4451344" cy="365760"/>
+          </a:xfrm>
+          <a:prstGeom prst="rect">
+            <a:avLst/>
+          </a:prstGeom>
+          <a:noFill/>
+          <a:ln>
+            <a:noFill/>
+          </a:ln>
+        </p:spPr>
+        <p:txBody>
+          <a:bodyPr wrap="square" lIns="0" tIns="0" rIns="0" bIns="0" anchor="t">
+            <a:noAutofit/>
+          </a:bodyPr>
+          <a:lstStyle/>
+          <a:p>
+            <a:pPr marL="0" indent="0" algn="l">
               <a:spcBef>
                 <a:spcPts val="0"/>
               </a:spcBef>
               <a:buNone/>
             </a:pPr>
             <a:r>
-              <a:rPr lang="en-GB" sz="1400" b="0" i="0" dirty="0">
-                <a:solidFill>
-                  <a:srgbClr val="595959"/>
-                </a:solidFill>
-                <a:latin typeface="Arial"/>
-                <a:cs typeface="Arial"/>
-              </a:rPr>
-              <a:t>Other days: similar for all versions. Final calendar with time-varying coefficients: smallest revisions overall (0.15%).</a:t>
-            </a:r>
-          </a:p>
-        </p:txBody>
-      </p:sp>
-      <p:sp>
-        <p:nvSpPr>
-          <p:cNvPr id="51" name="Caption"/>
+              <a:rPr lang="en-GB" sz="1700" b="1" i="0" dirty="0">
+                <a:solidFill>
+                  <a:srgbClr val="7B7C7E"/>
+                </a:solidFill>
+                <a:latin typeface="Arial"/>
+                <a:cs typeface="Arial"/>
+              </a:rPr>
+              <a:t>Why</a:t>
+            </a:r>
+          </a:p>
+        </p:txBody>
+      </p:sp>
+      <p:sp>
+        <p:nvSpPr>
+          <p:cNvPr id="49" name="Point text 3"/>
           <p:cNvSpPr txBox="1"/>
           <p:nvPr/>
         </p:nvSpPr>
         <p:spPr>
           <a:xfrm>
-            <a:off x="466344" y="5532120"/>
-            <a:ext cx="11256264" cy="411480"/>
+            <a:off x="7109415" y="4480560"/>
+            <a:ext cx="4451344" cy="777240"/>
           </a:xfrm>
           <a:prstGeom prst="rect">
             <a:avLst/>
@@ -18986,22 +19590,56 @@
           </a:bodyPr>
           <a:lstStyle/>
           <a:p>
-            <a:pPr algn="l" marL="0" indent="0">
+            <a:pPr marL="0" indent="0" algn="l">
               <a:spcBef>
                 <a:spcPts val="0"/>
               </a:spcBef>
               <a:buNone/>
             </a:pPr>
             <a:r>
-              <a:rPr lang="en-GB" sz="1300" b="1" i="0" dirty="0">
-                <a:solidFill>
-                  <a:srgbClr val="C00000"/>
-                </a:solidFill>
-                <a:latin typeface="Arial"/>
-                <a:cs typeface="Arial"/>
-              </a:rPr>
-              <a:t>Result · Revisions, electricity.  </a:t>
-            </a:r>
+              <a:rPr lang="en-GB" sz="1300" b="0" i="0" dirty="0">
+                <a:solidFill>
+                  <a:srgbClr val="595959"/>
+                </a:solidFill>
+                <a:latin typeface="Arial"/>
+                <a:cs typeface="Arial"/>
+              </a:rPr>
+              <a:t>Special days are a few per year and get lost in rolling windows over all days. The DMR groups them by mechanism, so it sees them.</a:t>
+            </a:r>
+          </a:p>
+        </p:txBody>
+      </p:sp>
+      <p:sp>
+        <p:nvSpPr>
+          <p:cNvPr id="52" name="Caption"/>
+          <p:cNvSpPr txBox="1"/>
+          <p:nvPr/>
+        </p:nvSpPr>
+        <p:spPr>
+          <a:xfrm>
+            <a:off x="466344" y="5623560"/>
+            <a:ext cx="11256264" cy="365760"/>
+          </a:xfrm>
+          <a:prstGeom prst="rect">
+            <a:avLst/>
+          </a:prstGeom>
+          <a:noFill/>
+          <a:ln>
+            <a:noFill/>
+          </a:ln>
+        </p:spPr>
+        <p:txBody>
+          <a:bodyPr wrap="square" lIns="0" tIns="0" rIns="0" bIns="0" anchor="t">
+            <a:noAutofit/>
+          </a:bodyPr>
+          <a:lstStyle/>
+          <a:p>
+            <a:pPr marL="0" indent="0" algn="l">
+              <a:spcBef>
+                <a:spcPts val="0"/>
+              </a:spcBef>
+              <a:buNone/>
+            </a:pPr>
             <a:r>
               <a:rPr lang="en-GB" sz="1300" b="0" i="1" dirty="0">
                 <a:solidFill>
@@ -19010,7 +19648,7 @@
                 <a:latin typeface="Arial"/>
                 <a:cs typeface="Arial"/>
               </a:rPr>
-              <a:t>Full sample vs six vintages ending 7 to 730 days earlier; mean absolute revision (%) over the last year of each vintage; about 24 special days per year.</a:t>
+              <a:t>Rolling autocorrelations of first differences (of logs for e-invoicing), windows of 28, 90 and 730 days; grey band ±0.025.</a:t>
             </a:r>
           </a:p>
         </p:txBody>
@@ -19071,7 +19709,7 @@
                   <a:srgbClr val="C00000"/>
                 </a:solidFill>
               </a:rPr>
-              <a:t>A good calendar also stabilises the outliers</a:t>
+              <a:t>Why the calendar deserves the effort</a:t>
             </a:r>
           </a:p>
         </p:txBody>
@@ -19113,7 +19751,7 @@
               <a:pPr>
                 <a:defRPr/>
               </a:pPr>
-              <a:t>19</a:t>
+              <a:t>28</a:t>
             </a:fld>
             <a:endParaRPr lang="en-US" dirty="0"/>
           </a:p>
@@ -19157,14 +19795,14 @@
       </p:sp>
       <p:sp>
         <p:nvSpPr>
-          <p:cNvPr id="20" name="Outlier card 1"/>
+          <p:cNvPr id="20" name="Conclusion card 1"/>
           <p:cNvSpPr/>
           <p:nvPr/>
         </p:nvSpPr>
         <p:spPr>
           <a:xfrm>
             <a:off x="466344" y="1298448"/>
-            <a:ext cx="5486400" cy="1874520"/>
+            <a:ext cx="3599688" cy="2199132"/>
           </a:xfrm>
           <a:prstGeom prst="roundRect">
             <a:avLst>
@@ -19190,14 +19828,14 @@
       </p:sp>
       <p:sp>
         <p:nvSpPr>
-          <p:cNvPr id="21" name="Outlier letter 1"/>
+          <p:cNvPr id="21" name="Conclusion number 1"/>
           <p:cNvSpPr/>
           <p:nvPr/>
         </p:nvSpPr>
         <p:spPr>
           <a:xfrm>
-            <a:off x="694944" y="1499616"/>
-            <a:ext cx="502920" cy="502920"/>
+            <a:off x="667512" y="1527048"/>
+            <a:ext cx="438912" cy="438912"/>
           </a:xfrm>
           <a:prstGeom prst="ellipse">
             <a:avLst/>
@@ -19215,35 +19853,35 @@
           </a:bodyPr>
           <a:lstStyle/>
           <a:p>
-            <a:pPr algn="ctr" marL="0" indent="0">
+            <a:pPr marL="0" indent="0" algn="ctr">
               <a:spcBef>
                 <a:spcPts val="0"/>
               </a:spcBef>
               <a:buNone/>
             </a:pPr>
             <a:r>
-              <a:rPr lang="en-GB" sz="1800" b="1" i="0" dirty="0">
+              <a:rPr lang="en-GB" sz="1600" b="1" i="0" dirty="0">
                 <a:solidFill>
                   <a:srgbClr val="FFFFFF"/>
                 </a:solidFill>
                 <a:latin typeface="Arial"/>
                 <a:cs typeface="Arial"/>
               </a:rPr>
-              <a:t>A</a:t>
-            </a:r>
-          </a:p>
-        </p:txBody>
-      </p:sp>
-      <p:sp>
-        <p:nvSpPr>
-          <p:cNvPr id="22" name="Outlier heading 1"/>
+              <a:t>1</a:t>
+            </a:r>
+          </a:p>
+        </p:txBody>
+      </p:sp>
+      <p:sp>
+        <p:nvSpPr>
+          <p:cNvPr id="22" name="Conclusion heading 1"/>
           <p:cNvSpPr txBox="1"/>
           <p:nvPr/>
         </p:nvSpPr>
         <p:spPr>
           <a:xfrm>
-            <a:off x="1380744" y="1536192"/>
-            <a:ext cx="4343400" cy="411480"/>
+            <a:off x="1243584" y="1435608"/>
+            <a:ext cx="2685288" cy="640080"/>
           </a:xfrm>
           <a:prstGeom prst="rect">
             <a:avLst/>
@@ -19254,40 +19892,40 @@
           </a:ln>
         </p:spPr>
         <p:txBody>
-          <a:bodyPr wrap="square" lIns="0" tIns="0" rIns="0" bIns="0" anchor="t">
+          <a:bodyPr wrap="square" lIns="0" tIns="0" rIns="0" bIns="0" anchor="ctr">
             <a:noAutofit/>
           </a:bodyPr>
           <a:lstStyle/>
           <a:p>
-            <a:pPr algn="l" marL="0" indent="0">
+            <a:pPr marL="0" indent="0" algn="l">
               <a:spcBef>
                 <a:spcPts val="0"/>
               </a:spcBef>
               <a:buNone/>
             </a:pPr>
             <a:r>
-              <a:rPr lang="en-GB" sz="1800" b="1" i="0" dirty="0">
+              <a:rPr lang="en-GB" sz="1600" b="1" i="0" dirty="0">
                 <a:solidFill>
                   <a:srgbClr val="595959"/>
                 </a:solidFill>
                 <a:latin typeface="Arial"/>
                 <a:cs typeface="Arial"/>
               </a:rPr>
-              <a:t>Basic, fixed</a:t>
-            </a:r>
-          </a:p>
-        </p:txBody>
-      </p:sp>
-      <p:sp>
-        <p:nvSpPr>
-          <p:cNvPr id="23" name="Outlier text 1"/>
+              <a:t>Special days are key days</a:t>
+            </a:r>
+          </a:p>
+        </p:txBody>
+      </p:sp>
+      <p:sp>
+        <p:nvSpPr>
+          <p:cNvPr id="23" name="Conclusion text 1"/>
           <p:cNvSpPr txBox="1"/>
           <p:nvPr/>
         </p:nvSpPr>
         <p:spPr>
           <a:xfrm>
-            <a:off x="1380744" y="2029968"/>
-            <a:ext cx="4343400" cy="1051560"/>
+            <a:off x="667512" y="2167128"/>
+            <a:ext cx="3197352" cy="1239012"/>
           </a:xfrm>
           <a:prstGeom prst="rect">
             <a:avLst/>
@@ -19303,7 +19941,7 @@
           </a:bodyPr>
           <a:lstStyle/>
           <a:p>
-            <a:pPr algn="l" marL="0" indent="0">
+            <a:pPr marL="0" indent="0" algn="l">
               <a:spcBef>
                 <a:spcPts val="0"/>
               </a:spcBef>
@@ -19317,21 +19955,21 @@
                 <a:latin typeface="Arial"/>
                 <a:cs typeface="Arial"/>
               </a:rPr>
-              <a:t>23 of 28 outliers on weekend holidays, and they come and go: All Saints' Day 2025, New Year's Days 2017 and 2023; Epiphany 2024 changes type and date.</a:t>
-            </a:r>
-          </a:p>
-        </p:txBody>
-      </p:sp>
-      <p:sp>
-        <p:nvSpPr>
-          <p:cNvPr id="25" name="Outlier card 2"/>
+              <a:t>Month ends, holidays and bridges are the days users look at. A wrong calendar distorts exactly them: e-invoicing DMR from 0.76 to 1.27 with the basic calendar.</a:t>
+            </a:r>
+          </a:p>
+        </p:txBody>
+      </p:sp>
+      <p:sp>
+        <p:nvSpPr>
+          <p:cNvPr id="25" name="Conclusion card 2"/>
           <p:cNvSpPr/>
           <p:nvPr/>
         </p:nvSpPr>
         <p:spPr>
           <a:xfrm>
-            <a:off x="6236208" y="1298448"/>
-            <a:ext cx="5486400" cy="1874520"/>
+            <a:off x="4294632" y="1298448"/>
+            <a:ext cx="3599688" cy="2199132"/>
           </a:xfrm>
           <a:prstGeom prst="roundRect">
             <a:avLst>
@@ -19357,20 +19995,20 @@
       </p:sp>
       <p:sp>
         <p:nvSpPr>
-          <p:cNvPr id="26" name="Outlier letter 2"/>
+          <p:cNvPr id="26" name="Conclusion number 2"/>
           <p:cNvSpPr/>
           <p:nvPr/>
         </p:nvSpPr>
         <p:spPr>
           <a:xfrm>
-            <a:off x="6464808" y="1499616"/>
-            <a:ext cx="502920" cy="502920"/>
+            <a:off x="4495800" y="1527048"/>
+            <a:ext cx="438912" cy="438912"/>
           </a:xfrm>
           <a:prstGeom prst="ellipse">
             <a:avLst/>
           </a:prstGeom>
           <a:solidFill>
-            <a:srgbClr val="942639"/>
+            <a:srgbClr val="C00000"/>
           </a:solidFill>
           <a:ln>
             <a:noFill/>
@@ -19382,35 +20020,35 @@
           </a:bodyPr>
           <a:lstStyle/>
           <a:p>
-            <a:pPr algn="ctr" marL="0" indent="0">
+            <a:pPr marL="0" indent="0" algn="ctr">
               <a:spcBef>
                 <a:spcPts val="0"/>
               </a:spcBef>
               <a:buNone/>
             </a:pPr>
             <a:r>
-              <a:rPr lang="en-GB" sz="1800" b="1" i="0" dirty="0">
+              <a:rPr lang="en-GB" sz="1600" b="1" i="0" dirty="0">
                 <a:solidFill>
                   <a:srgbClr val="FFFFFF"/>
                 </a:solidFill>
                 <a:latin typeface="Arial"/>
                 <a:cs typeface="Arial"/>
               </a:rPr>
-              <a:t>B</a:t>
-            </a:r>
-          </a:p>
-        </p:txBody>
-      </p:sp>
-      <p:sp>
-        <p:nvSpPr>
-          <p:cNvPr id="27" name="Outlier heading 2"/>
+              <a:t>2</a:t>
+            </a:r>
+          </a:p>
+        </p:txBody>
+      </p:sp>
+      <p:sp>
+        <p:nvSpPr>
+          <p:cNvPr id="27" name="Conclusion heading 2"/>
           <p:cNvSpPr txBox="1"/>
           <p:nvPr/>
         </p:nvSpPr>
         <p:spPr>
           <a:xfrm>
-            <a:off x="7150608" y="1536192"/>
-            <a:ext cx="4343400" cy="411480"/>
+            <a:off x="5071872" y="1435608"/>
+            <a:ext cx="2685288" cy="640080"/>
           </a:xfrm>
           <a:prstGeom prst="rect">
             <a:avLst/>
@@ -19421,40 +20059,40 @@
           </a:ln>
         </p:spPr>
         <p:txBody>
-          <a:bodyPr wrap="square" lIns="0" tIns="0" rIns="0" bIns="0" anchor="t">
+          <a:bodyPr wrap="square" lIns="0" tIns="0" rIns="0" bIns="0" anchor="ctr">
             <a:noAutofit/>
           </a:bodyPr>
           <a:lstStyle/>
           <a:p>
-            <a:pPr algn="l" marL="0" indent="0">
+            <a:pPr marL="0" indent="0" algn="l">
               <a:spcBef>
                 <a:spcPts val="0"/>
               </a:spcBef>
               <a:buNone/>
             </a:pPr>
             <a:r>
-              <a:rPr lang="en-GB" sz="1800" b="1" i="0" dirty="0">
+              <a:rPr lang="en-GB" sz="1600" b="1" i="0" dirty="0">
                 <a:solidFill>
                   <a:srgbClr val="595959"/>
                 </a:solidFill>
                 <a:latin typeface="Arial"/>
                 <a:cs typeface="Arial"/>
               </a:rPr>
-              <a:t>Final, fixed</a:t>
-            </a:r>
-          </a:p>
-        </p:txBody>
-      </p:sp>
-      <p:sp>
-        <p:nvSpPr>
-          <p:cNvPr id="28" name="Outlier text 2"/>
+              <a:t>Calendar effects are information</a:t>
+            </a:r>
+          </a:p>
+        </p:txBody>
+      </p:sp>
+      <p:sp>
+        <p:nvSpPr>
+          <p:cNvPr id="28" name="Conclusion text 2"/>
           <p:cNvSpPr txBox="1"/>
           <p:nvPr/>
         </p:nvSpPr>
         <p:spPr>
           <a:xfrm>
-            <a:off x="7150608" y="2029968"/>
-            <a:ext cx="4343400" cy="1051560"/>
+            <a:off x="4495800" y="2167128"/>
+            <a:ext cx="3197352" cy="1239012"/>
           </a:xfrm>
           <a:prstGeom prst="rect">
             <a:avLst/>
@@ -19470,7 +20108,7 @@
           </a:bodyPr>
           <a:lstStyle/>
           <a:p>
-            <a:pPr algn="l" marL="0" indent="0">
+            <a:pPr marL="0" indent="0" algn="l">
               <a:spcBef>
                 <a:spcPts val="0"/>
               </a:spcBef>
@@ -19484,21 +20122,21 @@
                 <a:latin typeface="Arial"/>
                 <a:cs typeface="Arial"/>
               </a:rPr>
-              <a:t>Weather outliers unstable: the 2015 storm and the 2023 summer level shifts appear only in some vintages. One day revised by 65 thousand MWh.</a:t>
-            </a:r>
-          </a:p>
-        </p:txBody>
-      </p:sp>
-      <p:sp>
-        <p:nvSpPr>
-          <p:cNvPr id="30" name="Outlier card 3"/>
+              <a:t>They can be read on their own: a month end worth almost nine weekdays of invoicing; holiday effects on electricity down 10–18% since 2012.</a:t>
+            </a:r>
+          </a:p>
+        </p:txBody>
+      </p:sp>
+      <p:sp>
+        <p:nvSpPr>
+          <p:cNvPr id="30" name="Conclusion card 3"/>
           <p:cNvSpPr/>
           <p:nvPr/>
         </p:nvSpPr>
         <p:spPr>
           <a:xfrm>
-            <a:off x="466344" y="3355848"/>
-            <a:ext cx="5486400" cy="1874520"/>
+            <a:off x="8122920" y="1298448"/>
+            <a:ext cx="3599688" cy="2199132"/>
           </a:xfrm>
           <a:prstGeom prst="roundRect">
             <a:avLst>
@@ -19524,20 +20162,20 @@
       </p:sp>
       <p:sp>
         <p:nvSpPr>
-          <p:cNvPr id="31" name="Outlier letter 3"/>
+          <p:cNvPr id="31" name="Conclusion number 3"/>
           <p:cNvSpPr/>
           <p:nvPr/>
         </p:nvSpPr>
         <p:spPr>
           <a:xfrm>
-            <a:off x="694944" y="3557016"/>
-            <a:ext cx="502920" cy="502920"/>
+            <a:off x="8324088" y="1527048"/>
+            <a:ext cx="438912" cy="438912"/>
           </a:xfrm>
           <a:prstGeom prst="ellipse">
             <a:avLst/>
           </a:prstGeom>
           <a:solidFill>
-            <a:srgbClr val="0072B2"/>
+            <a:srgbClr val="C00000"/>
           </a:solidFill>
           <a:ln>
             <a:noFill/>
@@ -19549,35 +20187,35 @@
           </a:bodyPr>
           <a:lstStyle/>
           <a:p>
-            <a:pPr algn="ctr" marL="0" indent="0">
+            <a:pPr marL="0" indent="0" algn="ctr">
               <a:spcBef>
                 <a:spcPts val="0"/>
               </a:spcBef>
               <a:buNone/>
             </a:pPr>
             <a:r>
-              <a:rPr lang="en-GB" sz="1800" b="1" i="0" dirty="0">
+              <a:rPr lang="en-GB" sz="1600" b="1" i="0" dirty="0">
                 <a:solidFill>
                   <a:srgbClr val="FFFFFF"/>
                 </a:solidFill>
                 <a:latin typeface="Arial"/>
                 <a:cs typeface="Arial"/>
               </a:rPr>
-              <a:t>C</a:t>
-            </a:r>
-          </a:p>
-        </p:txBody>
-      </p:sp>
-      <p:sp>
-        <p:nvSpPr>
-          <p:cNvPr id="32" name="Outlier heading 3"/>
+              <a:t>3</a:t>
+            </a:r>
+          </a:p>
+        </p:txBody>
+      </p:sp>
+      <p:sp>
+        <p:nvSpPr>
+          <p:cNvPr id="32" name="Conclusion heading 3"/>
           <p:cNvSpPr txBox="1"/>
           <p:nvPr/>
         </p:nvSpPr>
         <p:spPr>
           <a:xfrm>
-            <a:off x="1380744" y="3593592"/>
-            <a:ext cx="4343400" cy="411480"/>
+            <a:off x="8900160" y="1435608"/>
+            <a:ext cx="2685288" cy="640080"/>
           </a:xfrm>
           <a:prstGeom prst="rect">
             <a:avLst/>
@@ -19588,40 +20226,40 @@
           </a:ln>
         </p:spPr>
         <p:txBody>
-          <a:bodyPr wrap="square" lIns="0" tIns="0" rIns="0" bIns="0" anchor="t">
+          <a:bodyPr wrap="square" lIns="0" tIns="0" rIns="0" bIns="0" anchor="ctr">
             <a:noAutofit/>
           </a:bodyPr>
           <a:lstStyle/>
           <a:p>
-            <a:pPr algn="l" marL="0" indent="0">
+            <a:pPr marL="0" indent="0" algn="l">
               <a:spcBef>
                 <a:spcPts val="0"/>
               </a:spcBef>
               <a:buNone/>
             </a:pPr>
             <a:r>
-              <a:rPr lang="en-GB" sz="1800" b="1" i="0" dirty="0">
+              <a:rPr lang="en-GB" sz="1600" b="1" i="0" dirty="0">
                 <a:solidFill>
                   <a:srgbClr val="595959"/>
                 </a:solidFill>
                 <a:latin typeface="Arial"/>
                 <a:cs typeface="Arial"/>
               </a:rPr>
-              <a:t>Final, time-varying</a:t>
-            </a:r>
-          </a:p>
-        </p:txBody>
-      </p:sp>
-      <p:sp>
-        <p:nvSpPr>
-          <p:cNvPr id="33" name="Outlier text 3"/>
+              <a:t>Daily errors do not average out</a:t>
+            </a:r>
+          </a:p>
+        </p:txBody>
+      </p:sp>
+      <p:sp>
+        <p:nvSpPr>
+          <p:cNvPr id="33" name="Conclusion text 3"/>
           <p:cNvSpPr txBox="1"/>
           <p:nvPr/>
         </p:nvSpPr>
         <p:spPr>
           <a:xfrm>
-            <a:off x="1380744" y="4087368"/>
-            <a:ext cx="4343400" cy="1051560"/>
+            <a:off x="8324088" y="2167128"/>
+            <a:ext cx="3197352" cy="1239012"/>
           </a:xfrm>
           <a:prstGeom prst="rect">
             <a:avLst/>
@@ -19637,7 +20275,7 @@
           </a:bodyPr>
           <a:lstStyle/>
           <a:p>
-            <a:pPr algn="l" marL="0" indent="0">
+            <a:pPr marL="0" indent="0" algn="l">
               <a:spcBef>
                 <a:spcPts val="0"/>
               </a:spcBef>
@@ -19651,21 +20289,21 @@
                 <a:latin typeface="Arial"/>
                 <a:cs typeface="Arial"/>
               </a:rPr>
-              <a:t>The same outliers in all estimates, or all but one. Largest single-day revision below 10 thousand MWh.</a:t>
-            </a:r>
-          </a:p>
-        </p:txBody>
-      </p:sp>
-      <p:sp>
-        <p:nvSpPr>
-          <p:cNvPr id="35" name="Outlier card 4"/>
+              <a:t>A monthly total hides them; a daily series shows each one as a false movement, or as an outlier that should have been a calendar effect.</a:t>
+            </a:r>
+          </a:p>
+        </p:txBody>
+      </p:sp>
+      <p:sp>
+        <p:nvSpPr>
+          <p:cNvPr id="35" name="Conclusion card 4"/>
           <p:cNvSpPr/>
           <p:nvPr/>
         </p:nvSpPr>
         <p:spPr>
           <a:xfrm>
-            <a:off x="6236208" y="3355848"/>
-            <a:ext cx="5486400" cy="1874520"/>
+            <a:off x="466344" y="3698748"/>
+            <a:ext cx="3599688" cy="2199132"/>
           </a:xfrm>
           <a:prstGeom prst="roundRect">
             <a:avLst>
@@ -19691,20 +20329,20 @@
       </p:sp>
       <p:sp>
         <p:nvSpPr>
-          <p:cNvPr id="36" name="Outlier letter 4"/>
+          <p:cNvPr id="36" name="Conclusion number 4"/>
           <p:cNvSpPr/>
           <p:nvPr/>
         </p:nvSpPr>
         <p:spPr>
           <a:xfrm>
-            <a:off x="6464808" y="3557016"/>
-            <a:ext cx="502920" cy="502920"/>
+            <a:off x="667512" y="3927348"/>
+            <a:ext cx="438912" cy="438912"/>
           </a:xfrm>
           <a:prstGeom prst="ellipse">
             <a:avLst/>
           </a:prstGeom>
           <a:solidFill>
-            <a:srgbClr val="7B7C7E"/>
+            <a:srgbClr val="C00000"/>
           </a:solidFill>
           <a:ln>
             <a:noFill/>
@@ -19716,35 +20354,35 @@
           </a:bodyPr>
           <a:lstStyle/>
           <a:p>
-            <a:pPr algn="ctr" marL="0" indent="0">
+            <a:pPr marL="0" indent="0" algn="ctr">
               <a:spcBef>
                 <a:spcPts val="0"/>
               </a:spcBef>
               <a:buNone/>
             </a:pPr>
             <a:r>
-              <a:rPr lang="en-GB" sz="1800" b="1" i="0" dirty="0">
+              <a:rPr lang="en-GB" sz="1600" b="1" i="0" dirty="0">
                 <a:solidFill>
                   <a:srgbClr val="FFFFFF"/>
                 </a:solidFill>
                 <a:latin typeface="Arial"/>
                 <a:cs typeface="Arial"/>
               </a:rPr>
-              <a:t>D</a:t>
-            </a:r>
-          </a:p>
-        </p:txBody>
-      </p:sp>
-      <p:sp>
-        <p:nvSpPr>
-          <p:cNvPr id="37" name="Outlier heading 4"/>
+              <a:t>4</a:t>
+            </a:r>
+          </a:p>
+        </p:txBody>
+      </p:sp>
+      <p:sp>
+        <p:nvSpPr>
+          <p:cNvPr id="37" name="Conclusion heading 4"/>
           <p:cNvSpPr txBox="1"/>
           <p:nvPr/>
         </p:nvSpPr>
         <p:spPr>
           <a:xfrm>
-            <a:off x="7150608" y="3593592"/>
-            <a:ext cx="4343400" cy="411480"/>
+            <a:off x="1243584" y="3835908"/>
+            <a:ext cx="2685288" cy="640080"/>
           </a:xfrm>
           <a:prstGeom prst="rect">
             <a:avLst/>
@@ -19755,40 +20393,40 @@
           </a:ln>
         </p:spPr>
         <p:txBody>
-          <a:bodyPr wrap="square" lIns="0" tIns="0" rIns="0" bIns="0" anchor="t">
+          <a:bodyPr wrap="square" lIns="0" tIns="0" rIns="0" bIns="0" anchor="ctr">
             <a:noAutofit/>
           </a:bodyPr>
           <a:lstStyle/>
           <a:p>
-            <a:pPr algn="l" marL="0" indent="0">
+            <a:pPr marL="0" indent="0" algn="l">
               <a:spcBef>
                 <a:spcPts val="0"/>
               </a:spcBef>
               <a:buNone/>
             </a:pPr>
             <a:r>
-              <a:rPr lang="en-GB" sz="1800" b="1" i="0" dirty="0">
+              <a:rPr lang="en-GB" sz="1600" b="1" i="0" dirty="0">
                 <a:solidFill>
                   <a:srgbClr val="595959"/>
                 </a:solidFill>
                 <a:latin typeface="Arial"/>
                 <a:cs typeface="Arial"/>
               </a:rPr>
-              <a:t>Basic, time-varying</a:t>
-            </a:r>
-          </a:p>
-        </p:txBody>
-      </p:sp>
-      <p:sp>
-        <p:nvSpPr>
-          <p:cNvPr id="38" name="Outlier text 4"/>
+              <a:t>A good calendar is more stable</a:t>
+            </a:r>
+          </a:p>
+        </p:txBody>
+      </p:sp>
+      <p:sp>
+        <p:nvSpPr>
+          <p:cNvPr id="38" name="Conclusion text 4"/>
           <p:cNvSpPr txBox="1"/>
           <p:nvPr/>
         </p:nvSpPr>
         <p:spPr>
           <a:xfrm>
-            <a:off x="7150608" y="4087368"/>
-            <a:ext cx="4343400" cy="1051560"/>
+            <a:off x="667512" y="4567428"/>
+            <a:ext cx="3261360" cy="1239012"/>
           </a:xfrm>
           <a:prstGeom prst="rect">
             <a:avLst/>
@@ -19804,40 +20442,84 @@
           </a:bodyPr>
           <a:lstStyle/>
           <a:p>
-            <a:pPr algn="l" marL="0" indent="0">
+            <a:pPr marL="0" indent="0" algn="l">
               <a:spcBef>
                 <a:spcPts val="0"/>
               </a:spcBef>
               <a:buNone/>
             </a:pPr>
             <a:r>
+              <a:rPr lang="en-GB" sz="1400" b="1" i="0" dirty="0">
+                <a:solidFill>
+                  <a:srgbClr val="FF0000"/>
+                </a:solidFill>
+                <a:latin typeface="Arial"/>
+                <a:cs typeface="Arial"/>
+              </a:rPr>
+              <a:t>Fewer revisions</a:t>
+            </a:r>
+            <a:r>
               <a:rPr lang="en-GB" sz="1400" b="0" i="0" dirty="0">
                 <a:solidFill>
+                  <a:srgbClr val="FF0000"/>
+                </a:solidFill>
+                <a:latin typeface="Arial"/>
+                <a:cs typeface="Arial"/>
+              </a:rPr>
+              <a:t>, above all </a:t>
+            </a:r>
+            <a:r>
+              <a:rPr lang="en-GB" sz="1400" b="1" i="0" dirty="0">
+                <a:solidFill>
+                  <a:srgbClr val="FF0000"/>
+                </a:solidFill>
+                <a:latin typeface="Arial"/>
+                <a:cs typeface="Arial"/>
+              </a:rPr>
+              <a:t>on holidays</a:t>
+            </a:r>
+            <a:r>
+              <a:rPr lang="en-GB" sz="1400" b="0" i="0" dirty="0">
+                <a:solidFill>
+                  <a:srgbClr val="FF0000"/>
+                </a:solidFill>
+                <a:latin typeface="Arial"/>
+                <a:cs typeface="Arial"/>
+              </a:rPr>
+              <a:t>: −88% for e-invoicing, up to −63% on electricity special days. </a:t>
+            </a:r>
+            <a:r>
+              <a:rPr lang="en-GB" sz="1400" b="0" i="0" dirty="0">
+                <a:solidFill>
                   <a:srgbClr val="636462"/>
                 </a:solidFill>
                 <a:latin typeface="Arial"/>
                 <a:cs typeface="Arial"/>
               </a:rPr>
-              <a:t>No outlier on holidays: the coefficients absorb the error. A switch outlier still sits next to the 2016 All Saints' bridge.</a:t>
-            </a:r>
-          </a:p>
-        </p:txBody>
-      </p:sp>
-      <p:sp>
-        <p:nvSpPr>
-          <p:cNvPr id="50" name="Take-home"/>
-          <p:cNvSpPr txBox="1"/>
-          <p:nvPr/>
-        </p:nvSpPr>
-        <p:spPr>
-          <a:xfrm>
-            <a:off x="466344" y="5532120"/>
-            <a:ext cx="11256264" cy="411480"/>
-          </a:xfrm>
-          <a:prstGeom prst="rect">
-            <a:avLst/>
-          </a:prstGeom>
-          <a:noFill/>
+              <a:t>Outliers describe real events and stay put across vintages.</a:t>
+            </a:r>
+          </a:p>
+        </p:txBody>
+      </p:sp>
+      <p:sp>
+        <p:nvSpPr>
+          <p:cNvPr id="40" name="Conclusion card 5"/>
+          <p:cNvSpPr/>
+          <p:nvPr/>
+        </p:nvSpPr>
+        <p:spPr>
+          <a:xfrm>
+            <a:off x="4294632" y="3698748"/>
+            <a:ext cx="3599688" cy="2199132"/>
+          </a:xfrm>
+          <a:prstGeom prst="roundRect">
+            <a:avLst>
+              <a:gd name="adj" fmla="val 6000"/>
+            </a:avLst>
+          </a:prstGeom>
+          <a:solidFill>
+            <a:srgbClr val="F2F2F2"/>
+          </a:solidFill>
           <a:ln>
             <a:noFill/>
           </a:ln>
@@ -19848,21 +20530,188 @@
           </a:bodyPr>
           <a:lstStyle/>
           <a:p>
-            <a:pPr algn="l" marL="0" indent="0">
+            <a:endParaRPr lang="en-GB" dirty="0"/>
+          </a:p>
+        </p:txBody>
+      </p:sp>
+      <p:sp>
+        <p:nvSpPr>
+          <p:cNvPr id="41" name="Conclusion number 5"/>
+          <p:cNvSpPr/>
+          <p:nvPr/>
+        </p:nvSpPr>
+        <p:spPr>
+          <a:xfrm>
+            <a:off x="4495800" y="3927348"/>
+            <a:ext cx="438912" cy="438912"/>
+          </a:xfrm>
+          <a:prstGeom prst="ellipse">
+            <a:avLst/>
+          </a:prstGeom>
+          <a:solidFill>
+            <a:srgbClr val="C00000"/>
+          </a:solidFill>
+          <a:ln>
+            <a:noFill/>
+          </a:ln>
+        </p:spPr>
+        <p:txBody>
+          <a:bodyPr wrap="square" lIns="0" tIns="0" rIns="0" bIns="0" anchor="ctr">
+            <a:noAutofit/>
+          </a:bodyPr>
+          <a:lstStyle/>
+          <a:p>
+            <a:pPr marL="0" indent="0" algn="ctr">
               <a:spcBef>
                 <a:spcPts val="0"/>
               </a:spcBef>
               <a:buNone/>
             </a:pPr>
             <a:r>
+              <a:rPr lang="en-GB" sz="1600" b="1" i="0" dirty="0">
+                <a:solidFill>
+                  <a:srgbClr val="FFFFFF"/>
+                </a:solidFill>
+                <a:latin typeface="Arial"/>
+                <a:cs typeface="Arial"/>
+              </a:rPr>
+              <a:t>5</a:t>
+            </a:r>
+          </a:p>
+        </p:txBody>
+      </p:sp>
+      <p:sp>
+        <p:nvSpPr>
+          <p:cNvPr id="42" name="Conclusion heading 5"/>
+          <p:cNvSpPr txBox="1"/>
+          <p:nvPr/>
+        </p:nvSpPr>
+        <p:spPr>
+          <a:xfrm>
+            <a:off x="5071872" y="3835908"/>
+            <a:ext cx="2685288" cy="640080"/>
+          </a:xfrm>
+          <a:prstGeom prst="rect">
+            <a:avLst/>
+          </a:prstGeom>
+          <a:noFill/>
+          <a:ln>
+            <a:noFill/>
+          </a:ln>
+        </p:spPr>
+        <p:txBody>
+          <a:bodyPr wrap="square" lIns="0" tIns="0" rIns="0" bIns="0" anchor="ctr">
+            <a:noAutofit/>
+          </a:bodyPr>
+          <a:lstStyle/>
+          <a:p>
+            <a:pPr marL="0" indent="0" algn="l">
+              <a:spcBef>
+                <a:spcPts val="0"/>
+              </a:spcBef>
+              <a:buNone/>
+            </a:pPr>
+            <a:r>
+              <a:rPr lang="en-GB" sz="1600" b="1" i="0" dirty="0">
+                <a:solidFill>
+                  <a:srgbClr val="595959"/>
+                </a:solidFill>
+                <a:latin typeface="Arial"/>
+                <a:cs typeface="Arial"/>
+              </a:rPr>
+              <a:t>Each series needs its own calendar</a:t>
+            </a:r>
+          </a:p>
+        </p:txBody>
+      </p:sp>
+      <p:sp>
+        <p:nvSpPr>
+          <p:cNvPr id="43" name="Conclusion text 5"/>
+          <p:cNvSpPr txBox="1"/>
+          <p:nvPr/>
+        </p:nvSpPr>
+        <p:spPr>
+          <a:xfrm>
+            <a:off x="4495800" y="4567428"/>
+            <a:ext cx="3197352" cy="1239012"/>
+          </a:xfrm>
+          <a:prstGeom prst="rect">
+            <a:avLst/>
+          </a:prstGeom>
+          <a:noFill/>
+          <a:ln>
+            <a:noFill/>
+          </a:ln>
+        </p:spPr>
+        <p:txBody>
+          <a:bodyPr wrap="square" lIns="0" tIns="0" rIns="0" bIns="0" anchor="t">
+            <a:noAutofit/>
+          </a:bodyPr>
+          <a:lstStyle/>
+          <a:p>
+            <a:pPr marL="0" indent="0" algn="l">
+              <a:spcBef>
+                <a:spcPts val="0"/>
+              </a:spcBef>
+              <a:buNone/>
+            </a:pPr>
+            <a:r>
+              <a:rPr lang="en-GB" sz="1400" b="0" i="0" dirty="0">
+                <a:solidFill>
+                  <a:srgbClr val="636462"/>
+                </a:solidFill>
+                <a:latin typeface="Arial"/>
+                <a:cs typeface="Arial"/>
+              </a:rPr>
+              <a:t>Same diagnostic, different calendars: administrative for e-invoicing, production for electricity. Standard diagnostics barely see the difference; the DMR does.</a:t>
+            </a:r>
+          </a:p>
+        </p:txBody>
+      </p:sp>
+      <p:sp>
+        <p:nvSpPr>
+          <p:cNvPr id="50" name="Take-home message"/>
+          <p:cNvSpPr/>
+          <p:nvPr/>
+        </p:nvSpPr>
+        <p:spPr>
+          <a:xfrm>
+            <a:off x="8122920" y="3698748"/>
+            <a:ext cx="3599688" cy="2199132"/>
+          </a:xfrm>
+          <a:prstGeom prst="roundRect">
+            <a:avLst>
+              <a:gd name="adj" fmla="val 6000"/>
+            </a:avLst>
+          </a:prstGeom>
+          <a:solidFill>
+            <a:srgbClr val="C00000"/>
+          </a:solidFill>
+          <a:ln>
+            <a:noFill/>
+          </a:ln>
+        </p:spPr>
+        <p:txBody>
+          <a:bodyPr wrap="square" lIns="228600" tIns="228600" rIns="228600" bIns="228600" anchor="ctr">
+            <a:noAutofit/>
+          </a:bodyPr>
+          <a:lstStyle/>
+          <a:p>
+            <a:pPr marL="0" indent="0" algn="ctr">
+              <a:spcBef>
+                <a:spcPts val="0"/>
+              </a:spcBef>
+              <a:buNone/>
+            </a:pPr>
+            <a:r>
               <a:rPr lang="en-GB" sz="1800" b="1" i="0" dirty="0">
                 <a:solidFill>
-                  <a:srgbClr val="C00000"/>
-                </a:solidFill>
-                <a:latin typeface="Arial"/>
-                <a:cs typeface="Arial"/>
-              </a:rPr>
-              <a:t>A well-specified calendar makes the whole model more stable, not only the calendar days.</a:t>
+                  <a:srgbClr val="FFFFFF"/>
+                </a:solidFill>
+                <a:latin typeface="Arial"/>
+                <a:cs typeface="Arial"/>
+              </a:rPr>
+              <a:t>Build the calendar from the evidence of each series, and check it on the adjusted series, day by day.</a:t>
             </a:r>
           </a:p>
         </p:txBody>
@@ -19899,41 +20748,10 @@
       </p:grpSpPr>
       <p:sp>
         <p:nvSpPr>
-          <p:cNvPr id="19461" name="Titolo 4"/>
-          <p:cNvSpPr>
-            <a:spLocks noGrp="1"/>
-          </p:cNvSpPr>
-          <p:nvPr>
-            <p:ph type="title"/>
-          </p:nvPr>
-        </p:nvSpPr>
-        <p:spPr>
-          <a:xfrm>
-            <a:off x="468313" y="482109"/>
-            <a:ext cx="11269662" cy="405304"/>
-          </a:xfrm>
-        </p:spPr>
-        <p:txBody>
-          <a:bodyPr/>
-          <a:lstStyle/>
-          <a:p>
-            <a:r>
-              <a:rPr lang="en-GB" altLang="it-IT" sz="3600" dirty="0">
-                <a:solidFill>
-                  <a:srgbClr val="C00000"/>
-                </a:solidFill>
-              </a:rPr>
-              <a:t>Revisions: fewer on every group of days</a:t>
-            </a:r>
-          </a:p>
-        </p:txBody>
-      </p:sp>
-      <p:sp>
-        <p:nvSpPr>
-          <p:cNvPr id="9" name="Segnaposto numero diapositiva 4">
+          <p:cNvPr id="2" name="Titolo 1">
             <a:extLst>
               <a:ext uri="{FF2B5EF4-FFF2-40B4-BE49-F238E27FC236}">
-                <a16:creationId xmlns:a16="http://schemas.microsoft.com/office/drawing/2014/main" id="{43529721-AF16-448D-9B7A-D70C2ADC2006}"/>
+                <a16:creationId xmlns:a16="http://schemas.microsoft.com/office/drawing/2014/main" id="{1907821B-5649-449D-A1C2-3F67CA468A7F}"/>
               </a:ext>
             </a:extLst>
           </p:cNvPr>
@@ -19941,42 +20759,71 @@
             <a:spLocks noGrp="1"/>
           </p:cNvSpPr>
           <p:nvPr>
-            <p:ph type="sldNum" sz="quarter" idx="11"/>
+            <p:ph type="ctrTitle"/>
           </p:nvPr>
         </p:nvSpPr>
-        <p:spPr>
-          <a:xfrm>
-            <a:off x="0" y="6392815"/>
-            <a:ext cx="501650" cy="365125"/>
-          </a:xfrm>
-          <a:prstGeom prst="rect">
-            <a:avLst/>
-          </a:prstGeom>
-        </p:spPr>
+        <p:spPr/>
         <p:txBody>
           <a:bodyPr/>
           <a:lstStyle/>
           <a:p>
-            <a:pPr>
-              <a:defRPr/>
-            </a:pPr>
-            <a:fld id="{48B4153A-D4C5-4CEF-8992-0D8815C829E3}" type="slidenum">
-              <a:rPr lang="en-US" smtClean="0"/>
-              <a:pPr>
-                <a:defRPr/>
-              </a:pPr>
-              <a:t>19</a:t>
-            </a:fld>
-            <a:endParaRPr lang="en-US" dirty="0"/>
-          </a:p>
-        </p:txBody>
-      </p:sp>
-      <p:sp>
-        <p:nvSpPr>
-          <p:cNvPr id="8" name="Segnaposto piè di pagina 3">
+            <a:r>
+              <a:rPr lang="it-IT" dirty="0" err="1">
+                <a:solidFill>
+                  <a:srgbClr val="C00000"/>
+                </a:solidFill>
+              </a:rPr>
+              <a:t>Thanks</a:t>
+            </a:r>
+            <a:r>
+              <a:rPr lang="it-IT" dirty="0">
+                <a:solidFill>
+                  <a:srgbClr val="C00000"/>
+                </a:solidFill>
+              </a:rPr>
+              <a:t> for </a:t>
+            </a:r>
+            <a:r>
+              <a:rPr lang="it-IT" dirty="0" err="1">
+                <a:solidFill>
+                  <a:srgbClr val="C00000"/>
+                </a:solidFill>
+              </a:rPr>
+              <a:t>your</a:t>
+            </a:r>
+            <a:r>
+              <a:rPr lang="it-IT" dirty="0">
+                <a:solidFill>
+                  <a:srgbClr val="C00000"/>
+                </a:solidFill>
+              </a:rPr>
+              <a:t> </a:t>
+            </a:r>
+            <a:r>
+              <a:rPr lang="it-IT" dirty="0" err="1">
+                <a:solidFill>
+                  <a:srgbClr val="C00000"/>
+                </a:solidFill>
+              </a:rPr>
+              <a:t>attention</a:t>
+            </a:r>
+            <a:r>
+              <a:rPr lang="it-IT" dirty="0">
+                <a:solidFill>
+                  <a:srgbClr val="C00000"/>
+                </a:solidFill>
+              </a:rPr>
+              <a:t>!</a:t>
+            </a:r>
+          </a:p>
+        </p:txBody>
+      </p:sp>
+      <p:sp>
+        <p:nvSpPr>
+          <p:cNvPr id="3" name="Segnaposto testo 2">
             <a:extLst>
               <a:ext uri="{FF2B5EF4-FFF2-40B4-BE49-F238E27FC236}">
-                <a16:creationId xmlns:a16="http://schemas.microsoft.com/office/drawing/2014/main" id="{3223DD80-9C7E-474F-A668-27B6983A5687}"/>
+                <a16:creationId xmlns:a16="http://schemas.microsoft.com/office/drawing/2014/main" id="{52857493-CE83-4A58-B836-860B262B8CCD}"/>
               </a:ext>
             </a:extLst>
           </p:cNvPr>
@@ -19984,664 +20831,28 @@
             <a:spLocks noGrp="1"/>
           </p:cNvSpPr>
           <p:nvPr>
-            <p:ph type="ftr" sz="quarter" idx="10"/>
+            <p:ph type="body" idx="1"/>
           </p:nvPr>
         </p:nvSpPr>
         <p:spPr>
           <a:xfrm>
-            <a:off x="635830" y="6382305"/>
-            <a:ext cx="9644444" cy="259965"/>
+            <a:off x="3296093" y="3683529"/>
+            <a:ext cx="5624623" cy="867206"/>
           </a:xfrm>
         </p:spPr>
         <p:txBody>
           <a:bodyPr/>
           <a:lstStyle/>
           <a:p>
-            <a:pPr>
-              <a:defRPr/>
-            </a:pPr>
-            <a:r>
-              <a:rPr lang="en-US" dirty="0"/>
-              <a:t>Building calendars for daily seasonal adjustment</a:t>
-            </a:r>
-          </a:p>
-        </p:txBody>
-      </p:sp>
-      <p:pic>
-        <p:nvPicPr>
-          <p:cNvPr id="40" name="E-invoicing revisions by group of days" descr="Mean absolute revision over the last year of each vintage for holidays, month days and other days, basic versus final e-invoicing calendar"/>
-          <p:cNvPicPr>
-            <a:picLocks noChangeAspect="1"/>
-          </p:cNvPicPr>
-          <p:nvPr/>
-        </p:nvPicPr>
-        <p:blipFill>
-          <a:blip r:embed="rIdImg1"/>
-          <a:stretch>
-            <a:fillRect/>
-          </a:stretch>
-        </p:blipFill>
-        <p:spPr>
-          <a:xfrm>
-            <a:off x="749153" y="1298448"/>
-            <a:ext cx="6731293" cy="4114800"/>
-          </a:xfrm>
-          <a:prstGeom prst="rect">
-            <a:avLst/>
-          </a:prstGeom>
-        </p:spPr>
-      </p:pic>
-      <p:sp>
-        <p:nvSpPr>
-          <p:cNvPr id="41" name="Cards header"/>
-          <p:cNvSpPr txBox="1"/>
-          <p:nvPr/>
-        </p:nvSpPr>
-        <p:spPr>
-          <a:xfrm>
-            <a:off x="8092440" y="1234440"/>
-            <a:ext cx="3632911" cy="411480"/>
-          </a:xfrm>
-          <a:prstGeom prst="rect">
-            <a:avLst/>
-          </a:prstGeom>
-          <a:noFill/>
-          <a:ln>
-            <a:noFill/>
-          </a:ln>
-        </p:spPr>
-        <p:txBody>
-          <a:bodyPr wrap="square" lIns="0" tIns="0" rIns="0" bIns="0" anchor="t">
-            <a:noAutofit/>
-          </a:bodyPr>
-          <a:lstStyle/>
-          <a:p>
-            <a:pPr algn="l" marL="0" indent="0">
-              <a:spcBef>
-                <a:spcPts val="0"/>
-              </a:spcBef>
-              <a:buNone/>
-            </a:pPr>
-            <a:r>
-              <a:rPr lang="en-GB" sz="1800" b="1" i="0" dirty="0">
-                <a:solidFill>
-                  <a:srgbClr val="595959"/>
-                </a:solidFill>
-                <a:latin typeface="Arial"/>
-                <a:cs typeface="Arial"/>
-              </a:rPr>
-              <a:t>Last year</a:t>
-            </a:r>
-            <a:r>
-              <a:rPr lang="en-GB" sz="1400" b="0" i="0" dirty="0">
-                <a:solidFill>
-                  <a:srgbClr val="7B7C7E"/>
-                </a:solidFill>
-                <a:latin typeface="Arial"/>
-                <a:cs typeface="Arial"/>
-              </a:rPr>
-              <a:t>   basic → final</a:t>
-            </a:r>
-          </a:p>
-        </p:txBody>
-      </p:sp>
-      <p:sp>
-        <p:nvSpPr>
-          <p:cNvPr id="42" name="Rev card 1"/>
-          <p:cNvSpPr/>
-          <p:nvPr/>
-        </p:nvSpPr>
-        <p:spPr>
-          <a:xfrm>
-            <a:off x="8092440" y="1691640"/>
-            <a:ext cx="3632911" cy="896112"/>
-          </a:xfrm>
-          <a:prstGeom prst="roundRect">
-            <a:avLst>
-              <a:gd name="adj" fmla="val 6000"/>
-            </a:avLst>
-          </a:prstGeom>
-          <a:solidFill>
-            <a:srgbClr val="F2F2F2"/>
-          </a:solidFill>
-          <a:ln>
-            <a:noFill/>
-          </a:ln>
-        </p:spPr>
-        <p:txBody>
-          <a:bodyPr wrap="square" lIns="0" tIns="0" rIns="0" bIns="0" anchor="t">
-            <a:noAutofit/>
-          </a:bodyPr>
-          <a:lstStyle/>
-          <a:p>
-            <a:endParaRPr lang="en-GB" dirty="0"/>
-          </a:p>
-        </p:txBody>
-      </p:sp>
-      <p:sp>
-        <p:nvSpPr>
-          <p:cNvPr id="43" name="Rev card label 1"/>
-          <p:cNvSpPr txBox="1"/>
-          <p:nvPr/>
-        </p:nvSpPr>
-        <p:spPr>
-          <a:xfrm>
-            <a:off x="8275320" y="1737360"/>
-            <a:ext cx="3267151" cy="347472"/>
-          </a:xfrm>
-          <a:prstGeom prst="rect">
-            <a:avLst/>
-          </a:prstGeom>
-          <a:noFill/>
-          <a:ln>
-            <a:noFill/>
-          </a:ln>
-        </p:spPr>
-        <p:txBody>
-          <a:bodyPr wrap="square" lIns="0" tIns="0" rIns="0" bIns="0" anchor="t">
-            <a:noAutofit/>
-          </a:bodyPr>
-          <a:lstStyle/>
-          <a:p>
-            <a:pPr algn="l" marL="0" indent="0">
-              <a:spcBef>
-                <a:spcPts val="0"/>
-              </a:spcBef>
-              <a:buNone/>
-            </a:pPr>
-            <a:r>
-              <a:rPr lang="en-GB" sz="1400" b="1" i="0" dirty="0">
-                <a:solidFill>
-                  <a:srgbClr val="595959"/>
-                </a:solidFill>
-                <a:latin typeface="Arial"/>
-                <a:cs typeface="Arial"/>
-              </a:rPr>
-              <a:t>Holidays</a:t>
-            </a:r>
-          </a:p>
-        </p:txBody>
-      </p:sp>
-      <p:sp>
-        <p:nvSpPr>
-          <p:cNvPr id="44" name="Rev card values 1"/>
-          <p:cNvSpPr txBox="1"/>
-          <p:nvPr/>
-        </p:nvSpPr>
-        <p:spPr>
-          <a:xfrm>
-            <a:off x="8275320" y="2057400"/>
-            <a:ext cx="3267151" cy="475488"/>
-          </a:xfrm>
-          <a:prstGeom prst="rect">
-            <a:avLst/>
-          </a:prstGeom>
-          <a:noFill/>
-          <a:ln>
-            <a:noFill/>
-          </a:ln>
-        </p:spPr>
-        <p:txBody>
-          <a:bodyPr wrap="square" lIns="0" tIns="0" rIns="0" bIns="0" anchor="t">
-            <a:noAutofit/>
-          </a:bodyPr>
-          <a:lstStyle/>
-          <a:p>
-            <a:pPr algn="l" marL="0" indent="0">
-              <a:spcBef>
-                <a:spcPts val="0"/>
-              </a:spcBef>
-              <a:buNone/>
-            </a:pPr>
-            <a:r>
-              <a:rPr lang="en-GB" sz="2000" b="1" i="0" dirty="0">
-                <a:solidFill>
-                  <a:srgbClr val="C00000"/>
-                </a:solidFill>
-                <a:latin typeface="Arial"/>
-                <a:cs typeface="Arial"/>
-              </a:rPr>
-              <a:t>14.2%</a:t>
-            </a:r>
-            <a:r>
-              <a:rPr lang="en-GB" sz="1600" b="0" i="0" dirty="0">
-                <a:solidFill>
-                  <a:srgbClr val="7B7C7E"/>
-                </a:solidFill>
-                <a:latin typeface="Arial"/>
-                <a:cs typeface="Arial"/>
-              </a:rPr>
-              <a:t> → </a:t>
-            </a:r>
-            <a:r>
-              <a:rPr lang="en-GB" sz="2000" b="1" i="0" dirty="0">
-                <a:solidFill>
-                  <a:srgbClr val="0072B2"/>
-                </a:solidFill>
-                <a:latin typeface="Arial"/>
-                <a:cs typeface="Arial"/>
-              </a:rPr>
-              <a:t>1.7%</a:t>
-            </a:r>
-            <a:r>
-              <a:rPr lang="en-GB" sz="1500" b="1" i="0" dirty="0">
-                <a:solidFill>
-                  <a:srgbClr val="7B7C7E"/>
-                </a:solidFill>
-                <a:latin typeface="Arial"/>
-                <a:cs typeface="Arial"/>
-              </a:rPr>
-              <a:t>   −88%</a:t>
-            </a:r>
-          </a:p>
-        </p:txBody>
-      </p:sp>
-      <p:sp>
-        <p:nvSpPr>
-          <p:cNvPr id="45" name="Rev card 2"/>
-          <p:cNvSpPr/>
-          <p:nvPr/>
-        </p:nvSpPr>
-        <p:spPr>
-          <a:xfrm>
-            <a:off x="8092440" y="2679192"/>
-            <a:ext cx="3632911" cy="896112"/>
-          </a:xfrm>
-          <a:prstGeom prst="roundRect">
-            <a:avLst>
-              <a:gd name="adj" fmla="val 6000"/>
-            </a:avLst>
-          </a:prstGeom>
-          <a:solidFill>
-            <a:srgbClr val="F2F2F2"/>
-          </a:solidFill>
-          <a:ln>
-            <a:noFill/>
-          </a:ln>
-        </p:spPr>
-        <p:txBody>
-          <a:bodyPr wrap="square" lIns="0" tIns="0" rIns="0" bIns="0" anchor="t">
-            <a:noAutofit/>
-          </a:bodyPr>
-          <a:lstStyle/>
-          <a:p>
-            <a:endParaRPr lang="en-GB" dirty="0"/>
-          </a:p>
-        </p:txBody>
-      </p:sp>
-      <p:sp>
-        <p:nvSpPr>
-          <p:cNvPr id="46" name="Rev card label 2"/>
-          <p:cNvSpPr txBox="1"/>
-          <p:nvPr/>
-        </p:nvSpPr>
-        <p:spPr>
-          <a:xfrm>
-            <a:off x="8275320" y="2724912"/>
-            <a:ext cx="3267151" cy="347472"/>
-          </a:xfrm>
-          <a:prstGeom prst="rect">
-            <a:avLst/>
-          </a:prstGeom>
-          <a:noFill/>
-          <a:ln>
-            <a:noFill/>
-          </a:ln>
-        </p:spPr>
-        <p:txBody>
-          <a:bodyPr wrap="square" lIns="0" tIns="0" rIns="0" bIns="0" anchor="t">
-            <a:noAutofit/>
-          </a:bodyPr>
-          <a:lstStyle/>
-          <a:p>
-            <a:pPr algn="l" marL="0" indent="0">
-              <a:spcBef>
-                <a:spcPts val="0"/>
-              </a:spcBef>
-              <a:buNone/>
-            </a:pPr>
-            <a:r>
-              <a:rPr lang="en-GB" sz="1400" b="1" i="0" dirty="0">
-                <a:solidFill>
-                  <a:srgbClr val="595959"/>
-                </a:solidFill>
-                <a:latin typeface="Arial"/>
-                <a:cs typeface="Arial"/>
-              </a:rPr>
-              <a:t>Month days</a:t>
-            </a:r>
-          </a:p>
-        </p:txBody>
-      </p:sp>
-      <p:sp>
-        <p:nvSpPr>
-          <p:cNvPr id="47" name="Rev card values 2"/>
-          <p:cNvSpPr txBox="1"/>
-          <p:nvPr/>
-        </p:nvSpPr>
-        <p:spPr>
-          <a:xfrm>
-            <a:off x="8275320" y="3044952"/>
-            <a:ext cx="3267151" cy="475488"/>
-          </a:xfrm>
-          <a:prstGeom prst="rect">
-            <a:avLst/>
-          </a:prstGeom>
-          <a:noFill/>
-          <a:ln>
-            <a:noFill/>
-          </a:ln>
-        </p:spPr>
-        <p:txBody>
-          <a:bodyPr wrap="square" lIns="0" tIns="0" rIns="0" bIns="0" anchor="t">
-            <a:noAutofit/>
-          </a:bodyPr>
-          <a:lstStyle/>
-          <a:p>
-            <a:pPr algn="l" marL="0" indent="0">
-              <a:spcBef>
-                <a:spcPts val="0"/>
-              </a:spcBef>
-              <a:buNone/>
-            </a:pPr>
-            <a:r>
-              <a:rPr lang="en-GB" sz="2000" b="1" i="0" dirty="0">
-                <a:solidFill>
-                  <a:srgbClr val="C00000"/>
-                </a:solidFill>
-                <a:latin typeface="Arial"/>
-                <a:cs typeface="Arial"/>
-              </a:rPr>
-              <a:t>3.0%</a:t>
-            </a:r>
-            <a:r>
-              <a:rPr lang="en-GB" sz="1600" b="0" i="0" dirty="0">
-                <a:solidFill>
-                  <a:srgbClr val="7B7C7E"/>
-                </a:solidFill>
-                <a:latin typeface="Arial"/>
-                <a:cs typeface="Arial"/>
-              </a:rPr>
-              <a:t> → </a:t>
-            </a:r>
-            <a:r>
-              <a:rPr lang="en-GB" sz="2000" b="1" i="0" dirty="0">
-                <a:solidFill>
-                  <a:srgbClr val="0072B2"/>
-                </a:solidFill>
-                <a:latin typeface="Arial"/>
-                <a:cs typeface="Arial"/>
-              </a:rPr>
-              <a:t>1.1%</a:t>
-            </a:r>
-            <a:r>
-              <a:rPr lang="en-GB" sz="1500" b="1" i="0" dirty="0">
-                <a:solidFill>
-                  <a:srgbClr val="7B7C7E"/>
-                </a:solidFill>
-                <a:latin typeface="Arial"/>
-                <a:cs typeface="Arial"/>
-              </a:rPr>
-              <a:t>   −62%</a:t>
-            </a:r>
-          </a:p>
-        </p:txBody>
-      </p:sp>
-      <p:sp>
-        <p:nvSpPr>
-          <p:cNvPr id="48" name="Rev card 3"/>
-          <p:cNvSpPr/>
-          <p:nvPr/>
-        </p:nvSpPr>
-        <p:spPr>
-          <a:xfrm>
-            <a:off x="8092440" y="3666744"/>
-            <a:ext cx="3632911" cy="896112"/>
-          </a:xfrm>
-          <a:prstGeom prst="roundRect">
-            <a:avLst>
-              <a:gd name="adj" fmla="val 6000"/>
-            </a:avLst>
-          </a:prstGeom>
-          <a:solidFill>
-            <a:srgbClr val="F2F2F2"/>
-          </a:solidFill>
-          <a:ln>
-            <a:noFill/>
-          </a:ln>
-        </p:spPr>
-        <p:txBody>
-          <a:bodyPr wrap="square" lIns="0" tIns="0" rIns="0" bIns="0" anchor="t">
-            <a:noAutofit/>
-          </a:bodyPr>
-          <a:lstStyle/>
-          <a:p>
-            <a:endParaRPr lang="en-GB" dirty="0"/>
-          </a:p>
-        </p:txBody>
-      </p:sp>
-      <p:sp>
-        <p:nvSpPr>
-          <p:cNvPr id="49" name="Rev card label 3"/>
-          <p:cNvSpPr txBox="1"/>
-          <p:nvPr/>
-        </p:nvSpPr>
-        <p:spPr>
-          <a:xfrm>
-            <a:off x="8275320" y="3712464"/>
-            <a:ext cx="3267151" cy="347472"/>
-          </a:xfrm>
-          <a:prstGeom prst="rect">
-            <a:avLst/>
-          </a:prstGeom>
-          <a:noFill/>
-          <a:ln>
-            <a:noFill/>
-          </a:ln>
-        </p:spPr>
-        <p:txBody>
-          <a:bodyPr wrap="square" lIns="0" tIns="0" rIns="0" bIns="0" anchor="t">
-            <a:noAutofit/>
-          </a:bodyPr>
-          <a:lstStyle/>
-          <a:p>
-            <a:pPr algn="l" marL="0" indent="0">
-              <a:spcBef>
-                <a:spcPts val="0"/>
-              </a:spcBef>
-              <a:buNone/>
-            </a:pPr>
-            <a:r>
-              <a:rPr lang="en-GB" sz="1400" b="1" i="0" dirty="0">
-                <a:solidFill>
-                  <a:srgbClr val="595959"/>
-                </a:solidFill>
-                <a:latin typeface="Arial"/>
-                <a:cs typeface="Arial"/>
-              </a:rPr>
-              <a:t>Other days</a:t>
-            </a:r>
-          </a:p>
-        </p:txBody>
-      </p:sp>
-      <p:sp>
-        <p:nvSpPr>
-          <p:cNvPr id="50" name="Rev card values 3"/>
-          <p:cNvSpPr txBox="1"/>
-          <p:nvPr/>
-        </p:nvSpPr>
-        <p:spPr>
-          <a:xfrm>
-            <a:off x="8275320" y="4032504"/>
-            <a:ext cx="3267151" cy="475488"/>
-          </a:xfrm>
-          <a:prstGeom prst="rect">
-            <a:avLst/>
-          </a:prstGeom>
-          <a:noFill/>
-          <a:ln>
-            <a:noFill/>
-          </a:ln>
-        </p:spPr>
-        <p:txBody>
-          <a:bodyPr wrap="square" lIns="0" tIns="0" rIns="0" bIns="0" anchor="t">
-            <a:noAutofit/>
-          </a:bodyPr>
-          <a:lstStyle/>
-          <a:p>
-            <a:pPr algn="l" marL="0" indent="0">
-              <a:spcBef>
-                <a:spcPts val="0"/>
-              </a:spcBef>
-              <a:buNone/>
-            </a:pPr>
-            <a:r>
-              <a:rPr lang="en-GB" sz="2000" b="1" i="0" dirty="0">
-                <a:solidFill>
-                  <a:srgbClr val="C00000"/>
-                </a:solidFill>
-                <a:latin typeface="Arial"/>
-                <a:cs typeface="Arial"/>
-              </a:rPr>
-              <a:t>2.1%</a:t>
-            </a:r>
-            <a:r>
-              <a:rPr lang="en-GB" sz="1600" b="0" i="0" dirty="0">
-                <a:solidFill>
-                  <a:srgbClr val="7B7C7E"/>
-                </a:solidFill>
-                <a:latin typeface="Arial"/>
-                <a:cs typeface="Arial"/>
-              </a:rPr>
-              <a:t> → </a:t>
-            </a:r>
-            <a:r>
-              <a:rPr lang="en-GB" sz="2000" b="1" i="0" dirty="0">
-                <a:solidFill>
-                  <a:srgbClr val="0072B2"/>
-                </a:solidFill>
-                <a:latin typeface="Arial"/>
-                <a:cs typeface="Arial"/>
-              </a:rPr>
-              <a:t>1.2%</a:t>
-            </a:r>
-            <a:r>
-              <a:rPr lang="en-GB" sz="1500" b="1" i="0" dirty="0">
-                <a:solidFill>
-                  <a:srgbClr val="7B7C7E"/>
-                </a:solidFill>
-                <a:latin typeface="Arial"/>
-                <a:cs typeface="Arial"/>
-              </a:rPr>
-              <a:t>   −42%</a:t>
-            </a:r>
-          </a:p>
-        </p:txBody>
-      </p:sp>
-      <p:sp>
-        <p:nvSpPr>
-          <p:cNvPr id="52" name="Rev note"/>
-          <p:cNvSpPr txBox="1"/>
-          <p:nvPr/>
-        </p:nvSpPr>
-        <p:spPr>
-          <a:xfrm>
-            <a:off x="8092440" y="4663440"/>
-            <a:ext cx="3632911" cy="822960"/>
-          </a:xfrm>
-          <a:prstGeom prst="rect">
-            <a:avLst/>
-          </a:prstGeom>
-          <a:noFill/>
-          <a:ln>
-            <a:noFill/>
-          </a:ln>
-        </p:spPr>
-        <p:txBody>
-          <a:bodyPr wrap="square" lIns="0" tIns="0" rIns="0" bIns="0" anchor="t">
-            <a:noAutofit/>
-          </a:bodyPr>
-          <a:lstStyle/>
-          <a:p>
-            <a:pPr algn="l" marL="0" indent="0">
-              <a:spcBef>
-                <a:spcPts val="0"/>
-              </a:spcBef>
-              <a:buNone/>
-            </a:pPr>
-            <a:r>
-              <a:rPr lang="en-GB" sz="1300" b="1" i="0" dirty="0">
-                <a:solidFill>
-                  <a:srgbClr val="595959"/>
-                </a:solidFill>
-                <a:latin typeface="Arial"/>
-                <a:cs typeface="Arial"/>
-              </a:rPr>
-              <a:t>Historical sample: 3.0% → 0.9% (−71%). </a:t>
-            </a:r>
-            <a:r>
-              <a:rPr lang="en-GB" sz="1300" b="0" i="0" dirty="0">
-                <a:solidFill>
-                  <a:srgbClr val="595959"/>
-                </a:solidFill>
-                <a:latin typeface="Arial"/>
-                <a:cs typeface="Arial"/>
-              </a:rPr>
-              <a:t>Basic calendar: weekend-holiday outliers come and go, one day revised by over 400%; no lockdown level shift detected.</a:t>
-            </a:r>
-          </a:p>
-        </p:txBody>
-      </p:sp>
-      <p:sp>
-        <p:nvSpPr>
-          <p:cNvPr id="53" name="Caption"/>
-          <p:cNvSpPr txBox="1"/>
-          <p:nvPr/>
-        </p:nvSpPr>
-        <p:spPr>
-          <a:xfrm>
-            <a:off x="466344" y="5532120"/>
-            <a:ext cx="11256264" cy="411480"/>
-          </a:xfrm>
-          <a:prstGeom prst="rect">
-            <a:avLst/>
-          </a:prstGeom>
-          <a:noFill/>
-          <a:ln>
-            <a:noFill/>
-          </a:ln>
-        </p:spPr>
-        <p:txBody>
-          <a:bodyPr wrap="square" lIns="0" tIns="0" rIns="0" bIns="0" anchor="t">
-            <a:noAutofit/>
-          </a:bodyPr>
-          <a:lstStyle/>
-          <a:p>
-            <a:pPr algn="l" marL="0" indent="0">
-              <a:spcBef>
-                <a:spcPts val="0"/>
-              </a:spcBef>
-              <a:buNone/>
-            </a:pPr>
-            <a:r>
-              <a:rPr lang="en-GB" sz="1300" b="1" i="0" dirty="0">
-                <a:solidFill>
-                  <a:srgbClr val="C00000"/>
-                </a:solidFill>
-                <a:latin typeface="Arial"/>
-                <a:cs typeface="Arial"/>
-              </a:rPr>
-              <a:t>Result · Revisions, e-invoicing.  </a:t>
-            </a:r>
-            <a:r>
-              <a:rPr lang="en-GB" sz="1300" b="0" i="1" dirty="0">
-                <a:solidFill>
-                  <a:srgbClr val="7B7C7E"/>
-                </a:solidFill>
-                <a:latin typeface="Arial"/>
-                <a:cs typeface="Arial"/>
-              </a:rPr>
-              <a:t>Fixed coefficients. Full sample vs six vintages ending 7 to 730 days earlier; mean absolute revision (%) over the last year of each vintage.</a:t>
+            <a:r>
+              <a:rPr lang="it-IT" sz="2400" dirty="0"/>
+              <a:t>ALESSANDRO PIOVANI</a:t>
+            </a:r>
+          </a:p>
+          <a:p>
+            <a:r>
+              <a:rPr lang="it-IT" sz="2400" dirty="0"/>
+              <a:t>alessandro.piovani@istat.it</a:t>
             </a:r>
           </a:p>
         </p:txBody>
@@ -20649,7 +20860,7 @@
     </p:spTree>
     <p:extLst>
       <p:ext uri="{BB962C8B-B14F-4D97-AF65-F5344CB8AC3E}">
-        <p14:creationId xmlns:p14="http://schemas.microsoft.com/office/powerpoint/2010/main" val="1781916628"/>
+        <p14:creationId xmlns:p14="http://schemas.microsoft.com/office/powerpoint/2010/main" val="1975414769"/>
       </p:ext>
     </p:extLst>
   </p:cSld>
@@ -24631,6 +24842,21 @@
 </file>
 
 <file path=customXml/item1.xml><?xml version="1.0" encoding="utf-8"?>
+<p:properties xmlns:p="http://schemas.microsoft.com/office/2006/metadata/properties" xmlns:xsi="http://www.w3.org/2001/XMLSchema-instance" xmlns:pc="http://schemas.microsoft.com/office/infopath/2007/PartnerControls">
+  <documentManagement>
+    <SottoCategoria xmlns="679261c3-551f-4e86-913f-177e0e529669">-</SottoCategoria>
+    <Categoria xmlns="c58f2efd-82a8-4ecf-b395-8c25e928921d">3- Standard presentazioni Power Point</Categoria>
+    <_dlc_DocId xmlns="459159c4-d20a-4ff3-9b11-fbd127bd52e5">INTRANET-14-174</_dlc_DocId>
+    <_dlc_DocIdUrl xmlns="459159c4-d20a-4ff3-9b11-fbd127bd52e5">
+      <Url>https://intranet.istat.it/Collaborativi/_layouts/15/DocIdRedir.aspx?ID=INTRANET-14-174</Url>
+      <Description>INTRANET-14-174</Description>
+    </_dlc_DocIdUrl>
+    <Ordine xmlns="679261c3-551f-4e86-913f-177e0e529669">1</Ordine>
+  </documentManagement>
+</p:properties>
+</file>
+
+<file path=customXml/item2.xml><?xml version="1.0" encoding="utf-8"?>
 <ct:contentTypeSchema xmlns:ct="http://schemas.microsoft.com/office/2006/metadata/contentType" xmlns:ma="http://schemas.microsoft.com/office/2006/metadata/properties/metaAttributes" ct:_="" ma:_="" ma:contentTypeName="Documento" ma:contentTypeID="0x010100661A2BE3120D674DA36C11D6006822D4" ma:contentTypeVersion="5" ma:contentTypeDescription="Creare un nuovo documento." ma:contentTypeScope="" ma:versionID="742e6049321d93803bb3bb587f561ffa">
   <xsd:schema xmlns:xsd="http://www.w3.org/2001/XMLSchema" xmlns:xs="http://www.w3.org/2001/XMLSchema" xmlns:p="http://schemas.microsoft.com/office/2006/metadata/properties" xmlns:ns2="c58f2efd-82a8-4ecf-b395-8c25e928921d" xmlns:ns3="459159c4-d20a-4ff3-9b11-fbd127bd52e5" xmlns:ns4="679261c3-551f-4e86-913f-177e0e529669" targetNamespace="http://schemas.microsoft.com/office/2006/metadata/properties" ma:root="true" ma:fieldsID="939ae4a7eaec2950db97a79ca38d2d4d" ns2:_="" ns3:_="" ns4:_="">
     <xsd:import namespace="c58f2efd-82a8-4ecf-b395-8c25e928921d"/>
@@ -24823,22 +25049,16 @@
 </ct:contentTypeSchema>
 </file>
 
-<file path=customXml/item2.xml><?xml version="1.0" encoding="utf-8"?>
-<p:properties xmlns:p="http://schemas.microsoft.com/office/2006/metadata/properties" xmlns:xsi="http://www.w3.org/2001/XMLSchema-instance" xmlns:pc="http://schemas.microsoft.com/office/infopath/2007/PartnerControls">
-  <documentManagement>
-    <SottoCategoria xmlns="679261c3-551f-4e86-913f-177e0e529669">-</SottoCategoria>
-    <Categoria xmlns="c58f2efd-82a8-4ecf-b395-8c25e928921d">3- Standard presentazioni Power Point</Categoria>
-    <_dlc_DocId xmlns="459159c4-d20a-4ff3-9b11-fbd127bd52e5">INTRANET-14-174</_dlc_DocId>
-    <_dlc_DocIdUrl xmlns="459159c4-d20a-4ff3-9b11-fbd127bd52e5">
-      <Url>https://intranet.istat.it/Collaborativi/_layouts/15/DocIdRedir.aspx?ID=INTRANET-14-174</Url>
-      <Description>INTRANET-14-174</Description>
-    </_dlc_DocIdUrl>
-    <Ordine xmlns="679261c3-551f-4e86-913f-177e0e529669">1</Ordine>
-  </documentManagement>
-</p:properties>
+<file path=customXml/item3.xml><?xml version="1.0" encoding="utf-8"?>
+<?mso-contentType ?>
+<FormTemplates xmlns="http://schemas.microsoft.com/sharepoint/v3/contenttype/forms">
+  <Display>DocumentLibraryForm</Display>
+  <Edit>DocumentLibraryForm</Edit>
+  <New>DocumentLibraryForm</New>
+</FormTemplates>
 </file>
 
-<file path=customXml/item3.xml><?xml version="1.0" encoding="utf-8"?>
+<file path=customXml/item4.xml><?xml version="1.0" encoding="utf-8"?>
 <?mso-contentType ?>
 <spe:Receivers xmlns:spe="http://schemas.microsoft.com/sharepoint/events">
   <Receiver>
@@ -24888,16 +25108,25 @@
 </spe:Receivers>
 </file>
 
-<file path=customXml/item4.xml><?xml version="1.0" encoding="utf-8"?>
-<?mso-contentType ?>
-<FormTemplates xmlns="http://schemas.microsoft.com/sharepoint/v3/contenttype/forms">
-  <Display>DocumentLibraryForm</Display>
-  <Edit>DocumentLibraryForm</Edit>
-  <New>DocumentLibraryForm</New>
-</FormTemplates>
+<file path=customXml/itemProps1.xml><?xml version="1.0" encoding="utf-8"?>
+<ds:datastoreItem xmlns:ds="http://schemas.openxmlformats.org/officeDocument/2006/customXml" ds:itemID="{3EF378BC-F4D0-4510-B4EC-07B6EFE18CF8}">
+  <ds:schemaRefs>
+    <ds:schemaRef ds:uri="http://purl.org/dc/dcmitype/"/>
+    <ds:schemaRef ds:uri="http://purl.org/dc/terms/"/>
+    <ds:schemaRef ds:uri="459159c4-d20a-4ff3-9b11-fbd127bd52e5"/>
+    <ds:schemaRef ds:uri="http://schemas.microsoft.com/office/2006/metadata/properties"/>
+    <ds:schemaRef ds:uri="http://www.w3.org/XML/1998/namespace"/>
+    <ds:schemaRef ds:uri="http://schemas.microsoft.com/office/2006/documentManagement/types"/>
+    <ds:schemaRef ds:uri="http://schemas.openxmlformats.org/package/2006/metadata/core-properties"/>
+    <ds:schemaRef ds:uri="http://schemas.microsoft.com/office/infopath/2007/PartnerControls"/>
+    <ds:schemaRef ds:uri="679261c3-551f-4e86-913f-177e0e529669"/>
+    <ds:schemaRef ds:uri="c58f2efd-82a8-4ecf-b395-8c25e928921d"/>
+    <ds:schemaRef ds:uri="http://purl.org/dc/elements/1.1/"/>
+  </ds:schemaRefs>
+</ds:datastoreItem>
 </file>
 
-<file path=customXml/itemProps1.xml><?xml version="1.0" encoding="utf-8"?>
+<file path=customXml/itemProps2.xml><?xml version="1.0" encoding="utf-8"?>
 <ds:datastoreItem xmlns:ds="http://schemas.openxmlformats.org/officeDocument/2006/customXml" ds:itemID="{AA760D03-2285-4F80-B9FC-1F4F97E97129}">
   <ds:schemaRefs>
     <ds:schemaRef ds:uri="http://schemas.microsoft.com/office/2006/metadata/contentType"/>
@@ -24917,36 +25146,18 @@
 </ds:datastoreItem>
 </file>
 
-<file path=customXml/itemProps2.xml><?xml version="1.0" encoding="utf-8"?>
-<ds:datastoreItem xmlns:ds="http://schemas.openxmlformats.org/officeDocument/2006/customXml" ds:itemID="{3EF378BC-F4D0-4510-B4EC-07B6EFE18CF8}">
+<file path=customXml/itemProps3.xml><?xml version="1.0" encoding="utf-8"?>
+<ds:datastoreItem xmlns:ds="http://schemas.openxmlformats.org/officeDocument/2006/customXml" ds:itemID="{BD9C238D-4D5C-4783-820B-4854DCE45D41}">
   <ds:schemaRefs>
-    <ds:schemaRef ds:uri="http://purl.org/dc/dcmitype/"/>
-    <ds:schemaRef ds:uri="http://purl.org/dc/terms/"/>
-    <ds:schemaRef ds:uri="459159c4-d20a-4ff3-9b11-fbd127bd52e5"/>
-    <ds:schemaRef ds:uri="http://schemas.microsoft.com/office/2006/metadata/properties"/>
-    <ds:schemaRef ds:uri="http://www.w3.org/XML/1998/namespace"/>
-    <ds:schemaRef ds:uri="http://schemas.microsoft.com/office/2006/documentManagement/types"/>
-    <ds:schemaRef ds:uri="http://schemas.openxmlformats.org/package/2006/metadata/core-properties"/>
-    <ds:schemaRef ds:uri="http://schemas.microsoft.com/office/infopath/2007/PartnerControls"/>
-    <ds:schemaRef ds:uri="679261c3-551f-4e86-913f-177e0e529669"/>
-    <ds:schemaRef ds:uri="c58f2efd-82a8-4ecf-b395-8c25e928921d"/>
-    <ds:schemaRef ds:uri="http://purl.org/dc/elements/1.1/"/>
+    <ds:schemaRef ds:uri="http://schemas.microsoft.com/sharepoint/v3/contenttype/forms"/>
   </ds:schemaRefs>
 </ds:datastoreItem>
 </file>
 
-<file path=customXml/itemProps3.xml><?xml version="1.0" encoding="utf-8"?>
+<file path=customXml/itemProps4.xml><?xml version="1.0" encoding="utf-8"?>
 <ds:datastoreItem xmlns:ds="http://schemas.openxmlformats.org/officeDocument/2006/customXml" ds:itemID="{D9296C4F-9DE9-4B43-AA80-1FC85656CFFA}">
   <ds:schemaRefs>
     <ds:schemaRef ds:uri="http://schemas.microsoft.com/sharepoint/events"/>
   </ds:schemaRefs>
 </ds:datastoreItem>
-</file>
-
-<file path=customXml/itemProps4.xml><?xml version="1.0" encoding="utf-8"?>
-<ds:datastoreItem xmlns:ds="http://schemas.openxmlformats.org/officeDocument/2006/customXml" ds:itemID="{BD9C238D-4D5C-4783-820B-4854DCE45D41}">
-  <ds:schemaRefs>
-    <ds:schemaRef ds:uri="http://schemas.microsoft.com/sharepoint/v3/contenttype/forms"/>
-  </ds:schemaRefs>
-</ds:datastoreItem>
 </file>